--- a/44_心理学/24_浥尘伙伴社团原创：浥尘智慧家长课堂/AI时代高智慧家长私教课（第一季）/AI时代高智慧家长私教课（第一季）.pptx
+++ b/44_心理学/24_浥尘伙伴社团原创：浥尘智慧家长课堂/AI时代高智慧家长私教课（第一季）/AI时代高智慧家长私教课（第一季）.pptx
@@ -7,67 +7,67 @@
   <p:sldIdLst>
     <p:sldId id="256" r:id="rId2"/>
     <p:sldId id="257" r:id="rId3"/>
-    <p:sldId id="293" r:id="rId4"/>
-    <p:sldId id="294" r:id="rId5"/>
-    <p:sldId id="295" r:id="rId6"/>
-    <p:sldId id="297" r:id="rId7"/>
-    <p:sldId id="296" r:id="rId8"/>
-    <p:sldId id="298" r:id="rId9"/>
-    <p:sldId id="299" r:id="rId10"/>
-    <p:sldId id="300" r:id="rId11"/>
-    <p:sldId id="301" r:id="rId12"/>
-    <p:sldId id="302" r:id="rId13"/>
-    <p:sldId id="303" r:id="rId14"/>
-    <p:sldId id="304" r:id="rId15"/>
-    <p:sldId id="307" r:id="rId16"/>
-    <p:sldId id="308" r:id="rId17"/>
-    <p:sldId id="309" r:id="rId18"/>
-    <p:sldId id="310" r:id="rId19"/>
-    <p:sldId id="353" r:id="rId20"/>
-    <p:sldId id="354" r:id="rId21"/>
-    <p:sldId id="311" r:id="rId22"/>
-    <p:sldId id="312" r:id="rId23"/>
-    <p:sldId id="313" r:id="rId24"/>
-    <p:sldId id="314" r:id="rId25"/>
-    <p:sldId id="315" r:id="rId26"/>
-    <p:sldId id="316" r:id="rId27"/>
-    <p:sldId id="317" r:id="rId28"/>
-    <p:sldId id="318" r:id="rId29"/>
-    <p:sldId id="319" r:id="rId30"/>
-    <p:sldId id="320" r:id="rId31"/>
-    <p:sldId id="321" r:id="rId32"/>
-    <p:sldId id="322" r:id="rId33"/>
-    <p:sldId id="323" r:id="rId34"/>
-    <p:sldId id="324" r:id="rId35"/>
-    <p:sldId id="325" r:id="rId36"/>
-    <p:sldId id="326" r:id="rId37"/>
-    <p:sldId id="327" r:id="rId38"/>
-    <p:sldId id="328" r:id="rId39"/>
-    <p:sldId id="329" r:id="rId40"/>
-    <p:sldId id="330" r:id="rId41"/>
-    <p:sldId id="331" r:id="rId42"/>
-    <p:sldId id="332" r:id="rId43"/>
-    <p:sldId id="333" r:id="rId44"/>
-    <p:sldId id="334" r:id="rId45"/>
-    <p:sldId id="335" r:id="rId46"/>
-    <p:sldId id="336" r:id="rId47"/>
-    <p:sldId id="337" r:id="rId48"/>
-    <p:sldId id="338" r:id="rId49"/>
-    <p:sldId id="339" r:id="rId50"/>
-    <p:sldId id="340" r:id="rId51"/>
-    <p:sldId id="341" r:id="rId52"/>
-    <p:sldId id="342" r:id="rId53"/>
-    <p:sldId id="343" r:id="rId54"/>
-    <p:sldId id="344" r:id="rId55"/>
-    <p:sldId id="345" r:id="rId56"/>
-    <p:sldId id="346" r:id="rId57"/>
-    <p:sldId id="347" r:id="rId58"/>
-    <p:sldId id="348" r:id="rId59"/>
-    <p:sldId id="349" r:id="rId60"/>
-    <p:sldId id="350" r:id="rId61"/>
-    <p:sldId id="351" r:id="rId62"/>
-    <p:sldId id="352" r:id="rId63"/>
-    <p:sldId id="306" r:id="rId64"/>
+    <p:sldId id="355" r:id="rId4"/>
+    <p:sldId id="356" r:id="rId5"/>
+    <p:sldId id="293" r:id="rId6"/>
+    <p:sldId id="294" r:id="rId7"/>
+    <p:sldId id="295" r:id="rId8"/>
+    <p:sldId id="297" r:id="rId9"/>
+    <p:sldId id="296" r:id="rId10"/>
+    <p:sldId id="298" r:id="rId11"/>
+    <p:sldId id="299" r:id="rId12"/>
+    <p:sldId id="300" r:id="rId13"/>
+    <p:sldId id="301" r:id="rId14"/>
+    <p:sldId id="302" r:id="rId15"/>
+    <p:sldId id="303" r:id="rId16"/>
+    <p:sldId id="304" r:id="rId17"/>
+    <p:sldId id="307" r:id="rId18"/>
+    <p:sldId id="308" r:id="rId19"/>
+    <p:sldId id="309" r:id="rId20"/>
+    <p:sldId id="310" r:id="rId21"/>
+    <p:sldId id="353" r:id="rId22"/>
+    <p:sldId id="354" r:id="rId23"/>
+    <p:sldId id="311" r:id="rId24"/>
+    <p:sldId id="312" r:id="rId25"/>
+    <p:sldId id="313" r:id="rId26"/>
+    <p:sldId id="314" r:id="rId27"/>
+    <p:sldId id="315" r:id="rId28"/>
+    <p:sldId id="316" r:id="rId29"/>
+    <p:sldId id="317" r:id="rId30"/>
+    <p:sldId id="318" r:id="rId31"/>
+    <p:sldId id="319" r:id="rId32"/>
+    <p:sldId id="320" r:id="rId33"/>
+    <p:sldId id="321" r:id="rId34"/>
+    <p:sldId id="322" r:id="rId35"/>
+    <p:sldId id="323" r:id="rId36"/>
+    <p:sldId id="324" r:id="rId37"/>
+    <p:sldId id="325" r:id="rId38"/>
+    <p:sldId id="326" r:id="rId39"/>
+    <p:sldId id="327" r:id="rId40"/>
+    <p:sldId id="328" r:id="rId41"/>
+    <p:sldId id="329" r:id="rId42"/>
+    <p:sldId id="330" r:id="rId43"/>
+    <p:sldId id="331" r:id="rId44"/>
+    <p:sldId id="332" r:id="rId45"/>
+    <p:sldId id="333" r:id="rId46"/>
+    <p:sldId id="334" r:id="rId47"/>
+    <p:sldId id="335" r:id="rId48"/>
+    <p:sldId id="336" r:id="rId49"/>
+    <p:sldId id="337" r:id="rId50"/>
+    <p:sldId id="338" r:id="rId51"/>
+    <p:sldId id="339" r:id="rId52"/>
+    <p:sldId id="340" r:id="rId53"/>
+    <p:sldId id="342" r:id="rId54"/>
+    <p:sldId id="343" r:id="rId55"/>
+    <p:sldId id="344" r:id="rId56"/>
+    <p:sldId id="345" r:id="rId57"/>
+    <p:sldId id="346" r:id="rId58"/>
+    <p:sldId id="347" r:id="rId59"/>
+    <p:sldId id="348" r:id="rId60"/>
+    <p:sldId id="349" r:id="rId61"/>
+    <p:sldId id="350" r:id="rId62"/>
+    <p:sldId id="351" r:id="rId63"/>
+    <p:sldId id="352" r:id="rId64"/>
     <p:sldId id="292" r:id="rId65"/>
   </p:sldIdLst>
   <p:sldSz cx="12192000" cy="6858000"/>
@@ -4097,6 +4097,358 @@
         <p:cNvPr id="1" name="">
           <a:extLst>
             <a:ext uri="{FF2B5EF4-FFF2-40B4-BE49-F238E27FC236}">
+              <a16:creationId xmlns:a16="http://schemas.microsoft.com/office/drawing/2014/main" id="{217923CA-432F-2783-C573-5F6BCAAC12F7}"/>
+            </a:ext>
+          </a:extLst>
+        </p:cNvPr>
+        <p:cNvGrpSpPr/>
+        <p:nvPr/>
+      </p:nvGrpSpPr>
+      <p:grpSpPr>
+        <a:xfrm>
+          <a:off x="0" y="0"/>
+          <a:ext cx="0" cy="0"/>
+          <a:chOff x="0" y="0"/>
+          <a:chExt cx="0" cy="0"/>
+        </a:xfrm>
+      </p:grpSpPr>
+      <p:sp>
+        <p:nvSpPr>
+          <p:cNvPr id="2" name="标题 1">
+            <a:extLst>
+              <a:ext uri="{FF2B5EF4-FFF2-40B4-BE49-F238E27FC236}">
+                <a16:creationId xmlns:a16="http://schemas.microsoft.com/office/drawing/2014/main" id="{117F6D74-032C-F4F8-C1E8-F238092349F0}"/>
+              </a:ext>
+            </a:extLst>
+          </p:cNvPr>
+          <p:cNvSpPr>
+            <a:spLocks noGrp="1"/>
+          </p:cNvSpPr>
+          <p:nvPr>
+            <p:ph type="title"/>
+          </p:nvPr>
+        </p:nvSpPr>
+        <p:spPr/>
+        <p:txBody>
+          <a:bodyPr/>
+          <a:lstStyle/>
+          <a:p>
+            <a:r>
+              <a:rPr lang="zh-CN" altLang="en-US" sz="4400" dirty="0"/>
+              <a:t>中美竞争</a:t>
+            </a:r>
+          </a:p>
+        </p:txBody>
+      </p:sp>
+      <p:sp>
+        <p:nvSpPr>
+          <p:cNvPr id="3" name="内容占位符 2">
+            <a:extLst>
+              <a:ext uri="{FF2B5EF4-FFF2-40B4-BE49-F238E27FC236}">
+                <a16:creationId xmlns:a16="http://schemas.microsoft.com/office/drawing/2014/main" id="{3E2D1996-A1D5-2F8B-5E44-6953B1BBA898}"/>
+              </a:ext>
+            </a:extLst>
+          </p:cNvPr>
+          <p:cNvSpPr>
+            <a:spLocks noGrp="1"/>
+          </p:cNvSpPr>
+          <p:nvPr>
+            <p:ph idx="1"/>
+          </p:nvPr>
+        </p:nvSpPr>
+        <p:spPr>
+          <a:xfrm>
+            <a:off x="521208" y="2044700"/>
+            <a:ext cx="11155680" cy="4301236"/>
+          </a:xfrm>
+        </p:spPr>
+        <p:txBody>
+          <a:bodyPr/>
+          <a:lstStyle/>
+          <a:p>
+            <a:pPr marL="0" indent="0">
+              <a:buNone/>
+            </a:pPr>
+            <a:r>
+              <a:rPr lang="zh-CN" altLang="en-US" dirty="0"/>
+              <a:t>那为什么美国要发展那么快呢？</a:t>
+            </a:r>
+          </a:p>
+          <a:p>
+            <a:pPr marL="0" indent="0">
+              <a:buNone/>
+            </a:pPr>
+            <a:r>
+              <a:rPr lang="zh-CN" altLang="en-US" dirty="0"/>
+              <a:t>这是由美国这个国家的特点决定的，因为它要做全世界的灯塔。</a:t>
+            </a:r>
+          </a:p>
+          <a:p>
+            <a:pPr marL="0" indent="0">
+              <a:buNone/>
+            </a:pPr>
+            <a:r>
+              <a:rPr lang="zh-CN" altLang="en-US" dirty="0"/>
+              <a:t>它如果没有在科技上引领全世界的话，这个国家就会垮掉。</a:t>
+            </a:r>
+          </a:p>
+          <a:p>
+            <a:pPr marL="0" indent="0">
+              <a:buNone/>
+            </a:pPr>
+            <a:r>
+              <a:rPr lang="zh-CN" altLang="en-US" dirty="0"/>
+              <a:t>美国就是靠编织一个美国梦来达到吸引全球资本的目的。</a:t>
+            </a:r>
+          </a:p>
+          <a:p>
+            <a:pPr marL="0" indent="0">
+              <a:buNone/>
+            </a:pPr>
+            <a:r>
+              <a:rPr lang="zh-CN" altLang="en-US" dirty="0"/>
+              <a:t>吸引全球的金融、全球的人才，这样它才能撑下去。</a:t>
+            </a:r>
+          </a:p>
+          <a:p>
+            <a:pPr marL="0" indent="0">
+              <a:buNone/>
+            </a:pPr>
+            <a:r>
+              <a:rPr lang="zh-CN" altLang="en-US" dirty="0"/>
+              <a:t>所以它会不断地拼命地发展它的科技，特别是发展</a:t>
+            </a:r>
+            <a:r>
+              <a:rPr lang="en-US" altLang="zh-CN" dirty="0"/>
+              <a:t>AI</a:t>
+            </a:r>
+            <a:r>
+              <a:rPr lang="zh-CN" altLang="en-US" dirty="0"/>
+              <a:t>。</a:t>
+            </a:r>
+          </a:p>
+          <a:p>
+            <a:pPr marL="0" indent="0">
+              <a:buNone/>
+            </a:pPr>
+            <a:r>
+              <a:rPr lang="en-US" altLang="zh-CN" dirty="0"/>
+              <a:t>AGI</a:t>
+            </a:r>
+            <a:r>
+              <a:rPr lang="zh-CN" altLang="en-US" dirty="0"/>
+              <a:t>发展需要多久呢？</a:t>
+            </a:r>
+          </a:p>
+          <a:p>
+            <a:pPr marL="0" indent="0">
+              <a:buNone/>
+            </a:pPr>
+            <a:r>
+              <a:rPr lang="zh-CN" altLang="en-US" dirty="0"/>
+              <a:t>根据美国各行业内估算，快需要</a:t>
+            </a:r>
+            <a:r>
+              <a:rPr lang="en-US" altLang="zh-CN" dirty="0"/>
+              <a:t>2</a:t>
+            </a:r>
+            <a:r>
+              <a:rPr lang="zh-CN" altLang="en-US" dirty="0"/>
+              <a:t>年，慢则需要</a:t>
+            </a:r>
+            <a:r>
+              <a:rPr lang="en-US" altLang="zh-CN" dirty="0"/>
+              <a:t>10</a:t>
+            </a:r>
+            <a:r>
+              <a:rPr lang="zh-CN" altLang="en-US" dirty="0"/>
+              <a:t>年。</a:t>
+            </a:r>
+          </a:p>
+          <a:p>
+            <a:pPr marL="0" indent="0">
+              <a:buNone/>
+            </a:pPr>
+            <a:r>
+              <a:rPr lang="zh-CN" altLang="en-US" dirty="0"/>
+              <a:t>你看看，你的孩子在</a:t>
+            </a:r>
+            <a:r>
+              <a:rPr lang="en-US" altLang="zh-CN" dirty="0"/>
+              <a:t>10</a:t>
+            </a:r>
+            <a:r>
+              <a:rPr lang="zh-CN" altLang="en-US" dirty="0"/>
+              <a:t>年之后还会有白领的工作吗？</a:t>
+            </a:r>
+          </a:p>
+        </p:txBody>
+      </p:sp>
+    </p:spTree>
+    <p:extLst>
+      <p:ext uri="{BB962C8B-B14F-4D97-AF65-F5344CB8AC3E}">
+        <p14:creationId xmlns:p14="http://schemas.microsoft.com/office/powerpoint/2010/main" val="30792127"/>
+      </p:ext>
+    </p:extLst>
+  </p:cSld>
+  <p:clrMapOvr>
+    <a:masterClrMapping/>
+  </p:clrMapOvr>
+</p:sld>
+</file>
+
+<file path=ppt/slides/slide11.xml><?xml version="1.0" encoding="utf-8"?>
+<p:sld xmlns:a="http://schemas.openxmlformats.org/drawingml/2006/main" xmlns:r="http://schemas.openxmlformats.org/officeDocument/2006/relationships" xmlns:p="http://schemas.openxmlformats.org/presentationml/2006/main">
+  <p:cSld>
+    <p:spTree>
+      <p:nvGrpSpPr>
+        <p:cNvPr id="1" name="">
+          <a:extLst>
+            <a:ext uri="{FF2B5EF4-FFF2-40B4-BE49-F238E27FC236}">
+              <a16:creationId xmlns:a16="http://schemas.microsoft.com/office/drawing/2014/main" id="{A7C47270-8863-B67A-1608-AD40773F7428}"/>
+            </a:ext>
+          </a:extLst>
+        </p:cNvPr>
+        <p:cNvGrpSpPr/>
+        <p:nvPr/>
+      </p:nvGrpSpPr>
+      <p:grpSpPr>
+        <a:xfrm>
+          <a:off x="0" y="0"/>
+          <a:ext cx="0" cy="0"/>
+          <a:chOff x="0" y="0"/>
+          <a:chExt cx="0" cy="0"/>
+        </a:xfrm>
+      </p:grpSpPr>
+      <p:sp>
+        <p:nvSpPr>
+          <p:cNvPr id="2" name="标题 1">
+            <a:extLst>
+              <a:ext uri="{FF2B5EF4-FFF2-40B4-BE49-F238E27FC236}">
+                <a16:creationId xmlns:a16="http://schemas.microsoft.com/office/drawing/2014/main" id="{2562A1A4-820E-DA6F-0D16-BBE7F23CBB75}"/>
+              </a:ext>
+            </a:extLst>
+          </p:cNvPr>
+          <p:cNvSpPr>
+            <a:spLocks noGrp="1"/>
+          </p:cNvSpPr>
+          <p:nvPr>
+            <p:ph type="title"/>
+          </p:nvPr>
+        </p:nvSpPr>
+        <p:spPr>
+          <a:xfrm>
+            <a:off x="521208" y="978408"/>
+            <a:ext cx="11155680" cy="951992"/>
+          </a:xfrm>
+        </p:spPr>
+        <p:txBody>
+          <a:bodyPr/>
+          <a:lstStyle/>
+          <a:p>
+            <a:r>
+              <a:rPr lang="zh-CN" altLang="en-US" sz="4400" dirty="0"/>
+              <a:t>资本主义的闭环逻辑</a:t>
+            </a:r>
+          </a:p>
+        </p:txBody>
+      </p:sp>
+      <p:sp>
+        <p:nvSpPr>
+          <p:cNvPr id="3" name="内容占位符 2">
+            <a:extLst>
+              <a:ext uri="{FF2B5EF4-FFF2-40B4-BE49-F238E27FC236}">
+                <a16:creationId xmlns:a16="http://schemas.microsoft.com/office/drawing/2014/main" id="{33B79987-83C5-F973-0A79-77E03050F67B}"/>
+              </a:ext>
+            </a:extLst>
+          </p:cNvPr>
+          <p:cNvSpPr>
+            <a:spLocks noGrp="1"/>
+          </p:cNvSpPr>
+          <p:nvPr>
+            <p:ph idx="1"/>
+          </p:nvPr>
+        </p:nvSpPr>
+        <p:spPr/>
+        <p:txBody>
+          <a:bodyPr/>
+          <a:lstStyle/>
+          <a:p>
+            <a:pPr marL="0" indent="0">
+              <a:buNone/>
+            </a:pPr>
+            <a:r>
+              <a:rPr lang="zh-CN" altLang="en-US" dirty="0"/>
+              <a:t>马克思看到了资本主义的本质。</a:t>
+            </a:r>
+          </a:p>
+          <a:p>
+            <a:pPr marL="0" indent="0">
+              <a:buNone/>
+            </a:pPr>
+            <a:r>
+              <a:rPr lang="zh-CN" altLang="en-US" dirty="0"/>
+              <a:t>贷款、生产、消费闭环，但每</a:t>
+            </a:r>
+            <a:r>
+              <a:rPr lang="en-US" altLang="zh-CN" dirty="0"/>
+              <a:t>10</a:t>
+            </a:r>
+            <a:r>
+              <a:rPr lang="zh-CN" altLang="en-US" dirty="0"/>
+              <a:t>年发生经济危机</a:t>
+            </a:r>
+          </a:p>
+          <a:p>
+            <a:pPr marL="0" indent="0">
+              <a:buNone/>
+            </a:pPr>
+            <a:r>
+              <a:rPr lang="zh-CN" altLang="en-US" dirty="0"/>
+              <a:t>但是为什么现实中没有那么频繁呢？</a:t>
+            </a:r>
+          </a:p>
+          <a:p>
+            <a:pPr marL="0" indent="0">
+              <a:buNone/>
+            </a:pPr>
+            <a:r>
+              <a:rPr lang="zh-CN" altLang="en-US" dirty="0"/>
+              <a:t>不是马克思错了，而是中国成为新商品的倾销市场，缓解了资本主义矛盾。</a:t>
+            </a:r>
+          </a:p>
+          <a:p>
+            <a:pPr marL="0" indent="0">
+              <a:buNone/>
+            </a:pPr>
+            <a:r>
+              <a:rPr lang="zh-CN" altLang="en-US" dirty="0"/>
+              <a:t>日本的彩电、日本的冰箱、外国的汽车</a:t>
+            </a:r>
+          </a:p>
+        </p:txBody>
+      </p:sp>
+    </p:spTree>
+    <p:extLst>
+      <p:ext uri="{BB962C8B-B14F-4D97-AF65-F5344CB8AC3E}">
+        <p14:creationId xmlns:p14="http://schemas.microsoft.com/office/powerpoint/2010/main" val="2490607248"/>
+      </p:ext>
+    </p:extLst>
+  </p:cSld>
+  <p:clrMapOvr>
+    <a:masterClrMapping/>
+  </p:clrMapOvr>
+</p:sld>
+</file>
+
+<file path=ppt/slides/slide12.xml><?xml version="1.0" encoding="utf-8"?>
+<p:sld xmlns:a="http://schemas.openxmlformats.org/drawingml/2006/main" xmlns:r="http://schemas.openxmlformats.org/officeDocument/2006/relationships" xmlns:p="http://schemas.openxmlformats.org/presentationml/2006/main">
+  <p:cSld>
+    <p:spTree>
+      <p:nvGrpSpPr>
+        <p:cNvPr id="1" name="">
+          <a:extLst>
+            <a:ext uri="{FF2B5EF4-FFF2-40B4-BE49-F238E27FC236}">
               <a16:creationId xmlns:a16="http://schemas.microsoft.com/office/drawing/2014/main" id="{3D07E0AD-6F5A-4348-5DBB-64DEE36B50C0}"/>
             </a:ext>
           </a:extLst>
@@ -4135,7 +4487,7 @@
           <a:p>
             <a:r>
               <a:rPr lang="zh-CN" altLang="en-US" sz="4400" dirty="0"/>
-              <a:t>第三代儿童教育就是面向未来的教育（八）</a:t>
+              <a:t>人才过剩</a:t>
             </a:r>
           </a:p>
         </p:txBody>
@@ -4236,7 +4588,7 @@
 </p:sld>
 </file>
 
-<file path=ppt/slides/slide11.xml><?xml version="1.0" encoding="utf-8"?>
+<file path=ppt/slides/slide13.xml><?xml version="1.0" encoding="utf-8"?>
 <p:sld xmlns:a="http://schemas.openxmlformats.org/drawingml/2006/main" xmlns:r="http://schemas.openxmlformats.org/officeDocument/2006/relationships" xmlns:p="http://schemas.openxmlformats.org/presentationml/2006/main">
   <p:cSld>
     <p:spTree>
@@ -4275,22 +4627,19 @@
             <p:ph type="title"/>
           </p:nvPr>
         </p:nvSpPr>
-        <p:spPr/>
+        <p:spPr>
+          <a:xfrm>
+            <a:off x="521208" y="978408"/>
+            <a:ext cx="11155680" cy="901192"/>
+          </a:xfrm>
+        </p:spPr>
         <p:txBody>
           <a:bodyPr/>
           <a:lstStyle/>
           <a:p>
             <a:r>
               <a:rPr lang="zh-CN" altLang="en-US" sz="4400" dirty="0"/>
-              <a:t>第三代儿童教育就是面向未来的教育（</a:t>
-            </a:r>
-            <a:r>
-              <a:rPr lang="en-US" altLang="zh-CN" sz="4400" dirty="0"/>
-              <a:t>9</a:t>
-            </a:r>
-            <a:r>
-              <a:rPr lang="zh-CN" altLang="en-US" sz="4400" dirty="0"/>
-              <a:t>）</a:t>
+              <a:t>第一代教育模式</a:t>
             </a:r>
           </a:p>
         </p:txBody>
@@ -4351,7 +4700,7 @@
 </p:sld>
 </file>
 
-<file path=ppt/slides/slide12.xml><?xml version="1.0" encoding="utf-8"?>
+<file path=ppt/slides/slide14.xml><?xml version="1.0" encoding="utf-8"?>
 <p:sld xmlns:a="http://schemas.openxmlformats.org/drawingml/2006/main" xmlns:r="http://schemas.openxmlformats.org/officeDocument/2006/relationships" xmlns:p="http://schemas.openxmlformats.org/presentationml/2006/main">
   <p:cSld>
     <p:spTree>
@@ -4390,22 +4739,19 @@
             <p:ph type="title"/>
           </p:nvPr>
         </p:nvSpPr>
-        <p:spPr/>
+        <p:spPr>
+          <a:xfrm>
+            <a:off x="521208" y="978408"/>
+            <a:ext cx="11155680" cy="990092"/>
+          </a:xfrm>
+        </p:spPr>
         <p:txBody>
           <a:bodyPr/>
           <a:lstStyle/>
           <a:p>
             <a:r>
               <a:rPr lang="zh-CN" altLang="en-US" sz="4400" dirty="0"/>
-              <a:t>第三代儿童教育就是面向未来的教育（</a:t>
-            </a:r>
-            <a:r>
-              <a:rPr lang="en-US" altLang="zh-CN" sz="4400" dirty="0"/>
-              <a:t>10</a:t>
-            </a:r>
-            <a:r>
-              <a:rPr lang="zh-CN" altLang="en-US" sz="4400" dirty="0"/>
-              <a:t>）</a:t>
+              <a:t>第二代教育模式</a:t>
             </a:r>
           </a:p>
         </p:txBody>
@@ -4469,7 +4815,7 @@
 </p:sld>
 </file>
 
-<file path=ppt/slides/slide13.xml><?xml version="1.0" encoding="utf-8"?>
+<file path=ppt/slides/slide15.xml><?xml version="1.0" encoding="utf-8"?>
 <p:sld xmlns:a="http://schemas.openxmlformats.org/drawingml/2006/main" xmlns:r="http://schemas.openxmlformats.org/officeDocument/2006/relationships" xmlns:p="http://schemas.openxmlformats.org/presentationml/2006/main">
   <p:cSld>
     <p:spTree>
@@ -4515,15 +4861,7 @@
           <a:p>
             <a:r>
               <a:rPr lang="zh-CN" altLang="en-US" sz="4400" dirty="0"/>
-              <a:t>第三代儿童教育就是面向未来的教育（</a:t>
-            </a:r>
-            <a:r>
-              <a:rPr lang="en-US" altLang="zh-CN" sz="4400" dirty="0"/>
-              <a:t>11</a:t>
-            </a:r>
-            <a:r>
-              <a:rPr lang="zh-CN" altLang="en-US" sz="4400" dirty="0"/>
-              <a:t>）</a:t>
+              <a:t>第二代教育模式的弊端</a:t>
             </a:r>
           </a:p>
         </p:txBody>
@@ -4602,7 +4940,7 @@
 </p:sld>
 </file>
 
-<file path=ppt/slides/slide14.xml><?xml version="1.0" encoding="utf-8"?>
+<file path=ppt/slides/slide16.xml><?xml version="1.0" encoding="utf-8"?>
 <p:sld xmlns:a="http://schemas.openxmlformats.org/drawingml/2006/main" xmlns:r="http://schemas.openxmlformats.org/officeDocument/2006/relationships" xmlns:p="http://schemas.openxmlformats.org/presentationml/2006/main">
   <p:cSld>
     <p:spTree>
@@ -4650,11 +4988,6 @@
               <a:rPr lang="zh-CN" altLang="en-US" sz="4400" dirty="0"/>
               <a:t>躺平问题</a:t>
             </a:r>
-            <a:r>
-              <a:rPr lang="en-US" altLang="zh-CN" sz="4400" dirty="0"/>
-              <a:t>1</a:t>
-            </a:r>
-            <a:endParaRPr lang="zh-CN" altLang="en-US" sz="4400" dirty="0"/>
           </a:p>
         </p:txBody>
       </p:sp>
@@ -4729,7 +5062,7 @@
 </p:sld>
 </file>
 
-<file path=ppt/slides/slide15.xml><?xml version="1.0" encoding="utf-8"?>
+<file path=ppt/slides/slide17.xml><?xml version="1.0" encoding="utf-8"?>
 <p:sld xmlns:a="http://schemas.openxmlformats.org/drawingml/2006/main" xmlns:r="http://schemas.openxmlformats.org/officeDocument/2006/relationships" xmlns:p="http://schemas.openxmlformats.org/presentationml/2006/main">
   <p:cSld>
     <p:spTree>
@@ -4775,13 +5108,8 @@
           <a:p>
             <a:r>
               <a:rPr lang="zh-CN" altLang="en-US" sz="4400" dirty="0"/>
-              <a:t>躺平问题</a:t>
-            </a:r>
-            <a:r>
-              <a:rPr lang="en-US" altLang="zh-CN" sz="4400" dirty="0"/>
-              <a:t>2</a:t>
-            </a:r>
-            <a:endParaRPr lang="zh-CN" altLang="en-US" sz="4400" dirty="0"/>
+              <a:t>躺平问题的案例</a:t>
+            </a:r>
           </a:p>
         </p:txBody>
       </p:sp>
@@ -4856,7 +5184,7 @@
 </p:sld>
 </file>
 
-<file path=ppt/slides/slide16.xml><?xml version="1.0" encoding="utf-8"?>
+<file path=ppt/slides/slide18.xml><?xml version="1.0" encoding="utf-8"?>
 <p:sld xmlns:a="http://schemas.openxmlformats.org/drawingml/2006/main" xmlns:r="http://schemas.openxmlformats.org/officeDocument/2006/relationships" xmlns:p="http://schemas.openxmlformats.org/presentationml/2006/main">
   <p:cSld>
     <p:spTree>
@@ -4902,13 +5230,8 @@
           <a:p>
             <a:r>
               <a:rPr lang="zh-CN" altLang="en-US" sz="4400" dirty="0"/>
-              <a:t>躺平问题</a:t>
-            </a:r>
-            <a:r>
-              <a:rPr lang="en-US" altLang="zh-CN" sz="4400" dirty="0"/>
-              <a:t>3</a:t>
-            </a:r>
-            <a:endParaRPr lang="zh-CN" altLang="en-US" sz="4400" dirty="0"/>
+              <a:t>躺平问题的本质</a:t>
+            </a:r>
           </a:p>
         </p:txBody>
       </p:sp>
@@ -5010,7 +5333,7 @@
 </p:sld>
 </file>
 
-<file path=ppt/slides/slide17.xml><?xml version="1.0" encoding="utf-8"?>
+<file path=ppt/slides/slide19.xml><?xml version="1.0" encoding="utf-8"?>
 <p:sld xmlns:a="http://schemas.openxmlformats.org/drawingml/2006/main" xmlns:r="http://schemas.openxmlformats.org/officeDocument/2006/relationships" xmlns:p="http://schemas.openxmlformats.org/presentationml/2006/main">
   <p:cSld>
     <p:spTree>
@@ -5056,7 +5379,7 @@
           <a:p>
             <a:r>
               <a:rPr lang="zh-CN" altLang="en-US" sz="4400" dirty="0"/>
-              <a:t>失败是大概率事件</a:t>
+              <a:t>教育失败是大概率事件</a:t>
             </a:r>
           </a:p>
         </p:txBody>
@@ -5149,241 +5472,6 @@
     <p:extLst>
       <p:ext uri="{BB962C8B-B14F-4D97-AF65-F5344CB8AC3E}">
         <p14:creationId xmlns:p14="http://schemas.microsoft.com/office/powerpoint/2010/main" val="1930393817"/>
-      </p:ext>
-    </p:extLst>
-  </p:cSld>
-  <p:clrMapOvr>
-    <a:masterClrMapping/>
-  </p:clrMapOvr>
-</p:sld>
-</file>
-
-<file path=ppt/slides/slide18.xml><?xml version="1.0" encoding="utf-8"?>
-<p:sld xmlns:a="http://schemas.openxmlformats.org/drawingml/2006/main" xmlns:r="http://schemas.openxmlformats.org/officeDocument/2006/relationships" xmlns:p="http://schemas.openxmlformats.org/presentationml/2006/main">
-  <p:cSld>
-    <p:spTree>
-      <p:nvGrpSpPr>
-        <p:cNvPr id="1" name="">
-          <a:extLst>
-            <a:ext uri="{FF2B5EF4-FFF2-40B4-BE49-F238E27FC236}">
-              <a16:creationId xmlns:a16="http://schemas.microsoft.com/office/drawing/2014/main" id="{D5E30A33-23BB-DCDE-B7B4-0F4EEBDD2624}"/>
-            </a:ext>
-          </a:extLst>
-        </p:cNvPr>
-        <p:cNvGrpSpPr/>
-        <p:nvPr/>
-      </p:nvGrpSpPr>
-      <p:grpSpPr>
-        <a:xfrm>
-          <a:off x="0" y="0"/>
-          <a:ext cx="0" cy="0"/>
-          <a:chOff x="0" y="0"/>
-          <a:chExt cx="0" cy="0"/>
-        </a:xfrm>
-      </p:grpSpPr>
-      <p:sp>
-        <p:nvSpPr>
-          <p:cNvPr id="2" name="标题 1">
-            <a:extLst>
-              <a:ext uri="{FF2B5EF4-FFF2-40B4-BE49-F238E27FC236}">
-                <a16:creationId xmlns:a16="http://schemas.microsoft.com/office/drawing/2014/main" id="{32A90453-9E14-AC5C-EB56-DEB9CD543DCD}"/>
-              </a:ext>
-            </a:extLst>
-          </p:cNvPr>
-          <p:cNvSpPr>
-            <a:spLocks noGrp="1"/>
-          </p:cNvSpPr>
-          <p:nvPr>
-            <p:ph type="title"/>
-          </p:nvPr>
-        </p:nvSpPr>
-        <p:spPr/>
-        <p:txBody>
-          <a:bodyPr/>
-          <a:lstStyle/>
-          <a:p>
-            <a:r>
-              <a:rPr lang="zh-CN" altLang="en-US" sz="4400" dirty="0"/>
-              <a:t>为什么学习如此艰难</a:t>
-            </a:r>
-          </a:p>
-        </p:txBody>
-      </p:sp>
-      <p:sp>
-        <p:nvSpPr>
-          <p:cNvPr id="3" name="内容占位符 2">
-            <a:extLst>
-              <a:ext uri="{FF2B5EF4-FFF2-40B4-BE49-F238E27FC236}">
-                <a16:creationId xmlns:a16="http://schemas.microsoft.com/office/drawing/2014/main" id="{B0A0C15A-BAF5-9A06-4FD7-3C7AF8BA6F08}"/>
-              </a:ext>
-            </a:extLst>
-          </p:cNvPr>
-          <p:cNvSpPr>
-            <a:spLocks noGrp="1"/>
-          </p:cNvSpPr>
-          <p:nvPr>
-            <p:ph idx="1"/>
-          </p:nvPr>
-        </p:nvSpPr>
-        <p:spPr/>
-        <p:txBody>
-          <a:bodyPr/>
-          <a:lstStyle/>
-          <a:p>
-            <a:pPr marL="0" indent="0">
-              <a:buNone/>
-            </a:pPr>
-            <a:r>
-              <a:rPr lang="zh-CN" altLang="en-US" dirty="0"/>
-              <a:t>“最近发展区”和“自然成熟说”</a:t>
-            </a:r>
-          </a:p>
-        </p:txBody>
-      </p:sp>
-    </p:spTree>
-    <p:extLst>
-      <p:ext uri="{BB962C8B-B14F-4D97-AF65-F5344CB8AC3E}">
-        <p14:creationId xmlns:p14="http://schemas.microsoft.com/office/powerpoint/2010/main" val="1054533147"/>
-      </p:ext>
-    </p:extLst>
-  </p:cSld>
-  <p:clrMapOvr>
-    <a:masterClrMapping/>
-  </p:clrMapOvr>
-</p:sld>
-</file>
-
-<file path=ppt/slides/slide19.xml><?xml version="1.0" encoding="utf-8"?>
-<p:sld xmlns:a="http://schemas.openxmlformats.org/drawingml/2006/main" xmlns:r="http://schemas.openxmlformats.org/officeDocument/2006/relationships" xmlns:p="http://schemas.openxmlformats.org/presentationml/2006/main">
-  <p:cSld>
-    <p:spTree>
-      <p:nvGrpSpPr>
-        <p:cNvPr id="1" name="">
-          <a:extLst>
-            <a:ext uri="{FF2B5EF4-FFF2-40B4-BE49-F238E27FC236}">
-              <a16:creationId xmlns:a16="http://schemas.microsoft.com/office/drawing/2014/main" id="{A4B14C8F-8178-9648-E8CA-4D58F91D28B8}"/>
-            </a:ext>
-          </a:extLst>
-        </p:cNvPr>
-        <p:cNvGrpSpPr/>
-        <p:nvPr/>
-      </p:nvGrpSpPr>
-      <p:grpSpPr>
-        <a:xfrm>
-          <a:off x="0" y="0"/>
-          <a:ext cx="0" cy="0"/>
-          <a:chOff x="0" y="0"/>
-          <a:chExt cx="0" cy="0"/>
-        </a:xfrm>
-      </p:grpSpPr>
-      <p:sp>
-        <p:nvSpPr>
-          <p:cNvPr id="2" name="标题 1">
-            <a:extLst>
-              <a:ext uri="{FF2B5EF4-FFF2-40B4-BE49-F238E27FC236}">
-                <a16:creationId xmlns:a16="http://schemas.microsoft.com/office/drawing/2014/main" id="{C7EAFF0D-D09E-8CB2-B465-68B97C907070}"/>
-              </a:ext>
-            </a:extLst>
-          </p:cNvPr>
-          <p:cNvSpPr>
-            <a:spLocks noGrp="1"/>
-          </p:cNvSpPr>
-          <p:nvPr>
-            <p:ph type="title"/>
-          </p:nvPr>
-        </p:nvSpPr>
-        <p:spPr/>
-        <p:txBody>
-          <a:bodyPr/>
-          <a:lstStyle/>
-          <a:p>
-            <a:r>
-              <a:rPr lang="zh-CN" altLang="en-US" sz="4400" dirty="0"/>
-              <a:t>为什么学习如此艰难</a:t>
-            </a:r>
-          </a:p>
-        </p:txBody>
-      </p:sp>
-      <p:sp>
-        <p:nvSpPr>
-          <p:cNvPr id="3" name="内容占位符 2">
-            <a:extLst>
-              <a:ext uri="{FF2B5EF4-FFF2-40B4-BE49-F238E27FC236}">
-                <a16:creationId xmlns:a16="http://schemas.microsoft.com/office/drawing/2014/main" id="{81B8AD46-9AB2-4700-BA1F-ABEFEF85C257}"/>
-              </a:ext>
-            </a:extLst>
-          </p:cNvPr>
-          <p:cNvSpPr>
-            <a:spLocks noGrp="1"/>
-          </p:cNvSpPr>
-          <p:nvPr>
-            <p:ph idx="1"/>
-          </p:nvPr>
-        </p:nvSpPr>
-        <p:spPr/>
-        <p:txBody>
-          <a:bodyPr/>
-          <a:lstStyle/>
-          <a:p>
-            <a:pPr marL="0" indent="0">
-              <a:buNone/>
-            </a:pPr>
-            <a:r>
-              <a:rPr lang="zh-CN" altLang="en-US" dirty="0"/>
-              <a:t>学校被发明出来。</a:t>
-            </a:r>
-            <a:endParaRPr lang="en-US" altLang="zh-CN" dirty="0"/>
-          </a:p>
-          <a:p>
-            <a:pPr marL="0" indent="0">
-              <a:buNone/>
-            </a:pPr>
-            <a:r>
-              <a:rPr lang="zh-CN" altLang="en-US" dirty="0"/>
-              <a:t>改革开放和复制型人才。</a:t>
-            </a:r>
-            <a:endParaRPr lang="en-US" altLang="zh-CN" dirty="0"/>
-          </a:p>
-          <a:p>
-            <a:pPr marL="0" indent="0">
-              <a:buNone/>
-            </a:pPr>
-            <a:r>
-              <a:rPr lang="zh-CN" altLang="en-US" dirty="0"/>
-              <a:t>恢复</a:t>
-            </a:r>
-            <a:r>
-              <a:rPr lang="en-US" altLang="zh-CN" dirty="0"/>
-              <a:t>80</a:t>
-            </a:r>
-            <a:r>
-              <a:rPr lang="zh-CN" altLang="en-US" dirty="0"/>
-              <a:t>后教材的错误言论。</a:t>
-            </a:r>
-            <a:endParaRPr lang="en-US" altLang="zh-CN" dirty="0"/>
-          </a:p>
-          <a:p>
-            <a:pPr marL="0" indent="0">
-              <a:buNone/>
-            </a:pPr>
-            <a:r>
-              <a:rPr lang="zh-CN" altLang="en-US" dirty="0"/>
-              <a:t>国家为什么要“双减”</a:t>
-            </a:r>
-            <a:endParaRPr lang="en-US" altLang="zh-CN" dirty="0"/>
-          </a:p>
-          <a:p>
-            <a:pPr marL="0" indent="0">
-              <a:buNone/>
-            </a:pPr>
-            <a:endParaRPr lang="zh-CN" altLang="en-US" dirty="0"/>
-          </a:p>
-        </p:txBody>
-      </p:sp>
-    </p:spTree>
-    <p:extLst>
-      <p:ext uri="{BB962C8B-B14F-4D97-AF65-F5344CB8AC3E}">
-        <p14:creationId xmlns:p14="http://schemas.microsoft.com/office/powerpoint/2010/main" val="777729317"/>
       </p:ext>
     </p:extLst>
   </p:cSld>
@@ -5426,14 +5514,19 @@
             <p:ph type="title"/>
           </p:nvPr>
         </p:nvSpPr>
-        <p:spPr/>
+        <p:spPr>
+          <a:xfrm>
+            <a:off x="521208" y="978408"/>
+            <a:ext cx="11155680" cy="850392"/>
+          </a:xfrm>
+        </p:spPr>
         <p:txBody>
           <a:bodyPr/>
           <a:lstStyle/>
           <a:p>
             <a:r>
               <a:rPr lang="zh-CN" altLang="en-US" sz="4400" dirty="0"/>
-              <a:t>培养孩子是面向未来，而非面向现在（一）</a:t>
+              <a:t>教育面向未来，而非面向现在</a:t>
             </a:r>
           </a:p>
         </p:txBody>
@@ -5454,7 +5547,12 @@
             <p:ph idx="1"/>
           </p:nvPr>
         </p:nvSpPr>
-        <p:spPr/>
+        <p:spPr>
+          <a:xfrm>
+            <a:off x="521208" y="2159000"/>
+            <a:ext cx="11155680" cy="4186936"/>
+          </a:xfrm>
+        </p:spPr>
         <p:txBody>
           <a:bodyPr/>
           <a:lstStyle/>
@@ -5509,93 +5607,6 @@
               <a:t>据说现在考公务员，要研究生学历，并且还要有至少两年以上的工作经历才能报考。</a:t>
             </a:r>
             <a:endParaRPr lang="en-US" altLang="zh-CN" dirty="0"/>
-          </a:p>
-          <a:p>
-            <a:pPr marL="0" indent="0">
-              <a:buNone/>
-            </a:pPr>
-            <a:r>
-              <a:rPr lang="zh-CN" altLang="en-US" dirty="0"/>
-              <a:t>美国，学了理科，或者说计算机专业，搞</a:t>
-            </a:r>
-            <a:r>
-              <a:rPr lang="en-US" altLang="zh-CN" dirty="0"/>
-              <a:t>AI</a:t>
-            </a:r>
-            <a:r>
-              <a:rPr lang="zh-CN" altLang="en-US" dirty="0"/>
-              <a:t>的，在毕业之后就没有工作了。</a:t>
-            </a:r>
-          </a:p>
-          <a:p>
-            <a:pPr marL="0" indent="0">
-              <a:buNone/>
-            </a:pPr>
-            <a:r>
-              <a:rPr lang="zh-CN" altLang="en-US" dirty="0"/>
-              <a:t>在</a:t>
-            </a:r>
-            <a:r>
-              <a:rPr lang="en-US" altLang="zh-CN" dirty="0"/>
-              <a:t>30</a:t>
-            </a:r>
-            <a:r>
-              <a:rPr lang="zh-CN" altLang="en-US" dirty="0"/>
-              <a:t>岁左右就要对专业方向或者说职业发展方向，要有一个清晰的定位。</a:t>
-            </a:r>
-          </a:p>
-          <a:p>
-            <a:pPr marL="0" indent="0">
-              <a:buNone/>
-            </a:pPr>
-            <a:r>
-              <a:rPr lang="zh-CN" altLang="en-US" dirty="0"/>
-              <a:t>因为现在这个时代，专业方向是非常固化的，想要跨专业、跨领域是几乎不可能的事。</a:t>
-            </a:r>
-            <a:endParaRPr lang="en-US" altLang="zh-CN" dirty="0"/>
-          </a:p>
-          <a:p>
-            <a:pPr marL="0" indent="0">
-              <a:buNone/>
-            </a:pPr>
-            <a:r>
-              <a:rPr lang="zh-CN" altLang="en-US" dirty="0"/>
-              <a:t>教育部，有一个很重要的改革</a:t>
-            </a:r>
-          </a:p>
-          <a:p>
-            <a:pPr marL="0" indent="0">
-              <a:buNone/>
-            </a:pPr>
-            <a:r>
-              <a:rPr lang="zh-CN" altLang="en-US" dirty="0"/>
-              <a:t>就改革不是新建了多少大学，而是说是要在全国建</a:t>
-            </a:r>
-            <a:r>
-              <a:rPr lang="en-US" altLang="zh-CN" dirty="0"/>
-              <a:t>9000</a:t>
-            </a:r>
-            <a:r>
-              <a:rPr lang="zh-CN" altLang="en-US" dirty="0"/>
-              <a:t>所，两年建成</a:t>
-            </a:r>
-            <a:r>
-              <a:rPr lang="en-US" altLang="zh-CN" dirty="0"/>
-              <a:t>1.8</a:t>
-            </a:r>
-            <a:r>
-              <a:rPr lang="zh-CN" altLang="en-US" dirty="0"/>
-              <a:t>万所学校。</a:t>
-            </a:r>
-          </a:p>
-          <a:p>
-            <a:pPr marL="0" indent="0">
-              <a:buNone/>
-            </a:pPr>
-            <a:r>
-              <a:rPr lang="zh-CN" altLang="en-US" dirty="0"/>
-              <a:t>这些学校不是用来学知识的，而是用来玩的，重要在体育、劳动和其他技能方面的培养。</a:t>
-            </a:r>
           </a:p>
         </p:txBody>
       </p:sp>
@@ -5613,6 +5624,246 @@
 </file>
 
 <file path=ppt/slides/slide20.xml><?xml version="1.0" encoding="utf-8"?>
+<p:sld xmlns:a="http://schemas.openxmlformats.org/drawingml/2006/main" xmlns:r="http://schemas.openxmlformats.org/officeDocument/2006/relationships" xmlns:p="http://schemas.openxmlformats.org/presentationml/2006/main">
+  <p:cSld>
+    <p:spTree>
+      <p:nvGrpSpPr>
+        <p:cNvPr id="1" name="">
+          <a:extLst>
+            <a:ext uri="{FF2B5EF4-FFF2-40B4-BE49-F238E27FC236}">
+              <a16:creationId xmlns:a16="http://schemas.microsoft.com/office/drawing/2014/main" id="{D5E30A33-23BB-DCDE-B7B4-0F4EEBDD2624}"/>
+            </a:ext>
+          </a:extLst>
+        </p:cNvPr>
+        <p:cNvGrpSpPr/>
+        <p:nvPr/>
+      </p:nvGrpSpPr>
+      <p:grpSpPr>
+        <a:xfrm>
+          <a:off x="0" y="0"/>
+          <a:ext cx="0" cy="0"/>
+          <a:chOff x="0" y="0"/>
+          <a:chExt cx="0" cy="0"/>
+        </a:xfrm>
+      </p:grpSpPr>
+      <p:sp>
+        <p:nvSpPr>
+          <p:cNvPr id="2" name="标题 1">
+            <a:extLst>
+              <a:ext uri="{FF2B5EF4-FFF2-40B4-BE49-F238E27FC236}">
+                <a16:creationId xmlns:a16="http://schemas.microsoft.com/office/drawing/2014/main" id="{32A90453-9E14-AC5C-EB56-DEB9CD543DCD}"/>
+              </a:ext>
+            </a:extLst>
+          </p:cNvPr>
+          <p:cNvSpPr>
+            <a:spLocks noGrp="1"/>
+          </p:cNvSpPr>
+          <p:nvPr>
+            <p:ph type="title"/>
+          </p:nvPr>
+        </p:nvSpPr>
+        <p:spPr/>
+        <p:txBody>
+          <a:bodyPr/>
+          <a:lstStyle/>
+          <a:p>
+            <a:r>
+              <a:rPr lang="zh-CN" altLang="en-US" sz="4400" dirty="0"/>
+              <a:t>为什么学习如此艰难</a:t>
+            </a:r>
+          </a:p>
+        </p:txBody>
+      </p:sp>
+      <p:sp>
+        <p:nvSpPr>
+          <p:cNvPr id="3" name="内容占位符 2">
+            <a:extLst>
+              <a:ext uri="{FF2B5EF4-FFF2-40B4-BE49-F238E27FC236}">
+                <a16:creationId xmlns:a16="http://schemas.microsoft.com/office/drawing/2014/main" id="{B0A0C15A-BAF5-9A06-4FD7-3C7AF8BA6F08}"/>
+              </a:ext>
+            </a:extLst>
+          </p:cNvPr>
+          <p:cNvSpPr>
+            <a:spLocks noGrp="1"/>
+          </p:cNvSpPr>
+          <p:nvPr>
+            <p:ph idx="1"/>
+          </p:nvPr>
+        </p:nvSpPr>
+        <p:spPr/>
+        <p:txBody>
+          <a:bodyPr/>
+          <a:lstStyle/>
+          <a:p>
+            <a:pPr marL="0" indent="0">
+              <a:buNone/>
+            </a:pPr>
+            <a:r>
+              <a:rPr lang="zh-CN" altLang="en-US" dirty="0"/>
+              <a:t>“最近发展区”和“自然成熟说”</a:t>
+            </a:r>
+          </a:p>
+        </p:txBody>
+      </p:sp>
+    </p:spTree>
+    <p:extLst>
+      <p:ext uri="{BB962C8B-B14F-4D97-AF65-F5344CB8AC3E}">
+        <p14:creationId xmlns:p14="http://schemas.microsoft.com/office/powerpoint/2010/main" val="1054533147"/>
+      </p:ext>
+    </p:extLst>
+  </p:cSld>
+  <p:clrMapOvr>
+    <a:masterClrMapping/>
+  </p:clrMapOvr>
+</p:sld>
+</file>
+
+<file path=ppt/slides/slide21.xml><?xml version="1.0" encoding="utf-8"?>
+<p:sld xmlns:a="http://schemas.openxmlformats.org/drawingml/2006/main" xmlns:r="http://schemas.openxmlformats.org/officeDocument/2006/relationships" xmlns:p="http://schemas.openxmlformats.org/presentationml/2006/main">
+  <p:cSld>
+    <p:spTree>
+      <p:nvGrpSpPr>
+        <p:cNvPr id="1" name="">
+          <a:extLst>
+            <a:ext uri="{FF2B5EF4-FFF2-40B4-BE49-F238E27FC236}">
+              <a16:creationId xmlns:a16="http://schemas.microsoft.com/office/drawing/2014/main" id="{A4B14C8F-8178-9648-E8CA-4D58F91D28B8}"/>
+            </a:ext>
+          </a:extLst>
+        </p:cNvPr>
+        <p:cNvGrpSpPr/>
+        <p:nvPr/>
+      </p:nvGrpSpPr>
+      <p:grpSpPr>
+        <a:xfrm>
+          <a:off x="0" y="0"/>
+          <a:ext cx="0" cy="0"/>
+          <a:chOff x="0" y="0"/>
+          <a:chExt cx="0" cy="0"/>
+        </a:xfrm>
+      </p:grpSpPr>
+      <p:sp>
+        <p:nvSpPr>
+          <p:cNvPr id="2" name="标题 1">
+            <a:extLst>
+              <a:ext uri="{FF2B5EF4-FFF2-40B4-BE49-F238E27FC236}">
+                <a16:creationId xmlns:a16="http://schemas.microsoft.com/office/drawing/2014/main" id="{C7EAFF0D-D09E-8CB2-B465-68B97C907070}"/>
+              </a:ext>
+            </a:extLst>
+          </p:cNvPr>
+          <p:cNvSpPr>
+            <a:spLocks noGrp="1"/>
+          </p:cNvSpPr>
+          <p:nvPr>
+            <p:ph type="title"/>
+          </p:nvPr>
+        </p:nvSpPr>
+        <p:spPr>
+          <a:xfrm>
+            <a:off x="521208" y="978408"/>
+            <a:ext cx="11155680" cy="951992"/>
+          </a:xfrm>
+        </p:spPr>
+        <p:txBody>
+          <a:bodyPr/>
+          <a:lstStyle/>
+          <a:p>
+            <a:r>
+              <a:rPr lang="zh-CN" altLang="en-US" sz="4400" dirty="0"/>
+              <a:t>学校是怎么发明出来的</a:t>
+            </a:r>
+          </a:p>
+        </p:txBody>
+      </p:sp>
+      <p:sp>
+        <p:nvSpPr>
+          <p:cNvPr id="3" name="内容占位符 2">
+            <a:extLst>
+              <a:ext uri="{FF2B5EF4-FFF2-40B4-BE49-F238E27FC236}">
+                <a16:creationId xmlns:a16="http://schemas.microsoft.com/office/drawing/2014/main" id="{81B8AD46-9AB2-4700-BA1F-ABEFEF85C257}"/>
+              </a:ext>
+            </a:extLst>
+          </p:cNvPr>
+          <p:cNvSpPr>
+            <a:spLocks noGrp="1"/>
+          </p:cNvSpPr>
+          <p:nvPr>
+            <p:ph idx="1"/>
+          </p:nvPr>
+        </p:nvSpPr>
+        <p:spPr/>
+        <p:txBody>
+          <a:bodyPr/>
+          <a:lstStyle/>
+          <a:p>
+            <a:pPr marL="0" indent="0">
+              <a:buNone/>
+            </a:pPr>
+            <a:r>
+              <a:rPr lang="zh-CN" altLang="en-US" dirty="0"/>
+              <a:t>学校被发明出来。</a:t>
+            </a:r>
+            <a:endParaRPr lang="en-US" altLang="zh-CN" dirty="0"/>
+          </a:p>
+          <a:p>
+            <a:pPr marL="0" indent="0">
+              <a:buNone/>
+            </a:pPr>
+            <a:r>
+              <a:rPr lang="zh-CN" altLang="en-US" dirty="0"/>
+              <a:t>改革开放和复制型人才。</a:t>
+            </a:r>
+            <a:endParaRPr lang="en-US" altLang="zh-CN" dirty="0"/>
+          </a:p>
+          <a:p>
+            <a:pPr marL="0" indent="0">
+              <a:buNone/>
+            </a:pPr>
+            <a:r>
+              <a:rPr lang="zh-CN" altLang="en-US" dirty="0"/>
+              <a:t>恢复</a:t>
+            </a:r>
+            <a:r>
+              <a:rPr lang="en-US" altLang="zh-CN" dirty="0"/>
+              <a:t>80</a:t>
+            </a:r>
+            <a:r>
+              <a:rPr lang="zh-CN" altLang="en-US" dirty="0"/>
+              <a:t>后教材的错误言论。</a:t>
+            </a:r>
+            <a:endParaRPr lang="en-US" altLang="zh-CN" dirty="0"/>
+          </a:p>
+          <a:p>
+            <a:pPr marL="0" indent="0">
+              <a:buNone/>
+            </a:pPr>
+            <a:r>
+              <a:rPr lang="zh-CN" altLang="en-US" dirty="0"/>
+              <a:t>国家为什么要“双减”</a:t>
+            </a:r>
+            <a:endParaRPr lang="en-US" altLang="zh-CN" dirty="0"/>
+          </a:p>
+          <a:p>
+            <a:pPr marL="0" indent="0">
+              <a:buNone/>
+            </a:pPr>
+            <a:endParaRPr lang="zh-CN" altLang="en-US" dirty="0"/>
+          </a:p>
+        </p:txBody>
+      </p:sp>
+    </p:spTree>
+    <p:extLst>
+      <p:ext uri="{BB962C8B-B14F-4D97-AF65-F5344CB8AC3E}">
+        <p14:creationId xmlns:p14="http://schemas.microsoft.com/office/powerpoint/2010/main" val="777729317"/>
+      </p:ext>
+    </p:extLst>
+  </p:cSld>
+  <p:clrMapOvr>
+    <a:masterClrMapping/>
+  </p:clrMapOvr>
+</p:sld>
+</file>
+
+<file path=ppt/slides/slide22.xml><?xml version="1.0" encoding="utf-8"?>
 <p:sld xmlns:a="http://schemas.openxmlformats.org/drawingml/2006/main" xmlns:r="http://schemas.openxmlformats.org/officeDocument/2006/relationships" xmlns:p="http://schemas.openxmlformats.org/presentationml/2006/main">
   <p:cSld>
     <p:spTree>
@@ -5658,7 +5909,7 @@
           <a:p>
             <a:r>
               <a:rPr lang="zh-CN" altLang="en-US" sz="4400" dirty="0"/>
-              <a:t>为什么学习如此艰难</a:t>
+              <a:t>教育变化的根源</a:t>
             </a:r>
           </a:p>
         </p:txBody>
@@ -5743,7 +5994,7 @@
 </p:sld>
 </file>
 
-<file path=ppt/slides/slide21.xml><?xml version="1.0" encoding="utf-8"?>
+<file path=ppt/slides/slide23.xml><?xml version="1.0" encoding="utf-8"?>
 <p:sld xmlns:a="http://schemas.openxmlformats.org/drawingml/2006/main" xmlns:r="http://schemas.openxmlformats.org/officeDocument/2006/relationships" xmlns:p="http://schemas.openxmlformats.org/presentationml/2006/main">
   <p:cSld>
     <p:spTree>
@@ -5789,13 +6040,8 @@
           <a:p>
             <a:r>
               <a:rPr lang="zh-CN" altLang="en-US" sz="4400" dirty="0"/>
-              <a:t>普通娃应该怎么办</a:t>
-            </a:r>
-            <a:r>
-              <a:rPr lang="en-US" altLang="zh-CN" sz="4400" dirty="0"/>
-              <a:t>1</a:t>
-            </a:r>
-            <a:endParaRPr lang="zh-CN" altLang="en-US" sz="4400" dirty="0"/>
+              <a:t>普娃怎么办</a:t>
+            </a:r>
           </a:p>
         </p:txBody>
       </p:sp>
@@ -5879,7 +6125,7 @@
 </p:sld>
 </file>
 
-<file path=ppt/slides/slide22.xml><?xml version="1.0" encoding="utf-8"?>
+<file path=ppt/slides/slide24.xml><?xml version="1.0" encoding="utf-8"?>
 <p:sld xmlns:a="http://schemas.openxmlformats.org/drawingml/2006/main" xmlns:r="http://schemas.openxmlformats.org/officeDocument/2006/relationships" xmlns:p="http://schemas.openxmlformats.org/presentationml/2006/main">
   <p:cSld>
     <p:spTree>
@@ -5918,20 +6164,20 @@
             <p:ph type="title"/>
           </p:nvPr>
         </p:nvSpPr>
-        <p:spPr/>
+        <p:spPr>
+          <a:xfrm>
+            <a:off x="521208" y="978408"/>
+            <a:ext cx="11155680" cy="951992"/>
+          </a:xfrm>
+        </p:spPr>
         <p:txBody>
           <a:bodyPr/>
           <a:lstStyle/>
           <a:p>
             <a:r>
               <a:rPr lang="zh-CN" altLang="en-US" sz="4400" dirty="0"/>
-              <a:t>普通娃应该怎么办</a:t>
-            </a:r>
-            <a:r>
-              <a:rPr lang="en-US" altLang="zh-CN" sz="4400" dirty="0"/>
-              <a:t>2</a:t>
-            </a:r>
-            <a:endParaRPr lang="zh-CN" altLang="en-US" sz="4400" dirty="0"/>
+              <a:t>教育王道：体验真实世界</a:t>
+            </a:r>
           </a:p>
         </p:txBody>
       </p:sp>
@@ -5994,7 +6240,7 @@
 </p:sld>
 </file>
 
-<file path=ppt/slides/slide23.xml><?xml version="1.0" encoding="utf-8"?>
+<file path=ppt/slides/slide25.xml><?xml version="1.0" encoding="utf-8"?>
 <p:sld xmlns:a="http://schemas.openxmlformats.org/drawingml/2006/main" xmlns:r="http://schemas.openxmlformats.org/officeDocument/2006/relationships" xmlns:p="http://schemas.openxmlformats.org/presentationml/2006/main">
   <p:cSld>
     <p:spTree>
@@ -6040,13 +6286,8 @@
           <a:p>
             <a:r>
               <a:rPr lang="zh-CN" altLang="en-US" sz="4400" dirty="0"/>
-              <a:t>普通娃应该怎么办</a:t>
-            </a:r>
-            <a:r>
-              <a:rPr lang="en-US" altLang="zh-CN" sz="4400" dirty="0"/>
-              <a:t>3</a:t>
-            </a:r>
-            <a:endParaRPr lang="zh-CN" altLang="en-US" sz="4400" dirty="0"/>
+              <a:t>手机游戏的本质</a:t>
+            </a:r>
           </a:p>
         </p:txBody>
       </p:sp>
@@ -6121,7 +6362,7 @@
 </p:sld>
 </file>
 
-<file path=ppt/slides/slide24.xml><?xml version="1.0" encoding="utf-8"?>
+<file path=ppt/slides/slide26.xml><?xml version="1.0" encoding="utf-8"?>
 <p:sld xmlns:a="http://schemas.openxmlformats.org/drawingml/2006/main" xmlns:r="http://schemas.openxmlformats.org/officeDocument/2006/relationships" xmlns:p="http://schemas.openxmlformats.org/presentationml/2006/main">
   <p:cSld>
     <p:spTree>
@@ -6167,13 +6408,16 @@
           <a:p>
             <a:r>
               <a:rPr lang="zh-CN" altLang="en-US" sz="4400" dirty="0"/>
-              <a:t>常见的错误教育方式</a:t>
+              <a:t>常见错误教育方式</a:t>
             </a:r>
             <a:r>
               <a:rPr lang="en-US" altLang="zh-CN" sz="4400" dirty="0"/>
-              <a:t>1</a:t>
-            </a:r>
-            <a:endParaRPr lang="zh-CN" altLang="en-US" sz="4400" dirty="0"/>
+              <a:t>——</a:t>
+            </a:r>
+            <a:r>
+              <a:rPr lang="zh-CN" altLang="en-US" sz="4400" dirty="0"/>
+              <a:t>放任发展</a:t>
+            </a:r>
           </a:p>
         </p:txBody>
       </p:sp>
@@ -6251,7 +6495,7 @@
 </p:sld>
 </file>
 
-<file path=ppt/slides/slide25.xml><?xml version="1.0" encoding="utf-8"?>
+<file path=ppt/slides/slide27.xml><?xml version="1.0" encoding="utf-8"?>
 <p:sld xmlns:a="http://schemas.openxmlformats.org/drawingml/2006/main" xmlns:r="http://schemas.openxmlformats.org/officeDocument/2006/relationships" xmlns:p="http://schemas.openxmlformats.org/presentationml/2006/main">
   <p:cSld>
     <p:spTree>
@@ -6296,14 +6540,17 @@
           <a:lstStyle/>
           <a:p>
             <a:r>
-              <a:rPr lang="zh-CN" altLang="en-US" sz="900" dirty="0"/>
-              <a:t>常见的错误教育方式</a:t>
-            </a:r>
-            <a:r>
-              <a:rPr lang="en-US" altLang="zh-CN" sz="900" dirty="0"/>
-              <a:t>2</a:t>
-            </a:r>
-            <a:endParaRPr lang="zh-CN" altLang="en-US" sz="900" dirty="0"/>
+              <a:rPr lang="zh-CN" altLang="en-US" sz="4400" dirty="0"/>
+              <a:t>常见错误教育方式</a:t>
+            </a:r>
+            <a:r>
+              <a:rPr lang="en-US" altLang="zh-CN" sz="4400" dirty="0"/>
+              <a:t>——</a:t>
+            </a:r>
+            <a:r>
+              <a:rPr lang="zh-CN" altLang="en-US" sz="4400" dirty="0"/>
+              <a:t>过度管理</a:t>
+            </a:r>
           </a:p>
         </p:txBody>
       </p:sp>
@@ -6382,7 +6629,7 @@
 </p:sld>
 </file>
 
-<file path=ppt/slides/slide26.xml><?xml version="1.0" encoding="utf-8"?>
+<file path=ppt/slides/slide28.xml><?xml version="1.0" encoding="utf-8"?>
 <p:sld xmlns:a="http://schemas.openxmlformats.org/drawingml/2006/main" xmlns:r="http://schemas.openxmlformats.org/officeDocument/2006/relationships" xmlns:p="http://schemas.openxmlformats.org/presentationml/2006/main">
   <p:cSld>
     <p:spTree>
@@ -6421,20 +6668,28 @@
             <p:ph type="title"/>
           </p:nvPr>
         </p:nvSpPr>
-        <p:spPr/>
-        <p:txBody>
-          <a:bodyPr/>
-          <a:lstStyle/>
-          <a:p>
-            <a:r>
-              <a:rPr lang="zh-CN" altLang="en-US" sz="900" dirty="0"/>
-              <a:t>常见的错误教育方式</a:t>
-            </a:r>
-            <a:r>
-              <a:rPr lang="en-US" altLang="zh-CN" sz="900" dirty="0"/>
-              <a:t>3</a:t>
-            </a:r>
-            <a:endParaRPr lang="zh-CN" altLang="en-US" sz="900" dirty="0"/>
+        <p:spPr>
+          <a:xfrm>
+            <a:off x="521208" y="978408"/>
+            <a:ext cx="11155680" cy="837692"/>
+          </a:xfrm>
+        </p:spPr>
+        <p:txBody>
+          <a:bodyPr/>
+          <a:lstStyle/>
+          <a:p>
+            <a:r>
+              <a:rPr lang="zh-CN" altLang="en-US" sz="4400" dirty="0"/>
+              <a:t>常见错误教育方式</a:t>
+            </a:r>
+            <a:r>
+              <a:rPr lang="en-US" altLang="zh-CN" sz="4400" dirty="0"/>
+              <a:t>——</a:t>
+            </a:r>
+            <a:r>
+              <a:rPr lang="zh-CN" altLang="en-US" sz="4400" dirty="0"/>
+              <a:t>放纵学校教育</a:t>
+            </a:r>
           </a:p>
         </p:txBody>
       </p:sp>
@@ -6509,7 +6764,7 @@
 </p:sld>
 </file>
 
-<file path=ppt/slides/slide27.xml><?xml version="1.0" encoding="utf-8"?>
+<file path=ppt/slides/slide29.xml><?xml version="1.0" encoding="utf-8"?>
 <p:sld xmlns:a="http://schemas.openxmlformats.org/drawingml/2006/main" xmlns:r="http://schemas.openxmlformats.org/officeDocument/2006/relationships" xmlns:p="http://schemas.openxmlformats.org/presentationml/2006/main">
   <p:cSld>
     <p:spTree>
@@ -6548,20 +6803,20 @@
             <p:ph type="title"/>
           </p:nvPr>
         </p:nvSpPr>
-        <p:spPr/>
-        <p:txBody>
-          <a:bodyPr/>
-          <a:lstStyle/>
-          <a:p>
-            <a:r>
-              <a:rPr lang="zh-CN" altLang="en-US" sz="900" dirty="0"/>
-              <a:t>常见的错误教育方式</a:t>
-            </a:r>
-            <a:r>
-              <a:rPr lang="en-US" altLang="zh-CN" sz="900" dirty="0"/>
-              <a:t>4</a:t>
-            </a:r>
-            <a:endParaRPr lang="zh-CN" altLang="en-US" sz="900" dirty="0"/>
+        <p:spPr>
+          <a:xfrm>
+            <a:off x="521208" y="978408"/>
+            <a:ext cx="11155680" cy="939292"/>
+          </a:xfrm>
+        </p:spPr>
+        <p:txBody>
+          <a:bodyPr/>
+          <a:lstStyle/>
+          <a:p>
+            <a:r>
+              <a:rPr lang="zh-CN" altLang="en-US" sz="4400" dirty="0"/>
+              <a:t>同伴环境缺失，导致被边缘化</a:t>
+            </a:r>
           </a:p>
         </p:txBody>
       </p:sp>
@@ -6664,7 +6919,147 @@
 </p:sld>
 </file>
 
-<file path=ppt/slides/slide28.xml><?xml version="1.0" encoding="utf-8"?>
+<file path=ppt/slides/slide3.xml><?xml version="1.0" encoding="utf-8"?>
+<p:sld xmlns:a="http://schemas.openxmlformats.org/drawingml/2006/main" xmlns:r="http://schemas.openxmlformats.org/officeDocument/2006/relationships" xmlns:p="http://schemas.openxmlformats.org/presentationml/2006/main">
+  <p:cSld>
+    <p:spTree>
+      <p:nvGrpSpPr>
+        <p:cNvPr id="1" name="">
+          <a:extLst>
+            <a:ext uri="{FF2B5EF4-FFF2-40B4-BE49-F238E27FC236}">
+              <a16:creationId xmlns:a16="http://schemas.microsoft.com/office/drawing/2014/main" id="{ACA04B3B-C3EB-BC73-67AF-B4FCE66325F8}"/>
+            </a:ext>
+          </a:extLst>
+        </p:cNvPr>
+        <p:cNvGrpSpPr/>
+        <p:nvPr/>
+      </p:nvGrpSpPr>
+      <p:grpSpPr>
+        <a:xfrm>
+          <a:off x="0" y="0"/>
+          <a:ext cx="0" cy="0"/>
+          <a:chOff x="0" y="0"/>
+          <a:chExt cx="0" cy="0"/>
+        </a:xfrm>
+      </p:grpSpPr>
+      <p:sp>
+        <p:nvSpPr>
+          <p:cNvPr id="2" name="标题 1">
+            <a:extLst>
+              <a:ext uri="{FF2B5EF4-FFF2-40B4-BE49-F238E27FC236}">
+                <a16:creationId xmlns:a16="http://schemas.microsoft.com/office/drawing/2014/main" id="{C0139ED7-4F75-9DD3-D417-A3CE2FEBE06A}"/>
+              </a:ext>
+            </a:extLst>
+          </p:cNvPr>
+          <p:cNvSpPr>
+            <a:spLocks noGrp="1"/>
+          </p:cNvSpPr>
+          <p:nvPr>
+            <p:ph type="title"/>
+          </p:nvPr>
+        </p:nvSpPr>
+        <p:spPr>
+          <a:xfrm>
+            <a:off x="521208" y="978408"/>
+            <a:ext cx="11155680" cy="850392"/>
+          </a:xfrm>
+        </p:spPr>
+        <p:txBody>
+          <a:bodyPr/>
+          <a:lstStyle/>
+          <a:p>
+            <a:r>
+              <a:rPr lang="zh-CN" altLang="en-US" sz="4400" dirty="0"/>
+              <a:t>职业方向定位</a:t>
+            </a:r>
+          </a:p>
+        </p:txBody>
+      </p:sp>
+      <p:sp>
+        <p:nvSpPr>
+          <p:cNvPr id="3" name="内容占位符 2">
+            <a:extLst>
+              <a:ext uri="{FF2B5EF4-FFF2-40B4-BE49-F238E27FC236}">
+                <a16:creationId xmlns:a16="http://schemas.microsoft.com/office/drawing/2014/main" id="{8E9677FE-B023-B2A5-3A25-FDA1305773EA}"/>
+              </a:ext>
+            </a:extLst>
+          </p:cNvPr>
+          <p:cNvSpPr>
+            <a:spLocks noGrp="1"/>
+          </p:cNvSpPr>
+          <p:nvPr>
+            <p:ph idx="1"/>
+          </p:nvPr>
+        </p:nvSpPr>
+        <p:spPr>
+          <a:xfrm>
+            <a:off x="521208" y="2159000"/>
+            <a:ext cx="11155680" cy="4186936"/>
+          </a:xfrm>
+        </p:spPr>
+        <p:txBody>
+          <a:bodyPr/>
+          <a:lstStyle/>
+          <a:p>
+            <a:pPr marL="0" indent="0">
+              <a:buNone/>
+            </a:pPr>
+            <a:r>
+              <a:rPr lang="zh-CN" altLang="en-US" dirty="0"/>
+              <a:t>美国，学了理科，或者说计算机专业，搞</a:t>
+            </a:r>
+            <a:r>
+              <a:rPr lang="en-US" altLang="zh-CN" dirty="0"/>
+              <a:t>AI</a:t>
+            </a:r>
+            <a:r>
+              <a:rPr lang="zh-CN" altLang="en-US" dirty="0"/>
+              <a:t>的，在毕业之后就没有工作了。</a:t>
+            </a:r>
+          </a:p>
+          <a:p>
+            <a:pPr marL="0" indent="0">
+              <a:buNone/>
+            </a:pPr>
+            <a:r>
+              <a:rPr lang="zh-CN" altLang="en-US" dirty="0"/>
+              <a:t>在</a:t>
+            </a:r>
+            <a:r>
+              <a:rPr lang="en-US" altLang="zh-CN" dirty="0"/>
+              <a:t>30</a:t>
+            </a:r>
+            <a:r>
+              <a:rPr lang="zh-CN" altLang="en-US" dirty="0"/>
+              <a:t>岁左右就要对专业方向或者说职业发展方向，要有一个清晰的定位。</a:t>
+            </a:r>
+          </a:p>
+          <a:p>
+            <a:pPr marL="0" indent="0">
+              <a:buNone/>
+            </a:pPr>
+            <a:r>
+              <a:rPr lang="zh-CN" altLang="en-US" dirty="0"/>
+              <a:t>因为现在这个时代，专业方向是非常固化的，想要跨专业、跨领域是几乎不可能的事。</a:t>
+            </a:r>
+            <a:endParaRPr lang="en-US" altLang="zh-CN" dirty="0"/>
+          </a:p>
+        </p:txBody>
+      </p:sp>
+    </p:spTree>
+    <p:extLst>
+      <p:ext uri="{BB962C8B-B14F-4D97-AF65-F5344CB8AC3E}">
+        <p14:creationId xmlns:p14="http://schemas.microsoft.com/office/powerpoint/2010/main" val="889377864"/>
+      </p:ext>
+    </p:extLst>
+  </p:cSld>
+  <p:clrMapOvr>
+    <a:masterClrMapping/>
+  </p:clrMapOvr>
+</p:sld>
+</file>
+
+<file path=ppt/slides/slide30.xml><?xml version="1.0" encoding="utf-8"?>
 <p:sld xmlns:a="http://schemas.openxmlformats.org/drawingml/2006/main" xmlns:r="http://schemas.openxmlformats.org/officeDocument/2006/relationships" xmlns:p="http://schemas.openxmlformats.org/presentationml/2006/main">
   <p:cSld>
     <p:spTree>
@@ -6703,20 +7098,20 @@
             <p:ph type="title"/>
           </p:nvPr>
         </p:nvSpPr>
-        <p:spPr/>
-        <p:txBody>
-          <a:bodyPr/>
-          <a:lstStyle/>
-          <a:p>
-            <a:r>
-              <a:rPr lang="zh-CN" altLang="en-US" sz="900" dirty="0"/>
-              <a:t>常见的错误教育方式</a:t>
-            </a:r>
-            <a:r>
-              <a:rPr lang="en-US" altLang="zh-CN" sz="900" dirty="0"/>
-              <a:t>5</a:t>
-            </a:r>
-            <a:endParaRPr lang="zh-CN" altLang="en-US" sz="900" dirty="0"/>
+        <p:spPr>
+          <a:xfrm>
+            <a:off x="521208" y="978408"/>
+            <a:ext cx="11155680" cy="888492"/>
+          </a:xfrm>
+        </p:spPr>
+        <p:txBody>
+          <a:bodyPr/>
+          <a:lstStyle/>
+          <a:p>
+            <a:r>
+              <a:rPr lang="zh-CN" altLang="en-US" sz="4400" dirty="0"/>
+              <a:t>学霸照样会培养失败</a:t>
+            </a:r>
           </a:p>
         </p:txBody>
       </p:sp>
@@ -6790,7 +7185,7 @@
 </p:sld>
 </file>
 
-<file path=ppt/slides/slide29.xml><?xml version="1.0" encoding="utf-8"?>
+<file path=ppt/slides/slide31.xml><?xml version="1.0" encoding="utf-8"?>
 <p:sld xmlns:a="http://schemas.openxmlformats.org/drawingml/2006/main" xmlns:r="http://schemas.openxmlformats.org/officeDocument/2006/relationships" xmlns:p="http://schemas.openxmlformats.org/presentationml/2006/main">
   <p:cSld>
     <p:spTree>
@@ -6829,20 +7224,28 @@
             <p:ph type="title"/>
           </p:nvPr>
         </p:nvSpPr>
-        <p:spPr/>
-        <p:txBody>
-          <a:bodyPr/>
-          <a:lstStyle/>
-          <a:p>
-            <a:r>
-              <a:rPr lang="zh-CN" altLang="en-US" sz="900" dirty="0"/>
-              <a:t>常见的教育思维误区</a:t>
-            </a:r>
-            <a:r>
-              <a:rPr lang="en-US" altLang="zh-CN" sz="900" dirty="0"/>
-              <a:t>1</a:t>
-            </a:r>
-            <a:endParaRPr lang="zh-CN" altLang="en-US" sz="900" dirty="0"/>
+        <p:spPr>
+          <a:xfrm>
+            <a:off x="521208" y="978408"/>
+            <a:ext cx="11155680" cy="863092"/>
+          </a:xfrm>
+        </p:spPr>
+        <p:txBody>
+          <a:bodyPr/>
+          <a:lstStyle/>
+          <a:p>
+            <a:r>
+              <a:rPr lang="zh-CN" altLang="en-US" sz="4400" dirty="0"/>
+              <a:t>常见教育思维误区</a:t>
+            </a:r>
+            <a:r>
+              <a:rPr lang="en-US" altLang="zh-CN" sz="4400" dirty="0"/>
+              <a:t>——</a:t>
+            </a:r>
+            <a:r>
+              <a:rPr lang="zh-CN" altLang="en-US" sz="4400" dirty="0"/>
+              <a:t>只要学习好就行</a:t>
+            </a:r>
           </a:p>
         </p:txBody>
       </p:sp>
@@ -6916,7 +7319,2545 @@
 </p:sld>
 </file>
 
-<file path=ppt/slides/slide3.xml><?xml version="1.0" encoding="utf-8"?>
+<file path=ppt/slides/slide32.xml><?xml version="1.0" encoding="utf-8"?>
+<p:sld xmlns:a="http://schemas.openxmlformats.org/drawingml/2006/main" xmlns:r="http://schemas.openxmlformats.org/officeDocument/2006/relationships" xmlns:p="http://schemas.openxmlformats.org/presentationml/2006/main">
+  <p:cSld>
+    <p:spTree>
+      <p:nvGrpSpPr>
+        <p:cNvPr id="1" name="">
+          <a:extLst>
+            <a:ext uri="{FF2B5EF4-FFF2-40B4-BE49-F238E27FC236}">
+              <a16:creationId xmlns:a16="http://schemas.microsoft.com/office/drawing/2014/main" id="{DE0EFD34-3CC3-C676-7C09-B0B94BF07E14}"/>
+            </a:ext>
+          </a:extLst>
+        </p:cNvPr>
+        <p:cNvGrpSpPr/>
+        <p:nvPr/>
+      </p:nvGrpSpPr>
+      <p:grpSpPr>
+        <a:xfrm>
+          <a:off x="0" y="0"/>
+          <a:ext cx="0" cy="0"/>
+          <a:chOff x="0" y="0"/>
+          <a:chExt cx="0" cy="0"/>
+        </a:xfrm>
+      </p:grpSpPr>
+      <p:sp>
+        <p:nvSpPr>
+          <p:cNvPr id="2" name="标题 1">
+            <a:extLst>
+              <a:ext uri="{FF2B5EF4-FFF2-40B4-BE49-F238E27FC236}">
+                <a16:creationId xmlns:a16="http://schemas.microsoft.com/office/drawing/2014/main" id="{E41EA79F-0EC1-8279-1CDC-439A63D0421F}"/>
+              </a:ext>
+            </a:extLst>
+          </p:cNvPr>
+          <p:cNvSpPr>
+            <a:spLocks noGrp="1"/>
+          </p:cNvSpPr>
+          <p:nvPr>
+            <p:ph type="title"/>
+          </p:nvPr>
+        </p:nvSpPr>
+        <p:spPr/>
+        <p:txBody>
+          <a:bodyPr/>
+          <a:lstStyle/>
+          <a:p>
+            <a:r>
+              <a:rPr lang="zh-CN" altLang="en-US" sz="4400" dirty="0"/>
+              <a:t>常见教育思维误区</a:t>
+            </a:r>
+            <a:r>
+              <a:rPr lang="en-US" altLang="zh-CN" sz="4400" dirty="0"/>
+              <a:t>——</a:t>
+            </a:r>
+            <a:r>
+              <a:rPr lang="zh-CN" altLang="en-US" sz="4400" dirty="0"/>
+              <a:t>忽视校外活动</a:t>
+            </a:r>
+          </a:p>
+        </p:txBody>
+      </p:sp>
+      <p:sp>
+        <p:nvSpPr>
+          <p:cNvPr id="3" name="内容占位符 2">
+            <a:extLst>
+              <a:ext uri="{FF2B5EF4-FFF2-40B4-BE49-F238E27FC236}">
+                <a16:creationId xmlns:a16="http://schemas.microsoft.com/office/drawing/2014/main" id="{2E6340C6-4A63-076A-5B72-19552CF14F38}"/>
+              </a:ext>
+            </a:extLst>
+          </p:cNvPr>
+          <p:cNvSpPr>
+            <a:spLocks noGrp="1"/>
+          </p:cNvSpPr>
+          <p:nvPr>
+            <p:ph idx="1"/>
+          </p:nvPr>
+        </p:nvSpPr>
+        <p:spPr/>
+        <p:txBody>
+          <a:bodyPr/>
+          <a:lstStyle/>
+          <a:p>
+            <a:pPr marL="0" indent="0">
+              <a:buNone/>
+            </a:pPr>
+            <a:r>
+              <a:rPr lang="zh-CN" altLang="en-US" dirty="0"/>
+              <a:t>第二个，忽视校外活动</a:t>
+            </a:r>
+          </a:p>
+          <a:p>
+            <a:pPr marL="0" indent="0">
+              <a:buNone/>
+            </a:pPr>
+            <a:r>
+              <a:rPr lang="zh-CN" altLang="en-US" dirty="0"/>
+              <a:t>我告诉大家，</a:t>
+            </a:r>
+            <a:r>
+              <a:rPr lang="en-US" altLang="zh-CN" dirty="0"/>
+              <a:t>7-12</a:t>
+            </a:r>
+            <a:r>
+              <a:rPr lang="zh-CN" altLang="en-US" dirty="0"/>
+              <a:t>岁是培养孩子多巴胺模型的关键窗口期。</a:t>
+            </a:r>
+          </a:p>
+          <a:p>
+            <a:pPr marL="0" indent="0">
+              <a:buNone/>
+            </a:pPr>
+            <a:r>
+              <a:rPr lang="zh-CN" altLang="en-US" dirty="0"/>
+              <a:t>什么叫多巴胺模型呢？</a:t>
+            </a:r>
+          </a:p>
+          <a:p>
+            <a:pPr marL="0" indent="0">
+              <a:buNone/>
+            </a:pPr>
+            <a:r>
+              <a:rPr lang="zh-CN" altLang="en-US" dirty="0"/>
+              <a:t>说白了就是快感模型。</a:t>
+            </a:r>
+          </a:p>
+          <a:p>
+            <a:pPr marL="0" indent="0">
+              <a:buNone/>
+            </a:pPr>
+            <a:endParaRPr lang="zh-CN" altLang="en-US" dirty="0"/>
+          </a:p>
+        </p:txBody>
+      </p:sp>
+    </p:spTree>
+    <p:extLst>
+      <p:ext uri="{BB962C8B-B14F-4D97-AF65-F5344CB8AC3E}">
+        <p14:creationId xmlns:p14="http://schemas.microsoft.com/office/powerpoint/2010/main" val="473460896"/>
+      </p:ext>
+    </p:extLst>
+  </p:cSld>
+  <p:clrMapOvr>
+    <a:masterClrMapping/>
+  </p:clrMapOvr>
+</p:sld>
+</file>
+
+<file path=ppt/slides/slide33.xml><?xml version="1.0" encoding="utf-8"?>
+<p:sld xmlns:a="http://schemas.openxmlformats.org/drawingml/2006/main" xmlns:r="http://schemas.openxmlformats.org/officeDocument/2006/relationships" xmlns:p="http://schemas.openxmlformats.org/presentationml/2006/main">
+  <p:cSld>
+    <p:spTree>
+      <p:nvGrpSpPr>
+        <p:cNvPr id="1" name="">
+          <a:extLst>
+            <a:ext uri="{FF2B5EF4-FFF2-40B4-BE49-F238E27FC236}">
+              <a16:creationId xmlns:a16="http://schemas.microsoft.com/office/drawing/2014/main" id="{5E381603-7057-91BD-2B19-8F725D00BF27}"/>
+            </a:ext>
+          </a:extLst>
+        </p:cNvPr>
+        <p:cNvGrpSpPr/>
+        <p:nvPr/>
+      </p:nvGrpSpPr>
+      <p:grpSpPr>
+        <a:xfrm>
+          <a:off x="0" y="0"/>
+          <a:ext cx="0" cy="0"/>
+          <a:chOff x="0" y="0"/>
+          <a:chExt cx="0" cy="0"/>
+        </a:xfrm>
+      </p:grpSpPr>
+      <p:sp>
+        <p:nvSpPr>
+          <p:cNvPr id="2" name="标题 1">
+            <a:extLst>
+              <a:ext uri="{FF2B5EF4-FFF2-40B4-BE49-F238E27FC236}">
+                <a16:creationId xmlns:a16="http://schemas.microsoft.com/office/drawing/2014/main" id="{44B7E826-1FA0-587C-5B74-68D53CEF15A6}"/>
+              </a:ext>
+            </a:extLst>
+          </p:cNvPr>
+          <p:cNvSpPr>
+            <a:spLocks noGrp="1"/>
+          </p:cNvSpPr>
+          <p:nvPr>
+            <p:ph type="title"/>
+          </p:nvPr>
+        </p:nvSpPr>
+        <p:spPr>
+          <a:xfrm>
+            <a:off x="521208" y="978408"/>
+            <a:ext cx="11155680" cy="926592"/>
+          </a:xfrm>
+        </p:spPr>
+        <p:txBody>
+          <a:bodyPr/>
+          <a:lstStyle/>
+          <a:p>
+            <a:r>
+              <a:rPr lang="zh-CN" altLang="en-US" sz="4400" dirty="0"/>
+              <a:t>吃大饼的故事</a:t>
+            </a:r>
+          </a:p>
+        </p:txBody>
+      </p:sp>
+      <p:sp>
+        <p:nvSpPr>
+          <p:cNvPr id="3" name="内容占位符 2">
+            <a:extLst>
+              <a:ext uri="{FF2B5EF4-FFF2-40B4-BE49-F238E27FC236}">
+                <a16:creationId xmlns:a16="http://schemas.microsoft.com/office/drawing/2014/main" id="{F8C2C91C-0ED1-0C9C-B229-7EBEC44C7751}"/>
+              </a:ext>
+            </a:extLst>
+          </p:cNvPr>
+          <p:cNvSpPr>
+            <a:spLocks noGrp="1"/>
+          </p:cNvSpPr>
+          <p:nvPr>
+            <p:ph idx="1"/>
+          </p:nvPr>
+        </p:nvSpPr>
+        <p:spPr/>
+        <p:txBody>
+          <a:bodyPr/>
+          <a:lstStyle/>
+          <a:p>
+            <a:pPr marL="0" indent="0">
+              <a:buNone/>
+            </a:pPr>
+            <a:r>
+              <a:rPr lang="zh-CN" altLang="en-US" dirty="0"/>
+              <a:t>过去我们小时候常听到父母给我们讲一个故事。</a:t>
+            </a:r>
+          </a:p>
+          <a:p>
+            <a:pPr marL="0" indent="0">
+              <a:buNone/>
+            </a:pPr>
+            <a:endParaRPr lang="zh-CN" altLang="en-US" dirty="0"/>
+          </a:p>
+          <a:p>
+            <a:pPr marL="0" indent="0">
+              <a:buNone/>
+            </a:pPr>
+            <a:r>
+              <a:rPr lang="zh-CN" altLang="en-US" dirty="0"/>
+              <a:t>有个孩子非常懒，父母出门前怕他饿，就烙了个大饼，套他脖子上。</a:t>
+            </a:r>
+          </a:p>
+          <a:p>
+            <a:pPr marL="0" indent="0">
+              <a:buNone/>
+            </a:pPr>
+            <a:endParaRPr lang="zh-CN" altLang="en-US" dirty="0"/>
+          </a:p>
+          <a:p>
+            <a:pPr marL="0" indent="0">
+              <a:buNone/>
+            </a:pPr>
+            <a:r>
+              <a:rPr lang="zh-CN" altLang="en-US" dirty="0"/>
+              <a:t>结果等回来一看，饼前面的吃了，脖子后面的没吃，就饿死了。</a:t>
+            </a:r>
+          </a:p>
+        </p:txBody>
+      </p:sp>
+    </p:spTree>
+    <p:extLst>
+      <p:ext uri="{BB962C8B-B14F-4D97-AF65-F5344CB8AC3E}">
+        <p14:creationId xmlns:p14="http://schemas.microsoft.com/office/powerpoint/2010/main" val="2877700692"/>
+      </p:ext>
+    </p:extLst>
+  </p:cSld>
+  <p:clrMapOvr>
+    <a:masterClrMapping/>
+  </p:clrMapOvr>
+</p:sld>
+</file>
+
+<file path=ppt/slides/slide34.xml><?xml version="1.0" encoding="utf-8"?>
+<p:sld xmlns:a="http://schemas.openxmlformats.org/drawingml/2006/main" xmlns:r="http://schemas.openxmlformats.org/officeDocument/2006/relationships" xmlns:p="http://schemas.openxmlformats.org/presentationml/2006/main">
+  <p:cSld>
+    <p:spTree>
+      <p:nvGrpSpPr>
+        <p:cNvPr id="1" name="">
+          <a:extLst>
+            <a:ext uri="{FF2B5EF4-FFF2-40B4-BE49-F238E27FC236}">
+              <a16:creationId xmlns:a16="http://schemas.microsoft.com/office/drawing/2014/main" id="{853A1332-C94D-65CD-00A9-13D604074835}"/>
+            </a:ext>
+          </a:extLst>
+        </p:cNvPr>
+        <p:cNvGrpSpPr/>
+        <p:nvPr/>
+      </p:nvGrpSpPr>
+      <p:grpSpPr>
+        <a:xfrm>
+          <a:off x="0" y="0"/>
+          <a:ext cx="0" cy="0"/>
+          <a:chOff x="0" y="0"/>
+          <a:chExt cx="0" cy="0"/>
+        </a:xfrm>
+      </p:grpSpPr>
+      <p:sp>
+        <p:nvSpPr>
+          <p:cNvPr id="2" name="标题 1">
+            <a:extLst>
+              <a:ext uri="{FF2B5EF4-FFF2-40B4-BE49-F238E27FC236}">
+                <a16:creationId xmlns:a16="http://schemas.microsoft.com/office/drawing/2014/main" id="{BDB02363-8257-8C4C-650F-275418698723}"/>
+              </a:ext>
+            </a:extLst>
+          </p:cNvPr>
+          <p:cNvSpPr>
+            <a:spLocks noGrp="1"/>
+          </p:cNvSpPr>
+          <p:nvPr>
+            <p:ph type="title"/>
+          </p:nvPr>
+        </p:nvSpPr>
+        <p:spPr/>
+        <p:txBody>
+          <a:bodyPr/>
+          <a:lstStyle/>
+          <a:p>
+            <a:r>
+              <a:rPr lang="zh-CN" altLang="en-US" sz="4400" dirty="0"/>
+              <a:t>常见教育思维误区</a:t>
+            </a:r>
+            <a:r>
+              <a:rPr lang="en-US" altLang="zh-CN" sz="4400" dirty="0"/>
+              <a:t>——</a:t>
+            </a:r>
+            <a:r>
+              <a:rPr lang="zh-CN" altLang="en-US" sz="4400" dirty="0"/>
+              <a:t>缺乏心理韧性和品行培养</a:t>
+            </a:r>
+          </a:p>
+        </p:txBody>
+      </p:sp>
+      <p:sp>
+        <p:nvSpPr>
+          <p:cNvPr id="3" name="内容占位符 2">
+            <a:extLst>
+              <a:ext uri="{FF2B5EF4-FFF2-40B4-BE49-F238E27FC236}">
+                <a16:creationId xmlns:a16="http://schemas.microsoft.com/office/drawing/2014/main" id="{F96FB48D-1FF8-1190-F4E6-9161302A3EE6}"/>
+              </a:ext>
+            </a:extLst>
+          </p:cNvPr>
+          <p:cNvSpPr>
+            <a:spLocks noGrp="1"/>
+          </p:cNvSpPr>
+          <p:nvPr>
+            <p:ph idx="1"/>
+          </p:nvPr>
+        </p:nvSpPr>
+        <p:spPr/>
+        <p:txBody>
+          <a:bodyPr/>
+          <a:lstStyle/>
+          <a:p>
+            <a:pPr marL="0" indent="0">
+              <a:buNone/>
+            </a:pPr>
+            <a:r>
+              <a:rPr lang="zh-CN" altLang="en-US" dirty="0"/>
+              <a:t>第三个问题，对孩子的心理韧性和品行培养不在意。</a:t>
+            </a:r>
+          </a:p>
+          <a:p>
+            <a:pPr marL="0" indent="0">
+              <a:buNone/>
+            </a:pPr>
+            <a:r>
+              <a:rPr lang="zh-CN" altLang="en-US" dirty="0"/>
+              <a:t>要么没有这方面的意识，要么觉得没有用，不在意。</a:t>
+            </a:r>
+          </a:p>
+          <a:p>
+            <a:pPr marL="0" indent="0">
+              <a:buNone/>
+            </a:pPr>
+            <a:r>
+              <a:rPr lang="zh-CN" altLang="en-US" dirty="0"/>
+              <a:t>这些也是社会适应性方面非常重要的组成部分。</a:t>
+            </a:r>
+          </a:p>
+        </p:txBody>
+      </p:sp>
+    </p:spTree>
+    <p:extLst>
+      <p:ext uri="{BB962C8B-B14F-4D97-AF65-F5344CB8AC3E}">
+        <p14:creationId xmlns:p14="http://schemas.microsoft.com/office/powerpoint/2010/main" val="1540167266"/>
+      </p:ext>
+    </p:extLst>
+  </p:cSld>
+  <p:clrMapOvr>
+    <a:masterClrMapping/>
+  </p:clrMapOvr>
+</p:sld>
+</file>
+
+<file path=ppt/slides/slide35.xml><?xml version="1.0" encoding="utf-8"?>
+<p:sld xmlns:a="http://schemas.openxmlformats.org/drawingml/2006/main" xmlns:r="http://schemas.openxmlformats.org/officeDocument/2006/relationships" xmlns:p="http://schemas.openxmlformats.org/presentationml/2006/main">
+  <p:cSld>
+    <p:spTree>
+      <p:nvGrpSpPr>
+        <p:cNvPr id="1" name="">
+          <a:extLst>
+            <a:ext uri="{FF2B5EF4-FFF2-40B4-BE49-F238E27FC236}">
+              <a16:creationId xmlns:a16="http://schemas.microsoft.com/office/drawing/2014/main" id="{0673F7A3-9DFB-A22F-4504-19BE21BBA122}"/>
+            </a:ext>
+          </a:extLst>
+        </p:cNvPr>
+        <p:cNvGrpSpPr/>
+        <p:nvPr/>
+      </p:nvGrpSpPr>
+      <p:grpSpPr>
+        <a:xfrm>
+          <a:off x="0" y="0"/>
+          <a:ext cx="0" cy="0"/>
+          <a:chOff x="0" y="0"/>
+          <a:chExt cx="0" cy="0"/>
+        </a:xfrm>
+      </p:grpSpPr>
+      <p:sp>
+        <p:nvSpPr>
+          <p:cNvPr id="2" name="标题 1">
+            <a:extLst>
+              <a:ext uri="{FF2B5EF4-FFF2-40B4-BE49-F238E27FC236}">
+                <a16:creationId xmlns:a16="http://schemas.microsoft.com/office/drawing/2014/main" id="{34FB951E-F759-B197-AA31-BF8E3956BFF8}"/>
+              </a:ext>
+            </a:extLst>
+          </p:cNvPr>
+          <p:cNvSpPr>
+            <a:spLocks noGrp="1"/>
+          </p:cNvSpPr>
+          <p:nvPr>
+            <p:ph type="title"/>
+          </p:nvPr>
+        </p:nvSpPr>
+        <p:spPr/>
+        <p:txBody>
+          <a:bodyPr/>
+          <a:lstStyle/>
+          <a:p>
+            <a:r>
+              <a:rPr lang="zh-CN" altLang="en-US" sz="4400" dirty="0"/>
+              <a:t>常见教育思维误区</a:t>
+            </a:r>
+            <a:r>
+              <a:rPr lang="en-US" altLang="zh-CN" sz="4400" dirty="0"/>
+              <a:t>——</a:t>
+            </a:r>
+            <a:r>
+              <a:rPr lang="zh-CN" altLang="en-US" sz="4400" dirty="0"/>
+              <a:t>纵容手机游戏</a:t>
+            </a:r>
+          </a:p>
+        </p:txBody>
+      </p:sp>
+      <p:sp>
+        <p:nvSpPr>
+          <p:cNvPr id="3" name="内容占位符 2">
+            <a:extLst>
+              <a:ext uri="{FF2B5EF4-FFF2-40B4-BE49-F238E27FC236}">
+                <a16:creationId xmlns:a16="http://schemas.microsoft.com/office/drawing/2014/main" id="{A6F3F940-98BB-4DA4-6EEE-3BA4E29DC81A}"/>
+              </a:ext>
+            </a:extLst>
+          </p:cNvPr>
+          <p:cNvSpPr>
+            <a:spLocks noGrp="1"/>
+          </p:cNvSpPr>
+          <p:nvPr>
+            <p:ph idx="1"/>
+          </p:nvPr>
+        </p:nvSpPr>
+        <p:spPr/>
+        <p:txBody>
+          <a:bodyPr/>
+          <a:lstStyle/>
+          <a:p>
+            <a:pPr marL="0" indent="0">
+              <a:buNone/>
+            </a:pPr>
+            <a:r>
+              <a:rPr lang="zh-CN" altLang="en-US" dirty="0"/>
+              <a:t>你看网上有很多这种情况，父母不让孩子玩手机，孩子就把家给砸了。</a:t>
+            </a:r>
+          </a:p>
+          <a:p>
+            <a:pPr marL="0" indent="0">
+              <a:buNone/>
+            </a:pPr>
+            <a:r>
+              <a:rPr lang="zh-CN" altLang="en-US" dirty="0"/>
+              <a:t>很多人会觉得不可思议，是吧？</a:t>
+            </a:r>
+          </a:p>
+          <a:p>
+            <a:pPr marL="0" indent="0">
+              <a:buNone/>
+            </a:pPr>
+            <a:r>
+              <a:rPr lang="zh-CN" altLang="en-US" dirty="0"/>
+              <a:t>从全世界的医学论文中，有些论文库是公开的，我们可以查到一些资料。</a:t>
+            </a:r>
+          </a:p>
+          <a:p>
+            <a:pPr marL="0" indent="0">
+              <a:buNone/>
+            </a:pPr>
+            <a:r>
+              <a:rPr lang="zh-CN" altLang="en-US" dirty="0"/>
+              <a:t>就是手机游戏成瘾的大脑和吸毒大脑的对比研究，在核磁共振检测结果上是一样的。</a:t>
+            </a:r>
+          </a:p>
+          <a:p>
+            <a:pPr marL="0" indent="0">
+              <a:buNone/>
+            </a:pPr>
+            <a:r>
+              <a:rPr lang="zh-CN" altLang="en-US" dirty="0"/>
+              <a:t>所以你不要认为孩子玩游戏是个简单单纯的现象。</a:t>
+            </a:r>
+          </a:p>
+        </p:txBody>
+      </p:sp>
+    </p:spTree>
+    <p:extLst>
+      <p:ext uri="{BB962C8B-B14F-4D97-AF65-F5344CB8AC3E}">
+        <p14:creationId xmlns:p14="http://schemas.microsoft.com/office/powerpoint/2010/main" val="3905299610"/>
+      </p:ext>
+    </p:extLst>
+  </p:cSld>
+  <p:clrMapOvr>
+    <a:masterClrMapping/>
+  </p:clrMapOvr>
+</p:sld>
+</file>
+
+<file path=ppt/slides/slide36.xml><?xml version="1.0" encoding="utf-8"?>
+<p:sld xmlns:a="http://schemas.openxmlformats.org/drawingml/2006/main" xmlns:r="http://schemas.openxmlformats.org/officeDocument/2006/relationships" xmlns:p="http://schemas.openxmlformats.org/presentationml/2006/main">
+  <p:cSld>
+    <p:spTree>
+      <p:nvGrpSpPr>
+        <p:cNvPr id="1" name="">
+          <a:extLst>
+            <a:ext uri="{FF2B5EF4-FFF2-40B4-BE49-F238E27FC236}">
+              <a16:creationId xmlns:a16="http://schemas.microsoft.com/office/drawing/2014/main" id="{CA55FC25-F32C-D1AB-5E48-F55C5A01D5AA}"/>
+            </a:ext>
+          </a:extLst>
+        </p:cNvPr>
+        <p:cNvGrpSpPr/>
+        <p:nvPr/>
+      </p:nvGrpSpPr>
+      <p:grpSpPr>
+        <a:xfrm>
+          <a:off x="0" y="0"/>
+          <a:ext cx="0" cy="0"/>
+          <a:chOff x="0" y="0"/>
+          <a:chExt cx="0" cy="0"/>
+        </a:xfrm>
+      </p:grpSpPr>
+      <p:sp>
+        <p:nvSpPr>
+          <p:cNvPr id="2" name="标题 1">
+            <a:extLst>
+              <a:ext uri="{FF2B5EF4-FFF2-40B4-BE49-F238E27FC236}">
+                <a16:creationId xmlns:a16="http://schemas.microsoft.com/office/drawing/2014/main" id="{B92BB972-7E9E-EE76-C772-199E1358CB0E}"/>
+              </a:ext>
+            </a:extLst>
+          </p:cNvPr>
+          <p:cNvSpPr>
+            <a:spLocks noGrp="1"/>
+          </p:cNvSpPr>
+          <p:nvPr>
+            <p:ph type="title"/>
+          </p:nvPr>
+        </p:nvSpPr>
+        <p:spPr/>
+        <p:txBody>
+          <a:bodyPr/>
+          <a:lstStyle/>
+          <a:p>
+            <a:r>
+              <a:rPr lang="zh-CN" altLang="en-US" sz="4400" dirty="0"/>
+              <a:t>手机游戏危害科普</a:t>
+            </a:r>
+          </a:p>
+        </p:txBody>
+      </p:sp>
+      <p:sp>
+        <p:nvSpPr>
+          <p:cNvPr id="3" name="内容占位符 2">
+            <a:extLst>
+              <a:ext uri="{FF2B5EF4-FFF2-40B4-BE49-F238E27FC236}">
+                <a16:creationId xmlns:a16="http://schemas.microsoft.com/office/drawing/2014/main" id="{DD9B7F9C-A5FD-6776-8D2D-89005F9CE262}"/>
+              </a:ext>
+            </a:extLst>
+          </p:cNvPr>
+          <p:cNvSpPr>
+            <a:spLocks noGrp="1"/>
+          </p:cNvSpPr>
+          <p:nvPr>
+            <p:ph idx="1"/>
+          </p:nvPr>
+        </p:nvSpPr>
+        <p:spPr/>
+        <p:txBody>
+          <a:bodyPr/>
+          <a:lstStyle/>
+          <a:p>
+            <a:pPr marL="0" indent="0">
+              <a:buNone/>
+            </a:pPr>
+            <a:r>
+              <a:rPr lang="zh-CN" altLang="en-US" dirty="0"/>
+              <a:t>大家有没有想过一个问题。</a:t>
+            </a:r>
+          </a:p>
+          <a:p>
+            <a:pPr marL="0" indent="0">
+              <a:buNone/>
+            </a:pPr>
+            <a:r>
+              <a:rPr lang="zh-CN" altLang="en-US" dirty="0"/>
+              <a:t>这个世界上好玩的东西太多了，为什么全国几乎所有的孩子都会一致统一地去玩手机呢？</a:t>
+            </a:r>
+          </a:p>
+          <a:p>
+            <a:pPr marL="0" indent="0">
+              <a:buNone/>
+            </a:pPr>
+            <a:r>
+              <a:rPr lang="zh-CN" altLang="en-US" dirty="0"/>
+              <a:t>正常情况下，不应该是一部分孩子玩这个，一部分孩子玩那个吗？</a:t>
+            </a:r>
+          </a:p>
+          <a:p>
+            <a:pPr marL="0" indent="0">
+              <a:buNone/>
+            </a:pPr>
+            <a:r>
+              <a:rPr lang="zh-CN" altLang="en-US" dirty="0"/>
+              <a:t>即使是正态分布概率下，也不可能</a:t>
+            </a:r>
+            <a:r>
+              <a:rPr lang="en-US" altLang="zh-CN" dirty="0"/>
+              <a:t>99%</a:t>
+            </a:r>
+            <a:r>
+              <a:rPr lang="zh-CN" altLang="en-US" dirty="0"/>
+              <a:t>的孩子都去玩手机吧？</a:t>
+            </a:r>
+          </a:p>
+          <a:p>
+            <a:pPr marL="0" indent="0">
+              <a:buNone/>
+            </a:pPr>
+            <a:r>
+              <a:rPr lang="zh-CN" altLang="en-US" dirty="0"/>
+              <a:t>关于孩子玩手机的问题，我也有一个专题课有专门说明，大家有兴趣可以关注一下。</a:t>
+            </a:r>
+          </a:p>
+          <a:p>
+            <a:pPr marL="0" indent="0">
+              <a:buNone/>
+            </a:pPr>
+            <a:endParaRPr lang="zh-CN" altLang="en-US" dirty="0"/>
+          </a:p>
+        </p:txBody>
+      </p:sp>
+    </p:spTree>
+    <p:extLst>
+      <p:ext uri="{BB962C8B-B14F-4D97-AF65-F5344CB8AC3E}">
+        <p14:creationId xmlns:p14="http://schemas.microsoft.com/office/powerpoint/2010/main" val="3883424232"/>
+      </p:ext>
+    </p:extLst>
+  </p:cSld>
+  <p:clrMapOvr>
+    <a:masterClrMapping/>
+  </p:clrMapOvr>
+</p:sld>
+</file>
+
+<file path=ppt/slides/slide37.xml><?xml version="1.0" encoding="utf-8"?>
+<p:sld xmlns:a="http://schemas.openxmlformats.org/drawingml/2006/main" xmlns:r="http://schemas.openxmlformats.org/officeDocument/2006/relationships" xmlns:p="http://schemas.openxmlformats.org/presentationml/2006/main">
+  <p:cSld>
+    <p:spTree>
+      <p:nvGrpSpPr>
+        <p:cNvPr id="1" name="">
+          <a:extLst>
+            <a:ext uri="{FF2B5EF4-FFF2-40B4-BE49-F238E27FC236}">
+              <a16:creationId xmlns:a16="http://schemas.microsoft.com/office/drawing/2014/main" id="{34845F12-D1E0-8590-AA2D-83822BD05119}"/>
+            </a:ext>
+          </a:extLst>
+        </p:cNvPr>
+        <p:cNvGrpSpPr/>
+        <p:nvPr/>
+      </p:nvGrpSpPr>
+      <p:grpSpPr>
+        <a:xfrm>
+          <a:off x="0" y="0"/>
+          <a:ext cx="0" cy="0"/>
+          <a:chOff x="0" y="0"/>
+          <a:chExt cx="0" cy="0"/>
+        </a:xfrm>
+      </p:grpSpPr>
+      <p:sp>
+        <p:nvSpPr>
+          <p:cNvPr id="2" name="标题 1">
+            <a:extLst>
+              <a:ext uri="{FF2B5EF4-FFF2-40B4-BE49-F238E27FC236}">
+                <a16:creationId xmlns:a16="http://schemas.microsoft.com/office/drawing/2014/main" id="{966160FD-BF9F-0ABC-5146-971A0150FE6D}"/>
+              </a:ext>
+            </a:extLst>
+          </p:cNvPr>
+          <p:cNvSpPr>
+            <a:spLocks noGrp="1"/>
+          </p:cNvSpPr>
+          <p:nvPr>
+            <p:ph type="title"/>
+          </p:nvPr>
+        </p:nvSpPr>
+        <p:spPr/>
+        <p:txBody>
+          <a:bodyPr/>
+          <a:lstStyle/>
+          <a:p>
+            <a:r>
+              <a:rPr lang="zh-CN" altLang="en-US" sz="4400" dirty="0"/>
+              <a:t>手机游戏危害案例</a:t>
+            </a:r>
+          </a:p>
+        </p:txBody>
+      </p:sp>
+      <p:sp>
+        <p:nvSpPr>
+          <p:cNvPr id="3" name="内容占位符 2">
+            <a:extLst>
+              <a:ext uri="{FF2B5EF4-FFF2-40B4-BE49-F238E27FC236}">
+                <a16:creationId xmlns:a16="http://schemas.microsoft.com/office/drawing/2014/main" id="{4E66658F-162E-1F97-C6FF-713DA44636F2}"/>
+              </a:ext>
+            </a:extLst>
+          </p:cNvPr>
+          <p:cNvSpPr>
+            <a:spLocks noGrp="1"/>
+          </p:cNvSpPr>
+          <p:nvPr>
+            <p:ph idx="1"/>
+          </p:nvPr>
+        </p:nvSpPr>
+        <p:spPr/>
+        <p:txBody>
+          <a:bodyPr/>
+          <a:lstStyle/>
+          <a:p>
+            <a:pPr marL="0" indent="0">
+              <a:buNone/>
+            </a:pPr>
+            <a:r>
+              <a:rPr lang="zh-CN" altLang="en-US" dirty="0"/>
+              <a:t>北航大家都知道，非常好的大学，是吧？</a:t>
+            </a:r>
+          </a:p>
+          <a:p>
+            <a:pPr marL="0" indent="0">
+              <a:buNone/>
+            </a:pPr>
+            <a:r>
+              <a:rPr lang="zh-CN" altLang="en-US" dirty="0"/>
+              <a:t>一次性退学了</a:t>
+            </a:r>
+            <a:r>
+              <a:rPr lang="en-US" altLang="zh-CN" dirty="0"/>
+              <a:t>404</a:t>
+            </a:r>
+            <a:r>
+              <a:rPr lang="zh-CN" altLang="en-US" dirty="0"/>
+              <a:t>个学生，大家可以上网查一下这个消息。</a:t>
+            </a:r>
+          </a:p>
+        </p:txBody>
+      </p:sp>
+    </p:spTree>
+    <p:extLst>
+      <p:ext uri="{BB962C8B-B14F-4D97-AF65-F5344CB8AC3E}">
+        <p14:creationId xmlns:p14="http://schemas.microsoft.com/office/powerpoint/2010/main" val="518210905"/>
+      </p:ext>
+    </p:extLst>
+  </p:cSld>
+  <p:clrMapOvr>
+    <a:masterClrMapping/>
+  </p:clrMapOvr>
+</p:sld>
+</file>
+
+<file path=ppt/slides/slide38.xml><?xml version="1.0" encoding="utf-8"?>
+<p:sld xmlns:a="http://schemas.openxmlformats.org/drawingml/2006/main" xmlns:r="http://schemas.openxmlformats.org/officeDocument/2006/relationships" xmlns:p="http://schemas.openxmlformats.org/presentationml/2006/main">
+  <p:cSld>
+    <p:spTree>
+      <p:nvGrpSpPr>
+        <p:cNvPr id="1" name="">
+          <a:extLst>
+            <a:ext uri="{FF2B5EF4-FFF2-40B4-BE49-F238E27FC236}">
+              <a16:creationId xmlns:a16="http://schemas.microsoft.com/office/drawing/2014/main" id="{CBCCB30A-2902-FA30-8B68-3FC6B8739E11}"/>
+            </a:ext>
+          </a:extLst>
+        </p:cNvPr>
+        <p:cNvGrpSpPr/>
+        <p:nvPr/>
+      </p:nvGrpSpPr>
+      <p:grpSpPr>
+        <a:xfrm>
+          <a:off x="0" y="0"/>
+          <a:ext cx="0" cy="0"/>
+          <a:chOff x="0" y="0"/>
+          <a:chExt cx="0" cy="0"/>
+        </a:xfrm>
+      </p:grpSpPr>
+      <p:sp>
+        <p:nvSpPr>
+          <p:cNvPr id="2" name="标题 1">
+            <a:extLst>
+              <a:ext uri="{FF2B5EF4-FFF2-40B4-BE49-F238E27FC236}">
+                <a16:creationId xmlns:a16="http://schemas.microsoft.com/office/drawing/2014/main" id="{51914E59-B7BC-F6F5-0291-1809EA360BE8}"/>
+              </a:ext>
+            </a:extLst>
+          </p:cNvPr>
+          <p:cNvSpPr>
+            <a:spLocks noGrp="1"/>
+          </p:cNvSpPr>
+          <p:nvPr>
+            <p:ph type="title"/>
+          </p:nvPr>
+        </p:nvSpPr>
+        <p:spPr/>
+        <p:txBody>
+          <a:bodyPr/>
+          <a:lstStyle/>
+          <a:p>
+            <a:r>
+              <a:rPr lang="zh-CN" altLang="en-US" sz="4400" dirty="0"/>
+              <a:t>常见教育思维误区</a:t>
+            </a:r>
+            <a:r>
+              <a:rPr lang="en-US" altLang="zh-CN" sz="4400" dirty="0"/>
+              <a:t>——</a:t>
+            </a:r>
+            <a:r>
+              <a:rPr lang="zh-CN" altLang="en-US" sz="4400" dirty="0"/>
+              <a:t>物质交换</a:t>
+            </a:r>
+          </a:p>
+        </p:txBody>
+      </p:sp>
+      <p:sp>
+        <p:nvSpPr>
+          <p:cNvPr id="3" name="内容占位符 2">
+            <a:extLst>
+              <a:ext uri="{FF2B5EF4-FFF2-40B4-BE49-F238E27FC236}">
+                <a16:creationId xmlns:a16="http://schemas.microsoft.com/office/drawing/2014/main" id="{D0CACA72-D5F8-7964-0ABA-BA58C01FB11F}"/>
+              </a:ext>
+            </a:extLst>
+          </p:cNvPr>
+          <p:cNvSpPr>
+            <a:spLocks noGrp="1"/>
+          </p:cNvSpPr>
+          <p:nvPr>
+            <p:ph idx="1"/>
+          </p:nvPr>
+        </p:nvSpPr>
+        <p:spPr/>
+        <p:txBody>
+          <a:bodyPr/>
+          <a:lstStyle/>
+          <a:p>
+            <a:pPr marL="0" indent="0">
+              <a:buNone/>
+            </a:pPr>
+            <a:r>
+              <a:rPr lang="zh-CN" altLang="en-US" dirty="0"/>
+              <a:t>第四种错误教育方法。</a:t>
+            </a:r>
+          </a:p>
+          <a:p>
+            <a:pPr marL="0" indent="0">
+              <a:buNone/>
+            </a:pPr>
+            <a:r>
+              <a:rPr lang="zh-CN" altLang="en-US" dirty="0"/>
+              <a:t>为了让孩子学习，拿物质做交换。</a:t>
+            </a:r>
+          </a:p>
+          <a:p>
+            <a:pPr marL="0" indent="0">
+              <a:buNone/>
+            </a:pPr>
+            <a:r>
+              <a:rPr lang="zh-CN" altLang="en-US" dirty="0"/>
+              <a:t>只要你学习，我就给你买什么东西。</a:t>
+            </a:r>
+          </a:p>
+        </p:txBody>
+      </p:sp>
+    </p:spTree>
+    <p:extLst>
+      <p:ext uri="{BB962C8B-B14F-4D97-AF65-F5344CB8AC3E}">
+        <p14:creationId xmlns:p14="http://schemas.microsoft.com/office/powerpoint/2010/main" val="2236989085"/>
+      </p:ext>
+    </p:extLst>
+  </p:cSld>
+  <p:clrMapOvr>
+    <a:masterClrMapping/>
+  </p:clrMapOvr>
+</p:sld>
+</file>
+
+<file path=ppt/slides/slide39.xml><?xml version="1.0" encoding="utf-8"?>
+<p:sld xmlns:a="http://schemas.openxmlformats.org/drawingml/2006/main" xmlns:r="http://schemas.openxmlformats.org/officeDocument/2006/relationships" xmlns:p="http://schemas.openxmlformats.org/presentationml/2006/main">
+  <p:cSld>
+    <p:spTree>
+      <p:nvGrpSpPr>
+        <p:cNvPr id="1" name="">
+          <a:extLst>
+            <a:ext uri="{FF2B5EF4-FFF2-40B4-BE49-F238E27FC236}">
+              <a16:creationId xmlns:a16="http://schemas.microsoft.com/office/drawing/2014/main" id="{B883630F-FB9E-3D68-3456-005DF01E43D2}"/>
+            </a:ext>
+          </a:extLst>
+        </p:cNvPr>
+        <p:cNvGrpSpPr/>
+        <p:nvPr/>
+      </p:nvGrpSpPr>
+      <p:grpSpPr>
+        <a:xfrm>
+          <a:off x="0" y="0"/>
+          <a:ext cx="0" cy="0"/>
+          <a:chOff x="0" y="0"/>
+          <a:chExt cx="0" cy="0"/>
+        </a:xfrm>
+      </p:grpSpPr>
+      <p:sp>
+        <p:nvSpPr>
+          <p:cNvPr id="2" name="标题 1">
+            <a:extLst>
+              <a:ext uri="{FF2B5EF4-FFF2-40B4-BE49-F238E27FC236}">
+                <a16:creationId xmlns:a16="http://schemas.microsoft.com/office/drawing/2014/main" id="{97BEBBD1-AD47-4C3F-5771-0C8736AF63D2}"/>
+              </a:ext>
+            </a:extLst>
+          </p:cNvPr>
+          <p:cNvSpPr>
+            <a:spLocks noGrp="1"/>
+          </p:cNvSpPr>
+          <p:nvPr>
+            <p:ph type="title"/>
+          </p:nvPr>
+        </p:nvSpPr>
+        <p:spPr/>
+        <p:txBody>
+          <a:bodyPr/>
+          <a:lstStyle/>
+          <a:p>
+            <a:r>
+              <a:rPr lang="zh-CN" altLang="en-US" sz="4400" dirty="0"/>
+              <a:t>常见教育思维误区</a:t>
+            </a:r>
+            <a:r>
+              <a:rPr lang="en-US" altLang="zh-CN" sz="4400" dirty="0"/>
+              <a:t>——</a:t>
+            </a:r>
+            <a:r>
+              <a:rPr lang="zh-CN" altLang="en-US" sz="4400" dirty="0"/>
+              <a:t>家庭安乐窝</a:t>
+            </a:r>
+          </a:p>
+        </p:txBody>
+      </p:sp>
+      <p:sp>
+        <p:nvSpPr>
+          <p:cNvPr id="3" name="内容占位符 2">
+            <a:extLst>
+              <a:ext uri="{FF2B5EF4-FFF2-40B4-BE49-F238E27FC236}">
+                <a16:creationId xmlns:a16="http://schemas.microsoft.com/office/drawing/2014/main" id="{7618FB41-E73F-7B6D-B860-D7DB914E9DED}"/>
+              </a:ext>
+            </a:extLst>
+          </p:cNvPr>
+          <p:cNvSpPr>
+            <a:spLocks noGrp="1"/>
+          </p:cNvSpPr>
+          <p:nvPr>
+            <p:ph idx="1"/>
+          </p:nvPr>
+        </p:nvSpPr>
+        <p:spPr/>
+        <p:txBody>
+          <a:bodyPr/>
+          <a:lstStyle/>
+          <a:p>
+            <a:pPr marL="0" indent="0">
+              <a:buNone/>
+            </a:pPr>
+            <a:r>
+              <a:rPr lang="zh-CN" altLang="en-US" dirty="0"/>
+              <a:t>还有一种，就是安乐窝。</a:t>
+            </a:r>
+          </a:p>
+          <a:p>
+            <a:pPr marL="0" indent="0">
+              <a:buNone/>
+            </a:pPr>
+            <a:r>
+              <a:rPr lang="zh-CN" altLang="en-US" dirty="0"/>
+              <a:t>只要你学习，在家里什么都不用干。</a:t>
+            </a:r>
+          </a:p>
+          <a:p>
+            <a:pPr marL="0" indent="0">
+              <a:buNone/>
+            </a:pPr>
+            <a:r>
+              <a:rPr lang="zh-CN" altLang="en-US" dirty="0"/>
+              <a:t>在家里不用承担任何责任。</a:t>
+            </a:r>
+          </a:p>
+        </p:txBody>
+      </p:sp>
+    </p:spTree>
+    <p:extLst>
+      <p:ext uri="{BB962C8B-B14F-4D97-AF65-F5344CB8AC3E}">
+        <p14:creationId xmlns:p14="http://schemas.microsoft.com/office/powerpoint/2010/main" val="4115887133"/>
+      </p:ext>
+    </p:extLst>
+  </p:cSld>
+  <p:clrMapOvr>
+    <a:masterClrMapping/>
+  </p:clrMapOvr>
+</p:sld>
+</file>
+
+<file path=ppt/slides/slide4.xml><?xml version="1.0" encoding="utf-8"?>
+<p:sld xmlns:a="http://schemas.openxmlformats.org/drawingml/2006/main" xmlns:r="http://schemas.openxmlformats.org/officeDocument/2006/relationships" xmlns:p="http://schemas.openxmlformats.org/presentationml/2006/main">
+  <p:cSld>
+    <p:spTree>
+      <p:nvGrpSpPr>
+        <p:cNvPr id="1" name="">
+          <a:extLst>
+            <a:ext uri="{FF2B5EF4-FFF2-40B4-BE49-F238E27FC236}">
+              <a16:creationId xmlns:a16="http://schemas.microsoft.com/office/drawing/2014/main" id="{4AF24328-C25F-1E24-C8DA-90E935F7CF77}"/>
+            </a:ext>
+          </a:extLst>
+        </p:cNvPr>
+        <p:cNvGrpSpPr/>
+        <p:nvPr/>
+      </p:nvGrpSpPr>
+      <p:grpSpPr>
+        <a:xfrm>
+          <a:off x="0" y="0"/>
+          <a:ext cx="0" cy="0"/>
+          <a:chOff x="0" y="0"/>
+          <a:chExt cx="0" cy="0"/>
+        </a:xfrm>
+      </p:grpSpPr>
+      <p:sp>
+        <p:nvSpPr>
+          <p:cNvPr id="2" name="标题 1">
+            <a:extLst>
+              <a:ext uri="{FF2B5EF4-FFF2-40B4-BE49-F238E27FC236}">
+                <a16:creationId xmlns:a16="http://schemas.microsoft.com/office/drawing/2014/main" id="{6A95D723-B020-6815-7DD3-FCEF92E3C937}"/>
+              </a:ext>
+            </a:extLst>
+          </p:cNvPr>
+          <p:cNvSpPr>
+            <a:spLocks noGrp="1"/>
+          </p:cNvSpPr>
+          <p:nvPr>
+            <p:ph type="title"/>
+          </p:nvPr>
+        </p:nvSpPr>
+        <p:spPr>
+          <a:xfrm>
+            <a:off x="521208" y="978408"/>
+            <a:ext cx="11155680" cy="850392"/>
+          </a:xfrm>
+        </p:spPr>
+        <p:txBody>
+          <a:bodyPr/>
+          <a:lstStyle/>
+          <a:p>
+            <a:r>
+              <a:rPr lang="zh-CN" altLang="en-US" sz="4400" dirty="0"/>
+              <a:t>教育改革密集进行</a:t>
+            </a:r>
+          </a:p>
+        </p:txBody>
+      </p:sp>
+      <p:sp>
+        <p:nvSpPr>
+          <p:cNvPr id="3" name="内容占位符 2">
+            <a:extLst>
+              <a:ext uri="{FF2B5EF4-FFF2-40B4-BE49-F238E27FC236}">
+                <a16:creationId xmlns:a16="http://schemas.microsoft.com/office/drawing/2014/main" id="{7F8FF81C-E2B8-B9D6-2AD8-CB39D54CA542}"/>
+              </a:ext>
+            </a:extLst>
+          </p:cNvPr>
+          <p:cNvSpPr>
+            <a:spLocks noGrp="1"/>
+          </p:cNvSpPr>
+          <p:nvPr>
+            <p:ph idx="1"/>
+          </p:nvPr>
+        </p:nvSpPr>
+        <p:spPr>
+          <a:xfrm>
+            <a:off x="521208" y="2159000"/>
+            <a:ext cx="11155680" cy="4186936"/>
+          </a:xfrm>
+        </p:spPr>
+        <p:txBody>
+          <a:bodyPr/>
+          <a:lstStyle/>
+          <a:p>
+            <a:pPr marL="0" indent="0">
+              <a:buNone/>
+            </a:pPr>
+            <a:r>
+              <a:rPr lang="zh-CN" altLang="en-US" dirty="0"/>
+              <a:t>教育部，有一个很重要的改革</a:t>
+            </a:r>
+          </a:p>
+          <a:p>
+            <a:pPr marL="0" indent="0">
+              <a:buNone/>
+            </a:pPr>
+            <a:r>
+              <a:rPr lang="zh-CN" altLang="en-US" dirty="0"/>
+              <a:t>就改革不是新建了多少大学，而是说是要在全国建</a:t>
+            </a:r>
+            <a:r>
+              <a:rPr lang="en-US" altLang="zh-CN" dirty="0"/>
+              <a:t>9000</a:t>
+            </a:r>
+            <a:r>
+              <a:rPr lang="zh-CN" altLang="en-US" dirty="0"/>
+              <a:t>所，两年建成</a:t>
+            </a:r>
+            <a:r>
+              <a:rPr lang="en-US" altLang="zh-CN" dirty="0"/>
+              <a:t>1.8</a:t>
+            </a:r>
+            <a:r>
+              <a:rPr lang="zh-CN" altLang="en-US" dirty="0"/>
+              <a:t>万所学校。</a:t>
+            </a:r>
+          </a:p>
+          <a:p>
+            <a:pPr marL="0" indent="0">
+              <a:buNone/>
+            </a:pPr>
+            <a:r>
+              <a:rPr lang="zh-CN" altLang="en-US" dirty="0"/>
+              <a:t>这些学校不是用来学知识的，而是用来玩的，重要在体育、劳动和其他技能方面的培养。</a:t>
+            </a:r>
+          </a:p>
+        </p:txBody>
+      </p:sp>
+    </p:spTree>
+    <p:extLst>
+      <p:ext uri="{BB962C8B-B14F-4D97-AF65-F5344CB8AC3E}">
+        <p14:creationId xmlns:p14="http://schemas.microsoft.com/office/powerpoint/2010/main" val="1144251710"/>
+      </p:ext>
+    </p:extLst>
+  </p:cSld>
+  <p:clrMapOvr>
+    <a:masterClrMapping/>
+  </p:clrMapOvr>
+</p:sld>
+</file>
+
+<file path=ppt/slides/slide40.xml><?xml version="1.0" encoding="utf-8"?>
+<p:sld xmlns:a="http://schemas.openxmlformats.org/drawingml/2006/main" xmlns:r="http://schemas.openxmlformats.org/officeDocument/2006/relationships" xmlns:p="http://schemas.openxmlformats.org/presentationml/2006/main">
+  <p:cSld>
+    <p:spTree>
+      <p:nvGrpSpPr>
+        <p:cNvPr id="1" name="">
+          <a:extLst>
+            <a:ext uri="{FF2B5EF4-FFF2-40B4-BE49-F238E27FC236}">
+              <a16:creationId xmlns:a16="http://schemas.microsoft.com/office/drawing/2014/main" id="{21B39EA2-0553-7FAA-DD5C-4F8607648101}"/>
+            </a:ext>
+          </a:extLst>
+        </p:cNvPr>
+        <p:cNvGrpSpPr/>
+        <p:nvPr/>
+      </p:nvGrpSpPr>
+      <p:grpSpPr>
+        <a:xfrm>
+          <a:off x="0" y="0"/>
+          <a:ext cx="0" cy="0"/>
+          <a:chOff x="0" y="0"/>
+          <a:chExt cx="0" cy="0"/>
+        </a:xfrm>
+      </p:grpSpPr>
+      <p:sp>
+        <p:nvSpPr>
+          <p:cNvPr id="2" name="标题 1">
+            <a:extLst>
+              <a:ext uri="{FF2B5EF4-FFF2-40B4-BE49-F238E27FC236}">
+                <a16:creationId xmlns:a16="http://schemas.microsoft.com/office/drawing/2014/main" id="{70FB0DFD-729F-DECC-D541-ECF0A8B11A69}"/>
+              </a:ext>
+            </a:extLst>
+          </p:cNvPr>
+          <p:cNvSpPr>
+            <a:spLocks noGrp="1"/>
+          </p:cNvSpPr>
+          <p:nvPr>
+            <p:ph type="title"/>
+          </p:nvPr>
+        </p:nvSpPr>
+        <p:spPr/>
+        <p:txBody>
+          <a:bodyPr/>
+          <a:lstStyle/>
+          <a:p>
+            <a:r>
+              <a:rPr lang="zh-CN" altLang="en-US" sz="4400" dirty="0"/>
+              <a:t>常见教育思维误区</a:t>
+            </a:r>
+            <a:r>
+              <a:rPr lang="en-US" altLang="zh-CN" sz="4400" dirty="0"/>
+              <a:t>——</a:t>
+            </a:r>
+            <a:r>
+              <a:rPr lang="zh-CN" altLang="en-US" sz="4400" dirty="0"/>
+              <a:t>谎言教育</a:t>
+            </a:r>
+          </a:p>
+        </p:txBody>
+      </p:sp>
+      <p:sp>
+        <p:nvSpPr>
+          <p:cNvPr id="3" name="内容占位符 2">
+            <a:extLst>
+              <a:ext uri="{FF2B5EF4-FFF2-40B4-BE49-F238E27FC236}">
+                <a16:creationId xmlns:a16="http://schemas.microsoft.com/office/drawing/2014/main" id="{91A60C8E-521C-14D0-BA98-FA9EDAEBC6FC}"/>
+              </a:ext>
+            </a:extLst>
+          </p:cNvPr>
+          <p:cNvSpPr>
+            <a:spLocks noGrp="1"/>
+          </p:cNvSpPr>
+          <p:nvPr>
+            <p:ph idx="1"/>
+          </p:nvPr>
+        </p:nvSpPr>
+        <p:spPr/>
+        <p:txBody>
+          <a:bodyPr/>
+          <a:lstStyle/>
+          <a:p>
+            <a:pPr marL="0" indent="0">
+              <a:buNone/>
+            </a:pPr>
+            <a:r>
+              <a:rPr lang="zh-CN" altLang="en-US" dirty="0"/>
+              <a:t>还有，就是谎言教育。</a:t>
+            </a:r>
+          </a:p>
+          <a:p>
+            <a:pPr marL="0" indent="0">
+              <a:buNone/>
+            </a:pPr>
+            <a:r>
+              <a:rPr lang="zh-CN" altLang="en-US" dirty="0"/>
+              <a:t>只要你考上大学，你的前途就有了。</a:t>
+            </a:r>
+          </a:p>
+        </p:txBody>
+      </p:sp>
+    </p:spTree>
+    <p:extLst>
+      <p:ext uri="{BB962C8B-B14F-4D97-AF65-F5344CB8AC3E}">
+        <p14:creationId xmlns:p14="http://schemas.microsoft.com/office/powerpoint/2010/main" val="3365545826"/>
+      </p:ext>
+    </p:extLst>
+  </p:cSld>
+  <p:clrMapOvr>
+    <a:masterClrMapping/>
+  </p:clrMapOvr>
+</p:sld>
+</file>
+
+<file path=ppt/slides/slide41.xml><?xml version="1.0" encoding="utf-8"?>
+<p:sld xmlns:a="http://schemas.openxmlformats.org/drawingml/2006/main" xmlns:r="http://schemas.openxmlformats.org/officeDocument/2006/relationships" xmlns:p="http://schemas.openxmlformats.org/presentationml/2006/main">
+  <p:cSld>
+    <p:spTree>
+      <p:nvGrpSpPr>
+        <p:cNvPr id="1" name="">
+          <a:extLst>
+            <a:ext uri="{FF2B5EF4-FFF2-40B4-BE49-F238E27FC236}">
+              <a16:creationId xmlns:a16="http://schemas.microsoft.com/office/drawing/2014/main" id="{3FA26910-1B80-344C-2AA9-0AD1E2B047A7}"/>
+            </a:ext>
+          </a:extLst>
+        </p:cNvPr>
+        <p:cNvGrpSpPr/>
+        <p:nvPr/>
+      </p:nvGrpSpPr>
+      <p:grpSpPr>
+        <a:xfrm>
+          <a:off x="0" y="0"/>
+          <a:ext cx="0" cy="0"/>
+          <a:chOff x="0" y="0"/>
+          <a:chExt cx="0" cy="0"/>
+        </a:xfrm>
+      </p:grpSpPr>
+      <p:sp>
+        <p:nvSpPr>
+          <p:cNvPr id="2" name="标题 1">
+            <a:extLst>
+              <a:ext uri="{FF2B5EF4-FFF2-40B4-BE49-F238E27FC236}">
+                <a16:creationId xmlns:a16="http://schemas.microsoft.com/office/drawing/2014/main" id="{4A34FAEF-29F7-1CDD-D2C3-32E005DFCF16}"/>
+              </a:ext>
+            </a:extLst>
+          </p:cNvPr>
+          <p:cNvSpPr>
+            <a:spLocks noGrp="1"/>
+          </p:cNvSpPr>
+          <p:nvPr>
+            <p:ph type="title"/>
+          </p:nvPr>
+        </p:nvSpPr>
+        <p:spPr/>
+        <p:txBody>
+          <a:bodyPr/>
+          <a:lstStyle/>
+          <a:p>
+            <a:r>
+              <a:rPr lang="zh-CN" altLang="en-US" sz="4400" dirty="0"/>
+              <a:t>虚拟世界：二次元、电子游戏</a:t>
+            </a:r>
+          </a:p>
+        </p:txBody>
+      </p:sp>
+      <p:sp>
+        <p:nvSpPr>
+          <p:cNvPr id="3" name="内容占位符 2">
+            <a:extLst>
+              <a:ext uri="{FF2B5EF4-FFF2-40B4-BE49-F238E27FC236}">
+                <a16:creationId xmlns:a16="http://schemas.microsoft.com/office/drawing/2014/main" id="{76D0B381-3AE5-26D8-6A90-0406C5AAC8E1}"/>
+              </a:ext>
+            </a:extLst>
+          </p:cNvPr>
+          <p:cNvSpPr>
+            <a:spLocks noGrp="1"/>
+          </p:cNvSpPr>
+          <p:nvPr>
+            <p:ph idx="1"/>
+          </p:nvPr>
+        </p:nvSpPr>
+        <p:spPr/>
+        <p:txBody>
+          <a:bodyPr/>
+          <a:lstStyle/>
+          <a:p>
+            <a:pPr marL="0" indent="0">
+              <a:buNone/>
+            </a:pPr>
+            <a:r>
+              <a:rPr lang="zh-CN" altLang="en-US" dirty="0"/>
+              <a:t>孩子面对这些错误的教育方式，他们会怎么样呢？</a:t>
+            </a:r>
+          </a:p>
+          <a:p>
+            <a:pPr marL="0" indent="0">
+              <a:buNone/>
+            </a:pPr>
+            <a:r>
+              <a:rPr lang="zh-CN" altLang="en-US" dirty="0"/>
+              <a:t>一种，就是进入二次元。</a:t>
+            </a:r>
+          </a:p>
+          <a:p>
+            <a:pPr marL="0" indent="0">
+              <a:buNone/>
+            </a:pPr>
+            <a:r>
+              <a:rPr lang="zh-CN" altLang="en-US" dirty="0"/>
+              <a:t>还有就是进入虚拟世界，游戏、短视频。</a:t>
+            </a:r>
+          </a:p>
+          <a:p>
+            <a:pPr marL="0" indent="0">
+              <a:buNone/>
+            </a:pPr>
+            <a:r>
+              <a:rPr lang="zh-CN" altLang="en-US" dirty="0"/>
+              <a:t>举例</a:t>
+            </a:r>
+          </a:p>
+          <a:p>
+            <a:pPr marL="0" indent="0">
+              <a:buNone/>
+            </a:pPr>
+            <a:r>
+              <a:rPr lang="zh-CN" altLang="en-US" dirty="0"/>
+              <a:t>有些孩子严重到什么程度呢？</a:t>
+            </a:r>
+          </a:p>
+          <a:p>
+            <a:pPr marL="0" indent="0">
+              <a:buNone/>
+            </a:pPr>
+            <a:r>
+              <a:rPr lang="zh-CN" altLang="en-US" dirty="0"/>
+              <a:t>比如有个孩子说过这样的话。</a:t>
+            </a:r>
+          </a:p>
+          <a:p>
+            <a:pPr marL="0" indent="0">
+              <a:buNone/>
+            </a:pPr>
+            <a:r>
+              <a:rPr lang="zh-CN" altLang="en-US" dirty="0"/>
+              <a:t>他说他不敢见到太阳。</a:t>
+            </a:r>
+          </a:p>
+          <a:p>
+            <a:pPr marL="0" indent="0">
+              <a:buNone/>
+            </a:pPr>
+            <a:r>
+              <a:rPr lang="zh-CN" altLang="en-US" dirty="0"/>
+              <a:t>太阳会伤害我。</a:t>
+            </a:r>
+          </a:p>
+          <a:p>
+            <a:pPr marL="0" indent="0">
+              <a:buNone/>
+            </a:pPr>
+            <a:r>
+              <a:rPr lang="zh-CN" altLang="en-US" dirty="0"/>
+              <a:t>大家想一想，哪里没有太阳？</a:t>
+            </a:r>
+          </a:p>
+          <a:p>
+            <a:pPr marL="0" indent="0">
+              <a:buNone/>
+            </a:pPr>
+            <a:r>
+              <a:rPr lang="zh-CN" altLang="en-US" dirty="0"/>
+              <a:t>只有地下没有太阳，难道他只能生活在地下吗？</a:t>
+            </a:r>
+          </a:p>
+        </p:txBody>
+      </p:sp>
+    </p:spTree>
+    <p:extLst>
+      <p:ext uri="{BB962C8B-B14F-4D97-AF65-F5344CB8AC3E}">
+        <p14:creationId xmlns:p14="http://schemas.microsoft.com/office/powerpoint/2010/main" val="201398923"/>
+      </p:ext>
+    </p:extLst>
+  </p:cSld>
+  <p:clrMapOvr>
+    <a:masterClrMapping/>
+  </p:clrMapOvr>
+</p:sld>
+</file>
+
+<file path=ppt/slides/slide42.xml><?xml version="1.0" encoding="utf-8"?>
+<p:sld xmlns:a="http://schemas.openxmlformats.org/drawingml/2006/main" xmlns:r="http://schemas.openxmlformats.org/officeDocument/2006/relationships" xmlns:p="http://schemas.openxmlformats.org/presentationml/2006/main">
+  <p:cSld>
+    <p:spTree>
+      <p:nvGrpSpPr>
+        <p:cNvPr id="1" name="">
+          <a:extLst>
+            <a:ext uri="{FF2B5EF4-FFF2-40B4-BE49-F238E27FC236}">
+              <a16:creationId xmlns:a16="http://schemas.microsoft.com/office/drawing/2014/main" id="{659AA2D6-49F1-058F-9C82-1EA33B6D77C8}"/>
+            </a:ext>
+          </a:extLst>
+        </p:cNvPr>
+        <p:cNvGrpSpPr/>
+        <p:nvPr/>
+      </p:nvGrpSpPr>
+      <p:grpSpPr>
+        <a:xfrm>
+          <a:off x="0" y="0"/>
+          <a:ext cx="0" cy="0"/>
+          <a:chOff x="0" y="0"/>
+          <a:chExt cx="0" cy="0"/>
+        </a:xfrm>
+      </p:grpSpPr>
+      <p:sp>
+        <p:nvSpPr>
+          <p:cNvPr id="2" name="标题 1">
+            <a:extLst>
+              <a:ext uri="{FF2B5EF4-FFF2-40B4-BE49-F238E27FC236}">
+                <a16:creationId xmlns:a16="http://schemas.microsoft.com/office/drawing/2014/main" id="{F77C6474-117C-B73A-F95A-841F6F4324DC}"/>
+              </a:ext>
+            </a:extLst>
+          </p:cNvPr>
+          <p:cNvSpPr>
+            <a:spLocks noGrp="1"/>
+          </p:cNvSpPr>
+          <p:nvPr>
+            <p:ph type="title"/>
+          </p:nvPr>
+        </p:nvSpPr>
+        <p:spPr/>
+        <p:txBody>
+          <a:bodyPr/>
+          <a:lstStyle/>
+          <a:p>
+            <a:r>
+              <a:rPr lang="zh-CN" altLang="en-US" sz="4400" dirty="0"/>
+              <a:t>低欲望综合症</a:t>
+            </a:r>
+          </a:p>
+        </p:txBody>
+      </p:sp>
+      <p:sp>
+        <p:nvSpPr>
+          <p:cNvPr id="3" name="内容占位符 2">
+            <a:extLst>
+              <a:ext uri="{FF2B5EF4-FFF2-40B4-BE49-F238E27FC236}">
+                <a16:creationId xmlns:a16="http://schemas.microsoft.com/office/drawing/2014/main" id="{CFC534AB-D540-56BB-F4B8-9A5C721B4C56}"/>
+              </a:ext>
+            </a:extLst>
+          </p:cNvPr>
+          <p:cNvSpPr>
+            <a:spLocks noGrp="1"/>
+          </p:cNvSpPr>
+          <p:nvPr>
+            <p:ph idx="1"/>
+          </p:nvPr>
+        </p:nvSpPr>
+        <p:spPr/>
+        <p:txBody>
+          <a:bodyPr/>
+          <a:lstStyle/>
+          <a:p>
+            <a:pPr marL="0" indent="0">
+              <a:buNone/>
+            </a:pPr>
+            <a:r>
+              <a:rPr lang="zh-CN" altLang="en-US" dirty="0"/>
+              <a:t>低欲望综合症</a:t>
+            </a:r>
+          </a:p>
+          <a:p>
+            <a:pPr marL="0" indent="0">
+              <a:buNone/>
+            </a:pPr>
+            <a:r>
+              <a:rPr lang="zh-CN" altLang="en-US" dirty="0"/>
+              <a:t>是丧失了欲望的问题。</a:t>
+            </a:r>
+          </a:p>
+          <a:p>
+            <a:pPr marL="0" indent="0">
+              <a:buNone/>
+            </a:pPr>
+            <a:r>
+              <a:rPr lang="zh-CN" altLang="en-US" dirty="0"/>
+              <a:t>网上很多搞心理学的，他们学的都是弗洛伊德时代的心理学，当时弗洛伊德主要是治疗欲望过强的问题。</a:t>
+            </a:r>
+          </a:p>
+          <a:p>
+            <a:pPr marL="0" indent="0">
+              <a:buNone/>
+            </a:pPr>
+            <a:r>
+              <a:rPr lang="zh-CN" altLang="en-US" dirty="0"/>
+              <a:t>而现在是完全相反的，他们用错误的理论去看待现在的问题，必然得出错误的结论。</a:t>
+            </a:r>
+          </a:p>
+          <a:p>
+            <a:pPr marL="0" indent="0">
+              <a:buNone/>
+            </a:pPr>
+            <a:r>
+              <a:rPr lang="zh-CN" altLang="en-US" dirty="0"/>
+              <a:t>因为低欲望是不好搞的，一个人失去了欲望，你怎么处理都将无效，没有那么简单。</a:t>
+            </a:r>
+          </a:p>
+        </p:txBody>
+      </p:sp>
+    </p:spTree>
+    <p:extLst>
+      <p:ext uri="{BB962C8B-B14F-4D97-AF65-F5344CB8AC3E}">
+        <p14:creationId xmlns:p14="http://schemas.microsoft.com/office/powerpoint/2010/main" val="50470310"/>
+      </p:ext>
+    </p:extLst>
+  </p:cSld>
+  <p:clrMapOvr>
+    <a:masterClrMapping/>
+  </p:clrMapOvr>
+</p:sld>
+</file>
+
+<file path=ppt/slides/slide43.xml><?xml version="1.0" encoding="utf-8"?>
+<p:sld xmlns:a="http://schemas.openxmlformats.org/drawingml/2006/main" xmlns:r="http://schemas.openxmlformats.org/officeDocument/2006/relationships" xmlns:p="http://schemas.openxmlformats.org/presentationml/2006/main">
+  <p:cSld>
+    <p:spTree>
+      <p:nvGrpSpPr>
+        <p:cNvPr id="1" name="">
+          <a:extLst>
+            <a:ext uri="{FF2B5EF4-FFF2-40B4-BE49-F238E27FC236}">
+              <a16:creationId xmlns:a16="http://schemas.microsoft.com/office/drawing/2014/main" id="{F264BCFF-63FB-DC1C-9E02-57A425657F2E}"/>
+            </a:ext>
+          </a:extLst>
+        </p:cNvPr>
+        <p:cNvGrpSpPr/>
+        <p:nvPr/>
+      </p:nvGrpSpPr>
+      <p:grpSpPr>
+        <a:xfrm>
+          <a:off x="0" y="0"/>
+          <a:ext cx="0" cy="0"/>
+          <a:chOff x="0" y="0"/>
+          <a:chExt cx="0" cy="0"/>
+        </a:xfrm>
+      </p:grpSpPr>
+      <p:sp>
+        <p:nvSpPr>
+          <p:cNvPr id="2" name="标题 1">
+            <a:extLst>
+              <a:ext uri="{FF2B5EF4-FFF2-40B4-BE49-F238E27FC236}">
+                <a16:creationId xmlns:a16="http://schemas.microsoft.com/office/drawing/2014/main" id="{C97BDF0C-D6D4-1FCA-DF44-19737BA3F466}"/>
+              </a:ext>
+            </a:extLst>
+          </p:cNvPr>
+          <p:cNvSpPr>
+            <a:spLocks noGrp="1"/>
+          </p:cNvSpPr>
+          <p:nvPr>
+            <p:ph type="title"/>
+          </p:nvPr>
+        </p:nvSpPr>
+        <p:spPr/>
+        <p:txBody>
+          <a:bodyPr/>
+          <a:lstStyle/>
+          <a:p>
+            <a:r>
+              <a:rPr lang="zh-CN" altLang="en-US" sz="4400" dirty="0"/>
+              <a:t>低欲望综合症的表现</a:t>
+            </a:r>
+          </a:p>
+        </p:txBody>
+      </p:sp>
+      <p:sp>
+        <p:nvSpPr>
+          <p:cNvPr id="3" name="内容占位符 2">
+            <a:extLst>
+              <a:ext uri="{FF2B5EF4-FFF2-40B4-BE49-F238E27FC236}">
+                <a16:creationId xmlns:a16="http://schemas.microsoft.com/office/drawing/2014/main" id="{59496116-EBCD-132E-4CEE-6B7444A1131F}"/>
+              </a:ext>
+            </a:extLst>
+          </p:cNvPr>
+          <p:cNvSpPr>
+            <a:spLocks noGrp="1"/>
+          </p:cNvSpPr>
+          <p:nvPr>
+            <p:ph idx="1"/>
+          </p:nvPr>
+        </p:nvSpPr>
+        <p:spPr/>
+        <p:txBody>
+          <a:bodyPr/>
+          <a:lstStyle/>
+          <a:p>
+            <a:pPr marL="0" indent="0">
+              <a:buNone/>
+            </a:pPr>
+            <a:r>
+              <a:rPr lang="zh-CN" altLang="en-US" dirty="0"/>
+              <a:t>这种低欲望在孩子们中传播，现在越来越广泛、越来越严重。</a:t>
+            </a:r>
+          </a:p>
+          <a:p>
+            <a:pPr marL="0" indent="0">
+              <a:buNone/>
+            </a:pPr>
+            <a:r>
+              <a:rPr lang="zh-CN" altLang="en-US" dirty="0"/>
+              <a:t>当然，低欲望也分等级。</a:t>
+            </a:r>
+          </a:p>
+          <a:p>
+            <a:pPr marL="0" indent="0">
+              <a:buNone/>
+            </a:pPr>
+            <a:r>
+              <a:rPr lang="zh-CN" altLang="en-US" dirty="0"/>
+              <a:t>最严重的，是你问他吃什么，他对吃什么都没有任何兴趣。</a:t>
+            </a:r>
+          </a:p>
+          <a:p>
+            <a:pPr marL="0" indent="0">
+              <a:buNone/>
+            </a:pPr>
+            <a:r>
+              <a:rPr lang="zh-CN" altLang="en-US" dirty="0"/>
+              <a:t>一般严重的至少还对吃有那么一点兴趣。</a:t>
+            </a:r>
+          </a:p>
+          <a:p>
+            <a:pPr marL="0" indent="0">
+              <a:buNone/>
+            </a:pPr>
+            <a:r>
+              <a:rPr lang="zh-CN" altLang="en-US" dirty="0"/>
+              <a:t>你看现在的年轻人，只知道吃方便面、外卖、奶茶。</a:t>
+            </a:r>
+          </a:p>
+        </p:txBody>
+      </p:sp>
+    </p:spTree>
+    <p:extLst>
+      <p:ext uri="{BB962C8B-B14F-4D97-AF65-F5344CB8AC3E}">
+        <p14:creationId xmlns:p14="http://schemas.microsoft.com/office/powerpoint/2010/main" val="4170672797"/>
+      </p:ext>
+    </p:extLst>
+  </p:cSld>
+  <p:clrMapOvr>
+    <a:masterClrMapping/>
+  </p:clrMapOvr>
+</p:sld>
+</file>
+
+<file path=ppt/slides/slide44.xml><?xml version="1.0" encoding="utf-8"?>
+<p:sld xmlns:a="http://schemas.openxmlformats.org/drawingml/2006/main" xmlns:r="http://schemas.openxmlformats.org/officeDocument/2006/relationships" xmlns:p="http://schemas.openxmlformats.org/presentationml/2006/main">
+  <p:cSld>
+    <p:spTree>
+      <p:nvGrpSpPr>
+        <p:cNvPr id="1" name="">
+          <a:extLst>
+            <a:ext uri="{FF2B5EF4-FFF2-40B4-BE49-F238E27FC236}">
+              <a16:creationId xmlns:a16="http://schemas.microsoft.com/office/drawing/2014/main" id="{4239FEF6-1E28-1DD9-CBB6-A2FA01B61D86}"/>
+            </a:ext>
+          </a:extLst>
+        </p:cNvPr>
+        <p:cNvGrpSpPr/>
+        <p:nvPr/>
+      </p:nvGrpSpPr>
+      <p:grpSpPr>
+        <a:xfrm>
+          <a:off x="0" y="0"/>
+          <a:ext cx="0" cy="0"/>
+          <a:chOff x="0" y="0"/>
+          <a:chExt cx="0" cy="0"/>
+        </a:xfrm>
+      </p:grpSpPr>
+      <p:sp>
+        <p:nvSpPr>
+          <p:cNvPr id="2" name="标题 1">
+            <a:extLst>
+              <a:ext uri="{FF2B5EF4-FFF2-40B4-BE49-F238E27FC236}">
+                <a16:creationId xmlns:a16="http://schemas.microsoft.com/office/drawing/2014/main" id="{97EF93AB-78BB-28BB-03BD-B28EF35DA270}"/>
+              </a:ext>
+            </a:extLst>
+          </p:cNvPr>
+          <p:cNvSpPr>
+            <a:spLocks noGrp="1"/>
+          </p:cNvSpPr>
+          <p:nvPr>
+            <p:ph type="title"/>
+          </p:nvPr>
+        </p:nvSpPr>
+        <p:spPr/>
+        <p:txBody>
+          <a:bodyPr/>
+          <a:lstStyle/>
+          <a:p>
+            <a:r>
+              <a:rPr lang="zh-CN" altLang="en-US" sz="4400" dirty="0"/>
+              <a:t>教育重点不再是学习成绩和方法</a:t>
+            </a:r>
+          </a:p>
+        </p:txBody>
+      </p:sp>
+      <p:sp>
+        <p:nvSpPr>
+          <p:cNvPr id="3" name="内容占位符 2">
+            <a:extLst>
+              <a:ext uri="{FF2B5EF4-FFF2-40B4-BE49-F238E27FC236}">
+                <a16:creationId xmlns:a16="http://schemas.microsoft.com/office/drawing/2014/main" id="{338015CB-CA8B-8826-1585-C542D28E9B53}"/>
+              </a:ext>
+            </a:extLst>
+          </p:cNvPr>
+          <p:cNvSpPr>
+            <a:spLocks noGrp="1"/>
+          </p:cNvSpPr>
+          <p:nvPr>
+            <p:ph idx="1"/>
+          </p:nvPr>
+        </p:nvSpPr>
+        <p:spPr/>
+        <p:txBody>
+          <a:bodyPr/>
+          <a:lstStyle/>
+          <a:p>
+            <a:pPr marL="0" indent="0">
+              <a:buNone/>
+            </a:pPr>
+            <a:r>
+              <a:rPr lang="zh-CN" altLang="en-US" dirty="0"/>
+              <a:t>这些低欲望的问题，导致了孩子进入社会后对工作对职业没有任何兴趣和动力。</a:t>
+            </a:r>
+          </a:p>
+          <a:p>
+            <a:pPr marL="0" indent="0">
+              <a:buNone/>
+            </a:pPr>
+            <a:r>
+              <a:rPr lang="zh-CN" altLang="en-US" dirty="0"/>
+              <a:t>而家长们却只看到了表面，没有真正搞清楚问题的本源。</a:t>
+            </a:r>
+          </a:p>
+          <a:p>
+            <a:pPr marL="0" indent="0">
+              <a:buNone/>
+            </a:pPr>
+            <a:r>
+              <a:rPr lang="zh-CN" altLang="en-US" dirty="0"/>
+              <a:t>所以你看，很多家长来听课，只会问一些如何提高孩子学习成绩和学习方法的问题。</a:t>
+            </a:r>
+          </a:p>
+          <a:p>
+            <a:pPr marL="0" indent="0">
+              <a:buNone/>
+            </a:pPr>
+            <a:r>
+              <a:rPr lang="zh-CN" altLang="en-US" dirty="0"/>
+              <a:t>然而真正的问题，最严重的问题，都被大家忽略了！</a:t>
+            </a:r>
+          </a:p>
+        </p:txBody>
+      </p:sp>
+    </p:spTree>
+    <p:extLst>
+      <p:ext uri="{BB962C8B-B14F-4D97-AF65-F5344CB8AC3E}">
+        <p14:creationId xmlns:p14="http://schemas.microsoft.com/office/powerpoint/2010/main" val="2408514183"/>
+      </p:ext>
+    </p:extLst>
+  </p:cSld>
+  <p:clrMapOvr>
+    <a:masterClrMapping/>
+  </p:clrMapOvr>
+</p:sld>
+</file>
+
+<file path=ppt/slides/slide45.xml><?xml version="1.0" encoding="utf-8"?>
+<p:sld xmlns:a="http://schemas.openxmlformats.org/drawingml/2006/main" xmlns:r="http://schemas.openxmlformats.org/officeDocument/2006/relationships" xmlns:p="http://schemas.openxmlformats.org/presentationml/2006/main">
+  <p:cSld>
+    <p:spTree>
+      <p:nvGrpSpPr>
+        <p:cNvPr id="1" name="">
+          <a:extLst>
+            <a:ext uri="{FF2B5EF4-FFF2-40B4-BE49-F238E27FC236}">
+              <a16:creationId xmlns:a16="http://schemas.microsoft.com/office/drawing/2014/main" id="{4C224E28-1D4D-69C6-D85C-1801894FCDA3}"/>
+            </a:ext>
+          </a:extLst>
+        </p:cNvPr>
+        <p:cNvGrpSpPr/>
+        <p:nvPr/>
+      </p:nvGrpSpPr>
+      <p:grpSpPr>
+        <a:xfrm>
+          <a:off x="0" y="0"/>
+          <a:ext cx="0" cy="0"/>
+          <a:chOff x="0" y="0"/>
+          <a:chExt cx="0" cy="0"/>
+        </a:xfrm>
+      </p:grpSpPr>
+      <p:sp>
+        <p:nvSpPr>
+          <p:cNvPr id="2" name="标题 1">
+            <a:extLst>
+              <a:ext uri="{FF2B5EF4-FFF2-40B4-BE49-F238E27FC236}">
+                <a16:creationId xmlns:a16="http://schemas.microsoft.com/office/drawing/2014/main" id="{C395CC02-347E-D1CC-ED8A-064752802EE3}"/>
+              </a:ext>
+            </a:extLst>
+          </p:cNvPr>
+          <p:cNvSpPr>
+            <a:spLocks noGrp="1"/>
+          </p:cNvSpPr>
+          <p:nvPr>
+            <p:ph type="title"/>
+          </p:nvPr>
+        </p:nvSpPr>
+        <p:spPr/>
+        <p:txBody>
+          <a:bodyPr/>
+          <a:lstStyle/>
+          <a:p>
+            <a:r>
+              <a:rPr lang="zh-CN" altLang="en-US" sz="4400" dirty="0"/>
+              <a:t>多巴胺模型</a:t>
+            </a:r>
+          </a:p>
+        </p:txBody>
+      </p:sp>
+      <p:sp>
+        <p:nvSpPr>
+          <p:cNvPr id="3" name="内容占位符 2">
+            <a:extLst>
+              <a:ext uri="{FF2B5EF4-FFF2-40B4-BE49-F238E27FC236}">
+                <a16:creationId xmlns:a16="http://schemas.microsoft.com/office/drawing/2014/main" id="{E34815AA-919D-4537-6F5D-C486F32AC863}"/>
+              </a:ext>
+            </a:extLst>
+          </p:cNvPr>
+          <p:cNvSpPr>
+            <a:spLocks noGrp="1"/>
+          </p:cNvSpPr>
+          <p:nvPr>
+            <p:ph idx="1"/>
+          </p:nvPr>
+        </p:nvSpPr>
+        <p:spPr/>
+        <p:txBody>
+          <a:bodyPr/>
+          <a:lstStyle/>
+          <a:p>
+            <a:pPr marL="0" indent="0">
+              <a:buNone/>
+            </a:pPr>
+            <a:r>
+              <a:rPr lang="zh-CN" altLang="en-US" dirty="0"/>
+              <a:t>就是这个孩子在青春期的时候</a:t>
+            </a:r>
+          </a:p>
+          <a:p>
+            <a:pPr marL="0" indent="0">
+              <a:buNone/>
+            </a:pPr>
+            <a:endParaRPr lang="zh-CN" altLang="en-US" dirty="0"/>
+          </a:p>
+          <a:p>
+            <a:pPr marL="0" indent="0">
+              <a:buNone/>
+            </a:pPr>
+            <a:r>
+              <a:rPr lang="zh-CN" altLang="en-US" dirty="0"/>
+              <a:t>三大模型：多巴胺模型、血清素模型、压力激素模型。</a:t>
+            </a:r>
+          </a:p>
+          <a:p>
+            <a:pPr marL="0" indent="0">
+              <a:buNone/>
+            </a:pPr>
+            <a:endParaRPr lang="zh-CN" altLang="en-US" dirty="0"/>
+          </a:p>
+          <a:p>
+            <a:pPr marL="0" indent="0">
+              <a:buNone/>
+            </a:pPr>
+            <a:r>
+              <a:rPr lang="zh-CN" altLang="en-US" dirty="0"/>
+              <a:t>多巴胺模型讲过了。</a:t>
+            </a:r>
+          </a:p>
+        </p:txBody>
+      </p:sp>
+    </p:spTree>
+    <p:extLst>
+      <p:ext uri="{BB962C8B-B14F-4D97-AF65-F5344CB8AC3E}">
+        <p14:creationId xmlns:p14="http://schemas.microsoft.com/office/powerpoint/2010/main" val="3144703544"/>
+      </p:ext>
+    </p:extLst>
+  </p:cSld>
+  <p:clrMapOvr>
+    <a:masterClrMapping/>
+  </p:clrMapOvr>
+</p:sld>
+</file>
+
+<file path=ppt/slides/slide46.xml><?xml version="1.0" encoding="utf-8"?>
+<p:sld xmlns:a="http://schemas.openxmlformats.org/drawingml/2006/main" xmlns:r="http://schemas.openxmlformats.org/officeDocument/2006/relationships" xmlns:p="http://schemas.openxmlformats.org/presentationml/2006/main">
+  <p:cSld>
+    <p:spTree>
+      <p:nvGrpSpPr>
+        <p:cNvPr id="1" name="">
+          <a:extLst>
+            <a:ext uri="{FF2B5EF4-FFF2-40B4-BE49-F238E27FC236}">
+              <a16:creationId xmlns:a16="http://schemas.microsoft.com/office/drawing/2014/main" id="{90196926-917C-1BAB-2C87-1518750794CD}"/>
+            </a:ext>
+          </a:extLst>
+        </p:cNvPr>
+        <p:cNvGrpSpPr/>
+        <p:nvPr/>
+      </p:nvGrpSpPr>
+      <p:grpSpPr>
+        <a:xfrm>
+          <a:off x="0" y="0"/>
+          <a:ext cx="0" cy="0"/>
+          <a:chOff x="0" y="0"/>
+          <a:chExt cx="0" cy="0"/>
+        </a:xfrm>
+      </p:grpSpPr>
+      <p:sp>
+        <p:nvSpPr>
+          <p:cNvPr id="2" name="标题 1">
+            <a:extLst>
+              <a:ext uri="{FF2B5EF4-FFF2-40B4-BE49-F238E27FC236}">
+                <a16:creationId xmlns:a16="http://schemas.microsoft.com/office/drawing/2014/main" id="{84158EB0-3B57-6230-C086-89FFCEF43DE2}"/>
+              </a:ext>
+            </a:extLst>
+          </p:cNvPr>
+          <p:cNvSpPr>
+            <a:spLocks noGrp="1"/>
+          </p:cNvSpPr>
+          <p:nvPr>
+            <p:ph type="title"/>
+          </p:nvPr>
+        </p:nvSpPr>
+        <p:spPr/>
+        <p:txBody>
+          <a:bodyPr/>
+          <a:lstStyle/>
+          <a:p>
+            <a:r>
+              <a:rPr lang="zh-CN" altLang="en-US" sz="4400" dirty="0"/>
+              <a:t>血清素模型、压力激素模型</a:t>
+            </a:r>
+          </a:p>
+        </p:txBody>
+      </p:sp>
+      <p:sp>
+        <p:nvSpPr>
+          <p:cNvPr id="3" name="内容占位符 2">
+            <a:extLst>
+              <a:ext uri="{FF2B5EF4-FFF2-40B4-BE49-F238E27FC236}">
+                <a16:creationId xmlns:a16="http://schemas.microsoft.com/office/drawing/2014/main" id="{8088C0F3-2085-2211-7B23-9697E2D1B71B}"/>
+              </a:ext>
+            </a:extLst>
+          </p:cNvPr>
+          <p:cNvSpPr>
+            <a:spLocks noGrp="1"/>
+          </p:cNvSpPr>
+          <p:nvPr>
+            <p:ph idx="1"/>
+          </p:nvPr>
+        </p:nvSpPr>
+        <p:spPr/>
+        <p:txBody>
+          <a:bodyPr/>
+          <a:lstStyle/>
+          <a:p>
+            <a:pPr marL="0" indent="0">
+              <a:buNone/>
+            </a:pPr>
+            <a:r>
+              <a:rPr lang="zh-CN" altLang="en-US" dirty="0"/>
+              <a:t>血清素是什么呢</a:t>
+            </a:r>
+          </a:p>
+          <a:p>
+            <a:pPr marL="0" indent="0">
+              <a:buNone/>
+            </a:pPr>
+            <a:r>
+              <a:rPr lang="zh-CN" altLang="en-US" dirty="0"/>
+              <a:t>就是让我们得到安抚的一种激素</a:t>
+            </a:r>
+          </a:p>
+          <a:p>
+            <a:pPr marL="0" indent="0">
+              <a:buNone/>
+            </a:pPr>
+            <a:r>
+              <a:rPr lang="zh-CN" altLang="en-US" dirty="0"/>
+              <a:t>比如说我感到压力了啊</a:t>
+            </a:r>
+          </a:p>
+          <a:p>
+            <a:pPr marL="0" indent="0">
+              <a:buNone/>
+            </a:pPr>
+            <a:r>
+              <a:rPr lang="zh-CN" altLang="en-US" dirty="0"/>
+              <a:t>我觉得需要一种情绪获得满足了</a:t>
+            </a:r>
+          </a:p>
+          <a:p>
+            <a:pPr marL="0" indent="0">
+              <a:buNone/>
+            </a:pPr>
+            <a:r>
+              <a:rPr lang="zh-CN" altLang="en-US" dirty="0"/>
+              <a:t>你就需要血清素安抚我自己</a:t>
+            </a:r>
+          </a:p>
+        </p:txBody>
+      </p:sp>
+    </p:spTree>
+    <p:extLst>
+      <p:ext uri="{BB962C8B-B14F-4D97-AF65-F5344CB8AC3E}">
+        <p14:creationId xmlns:p14="http://schemas.microsoft.com/office/powerpoint/2010/main" val="3216303502"/>
+      </p:ext>
+    </p:extLst>
+  </p:cSld>
+  <p:clrMapOvr>
+    <a:masterClrMapping/>
+  </p:clrMapOvr>
+</p:sld>
+</file>
+
+<file path=ppt/slides/slide47.xml><?xml version="1.0" encoding="utf-8"?>
+<p:sld xmlns:a="http://schemas.openxmlformats.org/drawingml/2006/main" xmlns:r="http://schemas.openxmlformats.org/officeDocument/2006/relationships" xmlns:p="http://schemas.openxmlformats.org/presentationml/2006/main">
+  <p:cSld>
+    <p:spTree>
+      <p:nvGrpSpPr>
+        <p:cNvPr id="1" name="">
+          <a:extLst>
+            <a:ext uri="{FF2B5EF4-FFF2-40B4-BE49-F238E27FC236}">
+              <a16:creationId xmlns:a16="http://schemas.microsoft.com/office/drawing/2014/main" id="{09311EBA-BFE6-35B8-DA28-A385F03C63C0}"/>
+            </a:ext>
+          </a:extLst>
+        </p:cNvPr>
+        <p:cNvGrpSpPr/>
+        <p:nvPr/>
+      </p:nvGrpSpPr>
+      <p:grpSpPr>
+        <a:xfrm>
+          <a:off x="0" y="0"/>
+          <a:ext cx="0" cy="0"/>
+          <a:chOff x="0" y="0"/>
+          <a:chExt cx="0" cy="0"/>
+        </a:xfrm>
+      </p:grpSpPr>
+      <p:sp>
+        <p:nvSpPr>
+          <p:cNvPr id="2" name="标题 1">
+            <a:extLst>
+              <a:ext uri="{FF2B5EF4-FFF2-40B4-BE49-F238E27FC236}">
+                <a16:creationId xmlns:a16="http://schemas.microsoft.com/office/drawing/2014/main" id="{C6455C79-761D-A311-F539-EF2C9A03BCDF}"/>
+              </a:ext>
+            </a:extLst>
+          </p:cNvPr>
+          <p:cNvSpPr>
+            <a:spLocks noGrp="1"/>
+          </p:cNvSpPr>
+          <p:nvPr>
+            <p:ph type="title"/>
+          </p:nvPr>
+        </p:nvSpPr>
+        <p:spPr/>
+        <p:txBody>
+          <a:bodyPr/>
+          <a:lstStyle/>
+          <a:p>
+            <a:r>
+              <a:rPr lang="zh-CN" altLang="en-US" sz="4400" dirty="0"/>
+              <a:t>性驱力模型</a:t>
+            </a:r>
+          </a:p>
+        </p:txBody>
+      </p:sp>
+      <p:sp>
+        <p:nvSpPr>
+          <p:cNvPr id="3" name="内容占位符 2">
+            <a:extLst>
+              <a:ext uri="{FF2B5EF4-FFF2-40B4-BE49-F238E27FC236}">
+                <a16:creationId xmlns:a16="http://schemas.microsoft.com/office/drawing/2014/main" id="{6E6B7CDF-AAB7-6D46-DE81-A316F6CBB3A8}"/>
+              </a:ext>
+            </a:extLst>
+          </p:cNvPr>
+          <p:cNvSpPr>
+            <a:spLocks noGrp="1"/>
+          </p:cNvSpPr>
+          <p:nvPr>
+            <p:ph idx="1"/>
+          </p:nvPr>
+        </p:nvSpPr>
+        <p:spPr/>
+        <p:txBody>
+          <a:bodyPr/>
+          <a:lstStyle/>
+          <a:p>
+            <a:pPr marL="0" indent="0">
+              <a:buNone/>
+            </a:pPr>
+            <a:r>
+              <a:rPr lang="zh-CN" altLang="en-US" dirty="0"/>
+              <a:t>其实还有一个模型，都不好意思跟你们说，就是性驱力模型</a:t>
+            </a:r>
+          </a:p>
+          <a:p>
+            <a:pPr marL="0" indent="0">
+              <a:buNone/>
+            </a:pPr>
+            <a:r>
+              <a:rPr lang="zh-CN" altLang="en-US" dirty="0"/>
+              <a:t>现在这些孩子们</a:t>
+            </a:r>
+          </a:p>
+          <a:p>
+            <a:pPr marL="0" indent="0">
+              <a:buNone/>
+            </a:pPr>
+            <a:r>
+              <a:rPr lang="zh-CN" altLang="en-US" dirty="0"/>
+              <a:t>他们不能交往</a:t>
+            </a:r>
+          </a:p>
+          <a:p>
+            <a:pPr marL="0" indent="0">
+              <a:buNone/>
+            </a:pPr>
+            <a:r>
+              <a:rPr lang="zh-CN" altLang="en-US" dirty="0"/>
+              <a:t>没有男女朋友关系</a:t>
+            </a:r>
+          </a:p>
+          <a:p>
+            <a:pPr marL="0" indent="0">
+              <a:buNone/>
+            </a:pPr>
+            <a:r>
+              <a:rPr lang="zh-CN" altLang="en-US" dirty="0"/>
+              <a:t>没有运动、没有艺术</a:t>
+            </a:r>
+          </a:p>
+          <a:p>
+            <a:pPr marL="0" indent="0">
+              <a:buNone/>
+            </a:pPr>
+            <a:r>
+              <a:rPr lang="zh-CN" altLang="en-US" dirty="0"/>
+              <a:t>然后呢，他们在青春期的时候</a:t>
+            </a:r>
+          </a:p>
+          <a:p>
+            <a:pPr marL="0" indent="0">
+              <a:buNone/>
+            </a:pPr>
+            <a:r>
+              <a:rPr lang="zh-CN" altLang="en-US" dirty="0"/>
+              <a:t>他们其实是很痛苦的</a:t>
+            </a:r>
+          </a:p>
+        </p:txBody>
+      </p:sp>
+    </p:spTree>
+    <p:extLst>
+      <p:ext uri="{BB962C8B-B14F-4D97-AF65-F5344CB8AC3E}">
+        <p14:creationId xmlns:p14="http://schemas.microsoft.com/office/powerpoint/2010/main" val="2701718977"/>
+      </p:ext>
+    </p:extLst>
+  </p:cSld>
+  <p:clrMapOvr>
+    <a:masterClrMapping/>
+  </p:clrMapOvr>
+</p:sld>
+</file>
+
+<file path=ppt/slides/slide48.xml><?xml version="1.0" encoding="utf-8"?>
+<p:sld xmlns:a="http://schemas.openxmlformats.org/drawingml/2006/main" xmlns:r="http://schemas.openxmlformats.org/officeDocument/2006/relationships" xmlns:p="http://schemas.openxmlformats.org/presentationml/2006/main">
+  <p:cSld>
+    <p:spTree>
+      <p:nvGrpSpPr>
+        <p:cNvPr id="1" name="">
+          <a:extLst>
+            <a:ext uri="{FF2B5EF4-FFF2-40B4-BE49-F238E27FC236}">
+              <a16:creationId xmlns:a16="http://schemas.microsoft.com/office/drawing/2014/main" id="{9FB8B92A-EC36-B734-49FB-44CDD919D109}"/>
+            </a:ext>
+          </a:extLst>
+        </p:cNvPr>
+        <p:cNvGrpSpPr/>
+        <p:nvPr/>
+      </p:nvGrpSpPr>
+      <p:grpSpPr>
+        <a:xfrm>
+          <a:off x="0" y="0"/>
+          <a:ext cx="0" cy="0"/>
+          <a:chOff x="0" y="0"/>
+          <a:chExt cx="0" cy="0"/>
+        </a:xfrm>
+      </p:grpSpPr>
+      <p:sp>
+        <p:nvSpPr>
+          <p:cNvPr id="2" name="标题 1">
+            <a:extLst>
+              <a:ext uri="{FF2B5EF4-FFF2-40B4-BE49-F238E27FC236}">
+                <a16:creationId xmlns:a16="http://schemas.microsoft.com/office/drawing/2014/main" id="{97855CE3-BF31-732B-8C43-ADB1D52EF8E6}"/>
+              </a:ext>
+            </a:extLst>
+          </p:cNvPr>
+          <p:cNvSpPr>
+            <a:spLocks noGrp="1"/>
+          </p:cNvSpPr>
+          <p:nvPr>
+            <p:ph type="title"/>
+          </p:nvPr>
+        </p:nvSpPr>
+        <p:spPr/>
+        <p:txBody>
+          <a:bodyPr/>
+          <a:lstStyle/>
+          <a:p>
+            <a:r>
+              <a:rPr lang="zh-CN" altLang="en-US" sz="4400" dirty="0"/>
+              <a:t>正常性驱力模型缺失的严重后果</a:t>
+            </a:r>
+          </a:p>
+        </p:txBody>
+      </p:sp>
+      <p:sp>
+        <p:nvSpPr>
+          <p:cNvPr id="3" name="内容占位符 2">
+            <a:extLst>
+              <a:ext uri="{FF2B5EF4-FFF2-40B4-BE49-F238E27FC236}">
+                <a16:creationId xmlns:a16="http://schemas.microsoft.com/office/drawing/2014/main" id="{AC6FB6EC-55E6-995D-1D88-14A099BD0F92}"/>
+              </a:ext>
+            </a:extLst>
+          </p:cNvPr>
+          <p:cNvSpPr>
+            <a:spLocks noGrp="1"/>
+          </p:cNvSpPr>
+          <p:nvPr>
+            <p:ph idx="1"/>
+          </p:nvPr>
+        </p:nvSpPr>
+        <p:spPr/>
+        <p:txBody>
+          <a:bodyPr/>
+          <a:lstStyle/>
+          <a:p>
+            <a:pPr marL="0" indent="0">
+              <a:buNone/>
+            </a:pPr>
+            <a:r>
+              <a:rPr lang="zh-CN" altLang="en-US" dirty="0"/>
+              <a:t>他们上暗网</a:t>
+            </a:r>
+          </a:p>
+          <a:p>
+            <a:pPr marL="0" indent="0">
+              <a:buNone/>
+            </a:pPr>
+            <a:r>
+              <a:rPr lang="zh-CN" altLang="en-US" dirty="0"/>
+              <a:t>在暗网上下载什么呢</a:t>
+            </a:r>
+          </a:p>
+          <a:p>
+            <a:pPr marL="0" indent="0">
+              <a:buNone/>
+            </a:pPr>
+            <a:r>
+              <a:rPr lang="zh-CN" altLang="en-US" dirty="0"/>
+              <a:t>下载各种各样的扭曲变态的性视频、短视频</a:t>
+            </a:r>
+          </a:p>
+          <a:p>
+            <a:pPr marL="0" indent="0">
+              <a:buNone/>
+            </a:pPr>
+            <a:r>
+              <a:rPr lang="zh-CN" altLang="en-US" dirty="0"/>
+              <a:t>然后把这俩孩子培养成一种非常奇葩的性模型</a:t>
+            </a:r>
+          </a:p>
+          <a:p>
+            <a:pPr marL="0" indent="0">
+              <a:buNone/>
+            </a:pPr>
+            <a:r>
+              <a:rPr lang="zh-CN" altLang="en-US" dirty="0"/>
+              <a:t>他们喜欢恋尸癖</a:t>
+            </a:r>
+          </a:p>
+          <a:p>
+            <a:pPr marL="0" indent="0">
+              <a:buNone/>
+            </a:pPr>
+            <a:r>
+              <a:rPr lang="zh-CN" altLang="en-US" dirty="0"/>
+              <a:t>对眼睛的是身上长着绿毛的尸体的视频</a:t>
+            </a:r>
+          </a:p>
+        </p:txBody>
+      </p:sp>
+    </p:spTree>
+    <p:extLst>
+      <p:ext uri="{BB962C8B-B14F-4D97-AF65-F5344CB8AC3E}">
+        <p14:creationId xmlns:p14="http://schemas.microsoft.com/office/powerpoint/2010/main" val="24962942"/>
+      </p:ext>
+    </p:extLst>
+  </p:cSld>
+  <p:clrMapOvr>
+    <a:masterClrMapping/>
+  </p:clrMapOvr>
+</p:sld>
+</file>
+
+<file path=ppt/slides/slide49.xml><?xml version="1.0" encoding="utf-8"?>
+<p:sld xmlns:a="http://schemas.openxmlformats.org/drawingml/2006/main" xmlns:r="http://schemas.openxmlformats.org/officeDocument/2006/relationships" xmlns:p="http://schemas.openxmlformats.org/presentationml/2006/main">
+  <p:cSld>
+    <p:spTree>
+      <p:nvGrpSpPr>
+        <p:cNvPr id="1" name="">
+          <a:extLst>
+            <a:ext uri="{FF2B5EF4-FFF2-40B4-BE49-F238E27FC236}">
+              <a16:creationId xmlns:a16="http://schemas.microsoft.com/office/drawing/2014/main" id="{0D1DBEFC-0FF9-A3DD-EFFC-3391DADD87E3}"/>
+            </a:ext>
+          </a:extLst>
+        </p:cNvPr>
+        <p:cNvGrpSpPr/>
+        <p:nvPr/>
+      </p:nvGrpSpPr>
+      <p:grpSpPr>
+        <a:xfrm>
+          <a:off x="0" y="0"/>
+          <a:ext cx="0" cy="0"/>
+          <a:chOff x="0" y="0"/>
+          <a:chExt cx="0" cy="0"/>
+        </a:xfrm>
+      </p:grpSpPr>
+      <p:sp>
+        <p:nvSpPr>
+          <p:cNvPr id="2" name="标题 1">
+            <a:extLst>
+              <a:ext uri="{FF2B5EF4-FFF2-40B4-BE49-F238E27FC236}">
+                <a16:creationId xmlns:a16="http://schemas.microsoft.com/office/drawing/2014/main" id="{AEF14A9A-7D8C-6599-6630-8E99CE240E14}"/>
+              </a:ext>
+            </a:extLst>
+          </p:cNvPr>
+          <p:cNvSpPr>
+            <a:spLocks noGrp="1"/>
+          </p:cNvSpPr>
+          <p:nvPr>
+            <p:ph type="title"/>
+          </p:nvPr>
+        </p:nvSpPr>
+        <p:spPr/>
+        <p:txBody>
+          <a:bodyPr/>
+          <a:lstStyle/>
+          <a:p>
+            <a:r>
+              <a:rPr lang="zh-CN" altLang="en-US" sz="4400" dirty="0"/>
+              <a:t>运动和人际互动</a:t>
+            </a:r>
+          </a:p>
+        </p:txBody>
+      </p:sp>
+      <p:sp>
+        <p:nvSpPr>
+          <p:cNvPr id="3" name="内容占位符 2">
+            <a:extLst>
+              <a:ext uri="{FF2B5EF4-FFF2-40B4-BE49-F238E27FC236}">
+                <a16:creationId xmlns:a16="http://schemas.microsoft.com/office/drawing/2014/main" id="{0515B74D-194C-6CA3-E1B7-EE354E1DE7B7}"/>
+              </a:ext>
+            </a:extLst>
+          </p:cNvPr>
+          <p:cNvSpPr>
+            <a:spLocks noGrp="1"/>
+          </p:cNvSpPr>
+          <p:nvPr>
+            <p:ph idx="1"/>
+          </p:nvPr>
+        </p:nvSpPr>
+        <p:spPr/>
+        <p:txBody>
+          <a:bodyPr/>
+          <a:lstStyle/>
+          <a:p>
+            <a:pPr marL="0" indent="0">
+              <a:buNone/>
+            </a:pPr>
+            <a:r>
+              <a:rPr lang="zh-CN" altLang="en-US" dirty="0"/>
+              <a:t>血清素是他需求爆棚的时候</a:t>
+            </a:r>
+          </a:p>
+          <a:p>
+            <a:pPr marL="0" indent="0">
+              <a:buNone/>
+            </a:pPr>
+            <a:r>
+              <a:rPr lang="zh-CN" altLang="en-US" dirty="0"/>
+              <a:t>你必须要来运动</a:t>
+            </a:r>
+          </a:p>
+          <a:p>
+            <a:pPr marL="0" indent="0">
+              <a:buNone/>
+            </a:pPr>
+            <a:r>
+              <a:rPr lang="zh-CN" altLang="en-US" dirty="0"/>
+              <a:t>你让他人际交往</a:t>
+            </a:r>
+          </a:p>
+          <a:p>
+            <a:pPr marL="0" indent="0">
+              <a:buNone/>
+            </a:pPr>
+            <a:r>
+              <a:rPr lang="zh-CN" altLang="en-US" dirty="0"/>
+              <a:t>否则你把这孩子整个生理上都给弄坏了</a:t>
+            </a:r>
+          </a:p>
+          <a:p>
+            <a:pPr marL="0" indent="0">
+              <a:buNone/>
+            </a:pPr>
+            <a:r>
+              <a:rPr lang="zh-CN" altLang="en-US" dirty="0"/>
+              <a:t>他有压力的时候</a:t>
+            </a:r>
+          </a:p>
+          <a:p>
+            <a:pPr marL="0" indent="0">
+              <a:buNone/>
+            </a:pPr>
+            <a:r>
+              <a:rPr lang="zh-CN" altLang="en-US" dirty="0"/>
+              <a:t>他必须要去通过这个方式来缓解</a:t>
+            </a:r>
+          </a:p>
+          <a:p>
+            <a:pPr marL="0" indent="0">
+              <a:buNone/>
+            </a:pPr>
+            <a:r>
+              <a:rPr lang="zh-CN" altLang="en-US" dirty="0"/>
+              <a:t>孩子们就游戏成瘾</a:t>
+            </a:r>
+          </a:p>
+        </p:txBody>
+      </p:sp>
+    </p:spTree>
+    <p:extLst>
+      <p:ext uri="{BB962C8B-B14F-4D97-AF65-F5344CB8AC3E}">
+        <p14:creationId xmlns:p14="http://schemas.microsoft.com/office/powerpoint/2010/main" val="4292771339"/>
+      </p:ext>
+    </p:extLst>
+  </p:cSld>
+  <p:clrMapOvr>
+    <a:masterClrMapping/>
+  </p:clrMapOvr>
+</p:sld>
+</file>
+
+<file path=ppt/slides/slide5.xml><?xml version="1.0" encoding="utf-8"?>
 <p:sld xmlns:a="http://schemas.openxmlformats.org/drawingml/2006/main" xmlns:r="http://schemas.openxmlformats.org/officeDocument/2006/relationships" xmlns:p="http://schemas.openxmlformats.org/presentationml/2006/main">
   <p:cSld>
     <p:spTree>
@@ -6955,15 +9896,25 @@
             <p:ph type="title"/>
           </p:nvPr>
         </p:nvSpPr>
-        <p:spPr/>
+        <p:spPr>
+          <a:xfrm>
+            <a:off x="521208" y="978408"/>
+            <a:ext cx="11155680" cy="850392"/>
+          </a:xfrm>
+        </p:spPr>
         <p:txBody>
           <a:bodyPr/>
           <a:lstStyle/>
           <a:p>
             <a:r>
               <a:rPr lang="zh-CN" altLang="en-US" sz="4400" dirty="0"/>
-              <a:t>第三代儿童教育就是面向未来的教育（一）</a:t>
-            </a:r>
+              <a:t>第三代儿童教育就是面向未来</a:t>
+            </a:r>
+            <a:r>
+              <a:rPr lang="zh-CN" altLang="en-US" sz="4400"/>
+              <a:t>的教育</a:t>
+            </a:r>
+            <a:endParaRPr lang="zh-CN" altLang="en-US" sz="4400" dirty="0"/>
           </a:p>
         </p:txBody>
       </p:sp>
@@ -6983,7 +9934,12 @@
             <p:ph idx="1"/>
           </p:nvPr>
         </p:nvSpPr>
-        <p:spPr/>
+        <p:spPr>
+          <a:xfrm>
+            <a:off x="521208" y="2070100"/>
+            <a:ext cx="11155680" cy="4275836"/>
+          </a:xfrm>
+        </p:spPr>
         <p:txBody>
           <a:bodyPr/>
           <a:lstStyle/>
@@ -7036,7 +9992,7 @@
 </p:sld>
 </file>
 
-<file path=ppt/slides/slide30.xml><?xml version="1.0" encoding="utf-8"?>
+<file path=ppt/slides/slide50.xml><?xml version="1.0" encoding="utf-8"?>
 <p:sld xmlns:a="http://schemas.openxmlformats.org/drawingml/2006/main" xmlns:r="http://schemas.openxmlformats.org/officeDocument/2006/relationships" xmlns:p="http://schemas.openxmlformats.org/presentationml/2006/main">
   <p:cSld>
     <p:spTree>
@@ -7044,7 +10000,7 @@
         <p:cNvPr id="1" name="">
           <a:extLst>
             <a:ext uri="{FF2B5EF4-FFF2-40B4-BE49-F238E27FC236}">
-              <a16:creationId xmlns:a16="http://schemas.microsoft.com/office/drawing/2014/main" id="{DE0EFD34-3CC3-C676-7C09-B0B94BF07E14}"/>
+              <a16:creationId xmlns:a16="http://schemas.microsoft.com/office/drawing/2014/main" id="{FDF16D9F-EC44-AC37-3F9B-A4970927FB50}"/>
             </a:ext>
           </a:extLst>
         </p:cNvPr>
@@ -7064,7 +10020,7 @@
           <p:cNvPr id="2" name="标题 1">
             <a:extLst>
               <a:ext uri="{FF2B5EF4-FFF2-40B4-BE49-F238E27FC236}">
-                <a16:creationId xmlns:a16="http://schemas.microsoft.com/office/drawing/2014/main" id="{E41EA79F-0EC1-8279-1CDC-439A63D0421F}"/>
+                <a16:creationId xmlns:a16="http://schemas.microsoft.com/office/drawing/2014/main" id="{127E8E85-553B-BF4C-3DCF-471F6D6E2C3C}"/>
               </a:ext>
             </a:extLst>
           </p:cNvPr>
@@ -7081,14 +10037,9 @@
           <a:lstStyle/>
           <a:p>
             <a:r>
-              <a:rPr lang="zh-CN" altLang="en-US" sz="900" dirty="0"/>
-              <a:t>常见的教育思维误区</a:t>
-            </a:r>
-            <a:r>
-              <a:rPr lang="en-US" altLang="zh-CN" sz="900" dirty="0"/>
-              <a:t>2</a:t>
-            </a:r>
-            <a:endParaRPr lang="zh-CN" altLang="en-US" sz="900" dirty="0"/>
+              <a:rPr lang="zh-CN" altLang="en-US" sz="4400" dirty="0"/>
+              <a:t>亲子关系的谬误</a:t>
+            </a:r>
           </a:p>
         </p:txBody>
       </p:sp>
@@ -7097,7 +10048,7 @@
           <p:cNvPr id="3" name="内容占位符 2">
             <a:extLst>
               <a:ext uri="{FF2B5EF4-FFF2-40B4-BE49-F238E27FC236}">
-                <a16:creationId xmlns:a16="http://schemas.microsoft.com/office/drawing/2014/main" id="{2E6340C6-4A63-076A-5B72-19552CF14F38}"/>
+                <a16:creationId xmlns:a16="http://schemas.microsoft.com/office/drawing/2014/main" id="{51ED26EB-A0A8-77B5-641C-03433723A843}"/>
               </a:ext>
             </a:extLst>
           </p:cNvPr>
@@ -7118,56 +10069,51 @@
             </a:pPr>
             <a:r>
               <a:rPr lang="zh-CN" altLang="en-US" dirty="0"/>
-              <a:t>第二个，忽视校外活动</a:t>
-            </a:r>
-          </a:p>
-          <a:p>
-            <a:pPr marL="0" indent="0">
-              <a:buNone/>
-            </a:pPr>
-            <a:r>
-              <a:rPr lang="zh-CN" altLang="en-US" dirty="0"/>
-              <a:t>我告诉大家，</a:t>
-            </a:r>
-            <a:r>
-              <a:rPr lang="en-US" altLang="zh-CN" dirty="0"/>
-              <a:t>7-12</a:t>
-            </a:r>
-            <a:r>
-              <a:rPr lang="zh-CN" altLang="en-US" dirty="0"/>
-              <a:t>岁是培养孩子多巴胺模型的关键窗口期。</a:t>
-            </a:r>
-          </a:p>
-          <a:p>
-            <a:pPr marL="0" indent="0">
-              <a:buNone/>
-            </a:pPr>
-            <a:r>
-              <a:rPr lang="zh-CN" altLang="en-US" dirty="0"/>
-              <a:t>什么叫多巴胺模型呢？</a:t>
-            </a:r>
-          </a:p>
-          <a:p>
-            <a:pPr marL="0" indent="0">
-              <a:buNone/>
-            </a:pPr>
-            <a:r>
-              <a:rPr lang="zh-CN" altLang="en-US" dirty="0"/>
-              <a:t>说白了就是快感模型。</a:t>
-            </a:r>
-          </a:p>
-          <a:p>
-            <a:pPr marL="0" indent="0">
-              <a:buNone/>
-            </a:pPr>
-            <a:endParaRPr lang="zh-CN" altLang="en-US" dirty="0"/>
+              <a:t>第二个就是亲子关系破坏。</a:t>
+            </a:r>
+          </a:p>
+          <a:p>
+            <a:pPr marL="0" indent="0">
+              <a:buNone/>
+            </a:pPr>
+            <a:r>
+              <a:rPr lang="zh-CN" altLang="en-US" dirty="0"/>
+              <a:t>他很痛苦呀</a:t>
+            </a:r>
+          </a:p>
+          <a:p>
+            <a:pPr marL="0" indent="0">
+              <a:buNone/>
+            </a:pPr>
+            <a:r>
+              <a:rPr lang="zh-CN" altLang="en-US" dirty="0"/>
+              <a:t>痛苦之后他必然就会怎么样发火呀</a:t>
+            </a:r>
+          </a:p>
+          <a:p>
+            <a:pPr marL="0" indent="0">
+              <a:buNone/>
+            </a:pPr>
+            <a:r>
+              <a:rPr lang="zh-CN" altLang="en-US" dirty="0"/>
+              <a:t>他会对父母关系不好呀</a:t>
+            </a:r>
+          </a:p>
+          <a:p>
+            <a:pPr marL="0" indent="0">
+              <a:buNone/>
+            </a:pPr>
+            <a:r>
+              <a:rPr lang="zh-CN" altLang="en-US" dirty="0"/>
+              <a:t>然后你们认为是亲子关系不好</a:t>
+            </a:r>
           </a:p>
         </p:txBody>
       </p:sp>
     </p:spTree>
     <p:extLst>
       <p:ext uri="{BB962C8B-B14F-4D97-AF65-F5344CB8AC3E}">
-        <p14:creationId xmlns:p14="http://schemas.microsoft.com/office/powerpoint/2010/main" val="473460896"/>
+        <p14:creationId xmlns:p14="http://schemas.microsoft.com/office/powerpoint/2010/main" val="1372813099"/>
       </p:ext>
     </p:extLst>
   </p:cSld>
@@ -7177,7 +10123,7 @@
 </p:sld>
 </file>
 
-<file path=ppt/slides/slide31.xml><?xml version="1.0" encoding="utf-8"?>
+<file path=ppt/slides/slide51.xml><?xml version="1.0" encoding="utf-8"?>
 <p:sld xmlns:a="http://schemas.openxmlformats.org/drawingml/2006/main" xmlns:r="http://schemas.openxmlformats.org/officeDocument/2006/relationships" xmlns:p="http://schemas.openxmlformats.org/presentationml/2006/main">
   <p:cSld>
     <p:spTree>
@@ -7185,7 +10131,7 @@
         <p:cNvPr id="1" name="">
           <a:extLst>
             <a:ext uri="{FF2B5EF4-FFF2-40B4-BE49-F238E27FC236}">
-              <a16:creationId xmlns:a16="http://schemas.microsoft.com/office/drawing/2014/main" id="{5E381603-7057-91BD-2B19-8F725D00BF27}"/>
+              <a16:creationId xmlns:a16="http://schemas.microsoft.com/office/drawing/2014/main" id="{3BD6AE2E-DD93-B3AC-4557-E7516113F112}"/>
             </a:ext>
           </a:extLst>
         </p:cNvPr>
@@ -7205,7 +10151,7 @@
           <p:cNvPr id="2" name="标题 1">
             <a:extLst>
               <a:ext uri="{FF2B5EF4-FFF2-40B4-BE49-F238E27FC236}">
-                <a16:creationId xmlns:a16="http://schemas.microsoft.com/office/drawing/2014/main" id="{44B7E826-1FA0-587C-5B74-68D53CEF15A6}"/>
+                <a16:creationId xmlns:a16="http://schemas.microsoft.com/office/drawing/2014/main" id="{054373A8-E74B-8357-5324-1F6C016431D6}"/>
               </a:ext>
             </a:extLst>
           </p:cNvPr>
@@ -7222,14 +10168,9 @@
           <a:lstStyle/>
           <a:p>
             <a:r>
-              <a:rPr lang="zh-CN" altLang="en-US" sz="900" dirty="0"/>
-              <a:t>常见的教育思维误区</a:t>
-            </a:r>
-            <a:r>
-              <a:rPr lang="en-US" altLang="zh-CN" sz="900" dirty="0"/>
-              <a:t>3</a:t>
-            </a:r>
-            <a:endParaRPr lang="zh-CN" altLang="en-US" sz="900" dirty="0"/>
+              <a:rPr lang="zh-CN" altLang="en-US" sz="4400" dirty="0"/>
+              <a:t>芬太尼</a:t>
+            </a:r>
           </a:p>
         </p:txBody>
       </p:sp>
@@ -7238,7 +10179,7 @@
           <p:cNvPr id="3" name="内容占位符 2">
             <a:extLst>
               <a:ext uri="{FF2B5EF4-FFF2-40B4-BE49-F238E27FC236}">
-                <a16:creationId xmlns:a16="http://schemas.microsoft.com/office/drawing/2014/main" id="{F8C2C91C-0ED1-0C9C-B229-7EBEC44C7751}"/>
+                <a16:creationId xmlns:a16="http://schemas.microsoft.com/office/drawing/2014/main" id="{D40B4457-F4AE-8775-4679-380106C86BA9}"/>
               </a:ext>
             </a:extLst>
           </p:cNvPr>
@@ -7259,37 +10200,61 @@
             </a:pPr>
             <a:r>
               <a:rPr lang="zh-CN" altLang="en-US" dirty="0"/>
-              <a:t>过去我们小时候常听到父母给我们讲一个故事。</a:t>
-            </a:r>
-          </a:p>
-          <a:p>
-            <a:pPr marL="0" indent="0">
-              <a:buNone/>
-            </a:pPr>
-            <a:endParaRPr lang="zh-CN" altLang="en-US" dirty="0"/>
-          </a:p>
-          <a:p>
-            <a:pPr marL="0" indent="0">
-              <a:buNone/>
-            </a:pPr>
-            <a:r>
-              <a:rPr lang="zh-CN" altLang="en-US" dirty="0"/>
-              <a:t>有个孩子非常懒，父母出门前怕他饿，就烙了个大饼，套他脖子上。</a:t>
-            </a:r>
-          </a:p>
-          <a:p>
-            <a:pPr marL="0" indent="0">
-              <a:buNone/>
-            </a:pPr>
-            <a:endParaRPr lang="zh-CN" altLang="en-US" dirty="0"/>
-          </a:p>
-          <a:p>
-            <a:pPr marL="0" indent="0">
-              <a:buNone/>
-            </a:pPr>
-            <a:r>
-              <a:rPr lang="zh-CN" altLang="en-US" dirty="0"/>
-              <a:t>结果等回来一看，饼前面的吃了，脖子后面的没吃，就饿死了。</a:t>
+              <a:t>中国的孩子现在问题很严重。</a:t>
+            </a:r>
+          </a:p>
+          <a:p>
+            <a:pPr marL="0" indent="0">
+              <a:buNone/>
+            </a:pPr>
+            <a:r>
+              <a:rPr lang="zh-CN" altLang="en-US" dirty="0"/>
+              <a:t>同样西方的孩子也是一样的。</a:t>
+            </a:r>
+          </a:p>
+          <a:p>
+            <a:pPr marL="0" indent="0">
+              <a:buNone/>
+            </a:pPr>
+            <a:r>
+              <a:rPr lang="zh-CN" altLang="en-US" dirty="0"/>
+              <a:t>美国把芬太尼作为美国最大的问题。</a:t>
+            </a:r>
+          </a:p>
+          <a:p>
+            <a:pPr marL="0" indent="0">
+              <a:buNone/>
+            </a:pPr>
+            <a:r>
+              <a:rPr lang="zh-CN" altLang="en-US" dirty="0"/>
+              <a:t>每个青年人都在普遍吃芬太尼</a:t>
+            </a:r>
+          </a:p>
+          <a:p>
+            <a:pPr marL="0" indent="0">
+              <a:buNone/>
+            </a:pPr>
+            <a:r>
+              <a:rPr lang="zh-CN" altLang="en-US" dirty="0"/>
+              <a:t>用芬太尼在干嘛，缓解压</a:t>
+            </a:r>
+          </a:p>
+          <a:p>
+            <a:pPr marL="0" indent="0">
+              <a:buNone/>
+            </a:pPr>
+            <a:r>
+              <a:rPr lang="zh-CN" altLang="en-US" dirty="0"/>
+              <a:t>中国生产芬兰尼生产给美国了</a:t>
+            </a:r>
+          </a:p>
+          <a:p>
+            <a:pPr marL="0" indent="0">
+              <a:buNone/>
+            </a:pPr>
+            <a:r>
+              <a:rPr lang="zh-CN" altLang="en-US" dirty="0"/>
+              <a:t>所以美国就很生气</a:t>
             </a:r>
           </a:p>
         </p:txBody>
@@ -7297,7 +10262,7 @@
     </p:spTree>
     <p:extLst>
       <p:ext uri="{BB962C8B-B14F-4D97-AF65-F5344CB8AC3E}">
-        <p14:creationId xmlns:p14="http://schemas.microsoft.com/office/powerpoint/2010/main" val="2877700692"/>
+        <p14:creationId xmlns:p14="http://schemas.microsoft.com/office/powerpoint/2010/main" val="3219435374"/>
       </p:ext>
     </p:extLst>
   </p:cSld>
@@ -7307,7 +10272,7 @@
 </p:sld>
 </file>
 
-<file path=ppt/slides/slide32.xml><?xml version="1.0" encoding="utf-8"?>
+<file path=ppt/slides/slide52.xml><?xml version="1.0" encoding="utf-8"?>
 <p:sld xmlns:a="http://schemas.openxmlformats.org/drawingml/2006/main" xmlns:r="http://schemas.openxmlformats.org/officeDocument/2006/relationships" xmlns:p="http://schemas.openxmlformats.org/presentationml/2006/main">
   <p:cSld>
     <p:spTree>
@@ -7315,7 +10280,7 @@
         <p:cNvPr id="1" name="">
           <a:extLst>
             <a:ext uri="{FF2B5EF4-FFF2-40B4-BE49-F238E27FC236}">
-              <a16:creationId xmlns:a16="http://schemas.microsoft.com/office/drawing/2014/main" id="{853A1332-C94D-65CD-00A9-13D604074835}"/>
+              <a16:creationId xmlns:a16="http://schemas.microsoft.com/office/drawing/2014/main" id="{EAB9D1B2-A286-24BA-870D-763B77981D6C}"/>
             </a:ext>
           </a:extLst>
         </p:cNvPr>
@@ -7335,7 +10300,7 @@
           <p:cNvPr id="2" name="标题 1">
             <a:extLst>
               <a:ext uri="{FF2B5EF4-FFF2-40B4-BE49-F238E27FC236}">
-                <a16:creationId xmlns:a16="http://schemas.microsoft.com/office/drawing/2014/main" id="{BDB02363-8257-8C4C-650F-275418698723}"/>
+                <a16:creationId xmlns:a16="http://schemas.microsoft.com/office/drawing/2014/main" id="{AE6564CB-34A2-4FE3-26F7-82FA388FD1EB}"/>
               </a:ext>
             </a:extLst>
           </p:cNvPr>
@@ -7352,14 +10317,9 @@
           <a:lstStyle/>
           <a:p>
             <a:r>
-              <a:rPr lang="zh-CN" altLang="en-US" sz="900" dirty="0"/>
-              <a:t>常见的教育思维误区</a:t>
-            </a:r>
-            <a:r>
-              <a:rPr lang="en-US" altLang="zh-CN" sz="900" dirty="0"/>
-              <a:t>4</a:t>
-            </a:r>
-            <a:endParaRPr lang="zh-CN" altLang="en-US" sz="900" dirty="0"/>
+              <a:rPr lang="zh-CN" altLang="en-US" sz="4400" dirty="0"/>
+              <a:t>孩子错误的减压方式</a:t>
+            </a:r>
           </a:p>
         </p:txBody>
       </p:sp>
@@ -7368,7 +10328,7 @@
           <p:cNvPr id="3" name="内容占位符 2">
             <a:extLst>
               <a:ext uri="{FF2B5EF4-FFF2-40B4-BE49-F238E27FC236}">
-                <a16:creationId xmlns:a16="http://schemas.microsoft.com/office/drawing/2014/main" id="{F96FB48D-1FF8-1190-F4E6-9161302A3EE6}"/>
+                <a16:creationId xmlns:a16="http://schemas.microsoft.com/office/drawing/2014/main" id="{CF7E1A27-E427-1E87-71A2-6193382A3C3D}"/>
               </a:ext>
             </a:extLst>
           </p:cNvPr>
@@ -7389,33 +10349,84 @@
             </a:pPr>
             <a:r>
               <a:rPr lang="zh-CN" altLang="en-US" dirty="0"/>
-              <a:t>第三个问题，对孩子的心理韧性和品行培养不在意。</a:t>
-            </a:r>
-          </a:p>
-          <a:p>
-            <a:pPr marL="0" indent="0">
-              <a:buNone/>
-            </a:pPr>
-            <a:r>
-              <a:rPr lang="zh-CN" altLang="en-US" dirty="0"/>
-              <a:t>要么没有这方面的意识，要么觉得没有用，不在意。</a:t>
-            </a:r>
-          </a:p>
-          <a:p>
-            <a:pPr marL="0" indent="0">
-              <a:buNone/>
-            </a:pPr>
-            <a:r>
-              <a:rPr lang="zh-CN" altLang="en-US" dirty="0"/>
-              <a:t>这些也是社会适应性方面非常重要的组成部分。</a:t>
-            </a:r>
+              <a:t>中国孩子在 </a:t>
+            </a:r>
+            <a:r>
+              <a:rPr lang="en-US" altLang="zh-CN" dirty="0"/>
+              <a:t>QQ </a:t>
+            </a:r>
+            <a:r>
+              <a:rPr lang="zh-CN" altLang="en-US" dirty="0"/>
+              <a:t>群里面</a:t>
+            </a:r>
+          </a:p>
+          <a:p>
+            <a:pPr marL="0" indent="0">
+              <a:buNone/>
+            </a:pPr>
+            <a:r>
+              <a:rPr lang="zh-CN" altLang="en-US" dirty="0"/>
+              <a:t>跟科学院通过私下一些联系</a:t>
+            </a:r>
+          </a:p>
+          <a:p>
+            <a:pPr marL="0" indent="0">
+              <a:buNone/>
+            </a:pPr>
+            <a:r>
+              <a:rPr lang="zh-CN" altLang="en-US" dirty="0"/>
+              <a:t>他们互相传播去吃什么样的感冒药</a:t>
+            </a:r>
+          </a:p>
+          <a:p>
+            <a:pPr marL="0" indent="0">
+              <a:buNone/>
+            </a:pPr>
+            <a:r>
+              <a:rPr lang="zh-CN" altLang="en-US" dirty="0"/>
+              <a:t>吃什么样就那种带镇静的药物</a:t>
+            </a:r>
+          </a:p>
+          <a:p>
+            <a:pPr marL="0" indent="0">
+              <a:buNone/>
+            </a:pPr>
+            <a:r>
+              <a:rPr lang="zh-CN" altLang="en-US" dirty="0"/>
+              <a:t>能达到类似的减压效果</a:t>
+            </a:r>
+            <a:endParaRPr lang="en-US" altLang="zh-CN" dirty="0"/>
+          </a:p>
+          <a:p>
+            <a:pPr marL="0" indent="0">
+              <a:buNone/>
+            </a:pPr>
+            <a:r>
+              <a:rPr lang="zh-CN" altLang="en-US" dirty="0"/>
+              <a:t>给他一个正确的解压方法</a:t>
+            </a:r>
+          </a:p>
+          <a:p>
+            <a:pPr marL="0" indent="0">
+              <a:buNone/>
+            </a:pPr>
+            <a:r>
+              <a:rPr lang="zh-CN" altLang="en-US" dirty="0"/>
+              <a:t>而不是搞什么亲子关系问题</a:t>
+            </a:r>
+          </a:p>
+          <a:p>
+            <a:pPr marL="0" indent="0">
+              <a:buNone/>
+            </a:pPr>
+            <a:endParaRPr lang="zh-CN" altLang="en-US" dirty="0"/>
           </a:p>
         </p:txBody>
       </p:sp>
     </p:spTree>
     <p:extLst>
       <p:ext uri="{BB962C8B-B14F-4D97-AF65-F5344CB8AC3E}">
-        <p14:creationId xmlns:p14="http://schemas.microsoft.com/office/powerpoint/2010/main" val="1540167266"/>
+        <p14:creationId xmlns:p14="http://schemas.microsoft.com/office/powerpoint/2010/main" val="3248290299"/>
       </p:ext>
     </p:extLst>
   </p:cSld>
@@ -7425,7 +10436,7 @@
 </p:sld>
 </file>
 
-<file path=ppt/slides/slide33.xml><?xml version="1.0" encoding="utf-8"?>
+<file path=ppt/slides/slide53.xml><?xml version="1.0" encoding="utf-8"?>
 <p:sld xmlns:a="http://schemas.openxmlformats.org/drawingml/2006/main" xmlns:r="http://schemas.openxmlformats.org/officeDocument/2006/relationships" xmlns:p="http://schemas.openxmlformats.org/presentationml/2006/main">
   <p:cSld>
     <p:spTree>
@@ -7433,7 +10444,7 @@
         <p:cNvPr id="1" name="">
           <a:extLst>
             <a:ext uri="{FF2B5EF4-FFF2-40B4-BE49-F238E27FC236}">
-              <a16:creationId xmlns:a16="http://schemas.microsoft.com/office/drawing/2014/main" id="{0673F7A3-9DFB-A22F-4504-19BE21BBA122}"/>
+              <a16:creationId xmlns:a16="http://schemas.microsoft.com/office/drawing/2014/main" id="{41DD8A02-8CEA-F469-F3A9-9D050ADAFCD4}"/>
             </a:ext>
           </a:extLst>
         </p:cNvPr>
@@ -7453,7 +10464,7 @@
           <p:cNvPr id="2" name="标题 1">
             <a:extLst>
               <a:ext uri="{FF2B5EF4-FFF2-40B4-BE49-F238E27FC236}">
-                <a16:creationId xmlns:a16="http://schemas.microsoft.com/office/drawing/2014/main" id="{34FB951E-F759-B197-AA31-BF8E3956BFF8}"/>
+                <a16:creationId xmlns:a16="http://schemas.microsoft.com/office/drawing/2014/main" id="{B127C411-46B2-0C2B-6AFD-112CAF40E6AF}"/>
               </a:ext>
             </a:extLst>
           </p:cNvPr>
@@ -7470,14 +10481,9 @@
           <a:lstStyle/>
           <a:p>
             <a:r>
-              <a:rPr lang="zh-CN" altLang="en-US" sz="900" dirty="0"/>
-              <a:t>常见的教育思维误区</a:t>
-            </a:r>
-            <a:r>
-              <a:rPr lang="en-US" altLang="zh-CN" sz="900" dirty="0"/>
-              <a:t>5</a:t>
-            </a:r>
-            <a:endParaRPr lang="zh-CN" altLang="en-US" sz="900" dirty="0"/>
+              <a:rPr lang="zh-CN" altLang="en-US" sz="4400" dirty="0"/>
+              <a:t>人际沟通能力缺失的严峻性</a:t>
+            </a:r>
           </a:p>
         </p:txBody>
       </p:sp>
@@ -7486,7 +10492,7 @@
           <p:cNvPr id="3" name="内容占位符 2">
             <a:extLst>
               <a:ext uri="{FF2B5EF4-FFF2-40B4-BE49-F238E27FC236}">
-                <a16:creationId xmlns:a16="http://schemas.microsoft.com/office/drawing/2014/main" id="{A6F3F940-98BB-4DA4-6EEE-3BA4E29DC81A}"/>
+                <a16:creationId xmlns:a16="http://schemas.microsoft.com/office/drawing/2014/main" id="{7738B2A2-B144-64A4-EC4D-F4043162628A}"/>
               </a:ext>
             </a:extLst>
           </p:cNvPr>
@@ -7507,43 +10513,78 @@
             </a:pPr>
             <a:r>
               <a:rPr lang="zh-CN" altLang="en-US" dirty="0"/>
-              <a:t>你看网上有很多这种情况，父母不让孩子玩手机，孩子就把家给砸了。</a:t>
-            </a:r>
-          </a:p>
-          <a:p>
-            <a:pPr marL="0" indent="0">
-              <a:buNone/>
-            </a:pPr>
-            <a:r>
-              <a:rPr lang="zh-CN" altLang="en-US" dirty="0"/>
-              <a:t>很多人会觉得不可思议，是吧？</a:t>
-            </a:r>
-          </a:p>
-          <a:p>
-            <a:pPr marL="0" indent="0">
-              <a:buNone/>
-            </a:pPr>
-            <a:r>
-              <a:rPr lang="zh-CN" altLang="en-US" dirty="0"/>
-              <a:t>从全世界的医学论文中，有些论文库是公开的，我们可以查到一些资料。</a:t>
-            </a:r>
-          </a:p>
-          <a:p>
-            <a:pPr marL="0" indent="0">
-              <a:buNone/>
-            </a:pPr>
-            <a:r>
-              <a:rPr lang="zh-CN" altLang="en-US" dirty="0"/>
-              <a:t>就是手机游戏成瘾的大脑和吸毒大脑的对比研究，在核磁共振检测结果上是一样的。</a:t>
-            </a:r>
-          </a:p>
-          <a:p>
-            <a:pPr marL="0" indent="0">
-              <a:buNone/>
-            </a:pPr>
-            <a:r>
-              <a:rPr lang="zh-CN" altLang="en-US" dirty="0"/>
-              <a:t>所以你不要认为孩子玩游戏是个简单单纯的现象。</a:t>
+              <a:t>零零后啊，或者一零后这些啊</a:t>
+            </a:r>
+          </a:p>
+          <a:p>
+            <a:pPr marL="0" indent="0">
+              <a:buNone/>
+            </a:pPr>
+            <a:r>
+              <a:rPr lang="zh-CN" altLang="en-US" dirty="0"/>
+              <a:t>年纪小点的那些啊</a:t>
+            </a:r>
+          </a:p>
+          <a:p>
+            <a:pPr marL="0" indent="0">
+              <a:buNone/>
+            </a:pPr>
+            <a:r>
+              <a:rPr lang="zh-CN" altLang="en-US" dirty="0"/>
+              <a:t>看那些刚刚参加工作的年轻</a:t>
+            </a:r>
+            <a:r>
+              <a:rPr lang="en-US" altLang="zh-CN" dirty="0"/>
+              <a:t>18</a:t>
+            </a:r>
+            <a:r>
+              <a:rPr lang="zh-CN" altLang="en-US" dirty="0"/>
+              <a:t>岁左右</a:t>
+            </a:r>
+          </a:p>
+          <a:p>
+            <a:pPr marL="0" indent="0">
+              <a:buNone/>
+            </a:pPr>
+            <a:r>
+              <a:rPr lang="zh-CN" altLang="en-US" dirty="0"/>
+              <a:t>他连打电话都不会打</a:t>
+            </a:r>
+          </a:p>
+          <a:p>
+            <a:pPr marL="0" indent="0">
+              <a:buNone/>
+            </a:pPr>
+            <a:r>
+              <a:rPr lang="zh-CN" altLang="en-US" dirty="0"/>
+              <a:t>因为他不知道怎么说话</a:t>
+            </a:r>
+          </a:p>
+          <a:p>
+            <a:pPr marL="0" indent="0">
+              <a:buNone/>
+            </a:pPr>
+            <a:r>
+              <a:rPr lang="zh-CN" altLang="en-US" dirty="0"/>
+              <a:t>他们只擅长发表情包</a:t>
+            </a:r>
+          </a:p>
+          <a:p>
+            <a:pPr marL="0" indent="0">
+              <a:buNone/>
+            </a:pPr>
+            <a:r>
+              <a:rPr lang="zh-CN" altLang="en-US" dirty="0"/>
+              <a:t>因为他们不具备语言表达和沟通的能力。（他都不会甚至不知道去请教别人）</a:t>
+            </a:r>
+          </a:p>
+          <a:p>
+            <a:pPr marL="0" indent="0">
+              <a:buNone/>
+            </a:pPr>
+            <a:r>
+              <a:rPr lang="zh-CN" altLang="en-US" dirty="0"/>
+              <a:t>这些都是有研究的，不要以为是简单的现象。</a:t>
             </a:r>
           </a:p>
         </p:txBody>
@@ -7551,7 +10592,7 @@
     </p:spTree>
     <p:extLst>
       <p:ext uri="{BB962C8B-B14F-4D97-AF65-F5344CB8AC3E}">
-        <p14:creationId xmlns:p14="http://schemas.microsoft.com/office/powerpoint/2010/main" val="3905299610"/>
+        <p14:creationId xmlns:p14="http://schemas.microsoft.com/office/powerpoint/2010/main" val="356283702"/>
       </p:ext>
     </p:extLst>
   </p:cSld>
@@ -7561,7 +10602,7 @@
 </p:sld>
 </file>
 
-<file path=ppt/slides/slide34.xml><?xml version="1.0" encoding="utf-8"?>
+<file path=ppt/slides/slide54.xml><?xml version="1.0" encoding="utf-8"?>
 <p:sld xmlns:a="http://schemas.openxmlformats.org/drawingml/2006/main" xmlns:r="http://schemas.openxmlformats.org/officeDocument/2006/relationships" xmlns:p="http://schemas.openxmlformats.org/presentationml/2006/main">
   <p:cSld>
     <p:spTree>
@@ -7569,7 +10610,7 @@
         <p:cNvPr id="1" name="">
           <a:extLst>
             <a:ext uri="{FF2B5EF4-FFF2-40B4-BE49-F238E27FC236}">
-              <a16:creationId xmlns:a16="http://schemas.microsoft.com/office/drawing/2014/main" id="{CA55FC25-F32C-D1AB-5E48-F55C5A01D5AA}"/>
+              <a16:creationId xmlns:a16="http://schemas.microsoft.com/office/drawing/2014/main" id="{CC08602D-0153-22D9-8574-88FCE5EDA39B}"/>
             </a:ext>
           </a:extLst>
         </p:cNvPr>
@@ -7589,7 +10630,7 @@
           <p:cNvPr id="2" name="标题 1">
             <a:extLst>
               <a:ext uri="{FF2B5EF4-FFF2-40B4-BE49-F238E27FC236}">
-                <a16:creationId xmlns:a16="http://schemas.microsoft.com/office/drawing/2014/main" id="{B92BB972-7E9E-EE76-C772-199E1358CB0E}"/>
+                <a16:creationId xmlns:a16="http://schemas.microsoft.com/office/drawing/2014/main" id="{88231D6E-AAE8-8DE2-8310-E8AC8067807E}"/>
               </a:ext>
             </a:extLst>
           </p:cNvPr>
@@ -7606,14 +10647,9 @@
           <a:lstStyle/>
           <a:p>
             <a:r>
-              <a:rPr lang="zh-CN" altLang="en-US" sz="900" dirty="0"/>
-              <a:t>常见的教育思维误区</a:t>
-            </a:r>
-            <a:r>
-              <a:rPr lang="en-US" altLang="zh-CN" sz="900" dirty="0"/>
-              <a:t>6</a:t>
-            </a:r>
-            <a:endParaRPr lang="zh-CN" altLang="en-US" sz="900" dirty="0"/>
+              <a:rPr lang="zh-CN" altLang="en-US" sz="4400" dirty="0"/>
+              <a:t>嬉皮士运动</a:t>
+            </a:r>
           </a:p>
         </p:txBody>
       </p:sp>
@@ -7622,7 +10658,7 @@
           <p:cNvPr id="3" name="内容占位符 2">
             <a:extLst>
               <a:ext uri="{FF2B5EF4-FFF2-40B4-BE49-F238E27FC236}">
-                <a16:creationId xmlns:a16="http://schemas.microsoft.com/office/drawing/2014/main" id="{DD9B7F9C-A5FD-6776-8D2D-89005F9CE262}"/>
+                <a16:creationId xmlns:a16="http://schemas.microsoft.com/office/drawing/2014/main" id="{EA72EABE-F174-884A-570C-66C2F65AFDF2}"/>
               </a:ext>
             </a:extLst>
           </p:cNvPr>
@@ -7643,65 +10679,77 @@
             </a:pPr>
             <a:r>
               <a:rPr lang="zh-CN" altLang="en-US" dirty="0"/>
-              <a:t>大家有没有想过一个问题。</a:t>
-            </a:r>
-          </a:p>
-          <a:p>
-            <a:pPr marL="0" indent="0">
-              <a:buNone/>
-            </a:pPr>
-            <a:r>
-              <a:rPr lang="zh-CN" altLang="en-US" dirty="0"/>
-              <a:t>这个世界上好玩的东西太多了，为什么全国几乎所有的孩子都会一致统一地去玩手机呢？</a:t>
-            </a:r>
-          </a:p>
-          <a:p>
-            <a:pPr marL="0" indent="0">
-              <a:buNone/>
-            </a:pPr>
-            <a:r>
-              <a:rPr lang="zh-CN" altLang="en-US" dirty="0"/>
-              <a:t>正常情况下，不应该是一部分孩子玩这个，一部分孩子玩那个吗？</a:t>
-            </a:r>
-          </a:p>
-          <a:p>
-            <a:pPr marL="0" indent="0">
-              <a:buNone/>
-            </a:pPr>
-            <a:r>
-              <a:rPr lang="zh-CN" altLang="en-US" dirty="0"/>
-              <a:t>即使是正态分布概率下，也不可能</a:t>
+              <a:t>像现在我们看到的这种现象，其实不是中国独有的，也不是现在才有的。</a:t>
+            </a:r>
+          </a:p>
+          <a:p>
+            <a:pPr marL="0" indent="0">
+              <a:buNone/>
+            </a:pPr>
+            <a:r>
+              <a:rPr lang="zh-CN" altLang="en-US" dirty="0"/>
+              <a:t>早在上个世纪</a:t>
             </a:r>
             <a:r>
               <a:rPr lang="en-US" altLang="zh-CN" dirty="0"/>
-              <a:t>99%</a:t>
-            </a:r>
-            <a:r>
-              <a:rPr lang="zh-CN" altLang="en-US" dirty="0"/>
-              <a:t>的孩子都去玩手机吧？</a:t>
-            </a:r>
-          </a:p>
-          <a:p>
-            <a:pPr marL="0" indent="0">
-              <a:buNone/>
-            </a:pPr>
-            <a:r>
-              <a:rPr lang="zh-CN" altLang="en-US" dirty="0"/>
-              <a:t>关于孩子玩手机的问题，我也有一个专题课有专门说明，大家有兴趣可以关注一下。</a:t>
-            </a:r>
-          </a:p>
-          <a:p>
-            <a:pPr marL="0" indent="0">
-              <a:buNone/>
-            </a:pPr>
-            <a:endParaRPr lang="zh-CN" altLang="en-US" dirty="0"/>
+              <a:t>60</a:t>
+            </a:r>
+            <a:r>
+              <a:rPr lang="zh-CN" altLang="en-US" dirty="0"/>
+              <a:t>年代，全球就出现过这样的问题。</a:t>
+            </a:r>
+          </a:p>
+          <a:p>
+            <a:pPr marL="0" indent="0">
+              <a:buNone/>
+            </a:pPr>
+            <a:r>
+              <a:rPr lang="zh-CN" altLang="en-US" dirty="0"/>
+              <a:t>在美国出现了嬉皮士运动。</a:t>
+            </a:r>
+          </a:p>
+          <a:p>
+            <a:pPr marL="0" indent="0">
+              <a:buNone/>
+            </a:pPr>
+            <a:r>
+              <a:rPr lang="zh-CN" altLang="en-US" dirty="0"/>
+              <a:t>第二代会退化，会垮掉。</a:t>
+            </a:r>
+          </a:p>
+          <a:p>
+            <a:pPr marL="0" indent="0">
+              <a:buNone/>
+            </a:pPr>
+            <a:r>
+              <a:rPr lang="zh-CN" altLang="en-US" dirty="0"/>
+              <a:t>美国当时的解密文件中写道，希望中国的第二代也垮掉。</a:t>
+            </a:r>
+          </a:p>
+          <a:p>
+            <a:pPr marL="0" indent="0">
+              <a:buNone/>
+            </a:pPr>
+            <a:r>
+              <a:rPr lang="zh-CN" altLang="en-US" dirty="0"/>
+              <a:t>这样就不会竞争失败了。</a:t>
+            </a:r>
+          </a:p>
+          <a:p>
+            <a:pPr marL="0" indent="0">
+              <a:buNone/>
+            </a:pPr>
+            <a:r>
+              <a:rPr lang="zh-CN" altLang="en-US" dirty="0"/>
+              <a:t>中国的第二代，就是通过上山下乡，解决了这个问题。</a:t>
+            </a:r>
           </a:p>
         </p:txBody>
       </p:sp>
     </p:spTree>
     <p:extLst>
       <p:ext uri="{BB962C8B-B14F-4D97-AF65-F5344CB8AC3E}">
-        <p14:creationId xmlns:p14="http://schemas.microsoft.com/office/powerpoint/2010/main" val="3883424232"/>
+        <p14:creationId xmlns:p14="http://schemas.microsoft.com/office/powerpoint/2010/main" val="2966064999"/>
       </p:ext>
     </p:extLst>
   </p:cSld>
@@ -7711,7 +10759,7 @@
 </p:sld>
 </file>
 
-<file path=ppt/slides/slide35.xml><?xml version="1.0" encoding="utf-8"?>
+<file path=ppt/slides/slide55.xml><?xml version="1.0" encoding="utf-8"?>
 <p:sld xmlns:a="http://schemas.openxmlformats.org/drawingml/2006/main" xmlns:r="http://schemas.openxmlformats.org/officeDocument/2006/relationships" xmlns:p="http://schemas.openxmlformats.org/presentationml/2006/main">
   <p:cSld>
     <p:spTree>
@@ -7719,7 +10767,7 @@
         <p:cNvPr id="1" name="">
           <a:extLst>
             <a:ext uri="{FF2B5EF4-FFF2-40B4-BE49-F238E27FC236}">
-              <a16:creationId xmlns:a16="http://schemas.microsoft.com/office/drawing/2014/main" id="{34845F12-D1E0-8590-AA2D-83822BD05119}"/>
+              <a16:creationId xmlns:a16="http://schemas.microsoft.com/office/drawing/2014/main" id="{B9D66C6F-4DEB-660E-6969-34C5FBA04BED}"/>
             </a:ext>
           </a:extLst>
         </p:cNvPr>
@@ -7739,7 +10787,7 @@
           <p:cNvPr id="2" name="标题 1">
             <a:extLst>
               <a:ext uri="{FF2B5EF4-FFF2-40B4-BE49-F238E27FC236}">
-                <a16:creationId xmlns:a16="http://schemas.microsoft.com/office/drawing/2014/main" id="{966160FD-BF9F-0ABC-5146-971A0150FE6D}"/>
+                <a16:creationId xmlns:a16="http://schemas.microsoft.com/office/drawing/2014/main" id="{FBE5E903-5C82-CF32-4B6B-B8397780A9C4}"/>
               </a:ext>
             </a:extLst>
           </p:cNvPr>
@@ -7756,14 +10804,13 @@
           <a:lstStyle/>
           <a:p>
             <a:r>
-              <a:rPr lang="zh-CN" altLang="en-US" sz="900" dirty="0"/>
-              <a:t>常见的教育思维误区</a:t>
-            </a:r>
-            <a:r>
-              <a:rPr lang="en-US" altLang="zh-CN" sz="900" dirty="0"/>
-              <a:t>7</a:t>
-            </a:r>
-            <a:endParaRPr lang="zh-CN" altLang="en-US" sz="900" dirty="0"/>
+              <a:rPr lang="en-US" altLang="zh-CN" sz="4400" dirty="0"/>
+              <a:t>25</a:t>
+            </a:r>
+            <a:r>
+              <a:rPr lang="zh-CN" altLang="en-US" sz="4400" dirty="0"/>
+              <a:t>号宇宙</a:t>
+            </a:r>
           </a:p>
         </p:txBody>
       </p:sp>
@@ -7772,7 +10819,7 @@
           <p:cNvPr id="3" name="内容占位符 2">
             <a:extLst>
               <a:ext uri="{FF2B5EF4-FFF2-40B4-BE49-F238E27FC236}">
-                <a16:creationId xmlns:a16="http://schemas.microsoft.com/office/drawing/2014/main" id="{4E66658F-162E-1F97-C6FF-713DA44636F2}"/>
+                <a16:creationId xmlns:a16="http://schemas.microsoft.com/office/drawing/2014/main" id="{7089A6F3-5632-C937-67E3-A48767242AE8}"/>
               </a:ext>
             </a:extLst>
           </p:cNvPr>
@@ -7792,25 +10839,83 @@
               <a:buNone/>
             </a:pPr>
             <a:r>
-              <a:rPr lang="zh-CN" altLang="en-US" dirty="0"/>
-              <a:t>北航大家都知道，非常好的大学，是吧？</a:t>
-            </a:r>
-          </a:p>
-          <a:p>
-            <a:pPr marL="0" indent="0">
-              <a:buNone/>
-            </a:pPr>
-            <a:r>
-              <a:rPr lang="zh-CN" altLang="en-US" dirty="0"/>
-              <a:t>一次性退学了</a:t>
-            </a:r>
-            <a:r>
               <a:rPr lang="en-US" altLang="zh-CN" dirty="0"/>
-              <a:t>404</a:t>
-            </a:r>
-            <a:r>
-              <a:rPr lang="zh-CN" altLang="en-US" dirty="0"/>
-              <a:t>个学生，大家可以上网查一下这个消息。</a:t>
+              <a:t>25</a:t>
+            </a:r>
+            <a:r>
+              <a:rPr lang="zh-CN" altLang="en-US" dirty="0"/>
+              <a:t>号宇宙的老鼠实验。</a:t>
+            </a:r>
+          </a:p>
+          <a:p>
+            <a:pPr marL="0" indent="0">
+              <a:buNone/>
+            </a:pPr>
+            <a:r>
+              <a:rPr lang="zh-CN" altLang="en-US" dirty="0"/>
+              <a:t>结论：</a:t>
+            </a:r>
+          </a:p>
+          <a:p>
+            <a:pPr marL="0" indent="0">
+              <a:buNone/>
+            </a:pPr>
+            <a:r>
+              <a:rPr lang="zh-CN" altLang="en-US" dirty="0"/>
+              <a:t>第一，父母不喜欢孩子，互相攻击</a:t>
+            </a:r>
+          </a:p>
+          <a:p>
+            <a:pPr marL="0" indent="0">
+              <a:buNone/>
+            </a:pPr>
+            <a:r>
+              <a:rPr lang="zh-CN" altLang="en-US" dirty="0"/>
+              <a:t>第二，雄性女性化，雌性开始增强，要求女性权利</a:t>
+            </a:r>
+          </a:p>
+          <a:p>
+            <a:pPr marL="0" indent="0">
+              <a:buNone/>
+            </a:pPr>
+            <a:r>
+              <a:rPr lang="zh-CN" altLang="en-US" dirty="0"/>
+              <a:t>不求偶，不繁殖。</a:t>
+            </a:r>
+          </a:p>
+          <a:p>
+            <a:pPr marL="0" indent="0">
+              <a:buNone/>
+            </a:pPr>
+            <a:r>
+              <a:rPr lang="zh-CN" altLang="en-US" dirty="0"/>
+              <a:t>目前生孩子的主力是在</a:t>
+            </a:r>
+            <a:r>
+              <a:rPr lang="en-US" altLang="zh-CN" dirty="0"/>
+              <a:t>40</a:t>
+            </a:r>
+            <a:r>
+              <a:rPr lang="zh-CN" altLang="en-US" dirty="0"/>
+              <a:t>多岁的人，而年轻人几乎都不怎么生孩子。</a:t>
+            </a:r>
+          </a:p>
+          <a:p>
+            <a:pPr marL="0" indent="0">
+              <a:buNone/>
+            </a:pPr>
+            <a:r>
+              <a:rPr lang="zh-CN" altLang="en-US" dirty="0"/>
+              <a:t>日本是经历过这一切的。</a:t>
+            </a:r>
+          </a:p>
+          <a:p>
+            <a:pPr marL="0" indent="0">
+              <a:buNone/>
+            </a:pPr>
+            <a:r>
+              <a:rPr lang="zh-CN" altLang="en-US" dirty="0"/>
+              <a:t>在上个世纪日本就已经开始宅文化。</a:t>
             </a:r>
           </a:p>
         </p:txBody>
@@ -7818,7 +10923,7 @@
     </p:spTree>
     <p:extLst>
       <p:ext uri="{BB962C8B-B14F-4D97-AF65-F5344CB8AC3E}">
-        <p14:creationId xmlns:p14="http://schemas.microsoft.com/office/powerpoint/2010/main" val="518210905"/>
+        <p14:creationId xmlns:p14="http://schemas.microsoft.com/office/powerpoint/2010/main" val="3308965247"/>
       </p:ext>
     </p:extLst>
   </p:cSld>
@@ -7828,7 +10933,7 @@
 </p:sld>
 </file>
 
-<file path=ppt/slides/slide36.xml><?xml version="1.0" encoding="utf-8"?>
+<file path=ppt/slides/slide56.xml><?xml version="1.0" encoding="utf-8"?>
 <p:sld xmlns:a="http://schemas.openxmlformats.org/drawingml/2006/main" xmlns:r="http://schemas.openxmlformats.org/officeDocument/2006/relationships" xmlns:p="http://schemas.openxmlformats.org/presentationml/2006/main">
   <p:cSld>
     <p:spTree>
@@ -7836,7 +10941,7 @@
         <p:cNvPr id="1" name="">
           <a:extLst>
             <a:ext uri="{FF2B5EF4-FFF2-40B4-BE49-F238E27FC236}">
-              <a16:creationId xmlns:a16="http://schemas.microsoft.com/office/drawing/2014/main" id="{CBCCB30A-2902-FA30-8B68-3FC6B8739E11}"/>
+              <a16:creationId xmlns:a16="http://schemas.microsoft.com/office/drawing/2014/main" id="{96C50539-6176-A14B-E66E-1D5FD9BDE5BD}"/>
             </a:ext>
           </a:extLst>
         </p:cNvPr>
@@ -7856,7 +10961,7 @@
           <p:cNvPr id="2" name="标题 1">
             <a:extLst>
               <a:ext uri="{FF2B5EF4-FFF2-40B4-BE49-F238E27FC236}">
-                <a16:creationId xmlns:a16="http://schemas.microsoft.com/office/drawing/2014/main" id="{51914E59-B7BC-F6F5-0291-1809EA360BE8}"/>
+                <a16:creationId xmlns:a16="http://schemas.microsoft.com/office/drawing/2014/main" id="{C04BD122-590E-8953-EA42-CCCC741A85E5}"/>
               </a:ext>
             </a:extLst>
           </p:cNvPr>
@@ -7873,14 +10978,9 @@
           <a:lstStyle/>
           <a:p>
             <a:r>
-              <a:rPr lang="zh-CN" altLang="en-US" sz="900" dirty="0"/>
-              <a:t>常见的教育思维误区</a:t>
-            </a:r>
-            <a:r>
-              <a:rPr lang="en-US" altLang="zh-CN" sz="900" dirty="0"/>
-              <a:t>8</a:t>
-            </a:r>
-            <a:endParaRPr lang="zh-CN" altLang="en-US" sz="900" dirty="0"/>
+              <a:rPr lang="zh-CN" altLang="en-US" sz="4400" dirty="0"/>
+              <a:t>国家鼓励生育</a:t>
+            </a:r>
           </a:p>
         </p:txBody>
       </p:sp>
@@ -7889,7 +10989,7 @@
           <p:cNvPr id="3" name="内容占位符 2">
             <a:extLst>
               <a:ext uri="{FF2B5EF4-FFF2-40B4-BE49-F238E27FC236}">
-                <a16:creationId xmlns:a16="http://schemas.microsoft.com/office/drawing/2014/main" id="{D0CACA72-D5F8-7964-0ABA-BA58C01FB11F}"/>
+                <a16:creationId xmlns:a16="http://schemas.microsoft.com/office/drawing/2014/main" id="{B2E04C2E-04B7-77CE-3ACC-FCE18A243DAB}"/>
               </a:ext>
             </a:extLst>
           </p:cNvPr>
@@ -7910,25 +11010,16 @@
             </a:pPr>
             <a:r>
               <a:rPr lang="zh-CN" altLang="en-US" dirty="0"/>
-              <a:t>第四种错误教育方法。</a:t>
-            </a:r>
-          </a:p>
-          <a:p>
-            <a:pPr marL="0" indent="0">
-              <a:buNone/>
-            </a:pPr>
-            <a:r>
-              <a:rPr lang="zh-CN" altLang="en-US" dirty="0"/>
-              <a:t>为了让孩子学习，拿物质做交换。</a:t>
-            </a:r>
-          </a:p>
-          <a:p>
-            <a:pPr marL="0" indent="0">
-              <a:buNone/>
-            </a:pPr>
-            <a:r>
-              <a:rPr lang="zh-CN" altLang="en-US" dirty="0"/>
-              <a:t>只要你学习，我就给你买什么东西。</a:t>
+              <a:t>国家对于安全套开始收税了。</a:t>
+            </a:r>
+          </a:p>
+          <a:p>
+            <a:pPr marL="0" indent="0">
+              <a:buNone/>
+            </a:pPr>
+            <a:r>
+              <a:rPr lang="zh-CN" altLang="en-US" dirty="0"/>
+              <a:t>下一步可能会限售或禁售。</a:t>
             </a:r>
           </a:p>
         </p:txBody>
@@ -7936,7 +11027,7 @@
     </p:spTree>
     <p:extLst>
       <p:ext uri="{BB962C8B-B14F-4D97-AF65-F5344CB8AC3E}">
-        <p14:creationId xmlns:p14="http://schemas.microsoft.com/office/powerpoint/2010/main" val="2236989085"/>
+        <p14:creationId xmlns:p14="http://schemas.microsoft.com/office/powerpoint/2010/main" val="2253926580"/>
       </p:ext>
     </p:extLst>
   </p:cSld>
@@ -7946,7 +11037,7 @@
 </p:sld>
 </file>
 
-<file path=ppt/slides/slide37.xml><?xml version="1.0" encoding="utf-8"?>
+<file path=ppt/slides/slide57.xml><?xml version="1.0" encoding="utf-8"?>
 <p:sld xmlns:a="http://schemas.openxmlformats.org/drawingml/2006/main" xmlns:r="http://schemas.openxmlformats.org/officeDocument/2006/relationships" xmlns:p="http://schemas.openxmlformats.org/presentationml/2006/main">
   <p:cSld>
     <p:spTree>
@@ -7954,7 +11045,7 @@
         <p:cNvPr id="1" name="">
           <a:extLst>
             <a:ext uri="{FF2B5EF4-FFF2-40B4-BE49-F238E27FC236}">
-              <a16:creationId xmlns:a16="http://schemas.microsoft.com/office/drawing/2014/main" id="{B883630F-FB9E-3D68-3456-005DF01E43D2}"/>
+              <a16:creationId xmlns:a16="http://schemas.microsoft.com/office/drawing/2014/main" id="{9EE9A946-0908-B1E2-BCF4-EEEE724628AB}"/>
             </a:ext>
           </a:extLst>
         </p:cNvPr>
@@ -7974,7 +11065,7 @@
           <p:cNvPr id="2" name="标题 1">
             <a:extLst>
               <a:ext uri="{FF2B5EF4-FFF2-40B4-BE49-F238E27FC236}">
-                <a16:creationId xmlns:a16="http://schemas.microsoft.com/office/drawing/2014/main" id="{97BEBBD1-AD47-4C3F-5771-0C8736AF63D2}"/>
+                <a16:creationId xmlns:a16="http://schemas.microsoft.com/office/drawing/2014/main" id="{0759986E-909F-FF70-71F5-4C2D40D8AB8F}"/>
               </a:ext>
             </a:extLst>
           </p:cNvPr>
@@ -7991,14 +11082,9 @@
           <a:lstStyle/>
           <a:p>
             <a:r>
-              <a:rPr lang="zh-CN" altLang="en-US" sz="900" dirty="0"/>
-              <a:t>常见的教育思维误区</a:t>
-            </a:r>
-            <a:r>
-              <a:rPr lang="en-US" altLang="zh-CN" sz="900" dirty="0"/>
-              <a:t>9</a:t>
-            </a:r>
-            <a:endParaRPr lang="zh-CN" altLang="en-US" sz="900" dirty="0"/>
+              <a:rPr lang="zh-CN" altLang="en-US" sz="4400" dirty="0"/>
+              <a:t>年轻人竞争的标准变了</a:t>
+            </a:r>
           </a:p>
         </p:txBody>
       </p:sp>
@@ -8007,7 +11093,7 @@
           <p:cNvPr id="3" name="内容占位符 2">
             <a:extLst>
               <a:ext uri="{FF2B5EF4-FFF2-40B4-BE49-F238E27FC236}">
-                <a16:creationId xmlns:a16="http://schemas.microsoft.com/office/drawing/2014/main" id="{7618FB41-E73F-7B6D-B860-D7DB914E9DED}"/>
+                <a16:creationId xmlns:a16="http://schemas.microsoft.com/office/drawing/2014/main" id="{64C6530A-A3CD-DD5C-2E1A-30C060FCC098}"/>
               </a:ext>
             </a:extLst>
           </p:cNvPr>
@@ -8028,25 +11114,79 @@
             </a:pPr>
             <a:r>
               <a:rPr lang="zh-CN" altLang="en-US" dirty="0"/>
-              <a:t>还有一种，就是安乐窝。</a:t>
-            </a:r>
-          </a:p>
-          <a:p>
-            <a:pPr marL="0" indent="0">
-              <a:buNone/>
-            </a:pPr>
-            <a:r>
-              <a:rPr lang="zh-CN" altLang="en-US" dirty="0"/>
-              <a:t>只要你学习，在家里什么都不用干。</a:t>
-            </a:r>
-          </a:p>
-          <a:p>
-            <a:pPr marL="0" indent="0">
-              <a:buNone/>
-            </a:pPr>
-            <a:r>
-              <a:rPr lang="zh-CN" altLang="en-US" dirty="0"/>
-              <a:t>在家里不用承担任何责任。</a:t>
+              <a:t>你看现在的年轻人，不愿意花时间社交，浑身疲惫感。</a:t>
+            </a:r>
+          </a:p>
+          <a:p>
+            <a:pPr marL="0" indent="0">
+              <a:buNone/>
+            </a:pPr>
+            <a:r>
+              <a:rPr lang="zh-CN" altLang="en-US" dirty="0"/>
+              <a:t>这样的人难以立志、没有理想。</a:t>
+            </a:r>
+          </a:p>
+          <a:p>
+            <a:pPr marL="0" indent="0">
+              <a:buNone/>
+            </a:pPr>
+            <a:r>
+              <a:rPr lang="zh-CN" altLang="en-US" dirty="0"/>
+              <a:t>实际上我们说的儿童青少年教育到底比的是什么？</a:t>
+            </a:r>
+          </a:p>
+          <a:p>
+            <a:pPr marL="0" indent="0">
+              <a:buNone/>
+            </a:pPr>
+            <a:r>
+              <a:rPr lang="zh-CN" altLang="en-US" dirty="0"/>
+              <a:t>像跳高一样，其实比的就是谁最后失败。</a:t>
+            </a:r>
+          </a:p>
+          <a:p>
+            <a:pPr marL="0" indent="0">
+              <a:buNone/>
+            </a:pPr>
+            <a:r>
+              <a:rPr lang="zh-CN" altLang="en-US" dirty="0"/>
+              <a:t>大家都失败了，但是你坚持到最后才失败，其实就是你胜了！</a:t>
+            </a:r>
+          </a:p>
+          <a:p>
+            <a:pPr marL="0" indent="0">
+              <a:buNone/>
+            </a:pPr>
+            <a:r>
+              <a:rPr lang="zh-CN" altLang="en-US" dirty="0"/>
+              <a:t>很多孩子，不是小学躺平，就是初中躺平，不是初中就是高中，不是高中就是大学，不是大学就是工作后。</a:t>
+            </a:r>
+          </a:p>
+          <a:p>
+            <a:pPr marL="0" indent="0">
+              <a:buNone/>
+            </a:pPr>
+            <a:r>
+              <a:rPr lang="zh-CN" altLang="en-US" dirty="0"/>
+              <a:t>越晚倒下，机会越多。</a:t>
+            </a:r>
+          </a:p>
+          <a:p>
+            <a:pPr marL="0" indent="0">
+              <a:buNone/>
+            </a:pPr>
+            <a:r>
+              <a:rPr lang="zh-CN" altLang="en-US" dirty="0"/>
+              <a:t>关键在哪里呢？</a:t>
+            </a:r>
+          </a:p>
+          <a:p>
+            <a:pPr marL="0" indent="0">
+              <a:buNone/>
+            </a:pPr>
+            <a:r>
+              <a:rPr lang="zh-CN" altLang="en-US" dirty="0"/>
+              <a:t>关键就在于欲望的保持！</a:t>
             </a:r>
           </a:p>
         </p:txBody>
@@ -8054,7 +11194,7 @@
     </p:spTree>
     <p:extLst>
       <p:ext uri="{BB962C8B-B14F-4D97-AF65-F5344CB8AC3E}">
-        <p14:creationId xmlns:p14="http://schemas.microsoft.com/office/powerpoint/2010/main" val="4115887133"/>
+        <p14:creationId xmlns:p14="http://schemas.microsoft.com/office/powerpoint/2010/main" val="2259444647"/>
       </p:ext>
     </p:extLst>
   </p:cSld>
@@ -8064,7 +11204,7 @@
 </p:sld>
 </file>
 
-<file path=ppt/slides/slide38.xml><?xml version="1.0" encoding="utf-8"?>
+<file path=ppt/slides/slide58.xml><?xml version="1.0" encoding="utf-8"?>
 <p:sld xmlns:a="http://schemas.openxmlformats.org/drawingml/2006/main" xmlns:r="http://schemas.openxmlformats.org/officeDocument/2006/relationships" xmlns:p="http://schemas.openxmlformats.org/presentationml/2006/main">
   <p:cSld>
     <p:spTree>
@@ -8072,7 +11212,7 @@
         <p:cNvPr id="1" name="">
           <a:extLst>
             <a:ext uri="{FF2B5EF4-FFF2-40B4-BE49-F238E27FC236}">
-              <a16:creationId xmlns:a16="http://schemas.microsoft.com/office/drawing/2014/main" id="{21B39EA2-0553-7FAA-DD5C-4F8607648101}"/>
+              <a16:creationId xmlns:a16="http://schemas.microsoft.com/office/drawing/2014/main" id="{7C0AEA13-F54F-9D21-DA5C-684C7D497F33}"/>
             </a:ext>
           </a:extLst>
         </p:cNvPr>
@@ -8092,7 +11232,7 @@
           <p:cNvPr id="2" name="标题 1">
             <a:extLst>
               <a:ext uri="{FF2B5EF4-FFF2-40B4-BE49-F238E27FC236}">
-                <a16:creationId xmlns:a16="http://schemas.microsoft.com/office/drawing/2014/main" id="{70FB0DFD-729F-DECC-D541-ECF0A8B11A69}"/>
+                <a16:creationId xmlns:a16="http://schemas.microsoft.com/office/drawing/2014/main" id="{8E23939F-BD1E-9756-8F9E-CEC6A1627FB0}"/>
               </a:ext>
             </a:extLst>
           </p:cNvPr>
@@ -8109,14 +11249,17 @@
           <a:lstStyle/>
           <a:p>
             <a:r>
-              <a:rPr lang="zh-CN" altLang="en-US" sz="900" dirty="0"/>
-              <a:t>常见的教育思维误区</a:t>
-            </a:r>
-            <a:r>
-              <a:rPr lang="en-US" altLang="zh-CN" sz="900" dirty="0"/>
-              <a:t>10</a:t>
-            </a:r>
-            <a:endParaRPr lang="zh-CN" altLang="en-US" sz="900" dirty="0"/>
+              <a:rPr lang="zh-CN" altLang="en-US" sz="4400" dirty="0"/>
+              <a:t>怎么做</a:t>
+            </a:r>
+            <a:r>
+              <a:rPr lang="en-US" altLang="zh-CN" sz="4400" dirty="0"/>
+              <a:t>——</a:t>
+            </a:r>
+            <a:r>
+              <a:rPr lang="zh-CN" altLang="en-US" sz="4400" dirty="0"/>
+              <a:t>接触自然</a:t>
+            </a:r>
           </a:p>
         </p:txBody>
       </p:sp>
@@ -8125,7 +11268,7 @@
           <p:cNvPr id="3" name="内容占位符 2">
             <a:extLst>
               <a:ext uri="{FF2B5EF4-FFF2-40B4-BE49-F238E27FC236}">
-                <a16:creationId xmlns:a16="http://schemas.microsoft.com/office/drawing/2014/main" id="{91A60C8E-521C-14D0-BA98-FA9EDAEBC6FC}"/>
+                <a16:creationId xmlns:a16="http://schemas.microsoft.com/office/drawing/2014/main" id="{516AD339-025C-EDD0-03A4-2F402FF8B7A8}"/>
               </a:ext>
             </a:extLst>
           </p:cNvPr>
@@ -8146,16 +11289,34 @@
             </a:pPr>
             <a:r>
               <a:rPr lang="zh-CN" altLang="en-US" dirty="0"/>
-              <a:t>还有，就是谎言教育。</a:t>
-            </a:r>
-          </a:p>
-          <a:p>
-            <a:pPr marL="0" indent="0">
-              <a:buNone/>
-            </a:pPr>
-            <a:r>
-              <a:rPr lang="zh-CN" altLang="en-US" dirty="0"/>
-              <a:t>只要你考上大学，你的前途就有了。</a:t>
+              <a:t>怎么做呢？</a:t>
+            </a:r>
+          </a:p>
+          <a:p>
+            <a:pPr marL="0" indent="0">
+              <a:buNone/>
+            </a:pPr>
+            <a:r>
+              <a:rPr lang="zh-CN" altLang="en-US" dirty="0"/>
+              <a:t>四个方法。</a:t>
+            </a:r>
+          </a:p>
+          <a:p>
+            <a:pPr marL="0" indent="0">
+              <a:buNone/>
+            </a:pPr>
+            <a:r>
+              <a:rPr lang="zh-CN" altLang="en-US" dirty="0"/>
+              <a:t>第一，一定要让孩子接触自然</a:t>
+            </a:r>
+          </a:p>
+          <a:p>
+            <a:pPr marL="0" indent="0">
+              <a:buNone/>
+            </a:pPr>
+            <a:r>
+              <a:rPr lang="zh-CN" altLang="en-US" dirty="0"/>
+              <a:t>自然能给人带来欲望</a:t>
             </a:r>
           </a:p>
         </p:txBody>
@@ -8163,7 +11324,7 @@
     </p:spTree>
     <p:extLst>
       <p:ext uri="{BB962C8B-B14F-4D97-AF65-F5344CB8AC3E}">
-        <p14:creationId xmlns:p14="http://schemas.microsoft.com/office/powerpoint/2010/main" val="3365545826"/>
+        <p14:creationId xmlns:p14="http://schemas.microsoft.com/office/powerpoint/2010/main" val="1438312463"/>
       </p:ext>
     </p:extLst>
   </p:cSld>
@@ -8173,7 +11334,7 @@
 </p:sld>
 </file>
 
-<file path=ppt/slides/slide39.xml><?xml version="1.0" encoding="utf-8"?>
+<file path=ppt/slides/slide59.xml><?xml version="1.0" encoding="utf-8"?>
 <p:sld xmlns:a="http://schemas.openxmlformats.org/drawingml/2006/main" xmlns:r="http://schemas.openxmlformats.org/officeDocument/2006/relationships" xmlns:p="http://schemas.openxmlformats.org/presentationml/2006/main">
   <p:cSld>
     <p:spTree>
@@ -8181,7 +11342,7 @@
         <p:cNvPr id="1" name="">
           <a:extLst>
             <a:ext uri="{FF2B5EF4-FFF2-40B4-BE49-F238E27FC236}">
-              <a16:creationId xmlns:a16="http://schemas.microsoft.com/office/drawing/2014/main" id="{3FA26910-1B80-344C-2AA9-0AD1E2B047A7}"/>
+              <a16:creationId xmlns:a16="http://schemas.microsoft.com/office/drawing/2014/main" id="{0B8128BB-0FB1-9A1F-CC0B-FDC52C0675BF}"/>
             </a:ext>
           </a:extLst>
         </p:cNvPr>
@@ -8201,7 +11362,7 @@
           <p:cNvPr id="2" name="标题 1">
             <a:extLst>
               <a:ext uri="{FF2B5EF4-FFF2-40B4-BE49-F238E27FC236}">
-                <a16:creationId xmlns:a16="http://schemas.microsoft.com/office/drawing/2014/main" id="{4A34FAEF-29F7-1CDD-D2C3-32E005DFCF16}"/>
+                <a16:creationId xmlns:a16="http://schemas.microsoft.com/office/drawing/2014/main" id="{57F81AFF-3549-6A70-6908-D8EB8CAE3D0B}"/>
               </a:ext>
             </a:extLst>
           </p:cNvPr>
@@ -8218,14 +11379,17 @@
           <a:lstStyle/>
           <a:p>
             <a:r>
-              <a:rPr lang="zh-CN" altLang="en-US" sz="900" dirty="0"/>
-              <a:t>常见的教育思维误区</a:t>
-            </a:r>
-            <a:r>
-              <a:rPr lang="en-US" altLang="zh-CN" sz="900" dirty="0"/>
-              <a:t>11</a:t>
-            </a:r>
-            <a:endParaRPr lang="zh-CN" altLang="en-US" sz="900" dirty="0"/>
+              <a:rPr lang="zh-CN" altLang="en-US" sz="4400" dirty="0"/>
+              <a:t>怎么做</a:t>
+            </a:r>
+            <a:r>
+              <a:rPr lang="en-US" altLang="zh-CN" sz="4400" dirty="0"/>
+              <a:t>——</a:t>
+            </a:r>
+            <a:r>
+              <a:rPr lang="zh-CN" altLang="en-US" sz="4400" dirty="0"/>
+              <a:t>同伴社交</a:t>
+            </a:r>
           </a:p>
         </p:txBody>
       </p:sp>
@@ -8234,7 +11398,7 @@
           <p:cNvPr id="3" name="内容占位符 2">
             <a:extLst>
               <a:ext uri="{FF2B5EF4-FFF2-40B4-BE49-F238E27FC236}">
-                <a16:creationId xmlns:a16="http://schemas.microsoft.com/office/drawing/2014/main" id="{76D0B381-3AE5-26D8-6A90-0406C5AAC8E1}"/>
+                <a16:creationId xmlns:a16="http://schemas.microsoft.com/office/drawing/2014/main" id="{FEA50B06-7147-1246-16E5-A51DE4F457ED}"/>
               </a:ext>
             </a:extLst>
           </p:cNvPr>
@@ -8255,88 +11419,22 @@
             </a:pPr>
             <a:r>
               <a:rPr lang="zh-CN" altLang="en-US" dirty="0"/>
-              <a:t>孩子面对这些错误的教育方式，他们会怎么样呢？</a:t>
-            </a:r>
-          </a:p>
-          <a:p>
-            <a:pPr marL="0" indent="0">
-              <a:buNone/>
-            </a:pPr>
-            <a:r>
-              <a:rPr lang="zh-CN" altLang="en-US" dirty="0"/>
-              <a:t>一种，就是进入二次元。</a:t>
-            </a:r>
-          </a:p>
-          <a:p>
-            <a:pPr marL="0" indent="0">
-              <a:buNone/>
-            </a:pPr>
-            <a:r>
-              <a:rPr lang="zh-CN" altLang="en-US" dirty="0"/>
-              <a:t>还有就是进入虚拟世界，游戏、短视频。</a:t>
-            </a:r>
-          </a:p>
-          <a:p>
-            <a:pPr marL="0" indent="0">
-              <a:buNone/>
-            </a:pPr>
-            <a:r>
-              <a:rPr lang="zh-CN" altLang="en-US" dirty="0"/>
-              <a:t>举例</a:t>
-            </a:r>
-          </a:p>
-          <a:p>
-            <a:pPr marL="0" indent="0">
-              <a:buNone/>
-            </a:pPr>
-            <a:r>
-              <a:rPr lang="zh-CN" altLang="en-US" dirty="0"/>
-              <a:t>有些孩子严重到什么程度呢？</a:t>
-            </a:r>
-          </a:p>
-          <a:p>
-            <a:pPr marL="0" indent="0">
-              <a:buNone/>
-            </a:pPr>
-            <a:r>
-              <a:rPr lang="zh-CN" altLang="en-US" dirty="0"/>
-              <a:t>比如有个孩子说过这样的话。</a:t>
-            </a:r>
-          </a:p>
-          <a:p>
-            <a:pPr marL="0" indent="0">
-              <a:buNone/>
-            </a:pPr>
-            <a:r>
-              <a:rPr lang="zh-CN" altLang="en-US" dirty="0"/>
-              <a:t>他说他不敢见到太阳。</a:t>
-            </a:r>
-          </a:p>
-          <a:p>
-            <a:pPr marL="0" indent="0">
-              <a:buNone/>
-            </a:pPr>
-            <a:r>
-              <a:rPr lang="zh-CN" altLang="en-US" dirty="0"/>
-              <a:t>太阳会伤害我。</a:t>
-            </a:r>
-          </a:p>
-          <a:p>
-            <a:pPr marL="0" indent="0">
-              <a:buNone/>
-            </a:pPr>
-            <a:r>
-              <a:rPr lang="zh-CN" altLang="en-US" dirty="0"/>
-              <a:t>大家想一想，哪里没有太阳？</a:t>
-            </a:r>
-          </a:p>
-          <a:p>
-            <a:pPr marL="0" indent="0">
-              <a:buNone/>
-            </a:pPr>
-            <a:r>
-              <a:rPr lang="zh-CN" altLang="en-US" dirty="0"/>
-              <a:t>只有地下没有太阳，难道他只能生活在地下吗？</a:t>
+              <a:t>第二是要让孩子有社交</a:t>
+            </a:r>
+          </a:p>
+          <a:p>
+            <a:pPr marL="0" indent="0">
+              <a:buNone/>
+            </a:pPr>
+            <a:endParaRPr lang="zh-CN" altLang="en-US" dirty="0"/>
+          </a:p>
+          <a:p>
+            <a:pPr marL="0" indent="0">
+              <a:buNone/>
+            </a:pPr>
+            <a:r>
+              <a:rPr lang="zh-CN" altLang="en-US" dirty="0"/>
+              <a:t>一样有同伴</a:t>
             </a:r>
           </a:p>
         </p:txBody>
@@ -8344,7 +11442,7 @@
     </p:spTree>
     <p:extLst>
       <p:ext uri="{BB962C8B-B14F-4D97-AF65-F5344CB8AC3E}">
-        <p14:creationId xmlns:p14="http://schemas.microsoft.com/office/powerpoint/2010/main" val="201398923"/>
+        <p14:creationId xmlns:p14="http://schemas.microsoft.com/office/powerpoint/2010/main" val="2117710397"/>
       </p:ext>
     </p:extLst>
   </p:cSld>
@@ -8354,7 +11452,7 @@
 </p:sld>
 </file>
 
-<file path=ppt/slides/slide4.xml><?xml version="1.0" encoding="utf-8"?>
+<file path=ppt/slides/slide6.xml><?xml version="1.0" encoding="utf-8"?>
 <p:sld xmlns:a="http://schemas.openxmlformats.org/drawingml/2006/main" xmlns:r="http://schemas.openxmlformats.org/officeDocument/2006/relationships" xmlns:p="http://schemas.openxmlformats.org/presentationml/2006/main">
   <p:cSld>
     <p:spTree>
@@ -8393,14 +11491,19 @@
             <p:ph type="title"/>
           </p:nvPr>
         </p:nvSpPr>
-        <p:spPr/>
+        <p:spPr>
+          <a:xfrm>
+            <a:off x="521208" y="978408"/>
+            <a:ext cx="11155680" cy="926592"/>
+          </a:xfrm>
+        </p:spPr>
         <p:txBody>
           <a:bodyPr/>
           <a:lstStyle/>
           <a:p>
             <a:r>
               <a:rPr lang="zh-CN" altLang="en-US" sz="4400" dirty="0"/>
-              <a:t>第三代儿童教育就是面向未来的教育（二）</a:t>
+              <a:t>中国未来缺人，但不缺大学生</a:t>
             </a:r>
           </a:p>
         </p:txBody>
@@ -8501,2735 +11604,7 @@
 </p:sld>
 </file>
 
-<file path=ppt/slides/slide40.xml><?xml version="1.0" encoding="utf-8"?>
-<p:sld xmlns:a="http://schemas.openxmlformats.org/drawingml/2006/main" xmlns:r="http://schemas.openxmlformats.org/officeDocument/2006/relationships" xmlns:p="http://schemas.openxmlformats.org/presentationml/2006/main">
-  <p:cSld>
-    <p:spTree>
-      <p:nvGrpSpPr>
-        <p:cNvPr id="1" name="">
-          <a:extLst>
-            <a:ext uri="{FF2B5EF4-FFF2-40B4-BE49-F238E27FC236}">
-              <a16:creationId xmlns:a16="http://schemas.microsoft.com/office/drawing/2014/main" id="{659AA2D6-49F1-058F-9C82-1EA33B6D77C8}"/>
-            </a:ext>
-          </a:extLst>
-        </p:cNvPr>
-        <p:cNvGrpSpPr/>
-        <p:nvPr/>
-      </p:nvGrpSpPr>
-      <p:grpSpPr>
-        <a:xfrm>
-          <a:off x="0" y="0"/>
-          <a:ext cx="0" cy="0"/>
-          <a:chOff x="0" y="0"/>
-          <a:chExt cx="0" cy="0"/>
-        </a:xfrm>
-      </p:grpSpPr>
-      <p:sp>
-        <p:nvSpPr>
-          <p:cNvPr id="2" name="标题 1">
-            <a:extLst>
-              <a:ext uri="{FF2B5EF4-FFF2-40B4-BE49-F238E27FC236}">
-                <a16:creationId xmlns:a16="http://schemas.microsoft.com/office/drawing/2014/main" id="{F77C6474-117C-B73A-F95A-841F6F4324DC}"/>
-              </a:ext>
-            </a:extLst>
-          </p:cNvPr>
-          <p:cNvSpPr>
-            <a:spLocks noGrp="1"/>
-          </p:cNvSpPr>
-          <p:nvPr>
-            <p:ph type="title"/>
-          </p:nvPr>
-        </p:nvSpPr>
-        <p:spPr/>
-        <p:txBody>
-          <a:bodyPr/>
-          <a:lstStyle/>
-          <a:p>
-            <a:r>
-              <a:rPr lang="zh-CN" altLang="en-US" sz="900" dirty="0"/>
-              <a:t>低欲望综合症</a:t>
-            </a:r>
-          </a:p>
-        </p:txBody>
-      </p:sp>
-      <p:sp>
-        <p:nvSpPr>
-          <p:cNvPr id="3" name="内容占位符 2">
-            <a:extLst>
-              <a:ext uri="{FF2B5EF4-FFF2-40B4-BE49-F238E27FC236}">
-                <a16:creationId xmlns:a16="http://schemas.microsoft.com/office/drawing/2014/main" id="{CFC534AB-D540-56BB-F4B8-9A5C721B4C56}"/>
-              </a:ext>
-            </a:extLst>
-          </p:cNvPr>
-          <p:cNvSpPr>
-            <a:spLocks noGrp="1"/>
-          </p:cNvSpPr>
-          <p:nvPr>
-            <p:ph idx="1"/>
-          </p:nvPr>
-        </p:nvSpPr>
-        <p:spPr/>
-        <p:txBody>
-          <a:bodyPr/>
-          <a:lstStyle/>
-          <a:p>
-            <a:pPr marL="0" indent="0">
-              <a:buNone/>
-            </a:pPr>
-            <a:r>
-              <a:rPr lang="zh-CN" altLang="en-US" dirty="0"/>
-              <a:t>低欲望综合症</a:t>
-            </a:r>
-          </a:p>
-          <a:p>
-            <a:pPr marL="0" indent="0">
-              <a:buNone/>
-            </a:pPr>
-            <a:r>
-              <a:rPr lang="zh-CN" altLang="en-US" dirty="0"/>
-              <a:t>是丧失了欲望的问题。</a:t>
-            </a:r>
-          </a:p>
-          <a:p>
-            <a:pPr marL="0" indent="0">
-              <a:buNone/>
-            </a:pPr>
-            <a:r>
-              <a:rPr lang="zh-CN" altLang="en-US" dirty="0"/>
-              <a:t>网上很多搞心理学的，他们学的都是弗洛伊德时代的心理学，当时弗洛伊德主要是治疗欲望过强的问题。</a:t>
-            </a:r>
-          </a:p>
-          <a:p>
-            <a:pPr marL="0" indent="0">
-              <a:buNone/>
-            </a:pPr>
-            <a:r>
-              <a:rPr lang="zh-CN" altLang="en-US" dirty="0"/>
-              <a:t>而现在是完全相反的，他们用错误的理论去看待现在的问题，必然得出错误的结论。</a:t>
-            </a:r>
-          </a:p>
-          <a:p>
-            <a:pPr marL="0" indent="0">
-              <a:buNone/>
-            </a:pPr>
-            <a:r>
-              <a:rPr lang="zh-CN" altLang="en-US" dirty="0"/>
-              <a:t>因为低欲望是不好搞的，一个人失去了欲望，你怎么处理都将无效，没有那么简单。</a:t>
-            </a:r>
-          </a:p>
-        </p:txBody>
-      </p:sp>
-    </p:spTree>
-    <p:extLst>
-      <p:ext uri="{BB962C8B-B14F-4D97-AF65-F5344CB8AC3E}">
-        <p14:creationId xmlns:p14="http://schemas.microsoft.com/office/powerpoint/2010/main" val="50470310"/>
-      </p:ext>
-    </p:extLst>
-  </p:cSld>
-  <p:clrMapOvr>
-    <a:masterClrMapping/>
-  </p:clrMapOvr>
-</p:sld>
-</file>
-
-<file path=ppt/slides/slide41.xml><?xml version="1.0" encoding="utf-8"?>
-<p:sld xmlns:a="http://schemas.openxmlformats.org/drawingml/2006/main" xmlns:r="http://schemas.openxmlformats.org/officeDocument/2006/relationships" xmlns:p="http://schemas.openxmlformats.org/presentationml/2006/main">
-  <p:cSld>
-    <p:spTree>
-      <p:nvGrpSpPr>
-        <p:cNvPr id="1" name="">
-          <a:extLst>
-            <a:ext uri="{FF2B5EF4-FFF2-40B4-BE49-F238E27FC236}">
-              <a16:creationId xmlns:a16="http://schemas.microsoft.com/office/drawing/2014/main" id="{F264BCFF-63FB-DC1C-9E02-57A425657F2E}"/>
-            </a:ext>
-          </a:extLst>
-        </p:cNvPr>
-        <p:cNvGrpSpPr/>
-        <p:nvPr/>
-      </p:nvGrpSpPr>
-      <p:grpSpPr>
-        <a:xfrm>
-          <a:off x="0" y="0"/>
-          <a:ext cx="0" cy="0"/>
-          <a:chOff x="0" y="0"/>
-          <a:chExt cx="0" cy="0"/>
-        </a:xfrm>
-      </p:grpSpPr>
-      <p:sp>
-        <p:nvSpPr>
-          <p:cNvPr id="2" name="标题 1">
-            <a:extLst>
-              <a:ext uri="{FF2B5EF4-FFF2-40B4-BE49-F238E27FC236}">
-                <a16:creationId xmlns:a16="http://schemas.microsoft.com/office/drawing/2014/main" id="{C97BDF0C-D6D4-1FCA-DF44-19737BA3F466}"/>
-              </a:ext>
-            </a:extLst>
-          </p:cNvPr>
-          <p:cNvSpPr>
-            <a:spLocks noGrp="1"/>
-          </p:cNvSpPr>
-          <p:nvPr>
-            <p:ph type="title"/>
-          </p:nvPr>
-        </p:nvSpPr>
-        <p:spPr/>
-        <p:txBody>
-          <a:bodyPr/>
-          <a:lstStyle/>
-          <a:p>
-            <a:r>
-              <a:rPr lang="zh-CN" altLang="en-US" sz="900" dirty="0"/>
-              <a:t>低欲望综合症</a:t>
-            </a:r>
-          </a:p>
-        </p:txBody>
-      </p:sp>
-      <p:sp>
-        <p:nvSpPr>
-          <p:cNvPr id="3" name="内容占位符 2">
-            <a:extLst>
-              <a:ext uri="{FF2B5EF4-FFF2-40B4-BE49-F238E27FC236}">
-                <a16:creationId xmlns:a16="http://schemas.microsoft.com/office/drawing/2014/main" id="{59496116-EBCD-132E-4CEE-6B7444A1131F}"/>
-              </a:ext>
-            </a:extLst>
-          </p:cNvPr>
-          <p:cNvSpPr>
-            <a:spLocks noGrp="1"/>
-          </p:cNvSpPr>
-          <p:nvPr>
-            <p:ph idx="1"/>
-          </p:nvPr>
-        </p:nvSpPr>
-        <p:spPr/>
-        <p:txBody>
-          <a:bodyPr/>
-          <a:lstStyle/>
-          <a:p>
-            <a:pPr marL="0" indent="0">
-              <a:buNone/>
-            </a:pPr>
-            <a:r>
-              <a:rPr lang="zh-CN" altLang="en-US" dirty="0"/>
-              <a:t>这种低欲望在孩子们中传播，现在越来越广泛、越来越严重。</a:t>
-            </a:r>
-          </a:p>
-          <a:p>
-            <a:pPr marL="0" indent="0">
-              <a:buNone/>
-            </a:pPr>
-            <a:r>
-              <a:rPr lang="zh-CN" altLang="en-US" dirty="0"/>
-              <a:t>当然，低欲望也分等级。</a:t>
-            </a:r>
-          </a:p>
-          <a:p>
-            <a:pPr marL="0" indent="0">
-              <a:buNone/>
-            </a:pPr>
-            <a:r>
-              <a:rPr lang="zh-CN" altLang="en-US" dirty="0"/>
-              <a:t>最严重的，是你问他吃什么，他对吃什么都没有任何兴趣。</a:t>
-            </a:r>
-          </a:p>
-          <a:p>
-            <a:pPr marL="0" indent="0">
-              <a:buNone/>
-            </a:pPr>
-            <a:r>
-              <a:rPr lang="zh-CN" altLang="en-US" dirty="0"/>
-              <a:t>一般严重的至少还对吃有那么一点兴趣。</a:t>
-            </a:r>
-          </a:p>
-          <a:p>
-            <a:pPr marL="0" indent="0">
-              <a:buNone/>
-            </a:pPr>
-            <a:r>
-              <a:rPr lang="zh-CN" altLang="en-US" dirty="0"/>
-              <a:t>你看现在的年轻人，只知道吃方便面、外卖、奶茶。</a:t>
-            </a:r>
-          </a:p>
-        </p:txBody>
-      </p:sp>
-    </p:spTree>
-    <p:extLst>
-      <p:ext uri="{BB962C8B-B14F-4D97-AF65-F5344CB8AC3E}">
-        <p14:creationId xmlns:p14="http://schemas.microsoft.com/office/powerpoint/2010/main" val="4170672797"/>
-      </p:ext>
-    </p:extLst>
-  </p:cSld>
-  <p:clrMapOvr>
-    <a:masterClrMapping/>
-  </p:clrMapOvr>
-</p:sld>
-</file>
-
-<file path=ppt/slides/slide42.xml><?xml version="1.0" encoding="utf-8"?>
-<p:sld xmlns:a="http://schemas.openxmlformats.org/drawingml/2006/main" xmlns:r="http://schemas.openxmlformats.org/officeDocument/2006/relationships" xmlns:p="http://schemas.openxmlformats.org/presentationml/2006/main">
-  <p:cSld>
-    <p:spTree>
-      <p:nvGrpSpPr>
-        <p:cNvPr id="1" name="">
-          <a:extLst>
-            <a:ext uri="{FF2B5EF4-FFF2-40B4-BE49-F238E27FC236}">
-              <a16:creationId xmlns:a16="http://schemas.microsoft.com/office/drawing/2014/main" id="{4239FEF6-1E28-1DD9-CBB6-A2FA01B61D86}"/>
-            </a:ext>
-          </a:extLst>
-        </p:cNvPr>
-        <p:cNvGrpSpPr/>
-        <p:nvPr/>
-      </p:nvGrpSpPr>
-      <p:grpSpPr>
-        <a:xfrm>
-          <a:off x="0" y="0"/>
-          <a:ext cx="0" cy="0"/>
-          <a:chOff x="0" y="0"/>
-          <a:chExt cx="0" cy="0"/>
-        </a:xfrm>
-      </p:grpSpPr>
-      <p:sp>
-        <p:nvSpPr>
-          <p:cNvPr id="2" name="标题 1">
-            <a:extLst>
-              <a:ext uri="{FF2B5EF4-FFF2-40B4-BE49-F238E27FC236}">
-                <a16:creationId xmlns:a16="http://schemas.microsoft.com/office/drawing/2014/main" id="{97EF93AB-78BB-28BB-03BD-B28EF35DA270}"/>
-              </a:ext>
-            </a:extLst>
-          </p:cNvPr>
-          <p:cNvSpPr>
-            <a:spLocks noGrp="1"/>
-          </p:cNvSpPr>
-          <p:nvPr>
-            <p:ph type="title"/>
-          </p:nvPr>
-        </p:nvSpPr>
-        <p:spPr/>
-        <p:txBody>
-          <a:bodyPr/>
-          <a:lstStyle/>
-          <a:p>
-            <a:r>
-              <a:rPr lang="zh-CN" altLang="en-US" sz="900" dirty="0"/>
-              <a:t>低欲望综合症</a:t>
-            </a:r>
-          </a:p>
-        </p:txBody>
-      </p:sp>
-      <p:sp>
-        <p:nvSpPr>
-          <p:cNvPr id="3" name="内容占位符 2">
-            <a:extLst>
-              <a:ext uri="{FF2B5EF4-FFF2-40B4-BE49-F238E27FC236}">
-                <a16:creationId xmlns:a16="http://schemas.microsoft.com/office/drawing/2014/main" id="{338015CB-CA8B-8826-1585-C542D28E9B53}"/>
-              </a:ext>
-            </a:extLst>
-          </p:cNvPr>
-          <p:cNvSpPr>
-            <a:spLocks noGrp="1"/>
-          </p:cNvSpPr>
-          <p:nvPr>
-            <p:ph idx="1"/>
-          </p:nvPr>
-        </p:nvSpPr>
-        <p:spPr/>
-        <p:txBody>
-          <a:bodyPr/>
-          <a:lstStyle/>
-          <a:p>
-            <a:pPr marL="0" indent="0">
-              <a:buNone/>
-            </a:pPr>
-            <a:r>
-              <a:rPr lang="zh-CN" altLang="en-US" dirty="0"/>
-              <a:t>这些低欲望的问题，导致了孩子进入社会后对工作对职业没有任何兴趣和动力。</a:t>
-            </a:r>
-          </a:p>
-          <a:p>
-            <a:pPr marL="0" indent="0">
-              <a:buNone/>
-            </a:pPr>
-            <a:r>
-              <a:rPr lang="zh-CN" altLang="en-US" dirty="0"/>
-              <a:t>而家长们却只看到了表面，没有真正搞清楚问题的本源。</a:t>
-            </a:r>
-          </a:p>
-          <a:p>
-            <a:pPr marL="0" indent="0">
-              <a:buNone/>
-            </a:pPr>
-            <a:r>
-              <a:rPr lang="zh-CN" altLang="en-US" dirty="0"/>
-              <a:t>所以你看，很多家长来听课，只会问一些如何提高孩子学习成绩和学习方法的问题。</a:t>
-            </a:r>
-          </a:p>
-          <a:p>
-            <a:pPr marL="0" indent="0">
-              <a:buNone/>
-            </a:pPr>
-            <a:r>
-              <a:rPr lang="zh-CN" altLang="en-US" dirty="0"/>
-              <a:t>然而真正的问题，最严重的问题，都被大家忽略了！</a:t>
-            </a:r>
-          </a:p>
-        </p:txBody>
-      </p:sp>
-    </p:spTree>
-    <p:extLst>
-      <p:ext uri="{BB962C8B-B14F-4D97-AF65-F5344CB8AC3E}">
-        <p14:creationId xmlns:p14="http://schemas.microsoft.com/office/powerpoint/2010/main" val="2408514183"/>
-      </p:ext>
-    </p:extLst>
-  </p:cSld>
-  <p:clrMapOvr>
-    <a:masterClrMapping/>
-  </p:clrMapOvr>
-</p:sld>
-</file>
-
-<file path=ppt/slides/slide43.xml><?xml version="1.0" encoding="utf-8"?>
-<p:sld xmlns:a="http://schemas.openxmlformats.org/drawingml/2006/main" xmlns:r="http://schemas.openxmlformats.org/officeDocument/2006/relationships" xmlns:p="http://schemas.openxmlformats.org/presentationml/2006/main">
-  <p:cSld>
-    <p:spTree>
-      <p:nvGrpSpPr>
-        <p:cNvPr id="1" name="">
-          <a:extLst>
-            <a:ext uri="{FF2B5EF4-FFF2-40B4-BE49-F238E27FC236}">
-              <a16:creationId xmlns:a16="http://schemas.microsoft.com/office/drawing/2014/main" id="{4C224E28-1D4D-69C6-D85C-1801894FCDA3}"/>
-            </a:ext>
-          </a:extLst>
-        </p:cNvPr>
-        <p:cNvGrpSpPr/>
-        <p:nvPr/>
-      </p:nvGrpSpPr>
-      <p:grpSpPr>
-        <a:xfrm>
-          <a:off x="0" y="0"/>
-          <a:ext cx="0" cy="0"/>
-          <a:chOff x="0" y="0"/>
-          <a:chExt cx="0" cy="0"/>
-        </a:xfrm>
-      </p:grpSpPr>
-      <p:sp>
-        <p:nvSpPr>
-          <p:cNvPr id="2" name="标题 1">
-            <a:extLst>
-              <a:ext uri="{FF2B5EF4-FFF2-40B4-BE49-F238E27FC236}">
-                <a16:creationId xmlns:a16="http://schemas.microsoft.com/office/drawing/2014/main" id="{C395CC02-347E-D1CC-ED8A-064752802EE3}"/>
-              </a:ext>
-            </a:extLst>
-          </p:cNvPr>
-          <p:cNvSpPr>
-            <a:spLocks noGrp="1"/>
-          </p:cNvSpPr>
-          <p:nvPr>
-            <p:ph type="title"/>
-          </p:nvPr>
-        </p:nvSpPr>
-        <p:spPr/>
-        <p:txBody>
-          <a:bodyPr/>
-          <a:lstStyle/>
-          <a:p>
-            <a:r>
-              <a:rPr lang="zh-CN" altLang="en-US" sz="900" dirty="0"/>
-              <a:t>三大模型：多巴胺模型、血清素模型、压力激素模型</a:t>
-            </a:r>
-          </a:p>
-        </p:txBody>
-      </p:sp>
-      <p:sp>
-        <p:nvSpPr>
-          <p:cNvPr id="3" name="内容占位符 2">
-            <a:extLst>
-              <a:ext uri="{FF2B5EF4-FFF2-40B4-BE49-F238E27FC236}">
-                <a16:creationId xmlns:a16="http://schemas.microsoft.com/office/drawing/2014/main" id="{E34815AA-919D-4537-6F5D-C486F32AC863}"/>
-              </a:ext>
-            </a:extLst>
-          </p:cNvPr>
-          <p:cNvSpPr>
-            <a:spLocks noGrp="1"/>
-          </p:cNvSpPr>
-          <p:nvPr>
-            <p:ph idx="1"/>
-          </p:nvPr>
-        </p:nvSpPr>
-        <p:spPr/>
-        <p:txBody>
-          <a:bodyPr/>
-          <a:lstStyle/>
-          <a:p>
-            <a:pPr marL="0" indent="0">
-              <a:buNone/>
-            </a:pPr>
-            <a:r>
-              <a:rPr lang="zh-CN" altLang="en-US" dirty="0"/>
-              <a:t>就是这个孩子在青春期的时候</a:t>
-            </a:r>
-          </a:p>
-          <a:p>
-            <a:pPr marL="0" indent="0">
-              <a:buNone/>
-            </a:pPr>
-            <a:endParaRPr lang="zh-CN" altLang="en-US" dirty="0"/>
-          </a:p>
-          <a:p>
-            <a:pPr marL="0" indent="0">
-              <a:buNone/>
-            </a:pPr>
-            <a:r>
-              <a:rPr lang="zh-CN" altLang="en-US" dirty="0"/>
-              <a:t>三大模型：多巴胺模型、血清素模型、压力激素模型。</a:t>
-            </a:r>
-          </a:p>
-          <a:p>
-            <a:pPr marL="0" indent="0">
-              <a:buNone/>
-            </a:pPr>
-            <a:endParaRPr lang="zh-CN" altLang="en-US" dirty="0"/>
-          </a:p>
-          <a:p>
-            <a:pPr marL="0" indent="0">
-              <a:buNone/>
-            </a:pPr>
-            <a:r>
-              <a:rPr lang="zh-CN" altLang="en-US" dirty="0"/>
-              <a:t>多巴胺模型讲过了。</a:t>
-            </a:r>
-          </a:p>
-        </p:txBody>
-      </p:sp>
-    </p:spTree>
-    <p:extLst>
-      <p:ext uri="{BB962C8B-B14F-4D97-AF65-F5344CB8AC3E}">
-        <p14:creationId xmlns:p14="http://schemas.microsoft.com/office/powerpoint/2010/main" val="3144703544"/>
-      </p:ext>
-    </p:extLst>
-  </p:cSld>
-  <p:clrMapOvr>
-    <a:masterClrMapping/>
-  </p:clrMapOvr>
-</p:sld>
-</file>
-
-<file path=ppt/slides/slide44.xml><?xml version="1.0" encoding="utf-8"?>
-<p:sld xmlns:a="http://schemas.openxmlformats.org/drawingml/2006/main" xmlns:r="http://schemas.openxmlformats.org/officeDocument/2006/relationships" xmlns:p="http://schemas.openxmlformats.org/presentationml/2006/main">
-  <p:cSld>
-    <p:spTree>
-      <p:nvGrpSpPr>
-        <p:cNvPr id="1" name="">
-          <a:extLst>
-            <a:ext uri="{FF2B5EF4-FFF2-40B4-BE49-F238E27FC236}">
-              <a16:creationId xmlns:a16="http://schemas.microsoft.com/office/drawing/2014/main" id="{90196926-917C-1BAB-2C87-1518750794CD}"/>
-            </a:ext>
-          </a:extLst>
-        </p:cNvPr>
-        <p:cNvGrpSpPr/>
-        <p:nvPr/>
-      </p:nvGrpSpPr>
-      <p:grpSpPr>
-        <a:xfrm>
-          <a:off x="0" y="0"/>
-          <a:ext cx="0" cy="0"/>
-          <a:chOff x="0" y="0"/>
-          <a:chExt cx="0" cy="0"/>
-        </a:xfrm>
-      </p:grpSpPr>
-      <p:sp>
-        <p:nvSpPr>
-          <p:cNvPr id="2" name="标题 1">
-            <a:extLst>
-              <a:ext uri="{FF2B5EF4-FFF2-40B4-BE49-F238E27FC236}">
-                <a16:creationId xmlns:a16="http://schemas.microsoft.com/office/drawing/2014/main" id="{84158EB0-3B57-6230-C086-89FFCEF43DE2}"/>
-              </a:ext>
-            </a:extLst>
-          </p:cNvPr>
-          <p:cNvSpPr>
-            <a:spLocks noGrp="1"/>
-          </p:cNvSpPr>
-          <p:nvPr>
-            <p:ph type="title"/>
-          </p:nvPr>
-        </p:nvSpPr>
-        <p:spPr/>
-        <p:txBody>
-          <a:bodyPr/>
-          <a:lstStyle/>
-          <a:p>
-            <a:r>
-              <a:rPr lang="zh-CN" altLang="en-US" sz="900" dirty="0"/>
-              <a:t>三大模型：多巴胺模型、血清素模型、压力激素模型</a:t>
-            </a:r>
-          </a:p>
-        </p:txBody>
-      </p:sp>
-      <p:sp>
-        <p:nvSpPr>
-          <p:cNvPr id="3" name="内容占位符 2">
-            <a:extLst>
-              <a:ext uri="{FF2B5EF4-FFF2-40B4-BE49-F238E27FC236}">
-                <a16:creationId xmlns:a16="http://schemas.microsoft.com/office/drawing/2014/main" id="{8088C0F3-2085-2211-7B23-9697E2D1B71B}"/>
-              </a:ext>
-            </a:extLst>
-          </p:cNvPr>
-          <p:cNvSpPr>
-            <a:spLocks noGrp="1"/>
-          </p:cNvSpPr>
-          <p:nvPr>
-            <p:ph idx="1"/>
-          </p:nvPr>
-        </p:nvSpPr>
-        <p:spPr/>
-        <p:txBody>
-          <a:bodyPr/>
-          <a:lstStyle/>
-          <a:p>
-            <a:pPr marL="0" indent="0">
-              <a:buNone/>
-            </a:pPr>
-            <a:r>
-              <a:rPr lang="zh-CN" altLang="en-US" dirty="0"/>
-              <a:t>血清素是什么呢</a:t>
-            </a:r>
-          </a:p>
-          <a:p>
-            <a:pPr marL="0" indent="0">
-              <a:buNone/>
-            </a:pPr>
-            <a:r>
-              <a:rPr lang="zh-CN" altLang="en-US" dirty="0"/>
-              <a:t>就是让我们得到安抚的一种激素</a:t>
-            </a:r>
-          </a:p>
-          <a:p>
-            <a:pPr marL="0" indent="0">
-              <a:buNone/>
-            </a:pPr>
-            <a:r>
-              <a:rPr lang="zh-CN" altLang="en-US" dirty="0"/>
-              <a:t>比如说我感到压力了啊</a:t>
-            </a:r>
-          </a:p>
-          <a:p>
-            <a:pPr marL="0" indent="0">
-              <a:buNone/>
-            </a:pPr>
-            <a:r>
-              <a:rPr lang="zh-CN" altLang="en-US" dirty="0"/>
-              <a:t>我觉得需要一种情绪获得满足了</a:t>
-            </a:r>
-          </a:p>
-          <a:p>
-            <a:pPr marL="0" indent="0">
-              <a:buNone/>
-            </a:pPr>
-            <a:r>
-              <a:rPr lang="zh-CN" altLang="en-US" dirty="0"/>
-              <a:t>你就需要血清素安抚我自己</a:t>
-            </a:r>
-          </a:p>
-        </p:txBody>
-      </p:sp>
-    </p:spTree>
-    <p:extLst>
-      <p:ext uri="{BB962C8B-B14F-4D97-AF65-F5344CB8AC3E}">
-        <p14:creationId xmlns:p14="http://schemas.microsoft.com/office/powerpoint/2010/main" val="3216303502"/>
-      </p:ext>
-    </p:extLst>
-  </p:cSld>
-  <p:clrMapOvr>
-    <a:masterClrMapping/>
-  </p:clrMapOvr>
-</p:sld>
-</file>
-
-<file path=ppt/slides/slide45.xml><?xml version="1.0" encoding="utf-8"?>
-<p:sld xmlns:a="http://schemas.openxmlformats.org/drawingml/2006/main" xmlns:r="http://schemas.openxmlformats.org/officeDocument/2006/relationships" xmlns:p="http://schemas.openxmlformats.org/presentationml/2006/main">
-  <p:cSld>
-    <p:spTree>
-      <p:nvGrpSpPr>
-        <p:cNvPr id="1" name="">
-          <a:extLst>
-            <a:ext uri="{FF2B5EF4-FFF2-40B4-BE49-F238E27FC236}">
-              <a16:creationId xmlns:a16="http://schemas.microsoft.com/office/drawing/2014/main" id="{09311EBA-BFE6-35B8-DA28-A385F03C63C0}"/>
-            </a:ext>
-          </a:extLst>
-        </p:cNvPr>
-        <p:cNvGrpSpPr/>
-        <p:nvPr/>
-      </p:nvGrpSpPr>
-      <p:grpSpPr>
-        <a:xfrm>
-          <a:off x="0" y="0"/>
-          <a:ext cx="0" cy="0"/>
-          <a:chOff x="0" y="0"/>
-          <a:chExt cx="0" cy="0"/>
-        </a:xfrm>
-      </p:grpSpPr>
-      <p:sp>
-        <p:nvSpPr>
-          <p:cNvPr id="2" name="标题 1">
-            <a:extLst>
-              <a:ext uri="{FF2B5EF4-FFF2-40B4-BE49-F238E27FC236}">
-                <a16:creationId xmlns:a16="http://schemas.microsoft.com/office/drawing/2014/main" id="{C6455C79-761D-A311-F539-EF2C9A03BCDF}"/>
-              </a:ext>
-            </a:extLst>
-          </p:cNvPr>
-          <p:cNvSpPr>
-            <a:spLocks noGrp="1"/>
-          </p:cNvSpPr>
-          <p:nvPr>
-            <p:ph type="title"/>
-          </p:nvPr>
-        </p:nvSpPr>
-        <p:spPr/>
-        <p:txBody>
-          <a:bodyPr/>
-          <a:lstStyle/>
-          <a:p>
-            <a:r>
-              <a:rPr lang="zh-CN" altLang="en-US" sz="900" dirty="0"/>
-              <a:t>三大模型：多巴胺模型、血清素模型、压力激素模型</a:t>
-            </a:r>
-          </a:p>
-        </p:txBody>
-      </p:sp>
-      <p:sp>
-        <p:nvSpPr>
-          <p:cNvPr id="3" name="内容占位符 2">
-            <a:extLst>
-              <a:ext uri="{FF2B5EF4-FFF2-40B4-BE49-F238E27FC236}">
-                <a16:creationId xmlns:a16="http://schemas.microsoft.com/office/drawing/2014/main" id="{6E6B7CDF-AAB7-6D46-DE81-A316F6CBB3A8}"/>
-              </a:ext>
-            </a:extLst>
-          </p:cNvPr>
-          <p:cNvSpPr>
-            <a:spLocks noGrp="1"/>
-          </p:cNvSpPr>
-          <p:nvPr>
-            <p:ph idx="1"/>
-          </p:nvPr>
-        </p:nvSpPr>
-        <p:spPr/>
-        <p:txBody>
-          <a:bodyPr/>
-          <a:lstStyle/>
-          <a:p>
-            <a:pPr marL="0" indent="0">
-              <a:buNone/>
-            </a:pPr>
-            <a:r>
-              <a:rPr lang="zh-CN" altLang="en-US" dirty="0"/>
-              <a:t>其实还有一个模型，都不好意思跟你们说，就是性驱力模型</a:t>
-            </a:r>
-          </a:p>
-          <a:p>
-            <a:pPr marL="0" indent="0">
-              <a:buNone/>
-            </a:pPr>
-            <a:r>
-              <a:rPr lang="zh-CN" altLang="en-US" dirty="0"/>
-              <a:t>现在这些孩子们</a:t>
-            </a:r>
-          </a:p>
-          <a:p>
-            <a:pPr marL="0" indent="0">
-              <a:buNone/>
-            </a:pPr>
-            <a:r>
-              <a:rPr lang="zh-CN" altLang="en-US" dirty="0"/>
-              <a:t>他们不能交往</a:t>
-            </a:r>
-          </a:p>
-          <a:p>
-            <a:pPr marL="0" indent="0">
-              <a:buNone/>
-            </a:pPr>
-            <a:r>
-              <a:rPr lang="zh-CN" altLang="en-US" dirty="0"/>
-              <a:t>没有男女朋友关系</a:t>
-            </a:r>
-          </a:p>
-          <a:p>
-            <a:pPr marL="0" indent="0">
-              <a:buNone/>
-            </a:pPr>
-            <a:r>
-              <a:rPr lang="zh-CN" altLang="en-US" dirty="0"/>
-              <a:t>没有运动、没有艺术</a:t>
-            </a:r>
-          </a:p>
-          <a:p>
-            <a:pPr marL="0" indent="0">
-              <a:buNone/>
-            </a:pPr>
-            <a:r>
-              <a:rPr lang="zh-CN" altLang="en-US" dirty="0"/>
-              <a:t>然后呢，他们在青春期的时候</a:t>
-            </a:r>
-          </a:p>
-          <a:p>
-            <a:pPr marL="0" indent="0">
-              <a:buNone/>
-            </a:pPr>
-            <a:r>
-              <a:rPr lang="zh-CN" altLang="en-US" dirty="0"/>
-              <a:t>他们其实是很痛苦的</a:t>
-            </a:r>
-          </a:p>
-        </p:txBody>
-      </p:sp>
-    </p:spTree>
-    <p:extLst>
-      <p:ext uri="{BB962C8B-B14F-4D97-AF65-F5344CB8AC3E}">
-        <p14:creationId xmlns:p14="http://schemas.microsoft.com/office/powerpoint/2010/main" val="2701718977"/>
-      </p:ext>
-    </p:extLst>
-  </p:cSld>
-  <p:clrMapOvr>
-    <a:masterClrMapping/>
-  </p:clrMapOvr>
-</p:sld>
-</file>
-
-<file path=ppt/slides/slide46.xml><?xml version="1.0" encoding="utf-8"?>
-<p:sld xmlns:a="http://schemas.openxmlformats.org/drawingml/2006/main" xmlns:r="http://schemas.openxmlformats.org/officeDocument/2006/relationships" xmlns:p="http://schemas.openxmlformats.org/presentationml/2006/main">
-  <p:cSld>
-    <p:spTree>
-      <p:nvGrpSpPr>
-        <p:cNvPr id="1" name="">
-          <a:extLst>
-            <a:ext uri="{FF2B5EF4-FFF2-40B4-BE49-F238E27FC236}">
-              <a16:creationId xmlns:a16="http://schemas.microsoft.com/office/drawing/2014/main" id="{9FB8B92A-EC36-B734-49FB-44CDD919D109}"/>
-            </a:ext>
-          </a:extLst>
-        </p:cNvPr>
-        <p:cNvGrpSpPr/>
-        <p:nvPr/>
-      </p:nvGrpSpPr>
-      <p:grpSpPr>
-        <a:xfrm>
-          <a:off x="0" y="0"/>
-          <a:ext cx="0" cy="0"/>
-          <a:chOff x="0" y="0"/>
-          <a:chExt cx="0" cy="0"/>
-        </a:xfrm>
-      </p:grpSpPr>
-      <p:sp>
-        <p:nvSpPr>
-          <p:cNvPr id="2" name="标题 1">
-            <a:extLst>
-              <a:ext uri="{FF2B5EF4-FFF2-40B4-BE49-F238E27FC236}">
-                <a16:creationId xmlns:a16="http://schemas.microsoft.com/office/drawing/2014/main" id="{97855CE3-BF31-732B-8C43-ADB1D52EF8E6}"/>
-              </a:ext>
-            </a:extLst>
-          </p:cNvPr>
-          <p:cNvSpPr>
-            <a:spLocks noGrp="1"/>
-          </p:cNvSpPr>
-          <p:nvPr>
-            <p:ph type="title"/>
-          </p:nvPr>
-        </p:nvSpPr>
-        <p:spPr/>
-        <p:txBody>
-          <a:bodyPr/>
-          <a:lstStyle/>
-          <a:p>
-            <a:r>
-              <a:rPr lang="zh-CN" altLang="en-US" sz="900" dirty="0"/>
-              <a:t>三大模型：多巴胺模型、血清素模型、压力激素模型</a:t>
-            </a:r>
-          </a:p>
-        </p:txBody>
-      </p:sp>
-      <p:sp>
-        <p:nvSpPr>
-          <p:cNvPr id="3" name="内容占位符 2">
-            <a:extLst>
-              <a:ext uri="{FF2B5EF4-FFF2-40B4-BE49-F238E27FC236}">
-                <a16:creationId xmlns:a16="http://schemas.microsoft.com/office/drawing/2014/main" id="{AC6FB6EC-55E6-995D-1D88-14A099BD0F92}"/>
-              </a:ext>
-            </a:extLst>
-          </p:cNvPr>
-          <p:cNvSpPr>
-            <a:spLocks noGrp="1"/>
-          </p:cNvSpPr>
-          <p:nvPr>
-            <p:ph idx="1"/>
-          </p:nvPr>
-        </p:nvSpPr>
-        <p:spPr/>
-        <p:txBody>
-          <a:bodyPr/>
-          <a:lstStyle/>
-          <a:p>
-            <a:pPr marL="0" indent="0">
-              <a:buNone/>
-            </a:pPr>
-            <a:r>
-              <a:rPr lang="zh-CN" altLang="en-US" dirty="0"/>
-              <a:t>他们上暗网</a:t>
-            </a:r>
-          </a:p>
-          <a:p>
-            <a:pPr marL="0" indent="0">
-              <a:buNone/>
-            </a:pPr>
-            <a:r>
-              <a:rPr lang="zh-CN" altLang="en-US" dirty="0"/>
-              <a:t>在暗网上下载什么呢</a:t>
-            </a:r>
-          </a:p>
-          <a:p>
-            <a:pPr marL="0" indent="0">
-              <a:buNone/>
-            </a:pPr>
-            <a:r>
-              <a:rPr lang="zh-CN" altLang="en-US" dirty="0"/>
-              <a:t>下载各种各样的扭曲变态的性视频、短视频</a:t>
-            </a:r>
-          </a:p>
-          <a:p>
-            <a:pPr marL="0" indent="0">
-              <a:buNone/>
-            </a:pPr>
-            <a:r>
-              <a:rPr lang="zh-CN" altLang="en-US" dirty="0"/>
-              <a:t>然后把这俩孩子培养成一种非常奇葩的性模型</a:t>
-            </a:r>
-          </a:p>
-          <a:p>
-            <a:pPr marL="0" indent="0">
-              <a:buNone/>
-            </a:pPr>
-            <a:r>
-              <a:rPr lang="zh-CN" altLang="en-US" dirty="0"/>
-              <a:t>他们喜欢恋尸癖</a:t>
-            </a:r>
-          </a:p>
-          <a:p>
-            <a:pPr marL="0" indent="0">
-              <a:buNone/>
-            </a:pPr>
-            <a:r>
-              <a:rPr lang="zh-CN" altLang="en-US" dirty="0"/>
-              <a:t>对眼睛的是身上长着绿毛的尸体的视频</a:t>
-            </a:r>
-          </a:p>
-        </p:txBody>
-      </p:sp>
-    </p:spTree>
-    <p:extLst>
-      <p:ext uri="{BB962C8B-B14F-4D97-AF65-F5344CB8AC3E}">
-        <p14:creationId xmlns:p14="http://schemas.microsoft.com/office/powerpoint/2010/main" val="24962942"/>
-      </p:ext>
-    </p:extLst>
-  </p:cSld>
-  <p:clrMapOvr>
-    <a:masterClrMapping/>
-  </p:clrMapOvr>
-</p:sld>
-</file>
-
-<file path=ppt/slides/slide47.xml><?xml version="1.0" encoding="utf-8"?>
-<p:sld xmlns:a="http://schemas.openxmlformats.org/drawingml/2006/main" xmlns:r="http://schemas.openxmlformats.org/officeDocument/2006/relationships" xmlns:p="http://schemas.openxmlformats.org/presentationml/2006/main">
-  <p:cSld>
-    <p:spTree>
-      <p:nvGrpSpPr>
-        <p:cNvPr id="1" name="">
-          <a:extLst>
-            <a:ext uri="{FF2B5EF4-FFF2-40B4-BE49-F238E27FC236}">
-              <a16:creationId xmlns:a16="http://schemas.microsoft.com/office/drawing/2014/main" id="{0D1DBEFC-0FF9-A3DD-EFFC-3391DADD87E3}"/>
-            </a:ext>
-          </a:extLst>
-        </p:cNvPr>
-        <p:cNvGrpSpPr/>
-        <p:nvPr/>
-      </p:nvGrpSpPr>
-      <p:grpSpPr>
-        <a:xfrm>
-          <a:off x="0" y="0"/>
-          <a:ext cx="0" cy="0"/>
-          <a:chOff x="0" y="0"/>
-          <a:chExt cx="0" cy="0"/>
-        </a:xfrm>
-      </p:grpSpPr>
-      <p:sp>
-        <p:nvSpPr>
-          <p:cNvPr id="2" name="标题 1">
-            <a:extLst>
-              <a:ext uri="{FF2B5EF4-FFF2-40B4-BE49-F238E27FC236}">
-                <a16:creationId xmlns:a16="http://schemas.microsoft.com/office/drawing/2014/main" id="{AEF14A9A-7D8C-6599-6630-8E99CE240E14}"/>
-              </a:ext>
-            </a:extLst>
-          </p:cNvPr>
-          <p:cNvSpPr>
-            <a:spLocks noGrp="1"/>
-          </p:cNvSpPr>
-          <p:nvPr>
-            <p:ph type="title"/>
-          </p:nvPr>
-        </p:nvSpPr>
-        <p:spPr/>
-        <p:txBody>
-          <a:bodyPr/>
-          <a:lstStyle/>
-          <a:p>
-            <a:r>
-              <a:rPr lang="zh-CN" altLang="en-US" sz="900" dirty="0"/>
-              <a:t>三大模型：多巴胺模型、血清素模型、压力激素模型</a:t>
-            </a:r>
-          </a:p>
-        </p:txBody>
-      </p:sp>
-      <p:sp>
-        <p:nvSpPr>
-          <p:cNvPr id="3" name="内容占位符 2">
-            <a:extLst>
-              <a:ext uri="{FF2B5EF4-FFF2-40B4-BE49-F238E27FC236}">
-                <a16:creationId xmlns:a16="http://schemas.microsoft.com/office/drawing/2014/main" id="{0515B74D-194C-6CA3-E1B7-EE354E1DE7B7}"/>
-              </a:ext>
-            </a:extLst>
-          </p:cNvPr>
-          <p:cNvSpPr>
-            <a:spLocks noGrp="1"/>
-          </p:cNvSpPr>
-          <p:nvPr>
-            <p:ph idx="1"/>
-          </p:nvPr>
-        </p:nvSpPr>
-        <p:spPr/>
-        <p:txBody>
-          <a:bodyPr/>
-          <a:lstStyle/>
-          <a:p>
-            <a:pPr marL="0" indent="0">
-              <a:buNone/>
-            </a:pPr>
-            <a:r>
-              <a:rPr lang="zh-CN" altLang="en-US" dirty="0"/>
-              <a:t>血清素是他需求爆棚的时候</a:t>
-            </a:r>
-          </a:p>
-          <a:p>
-            <a:pPr marL="0" indent="0">
-              <a:buNone/>
-            </a:pPr>
-            <a:r>
-              <a:rPr lang="zh-CN" altLang="en-US" dirty="0"/>
-              <a:t>你必须要来运动</a:t>
-            </a:r>
-          </a:p>
-          <a:p>
-            <a:pPr marL="0" indent="0">
-              <a:buNone/>
-            </a:pPr>
-            <a:r>
-              <a:rPr lang="zh-CN" altLang="en-US" dirty="0"/>
-              <a:t>你让他人际交往</a:t>
-            </a:r>
-          </a:p>
-          <a:p>
-            <a:pPr marL="0" indent="0">
-              <a:buNone/>
-            </a:pPr>
-            <a:r>
-              <a:rPr lang="zh-CN" altLang="en-US" dirty="0"/>
-              <a:t>否则你把这孩子整个生理上都给弄坏了</a:t>
-            </a:r>
-          </a:p>
-          <a:p>
-            <a:pPr marL="0" indent="0">
-              <a:buNone/>
-            </a:pPr>
-            <a:r>
-              <a:rPr lang="zh-CN" altLang="en-US" dirty="0"/>
-              <a:t>他有压力的时候</a:t>
-            </a:r>
-          </a:p>
-          <a:p>
-            <a:pPr marL="0" indent="0">
-              <a:buNone/>
-            </a:pPr>
-            <a:r>
-              <a:rPr lang="zh-CN" altLang="en-US" dirty="0"/>
-              <a:t>他必须要去通过这个方式来缓解</a:t>
-            </a:r>
-          </a:p>
-          <a:p>
-            <a:pPr marL="0" indent="0">
-              <a:buNone/>
-            </a:pPr>
-            <a:r>
-              <a:rPr lang="zh-CN" altLang="en-US" dirty="0"/>
-              <a:t>孩子们就游戏成瘾</a:t>
-            </a:r>
-          </a:p>
-        </p:txBody>
-      </p:sp>
-    </p:spTree>
-    <p:extLst>
-      <p:ext uri="{BB962C8B-B14F-4D97-AF65-F5344CB8AC3E}">
-        <p14:creationId xmlns:p14="http://schemas.microsoft.com/office/powerpoint/2010/main" val="4292771339"/>
-      </p:ext>
-    </p:extLst>
-  </p:cSld>
-  <p:clrMapOvr>
-    <a:masterClrMapping/>
-  </p:clrMapOvr>
-</p:sld>
-</file>
-
-<file path=ppt/slides/slide48.xml><?xml version="1.0" encoding="utf-8"?>
-<p:sld xmlns:a="http://schemas.openxmlformats.org/drawingml/2006/main" xmlns:r="http://schemas.openxmlformats.org/officeDocument/2006/relationships" xmlns:p="http://schemas.openxmlformats.org/presentationml/2006/main">
-  <p:cSld>
-    <p:spTree>
-      <p:nvGrpSpPr>
-        <p:cNvPr id="1" name="">
-          <a:extLst>
-            <a:ext uri="{FF2B5EF4-FFF2-40B4-BE49-F238E27FC236}">
-              <a16:creationId xmlns:a16="http://schemas.microsoft.com/office/drawing/2014/main" id="{FDF16D9F-EC44-AC37-3F9B-A4970927FB50}"/>
-            </a:ext>
-          </a:extLst>
-        </p:cNvPr>
-        <p:cNvGrpSpPr/>
-        <p:nvPr/>
-      </p:nvGrpSpPr>
-      <p:grpSpPr>
-        <a:xfrm>
-          <a:off x="0" y="0"/>
-          <a:ext cx="0" cy="0"/>
-          <a:chOff x="0" y="0"/>
-          <a:chExt cx="0" cy="0"/>
-        </a:xfrm>
-      </p:grpSpPr>
-      <p:sp>
-        <p:nvSpPr>
-          <p:cNvPr id="2" name="标题 1">
-            <a:extLst>
-              <a:ext uri="{FF2B5EF4-FFF2-40B4-BE49-F238E27FC236}">
-                <a16:creationId xmlns:a16="http://schemas.microsoft.com/office/drawing/2014/main" id="{127E8E85-553B-BF4C-3DCF-471F6D6E2C3C}"/>
-              </a:ext>
-            </a:extLst>
-          </p:cNvPr>
-          <p:cNvSpPr>
-            <a:spLocks noGrp="1"/>
-          </p:cNvSpPr>
-          <p:nvPr>
-            <p:ph type="title"/>
-          </p:nvPr>
-        </p:nvSpPr>
-        <p:spPr/>
-        <p:txBody>
-          <a:bodyPr/>
-          <a:lstStyle/>
-          <a:p>
-            <a:r>
-              <a:rPr lang="zh-CN" altLang="en-US" sz="900" dirty="0"/>
-              <a:t>三大模型：多巴胺模型、血清素模型、压力激素模型</a:t>
-            </a:r>
-          </a:p>
-        </p:txBody>
-      </p:sp>
-      <p:sp>
-        <p:nvSpPr>
-          <p:cNvPr id="3" name="内容占位符 2">
-            <a:extLst>
-              <a:ext uri="{FF2B5EF4-FFF2-40B4-BE49-F238E27FC236}">
-                <a16:creationId xmlns:a16="http://schemas.microsoft.com/office/drawing/2014/main" id="{51ED26EB-A0A8-77B5-641C-03433723A843}"/>
-              </a:ext>
-            </a:extLst>
-          </p:cNvPr>
-          <p:cNvSpPr>
-            <a:spLocks noGrp="1"/>
-          </p:cNvSpPr>
-          <p:nvPr>
-            <p:ph idx="1"/>
-          </p:nvPr>
-        </p:nvSpPr>
-        <p:spPr/>
-        <p:txBody>
-          <a:bodyPr/>
-          <a:lstStyle/>
-          <a:p>
-            <a:pPr marL="0" indent="0">
-              <a:buNone/>
-            </a:pPr>
-            <a:r>
-              <a:rPr lang="zh-CN" altLang="en-US" dirty="0"/>
-              <a:t>第二个就是亲子关系破坏。</a:t>
-            </a:r>
-          </a:p>
-          <a:p>
-            <a:pPr marL="0" indent="0">
-              <a:buNone/>
-            </a:pPr>
-            <a:r>
-              <a:rPr lang="zh-CN" altLang="en-US" dirty="0"/>
-              <a:t>他很痛苦呀</a:t>
-            </a:r>
-          </a:p>
-          <a:p>
-            <a:pPr marL="0" indent="0">
-              <a:buNone/>
-            </a:pPr>
-            <a:r>
-              <a:rPr lang="zh-CN" altLang="en-US" dirty="0"/>
-              <a:t>痛苦之后他必然就会怎么样发火呀</a:t>
-            </a:r>
-          </a:p>
-          <a:p>
-            <a:pPr marL="0" indent="0">
-              <a:buNone/>
-            </a:pPr>
-            <a:r>
-              <a:rPr lang="zh-CN" altLang="en-US" dirty="0"/>
-              <a:t>他会对父母关系不好呀</a:t>
-            </a:r>
-          </a:p>
-          <a:p>
-            <a:pPr marL="0" indent="0">
-              <a:buNone/>
-            </a:pPr>
-            <a:r>
-              <a:rPr lang="zh-CN" altLang="en-US" dirty="0"/>
-              <a:t>然后你们认为是亲子关系不好</a:t>
-            </a:r>
-          </a:p>
-        </p:txBody>
-      </p:sp>
-    </p:spTree>
-    <p:extLst>
-      <p:ext uri="{BB962C8B-B14F-4D97-AF65-F5344CB8AC3E}">
-        <p14:creationId xmlns:p14="http://schemas.microsoft.com/office/powerpoint/2010/main" val="1372813099"/>
-      </p:ext>
-    </p:extLst>
-  </p:cSld>
-  <p:clrMapOvr>
-    <a:masterClrMapping/>
-  </p:clrMapOvr>
-</p:sld>
-</file>
-
-<file path=ppt/slides/slide49.xml><?xml version="1.0" encoding="utf-8"?>
-<p:sld xmlns:a="http://schemas.openxmlformats.org/drawingml/2006/main" xmlns:r="http://schemas.openxmlformats.org/officeDocument/2006/relationships" xmlns:p="http://schemas.openxmlformats.org/presentationml/2006/main">
-  <p:cSld>
-    <p:spTree>
-      <p:nvGrpSpPr>
-        <p:cNvPr id="1" name="">
-          <a:extLst>
-            <a:ext uri="{FF2B5EF4-FFF2-40B4-BE49-F238E27FC236}">
-              <a16:creationId xmlns:a16="http://schemas.microsoft.com/office/drawing/2014/main" id="{3BD6AE2E-DD93-B3AC-4557-E7516113F112}"/>
-            </a:ext>
-          </a:extLst>
-        </p:cNvPr>
-        <p:cNvGrpSpPr/>
-        <p:nvPr/>
-      </p:nvGrpSpPr>
-      <p:grpSpPr>
-        <a:xfrm>
-          <a:off x="0" y="0"/>
-          <a:ext cx="0" cy="0"/>
-          <a:chOff x="0" y="0"/>
-          <a:chExt cx="0" cy="0"/>
-        </a:xfrm>
-      </p:grpSpPr>
-      <p:sp>
-        <p:nvSpPr>
-          <p:cNvPr id="2" name="标题 1">
-            <a:extLst>
-              <a:ext uri="{FF2B5EF4-FFF2-40B4-BE49-F238E27FC236}">
-                <a16:creationId xmlns:a16="http://schemas.microsoft.com/office/drawing/2014/main" id="{054373A8-E74B-8357-5324-1F6C016431D6}"/>
-              </a:ext>
-            </a:extLst>
-          </p:cNvPr>
-          <p:cNvSpPr>
-            <a:spLocks noGrp="1"/>
-          </p:cNvSpPr>
-          <p:nvPr>
-            <p:ph type="title"/>
-          </p:nvPr>
-        </p:nvSpPr>
-        <p:spPr/>
-        <p:txBody>
-          <a:bodyPr/>
-          <a:lstStyle/>
-          <a:p>
-            <a:r>
-              <a:rPr lang="zh-CN" altLang="en-US" sz="900" dirty="0"/>
-              <a:t>三大模型：多巴胺模型、血清素模型、压力激素模型</a:t>
-            </a:r>
-          </a:p>
-        </p:txBody>
-      </p:sp>
-      <p:sp>
-        <p:nvSpPr>
-          <p:cNvPr id="3" name="内容占位符 2">
-            <a:extLst>
-              <a:ext uri="{FF2B5EF4-FFF2-40B4-BE49-F238E27FC236}">
-                <a16:creationId xmlns:a16="http://schemas.microsoft.com/office/drawing/2014/main" id="{D40B4457-F4AE-8775-4679-380106C86BA9}"/>
-              </a:ext>
-            </a:extLst>
-          </p:cNvPr>
-          <p:cNvSpPr>
-            <a:spLocks noGrp="1"/>
-          </p:cNvSpPr>
-          <p:nvPr>
-            <p:ph idx="1"/>
-          </p:nvPr>
-        </p:nvSpPr>
-        <p:spPr/>
-        <p:txBody>
-          <a:bodyPr/>
-          <a:lstStyle/>
-          <a:p>
-            <a:pPr marL="0" indent="0">
-              <a:buNone/>
-            </a:pPr>
-            <a:r>
-              <a:rPr lang="zh-CN" altLang="en-US" dirty="0"/>
-              <a:t>中国的孩子现在问题很严重。</a:t>
-            </a:r>
-          </a:p>
-          <a:p>
-            <a:pPr marL="0" indent="0">
-              <a:buNone/>
-            </a:pPr>
-            <a:r>
-              <a:rPr lang="zh-CN" altLang="en-US" dirty="0"/>
-              <a:t>同样西方的孩子也是一样的。</a:t>
-            </a:r>
-          </a:p>
-          <a:p>
-            <a:pPr marL="0" indent="0">
-              <a:buNone/>
-            </a:pPr>
-            <a:r>
-              <a:rPr lang="zh-CN" altLang="en-US" dirty="0"/>
-              <a:t>美国把芬太尼作为美国最大的问题。</a:t>
-            </a:r>
-          </a:p>
-          <a:p>
-            <a:pPr marL="0" indent="0">
-              <a:buNone/>
-            </a:pPr>
-            <a:r>
-              <a:rPr lang="zh-CN" altLang="en-US" dirty="0"/>
-              <a:t>每个青年人都在普遍吃芬太尼</a:t>
-            </a:r>
-          </a:p>
-          <a:p>
-            <a:pPr marL="0" indent="0">
-              <a:buNone/>
-            </a:pPr>
-            <a:r>
-              <a:rPr lang="zh-CN" altLang="en-US" dirty="0"/>
-              <a:t>用芬太尼在干嘛，缓解压</a:t>
-            </a:r>
-          </a:p>
-          <a:p>
-            <a:pPr marL="0" indent="0">
-              <a:buNone/>
-            </a:pPr>
-            <a:r>
-              <a:rPr lang="zh-CN" altLang="en-US" dirty="0"/>
-              <a:t>中国生产芬兰尼生产给美国了</a:t>
-            </a:r>
-          </a:p>
-          <a:p>
-            <a:pPr marL="0" indent="0">
-              <a:buNone/>
-            </a:pPr>
-            <a:r>
-              <a:rPr lang="zh-CN" altLang="en-US" dirty="0"/>
-              <a:t>所以美国就很生气</a:t>
-            </a:r>
-          </a:p>
-        </p:txBody>
-      </p:sp>
-    </p:spTree>
-    <p:extLst>
-      <p:ext uri="{BB962C8B-B14F-4D97-AF65-F5344CB8AC3E}">
-        <p14:creationId xmlns:p14="http://schemas.microsoft.com/office/powerpoint/2010/main" val="3219435374"/>
-      </p:ext>
-    </p:extLst>
-  </p:cSld>
-  <p:clrMapOvr>
-    <a:masterClrMapping/>
-  </p:clrMapOvr>
-</p:sld>
-</file>
-
-<file path=ppt/slides/slide5.xml><?xml version="1.0" encoding="utf-8"?>
-<p:sld xmlns:a="http://schemas.openxmlformats.org/drawingml/2006/main" xmlns:r="http://schemas.openxmlformats.org/officeDocument/2006/relationships" xmlns:p="http://schemas.openxmlformats.org/presentationml/2006/main">
-  <p:cSld>
-    <p:spTree>
-      <p:nvGrpSpPr>
-        <p:cNvPr id="1" name="">
-          <a:extLst>
-            <a:ext uri="{FF2B5EF4-FFF2-40B4-BE49-F238E27FC236}">
-              <a16:creationId xmlns:a16="http://schemas.microsoft.com/office/drawing/2014/main" id="{14BDDF96-FBD6-0AFB-72FC-44BB129CEA8D}"/>
-            </a:ext>
-          </a:extLst>
-        </p:cNvPr>
-        <p:cNvGrpSpPr/>
-        <p:nvPr/>
-      </p:nvGrpSpPr>
-      <p:grpSpPr>
-        <a:xfrm>
-          <a:off x="0" y="0"/>
-          <a:ext cx="0" cy="0"/>
-          <a:chOff x="0" y="0"/>
-          <a:chExt cx="0" cy="0"/>
-        </a:xfrm>
-      </p:grpSpPr>
-      <p:sp>
-        <p:nvSpPr>
-          <p:cNvPr id="2" name="标题 1">
-            <a:extLst>
-              <a:ext uri="{FF2B5EF4-FFF2-40B4-BE49-F238E27FC236}">
-                <a16:creationId xmlns:a16="http://schemas.microsoft.com/office/drawing/2014/main" id="{6AACDA2B-758B-0870-C014-48CB024397AA}"/>
-              </a:ext>
-            </a:extLst>
-          </p:cNvPr>
-          <p:cNvSpPr>
-            <a:spLocks noGrp="1"/>
-          </p:cNvSpPr>
-          <p:nvPr>
-            <p:ph type="title"/>
-          </p:nvPr>
-        </p:nvSpPr>
-        <p:spPr/>
-        <p:txBody>
-          <a:bodyPr/>
-          <a:lstStyle/>
-          <a:p>
-            <a:r>
-              <a:rPr lang="zh-CN" altLang="en-US" sz="4400" dirty="0"/>
-              <a:t>第三代儿童教育就是面向未来的教育（三）</a:t>
-            </a:r>
-          </a:p>
-        </p:txBody>
-      </p:sp>
-      <p:sp>
-        <p:nvSpPr>
-          <p:cNvPr id="3" name="内容占位符 2">
-            <a:extLst>
-              <a:ext uri="{FF2B5EF4-FFF2-40B4-BE49-F238E27FC236}">
-                <a16:creationId xmlns:a16="http://schemas.microsoft.com/office/drawing/2014/main" id="{AC198426-783E-07F5-22FB-8945255D452D}"/>
-              </a:ext>
-            </a:extLst>
-          </p:cNvPr>
-          <p:cNvSpPr>
-            <a:spLocks noGrp="1"/>
-          </p:cNvSpPr>
-          <p:nvPr>
-            <p:ph idx="1"/>
-          </p:nvPr>
-        </p:nvSpPr>
-        <p:spPr/>
-        <p:txBody>
-          <a:bodyPr/>
-          <a:lstStyle/>
-          <a:p>
-            <a:pPr marL="0" indent="0">
-              <a:buNone/>
-            </a:pPr>
-            <a:r>
-              <a:rPr lang="zh-CN" altLang="en-US" dirty="0"/>
-              <a:t>我们看一下北上广深大城市的外卖骑手，有多少人？</a:t>
-            </a:r>
-          </a:p>
-          <a:p>
-            <a:pPr marL="0" indent="0">
-              <a:buNone/>
-            </a:pPr>
-            <a:r>
-              <a:rPr lang="zh-CN" altLang="en-US" dirty="0"/>
-              <a:t>有多少大学学历的？</a:t>
-            </a:r>
-          </a:p>
-          <a:p>
-            <a:pPr marL="0" indent="0">
-              <a:buNone/>
-            </a:pPr>
-            <a:r>
-              <a:rPr lang="zh-CN" altLang="en-US" dirty="0"/>
-              <a:t>有一年春晚，有一个节目是很多外卖骑手在舞台上一起跳舞。</a:t>
-            </a:r>
-          </a:p>
-          <a:p>
-            <a:pPr marL="0" indent="0">
-              <a:buNone/>
-            </a:pPr>
-            <a:r>
-              <a:rPr lang="zh-CN" altLang="en-US" dirty="0"/>
-              <a:t>黄渤还曾登台一起表演。</a:t>
-            </a:r>
-          </a:p>
-          <a:p>
-            <a:pPr marL="0" indent="0">
-              <a:buNone/>
-            </a:pPr>
-            <a:r>
-              <a:rPr lang="zh-CN" altLang="en-US" dirty="0"/>
-              <a:t>大家知道为什么会有这样的节目吗？</a:t>
-            </a:r>
-          </a:p>
-        </p:txBody>
-      </p:sp>
-    </p:spTree>
-    <p:extLst>
-      <p:ext uri="{BB962C8B-B14F-4D97-AF65-F5344CB8AC3E}">
-        <p14:creationId xmlns:p14="http://schemas.microsoft.com/office/powerpoint/2010/main" val="2779998026"/>
-      </p:ext>
-    </p:extLst>
-  </p:cSld>
-  <p:clrMapOvr>
-    <a:masterClrMapping/>
-  </p:clrMapOvr>
-</p:sld>
-</file>
-
-<file path=ppt/slides/slide50.xml><?xml version="1.0" encoding="utf-8"?>
-<p:sld xmlns:a="http://schemas.openxmlformats.org/drawingml/2006/main" xmlns:r="http://schemas.openxmlformats.org/officeDocument/2006/relationships" xmlns:p="http://schemas.openxmlformats.org/presentationml/2006/main">
-  <p:cSld>
-    <p:spTree>
-      <p:nvGrpSpPr>
-        <p:cNvPr id="1" name="">
-          <a:extLst>
-            <a:ext uri="{FF2B5EF4-FFF2-40B4-BE49-F238E27FC236}">
-              <a16:creationId xmlns:a16="http://schemas.microsoft.com/office/drawing/2014/main" id="{EAB9D1B2-A286-24BA-870D-763B77981D6C}"/>
-            </a:ext>
-          </a:extLst>
-        </p:cNvPr>
-        <p:cNvGrpSpPr/>
-        <p:nvPr/>
-      </p:nvGrpSpPr>
-      <p:grpSpPr>
-        <a:xfrm>
-          <a:off x="0" y="0"/>
-          <a:ext cx="0" cy="0"/>
-          <a:chOff x="0" y="0"/>
-          <a:chExt cx="0" cy="0"/>
-        </a:xfrm>
-      </p:grpSpPr>
-      <p:sp>
-        <p:nvSpPr>
-          <p:cNvPr id="2" name="标题 1">
-            <a:extLst>
-              <a:ext uri="{FF2B5EF4-FFF2-40B4-BE49-F238E27FC236}">
-                <a16:creationId xmlns:a16="http://schemas.microsoft.com/office/drawing/2014/main" id="{AE6564CB-34A2-4FE3-26F7-82FA388FD1EB}"/>
-              </a:ext>
-            </a:extLst>
-          </p:cNvPr>
-          <p:cNvSpPr>
-            <a:spLocks noGrp="1"/>
-          </p:cNvSpPr>
-          <p:nvPr>
-            <p:ph type="title"/>
-          </p:nvPr>
-        </p:nvSpPr>
-        <p:spPr/>
-        <p:txBody>
-          <a:bodyPr/>
-          <a:lstStyle/>
-          <a:p>
-            <a:r>
-              <a:rPr lang="zh-CN" altLang="en-US" sz="900" dirty="0"/>
-              <a:t>三大模型：多巴胺模型、血清素模型、压力激素模型</a:t>
-            </a:r>
-          </a:p>
-        </p:txBody>
-      </p:sp>
-      <p:sp>
-        <p:nvSpPr>
-          <p:cNvPr id="3" name="内容占位符 2">
-            <a:extLst>
-              <a:ext uri="{FF2B5EF4-FFF2-40B4-BE49-F238E27FC236}">
-                <a16:creationId xmlns:a16="http://schemas.microsoft.com/office/drawing/2014/main" id="{CF7E1A27-E427-1E87-71A2-6193382A3C3D}"/>
-              </a:ext>
-            </a:extLst>
-          </p:cNvPr>
-          <p:cNvSpPr>
-            <a:spLocks noGrp="1"/>
-          </p:cNvSpPr>
-          <p:nvPr>
-            <p:ph idx="1"/>
-          </p:nvPr>
-        </p:nvSpPr>
-        <p:spPr/>
-        <p:txBody>
-          <a:bodyPr/>
-          <a:lstStyle/>
-          <a:p>
-            <a:pPr marL="0" indent="0">
-              <a:buNone/>
-            </a:pPr>
-            <a:r>
-              <a:rPr lang="zh-CN" altLang="en-US" dirty="0"/>
-              <a:t>中国孩子在 </a:t>
-            </a:r>
-            <a:r>
-              <a:rPr lang="en-US" altLang="zh-CN" dirty="0"/>
-              <a:t>QQ </a:t>
-            </a:r>
-            <a:r>
-              <a:rPr lang="zh-CN" altLang="en-US" dirty="0"/>
-              <a:t>群里面</a:t>
-            </a:r>
-          </a:p>
-          <a:p>
-            <a:pPr marL="0" indent="0">
-              <a:buNone/>
-            </a:pPr>
-            <a:r>
-              <a:rPr lang="zh-CN" altLang="en-US" dirty="0"/>
-              <a:t>跟科学院通过私下一些联系</a:t>
-            </a:r>
-          </a:p>
-          <a:p>
-            <a:pPr marL="0" indent="0">
-              <a:buNone/>
-            </a:pPr>
-            <a:r>
-              <a:rPr lang="zh-CN" altLang="en-US" dirty="0"/>
-              <a:t>他们互相传播去吃什么样的感冒药</a:t>
-            </a:r>
-          </a:p>
-          <a:p>
-            <a:pPr marL="0" indent="0">
-              <a:buNone/>
-            </a:pPr>
-            <a:r>
-              <a:rPr lang="zh-CN" altLang="en-US" dirty="0"/>
-              <a:t>吃什么样就那种带镇静的药物</a:t>
-            </a:r>
-          </a:p>
-          <a:p>
-            <a:pPr marL="0" indent="0">
-              <a:buNone/>
-            </a:pPr>
-            <a:r>
-              <a:rPr lang="zh-CN" altLang="en-US" dirty="0"/>
-              <a:t>能达到类似的减压效果</a:t>
-            </a:r>
-          </a:p>
-        </p:txBody>
-      </p:sp>
-    </p:spTree>
-    <p:extLst>
-      <p:ext uri="{BB962C8B-B14F-4D97-AF65-F5344CB8AC3E}">
-        <p14:creationId xmlns:p14="http://schemas.microsoft.com/office/powerpoint/2010/main" val="3248290299"/>
-      </p:ext>
-    </p:extLst>
-  </p:cSld>
-  <p:clrMapOvr>
-    <a:masterClrMapping/>
-  </p:clrMapOvr>
-</p:sld>
-</file>
-
-<file path=ppt/slides/slide51.xml><?xml version="1.0" encoding="utf-8"?>
-<p:sld xmlns:a="http://schemas.openxmlformats.org/drawingml/2006/main" xmlns:r="http://schemas.openxmlformats.org/officeDocument/2006/relationships" xmlns:p="http://schemas.openxmlformats.org/presentationml/2006/main">
-  <p:cSld>
-    <p:spTree>
-      <p:nvGrpSpPr>
-        <p:cNvPr id="1" name="">
-          <a:extLst>
-            <a:ext uri="{FF2B5EF4-FFF2-40B4-BE49-F238E27FC236}">
-              <a16:creationId xmlns:a16="http://schemas.microsoft.com/office/drawing/2014/main" id="{800F6BE4-E7A6-3591-7B1E-B04EB26E466D}"/>
-            </a:ext>
-          </a:extLst>
-        </p:cNvPr>
-        <p:cNvGrpSpPr/>
-        <p:nvPr/>
-      </p:nvGrpSpPr>
-      <p:grpSpPr>
-        <a:xfrm>
-          <a:off x="0" y="0"/>
-          <a:ext cx="0" cy="0"/>
-          <a:chOff x="0" y="0"/>
-          <a:chExt cx="0" cy="0"/>
-        </a:xfrm>
-      </p:grpSpPr>
-      <p:sp>
-        <p:nvSpPr>
-          <p:cNvPr id="2" name="标题 1">
-            <a:extLst>
-              <a:ext uri="{FF2B5EF4-FFF2-40B4-BE49-F238E27FC236}">
-                <a16:creationId xmlns:a16="http://schemas.microsoft.com/office/drawing/2014/main" id="{1F71854B-5BC7-AAA3-9333-3B76EA5F6E26}"/>
-              </a:ext>
-            </a:extLst>
-          </p:cNvPr>
-          <p:cNvSpPr>
-            <a:spLocks noGrp="1"/>
-          </p:cNvSpPr>
-          <p:nvPr>
-            <p:ph type="title"/>
-          </p:nvPr>
-        </p:nvSpPr>
-        <p:spPr/>
-        <p:txBody>
-          <a:bodyPr/>
-          <a:lstStyle/>
-          <a:p>
-            <a:r>
-              <a:rPr lang="zh-CN" altLang="en-US" sz="900" dirty="0"/>
-              <a:t>三大模型：多巴胺模型、血清素模型、压力激素模型</a:t>
-            </a:r>
-          </a:p>
-        </p:txBody>
-      </p:sp>
-      <p:sp>
-        <p:nvSpPr>
-          <p:cNvPr id="3" name="内容占位符 2">
-            <a:extLst>
-              <a:ext uri="{FF2B5EF4-FFF2-40B4-BE49-F238E27FC236}">
-                <a16:creationId xmlns:a16="http://schemas.microsoft.com/office/drawing/2014/main" id="{FA63ADE5-D814-7392-0972-342A4F655E64}"/>
-              </a:ext>
-            </a:extLst>
-          </p:cNvPr>
-          <p:cNvSpPr>
-            <a:spLocks noGrp="1"/>
-          </p:cNvSpPr>
-          <p:nvPr>
-            <p:ph idx="1"/>
-          </p:nvPr>
-        </p:nvSpPr>
-        <p:spPr/>
-        <p:txBody>
-          <a:bodyPr/>
-          <a:lstStyle/>
-          <a:p>
-            <a:pPr marL="0" indent="0">
-              <a:buNone/>
-            </a:pPr>
-            <a:r>
-              <a:rPr lang="zh-CN" altLang="en-US" dirty="0"/>
-              <a:t>给他一个正确的解压方法</a:t>
-            </a:r>
-          </a:p>
-          <a:p>
-            <a:pPr marL="0" indent="0">
-              <a:buNone/>
-            </a:pPr>
-            <a:r>
-              <a:rPr lang="zh-CN" altLang="en-US" dirty="0"/>
-              <a:t>而不是搞什么亲子关系问题</a:t>
-            </a:r>
-          </a:p>
-        </p:txBody>
-      </p:sp>
-    </p:spTree>
-    <p:extLst>
-      <p:ext uri="{BB962C8B-B14F-4D97-AF65-F5344CB8AC3E}">
-        <p14:creationId xmlns:p14="http://schemas.microsoft.com/office/powerpoint/2010/main" val="3868834614"/>
-      </p:ext>
-    </p:extLst>
-  </p:cSld>
-  <p:clrMapOvr>
-    <a:masterClrMapping/>
-  </p:clrMapOvr>
-</p:sld>
-</file>
-
-<file path=ppt/slides/slide52.xml><?xml version="1.0" encoding="utf-8"?>
-<p:sld xmlns:a="http://schemas.openxmlformats.org/drawingml/2006/main" xmlns:r="http://schemas.openxmlformats.org/officeDocument/2006/relationships" xmlns:p="http://schemas.openxmlformats.org/presentationml/2006/main">
-  <p:cSld>
-    <p:spTree>
-      <p:nvGrpSpPr>
-        <p:cNvPr id="1" name="">
-          <a:extLst>
-            <a:ext uri="{FF2B5EF4-FFF2-40B4-BE49-F238E27FC236}">
-              <a16:creationId xmlns:a16="http://schemas.microsoft.com/office/drawing/2014/main" id="{41DD8A02-8CEA-F469-F3A9-9D050ADAFCD4}"/>
-            </a:ext>
-          </a:extLst>
-        </p:cNvPr>
-        <p:cNvGrpSpPr/>
-        <p:nvPr/>
-      </p:nvGrpSpPr>
-      <p:grpSpPr>
-        <a:xfrm>
-          <a:off x="0" y="0"/>
-          <a:ext cx="0" cy="0"/>
-          <a:chOff x="0" y="0"/>
-          <a:chExt cx="0" cy="0"/>
-        </a:xfrm>
-      </p:grpSpPr>
-      <p:sp>
-        <p:nvSpPr>
-          <p:cNvPr id="2" name="标题 1">
-            <a:extLst>
-              <a:ext uri="{FF2B5EF4-FFF2-40B4-BE49-F238E27FC236}">
-                <a16:creationId xmlns:a16="http://schemas.microsoft.com/office/drawing/2014/main" id="{B127C411-46B2-0C2B-6AFD-112CAF40E6AF}"/>
-              </a:ext>
-            </a:extLst>
-          </p:cNvPr>
-          <p:cNvSpPr>
-            <a:spLocks noGrp="1"/>
-          </p:cNvSpPr>
-          <p:nvPr>
-            <p:ph type="title"/>
-          </p:nvPr>
-        </p:nvSpPr>
-        <p:spPr/>
-        <p:txBody>
-          <a:bodyPr/>
-          <a:lstStyle/>
-          <a:p>
-            <a:r>
-              <a:rPr lang="zh-CN" altLang="en-US" sz="900" dirty="0"/>
-              <a:t>三大模型：多巴胺模型、血清素模型、压力激素模型</a:t>
-            </a:r>
-          </a:p>
-        </p:txBody>
-      </p:sp>
-      <p:sp>
-        <p:nvSpPr>
-          <p:cNvPr id="3" name="内容占位符 2">
-            <a:extLst>
-              <a:ext uri="{FF2B5EF4-FFF2-40B4-BE49-F238E27FC236}">
-                <a16:creationId xmlns:a16="http://schemas.microsoft.com/office/drawing/2014/main" id="{7738B2A2-B144-64A4-EC4D-F4043162628A}"/>
-              </a:ext>
-            </a:extLst>
-          </p:cNvPr>
-          <p:cNvSpPr>
-            <a:spLocks noGrp="1"/>
-          </p:cNvSpPr>
-          <p:nvPr>
-            <p:ph idx="1"/>
-          </p:nvPr>
-        </p:nvSpPr>
-        <p:spPr/>
-        <p:txBody>
-          <a:bodyPr/>
-          <a:lstStyle/>
-          <a:p>
-            <a:pPr marL="0" indent="0">
-              <a:buNone/>
-            </a:pPr>
-            <a:r>
-              <a:rPr lang="zh-CN" altLang="en-US" dirty="0"/>
-              <a:t>零零后啊，或者一零后这些啊</a:t>
-            </a:r>
-          </a:p>
-          <a:p>
-            <a:pPr marL="0" indent="0">
-              <a:buNone/>
-            </a:pPr>
-            <a:r>
-              <a:rPr lang="zh-CN" altLang="en-US" dirty="0"/>
-              <a:t>年纪小点的那些啊</a:t>
-            </a:r>
-          </a:p>
-          <a:p>
-            <a:pPr marL="0" indent="0">
-              <a:buNone/>
-            </a:pPr>
-            <a:r>
-              <a:rPr lang="zh-CN" altLang="en-US" dirty="0"/>
-              <a:t>看那些刚刚参加工作的年轻</a:t>
-            </a:r>
-            <a:r>
-              <a:rPr lang="en-US" altLang="zh-CN" dirty="0"/>
-              <a:t>18</a:t>
-            </a:r>
-            <a:r>
-              <a:rPr lang="zh-CN" altLang="en-US" dirty="0"/>
-              <a:t>岁左右</a:t>
-            </a:r>
-          </a:p>
-          <a:p>
-            <a:pPr marL="0" indent="0">
-              <a:buNone/>
-            </a:pPr>
-            <a:r>
-              <a:rPr lang="zh-CN" altLang="en-US" dirty="0"/>
-              <a:t>他连打电话都不会打</a:t>
-            </a:r>
-          </a:p>
-          <a:p>
-            <a:pPr marL="0" indent="0">
-              <a:buNone/>
-            </a:pPr>
-            <a:r>
-              <a:rPr lang="zh-CN" altLang="en-US" dirty="0"/>
-              <a:t>因为他不知道怎么说话</a:t>
-            </a:r>
-          </a:p>
-          <a:p>
-            <a:pPr marL="0" indent="0">
-              <a:buNone/>
-            </a:pPr>
-            <a:r>
-              <a:rPr lang="zh-CN" altLang="en-US" dirty="0"/>
-              <a:t>他们只擅长发表情包</a:t>
-            </a:r>
-          </a:p>
-          <a:p>
-            <a:pPr marL="0" indent="0">
-              <a:buNone/>
-            </a:pPr>
-            <a:r>
-              <a:rPr lang="zh-CN" altLang="en-US" dirty="0"/>
-              <a:t>因为他们不具备语言表达和沟通的能力。</a:t>
-            </a:r>
-          </a:p>
-          <a:p>
-            <a:pPr marL="0" indent="0">
-              <a:buNone/>
-            </a:pPr>
-            <a:r>
-              <a:rPr lang="zh-CN" altLang="en-US" dirty="0"/>
-              <a:t>这些都是有研究的，不要以为是简单的现象。</a:t>
-            </a:r>
-          </a:p>
-        </p:txBody>
-      </p:sp>
-    </p:spTree>
-    <p:extLst>
-      <p:ext uri="{BB962C8B-B14F-4D97-AF65-F5344CB8AC3E}">
-        <p14:creationId xmlns:p14="http://schemas.microsoft.com/office/powerpoint/2010/main" val="356283702"/>
-      </p:ext>
-    </p:extLst>
-  </p:cSld>
-  <p:clrMapOvr>
-    <a:masterClrMapping/>
-  </p:clrMapOvr>
-</p:sld>
-</file>
-
-<file path=ppt/slides/slide53.xml><?xml version="1.0" encoding="utf-8"?>
-<p:sld xmlns:a="http://schemas.openxmlformats.org/drawingml/2006/main" xmlns:r="http://schemas.openxmlformats.org/officeDocument/2006/relationships" xmlns:p="http://schemas.openxmlformats.org/presentationml/2006/main">
-  <p:cSld>
-    <p:spTree>
-      <p:nvGrpSpPr>
-        <p:cNvPr id="1" name="">
-          <a:extLst>
-            <a:ext uri="{FF2B5EF4-FFF2-40B4-BE49-F238E27FC236}">
-              <a16:creationId xmlns:a16="http://schemas.microsoft.com/office/drawing/2014/main" id="{CC08602D-0153-22D9-8574-88FCE5EDA39B}"/>
-            </a:ext>
-          </a:extLst>
-        </p:cNvPr>
-        <p:cNvGrpSpPr/>
-        <p:nvPr/>
-      </p:nvGrpSpPr>
-      <p:grpSpPr>
-        <a:xfrm>
-          <a:off x="0" y="0"/>
-          <a:ext cx="0" cy="0"/>
-          <a:chOff x="0" y="0"/>
-          <a:chExt cx="0" cy="0"/>
-        </a:xfrm>
-      </p:grpSpPr>
-      <p:sp>
-        <p:nvSpPr>
-          <p:cNvPr id="2" name="标题 1">
-            <a:extLst>
-              <a:ext uri="{FF2B5EF4-FFF2-40B4-BE49-F238E27FC236}">
-                <a16:creationId xmlns:a16="http://schemas.microsoft.com/office/drawing/2014/main" id="{88231D6E-AAE8-8DE2-8310-E8AC8067807E}"/>
-              </a:ext>
-            </a:extLst>
-          </p:cNvPr>
-          <p:cNvSpPr>
-            <a:spLocks noGrp="1"/>
-          </p:cNvSpPr>
-          <p:nvPr>
-            <p:ph type="title"/>
-          </p:nvPr>
-        </p:nvSpPr>
-        <p:spPr/>
-        <p:txBody>
-          <a:bodyPr/>
-          <a:lstStyle/>
-          <a:p>
-            <a:r>
-              <a:rPr lang="zh-CN" altLang="en-US" sz="900" dirty="0"/>
-              <a:t>三大模型：多巴胺模型、血清素模型、压力激素模型</a:t>
-            </a:r>
-          </a:p>
-        </p:txBody>
-      </p:sp>
-      <p:sp>
-        <p:nvSpPr>
-          <p:cNvPr id="3" name="内容占位符 2">
-            <a:extLst>
-              <a:ext uri="{FF2B5EF4-FFF2-40B4-BE49-F238E27FC236}">
-                <a16:creationId xmlns:a16="http://schemas.microsoft.com/office/drawing/2014/main" id="{EA72EABE-F174-884A-570C-66C2F65AFDF2}"/>
-              </a:ext>
-            </a:extLst>
-          </p:cNvPr>
-          <p:cNvSpPr>
-            <a:spLocks noGrp="1"/>
-          </p:cNvSpPr>
-          <p:nvPr>
-            <p:ph idx="1"/>
-          </p:nvPr>
-        </p:nvSpPr>
-        <p:spPr/>
-        <p:txBody>
-          <a:bodyPr/>
-          <a:lstStyle/>
-          <a:p>
-            <a:pPr marL="0" indent="0">
-              <a:buNone/>
-            </a:pPr>
-            <a:r>
-              <a:rPr lang="zh-CN" altLang="en-US" dirty="0"/>
-              <a:t>像现在我们看到的这种现象，其实不是中国独有的，也不是现在才有的。</a:t>
-            </a:r>
-          </a:p>
-          <a:p>
-            <a:pPr marL="0" indent="0">
-              <a:buNone/>
-            </a:pPr>
-            <a:r>
-              <a:rPr lang="zh-CN" altLang="en-US" dirty="0"/>
-              <a:t>早在上个世纪</a:t>
-            </a:r>
-            <a:r>
-              <a:rPr lang="en-US" altLang="zh-CN" dirty="0"/>
-              <a:t>60</a:t>
-            </a:r>
-            <a:r>
-              <a:rPr lang="zh-CN" altLang="en-US" dirty="0"/>
-              <a:t>年代，全球就出现过这样的问题。</a:t>
-            </a:r>
-          </a:p>
-          <a:p>
-            <a:pPr marL="0" indent="0">
-              <a:buNone/>
-            </a:pPr>
-            <a:r>
-              <a:rPr lang="zh-CN" altLang="en-US" dirty="0"/>
-              <a:t>在美国出现了嬉皮士运动。</a:t>
-            </a:r>
-          </a:p>
-          <a:p>
-            <a:pPr marL="0" indent="0">
-              <a:buNone/>
-            </a:pPr>
-            <a:r>
-              <a:rPr lang="zh-CN" altLang="en-US" dirty="0"/>
-              <a:t>第二代会退化，会垮掉。</a:t>
-            </a:r>
-          </a:p>
-          <a:p>
-            <a:pPr marL="0" indent="0">
-              <a:buNone/>
-            </a:pPr>
-            <a:r>
-              <a:rPr lang="zh-CN" altLang="en-US" dirty="0"/>
-              <a:t>美国当时的解密文件中写道，希望中国的第二代也垮掉。</a:t>
-            </a:r>
-          </a:p>
-          <a:p>
-            <a:pPr marL="0" indent="0">
-              <a:buNone/>
-            </a:pPr>
-            <a:r>
-              <a:rPr lang="zh-CN" altLang="en-US" dirty="0"/>
-              <a:t>这样就不会竞争失败了。</a:t>
-            </a:r>
-          </a:p>
-          <a:p>
-            <a:pPr marL="0" indent="0">
-              <a:buNone/>
-            </a:pPr>
-            <a:r>
-              <a:rPr lang="zh-CN" altLang="en-US" dirty="0"/>
-              <a:t>中国的第二代，就是通过上山下乡，解决了这个问题。</a:t>
-            </a:r>
-          </a:p>
-        </p:txBody>
-      </p:sp>
-    </p:spTree>
-    <p:extLst>
-      <p:ext uri="{BB962C8B-B14F-4D97-AF65-F5344CB8AC3E}">
-        <p14:creationId xmlns:p14="http://schemas.microsoft.com/office/powerpoint/2010/main" val="2966064999"/>
-      </p:ext>
-    </p:extLst>
-  </p:cSld>
-  <p:clrMapOvr>
-    <a:masterClrMapping/>
-  </p:clrMapOvr>
-</p:sld>
-</file>
-
-<file path=ppt/slides/slide54.xml><?xml version="1.0" encoding="utf-8"?>
-<p:sld xmlns:a="http://schemas.openxmlformats.org/drawingml/2006/main" xmlns:r="http://schemas.openxmlformats.org/officeDocument/2006/relationships" xmlns:p="http://schemas.openxmlformats.org/presentationml/2006/main">
-  <p:cSld>
-    <p:spTree>
-      <p:nvGrpSpPr>
-        <p:cNvPr id="1" name="">
-          <a:extLst>
-            <a:ext uri="{FF2B5EF4-FFF2-40B4-BE49-F238E27FC236}">
-              <a16:creationId xmlns:a16="http://schemas.microsoft.com/office/drawing/2014/main" id="{B9D66C6F-4DEB-660E-6969-34C5FBA04BED}"/>
-            </a:ext>
-          </a:extLst>
-        </p:cNvPr>
-        <p:cNvGrpSpPr/>
-        <p:nvPr/>
-      </p:nvGrpSpPr>
-      <p:grpSpPr>
-        <a:xfrm>
-          <a:off x="0" y="0"/>
-          <a:ext cx="0" cy="0"/>
-          <a:chOff x="0" y="0"/>
-          <a:chExt cx="0" cy="0"/>
-        </a:xfrm>
-      </p:grpSpPr>
-      <p:sp>
-        <p:nvSpPr>
-          <p:cNvPr id="2" name="标题 1">
-            <a:extLst>
-              <a:ext uri="{FF2B5EF4-FFF2-40B4-BE49-F238E27FC236}">
-                <a16:creationId xmlns:a16="http://schemas.microsoft.com/office/drawing/2014/main" id="{FBE5E903-5C82-CF32-4B6B-B8397780A9C4}"/>
-              </a:ext>
-            </a:extLst>
-          </p:cNvPr>
-          <p:cNvSpPr>
-            <a:spLocks noGrp="1"/>
-          </p:cNvSpPr>
-          <p:nvPr>
-            <p:ph type="title"/>
-          </p:nvPr>
-        </p:nvSpPr>
-        <p:spPr/>
-        <p:txBody>
-          <a:bodyPr/>
-          <a:lstStyle/>
-          <a:p>
-            <a:r>
-              <a:rPr lang="zh-CN" altLang="en-US" sz="900" dirty="0"/>
-              <a:t>三大模型：多巴胺模型、血清素模型、压力激素模型</a:t>
-            </a:r>
-          </a:p>
-        </p:txBody>
-      </p:sp>
-      <p:sp>
-        <p:nvSpPr>
-          <p:cNvPr id="3" name="内容占位符 2">
-            <a:extLst>
-              <a:ext uri="{FF2B5EF4-FFF2-40B4-BE49-F238E27FC236}">
-                <a16:creationId xmlns:a16="http://schemas.microsoft.com/office/drawing/2014/main" id="{7089A6F3-5632-C937-67E3-A48767242AE8}"/>
-              </a:ext>
-            </a:extLst>
-          </p:cNvPr>
-          <p:cNvSpPr>
-            <a:spLocks noGrp="1"/>
-          </p:cNvSpPr>
-          <p:nvPr>
-            <p:ph idx="1"/>
-          </p:nvPr>
-        </p:nvSpPr>
-        <p:spPr/>
-        <p:txBody>
-          <a:bodyPr/>
-          <a:lstStyle/>
-          <a:p>
-            <a:pPr marL="0" indent="0">
-              <a:buNone/>
-            </a:pPr>
-            <a:r>
-              <a:rPr lang="en-US" altLang="zh-CN" dirty="0"/>
-              <a:t>25</a:t>
-            </a:r>
-            <a:r>
-              <a:rPr lang="zh-CN" altLang="en-US" dirty="0"/>
-              <a:t>号宇宙的老鼠实验。</a:t>
-            </a:r>
-          </a:p>
-          <a:p>
-            <a:pPr marL="0" indent="0">
-              <a:buNone/>
-            </a:pPr>
-            <a:r>
-              <a:rPr lang="zh-CN" altLang="en-US" dirty="0"/>
-              <a:t>结论：</a:t>
-            </a:r>
-          </a:p>
-          <a:p>
-            <a:pPr marL="0" indent="0">
-              <a:buNone/>
-            </a:pPr>
-            <a:r>
-              <a:rPr lang="zh-CN" altLang="en-US" dirty="0"/>
-              <a:t>第一，父母不喜欢孩子，互相攻击</a:t>
-            </a:r>
-          </a:p>
-          <a:p>
-            <a:pPr marL="0" indent="0">
-              <a:buNone/>
-            </a:pPr>
-            <a:r>
-              <a:rPr lang="zh-CN" altLang="en-US" dirty="0"/>
-              <a:t>第二，雄性女性化，雌性开始增强，要求女性权利</a:t>
-            </a:r>
-          </a:p>
-          <a:p>
-            <a:pPr marL="0" indent="0">
-              <a:buNone/>
-            </a:pPr>
-            <a:r>
-              <a:rPr lang="zh-CN" altLang="en-US" dirty="0"/>
-              <a:t>不求偶，不繁殖。</a:t>
-            </a:r>
-          </a:p>
-          <a:p>
-            <a:pPr marL="0" indent="0">
-              <a:buNone/>
-            </a:pPr>
-            <a:r>
-              <a:rPr lang="zh-CN" altLang="en-US" dirty="0"/>
-              <a:t>目前生孩子的主力是在</a:t>
-            </a:r>
-            <a:r>
-              <a:rPr lang="en-US" altLang="zh-CN" dirty="0"/>
-              <a:t>40</a:t>
-            </a:r>
-            <a:r>
-              <a:rPr lang="zh-CN" altLang="en-US" dirty="0"/>
-              <a:t>多岁的人，而年轻人几乎都不怎么生孩子。</a:t>
-            </a:r>
-          </a:p>
-          <a:p>
-            <a:pPr marL="0" indent="0">
-              <a:buNone/>
-            </a:pPr>
-            <a:r>
-              <a:rPr lang="zh-CN" altLang="en-US" dirty="0"/>
-              <a:t>日本是经历过这一切的。</a:t>
-            </a:r>
-          </a:p>
-          <a:p>
-            <a:pPr marL="0" indent="0">
-              <a:buNone/>
-            </a:pPr>
-            <a:r>
-              <a:rPr lang="zh-CN" altLang="en-US" dirty="0"/>
-              <a:t>在上个世纪日本就已经开始宅文化。</a:t>
-            </a:r>
-          </a:p>
-        </p:txBody>
-      </p:sp>
-    </p:spTree>
-    <p:extLst>
-      <p:ext uri="{BB962C8B-B14F-4D97-AF65-F5344CB8AC3E}">
-        <p14:creationId xmlns:p14="http://schemas.microsoft.com/office/powerpoint/2010/main" val="3308965247"/>
-      </p:ext>
-    </p:extLst>
-  </p:cSld>
-  <p:clrMapOvr>
-    <a:masterClrMapping/>
-  </p:clrMapOvr>
-</p:sld>
-</file>
-
-<file path=ppt/slides/slide55.xml><?xml version="1.0" encoding="utf-8"?>
-<p:sld xmlns:a="http://schemas.openxmlformats.org/drawingml/2006/main" xmlns:r="http://schemas.openxmlformats.org/officeDocument/2006/relationships" xmlns:p="http://schemas.openxmlformats.org/presentationml/2006/main">
-  <p:cSld>
-    <p:spTree>
-      <p:nvGrpSpPr>
-        <p:cNvPr id="1" name="">
-          <a:extLst>
-            <a:ext uri="{FF2B5EF4-FFF2-40B4-BE49-F238E27FC236}">
-              <a16:creationId xmlns:a16="http://schemas.microsoft.com/office/drawing/2014/main" id="{96C50539-6176-A14B-E66E-1D5FD9BDE5BD}"/>
-            </a:ext>
-          </a:extLst>
-        </p:cNvPr>
-        <p:cNvGrpSpPr/>
-        <p:nvPr/>
-      </p:nvGrpSpPr>
-      <p:grpSpPr>
-        <a:xfrm>
-          <a:off x="0" y="0"/>
-          <a:ext cx="0" cy="0"/>
-          <a:chOff x="0" y="0"/>
-          <a:chExt cx="0" cy="0"/>
-        </a:xfrm>
-      </p:grpSpPr>
-      <p:sp>
-        <p:nvSpPr>
-          <p:cNvPr id="2" name="标题 1">
-            <a:extLst>
-              <a:ext uri="{FF2B5EF4-FFF2-40B4-BE49-F238E27FC236}">
-                <a16:creationId xmlns:a16="http://schemas.microsoft.com/office/drawing/2014/main" id="{C04BD122-590E-8953-EA42-CCCC741A85E5}"/>
-              </a:ext>
-            </a:extLst>
-          </p:cNvPr>
-          <p:cNvSpPr>
-            <a:spLocks noGrp="1"/>
-          </p:cNvSpPr>
-          <p:nvPr>
-            <p:ph type="title"/>
-          </p:nvPr>
-        </p:nvSpPr>
-        <p:spPr/>
-        <p:txBody>
-          <a:bodyPr/>
-          <a:lstStyle/>
-          <a:p>
-            <a:r>
-              <a:rPr lang="zh-CN" altLang="en-US" sz="900" dirty="0"/>
-              <a:t>三大模型：多巴胺模型、血清素模型、压力激素模型</a:t>
-            </a:r>
-          </a:p>
-        </p:txBody>
-      </p:sp>
-      <p:sp>
-        <p:nvSpPr>
-          <p:cNvPr id="3" name="内容占位符 2">
-            <a:extLst>
-              <a:ext uri="{FF2B5EF4-FFF2-40B4-BE49-F238E27FC236}">
-                <a16:creationId xmlns:a16="http://schemas.microsoft.com/office/drawing/2014/main" id="{B2E04C2E-04B7-77CE-3ACC-FCE18A243DAB}"/>
-              </a:ext>
-            </a:extLst>
-          </p:cNvPr>
-          <p:cNvSpPr>
-            <a:spLocks noGrp="1"/>
-          </p:cNvSpPr>
-          <p:nvPr>
-            <p:ph idx="1"/>
-          </p:nvPr>
-        </p:nvSpPr>
-        <p:spPr/>
-        <p:txBody>
-          <a:bodyPr/>
-          <a:lstStyle/>
-          <a:p>
-            <a:pPr marL="0" indent="0">
-              <a:buNone/>
-            </a:pPr>
-            <a:r>
-              <a:rPr lang="zh-CN" altLang="en-US" dirty="0"/>
-              <a:t>国家对于安全套开始收税了。</a:t>
-            </a:r>
-          </a:p>
-          <a:p>
-            <a:pPr marL="0" indent="0">
-              <a:buNone/>
-            </a:pPr>
-            <a:r>
-              <a:rPr lang="zh-CN" altLang="en-US" dirty="0"/>
-              <a:t>下一步可能会限售或禁售。</a:t>
-            </a:r>
-          </a:p>
-        </p:txBody>
-      </p:sp>
-    </p:spTree>
-    <p:extLst>
-      <p:ext uri="{BB962C8B-B14F-4D97-AF65-F5344CB8AC3E}">
-        <p14:creationId xmlns:p14="http://schemas.microsoft.com/office/powerpoint/2010/main" val="2253926580"/>
-      </p:ext>
-    </p:extLst>
-  </p:cSld>
-  <p:clrMapOvr>
-    <a:masterClrMapping/>
-  </p:clrMapOvr>
-</p:sld>
-</file>
-
-<file path=ppt/slides/slide56.xml><?xml version="1.0" encoding="utf-8"?>
-<p:sld xmlns:a="http://schemas.openxmlformats.org/drawingml/2006/main" xmlns:r="http://schemas.openxmlformats.org/officeDocument/2006/relationships" xmlns:p="http://schemas.openxmlformats.org/presentationml/2006/main">
-  <p:cSld>
-    <p:spTree>
-      <p:nvGrpSpPr>
-        <p:cNvPr id="1" name="">
-          <a:extLst>
-            <a:ext uri="{FF2B5EF4-FFF2-40B4-BE49-F238E27FC236}">
-              <a16:creationId xmlns:a16="http://schemas.microsoft.com/office/drawing/2014/main" id="{9EE9A946-0908-B1E2-BCF4-EEEE724628AB}"/>
-            </a:ext>
-          </a:extLst>
-        </p:cNvPr>
-        <p:cNvGrpSpPr/>
-        <p:nvPr/>
-      </p:nvGrpSpPr>
-      <p:grpSpPr>
-        <a:xfrm>
-          <a:off x="0" y="0"/>
-          <a:ext cx="0" cy="0"/>
-          <a:chOff x="0" y="0"/>
-          <a:chExt cx="0" cy="0"/>
-        </a:xfrm>
-      </p:grpSpPr>
-      <p:sp>
-        <p:nvSpPr>
-          <p:cNvPr id="2" name="标题 1">
-            <a:extLst>
-              <a:ext uri="{FF2B5EF4-FFF2-40B4-BE49-F238E27FC236}">
-                <a16:creationId xmlns:a16="http://schemas.microsoft.com/office/drawing/2014/main" id="{0759986E-909F-FF70-71F5-4C2D40D8AB8F}"/>
-              </a:ext>
-            </a:extLst>
-          </p:cNvPr>
-          <p:cNvSpPr>
-            <a:spLocks noGrp="1"/>
-          </p:cNvSpPr>
-          <p:nvPr>
-            <p:ph type="title"/>
-          </p:nvPr>
-        </p:nvSpPr>
-        <p:spPr/>
-        <p:txBody>
-          <a:bodyPr/>
-          <a:lstStyle/>
-          <a:p>
-            <a:r>
-              <a:rPr lang="zh-CN" altLang="en-US" sz="900" dirty="0"/>
-              <a:t>三大模型：多巴胺模型、血清素模型、压力激素模型</a:t>
-            </a:r>
-          </a:p>
-        </p:txBody>
-      </p:sp>
-      <p:sp>
-        <p:nvSpPr>
-          <p:cNvPr id="3" name="内容占位符 2">
-            <a:extLst>
-              <a:ext uri="{FF2B5EF4-FFF2-40B4-BE49-F238E27FC236}">
-                <a16:creationId xmlns:a16="http://schemas.microsoft.com/office/drawing/2014/main" id="{64C6530A-A3CD-DD5C-2E1A-30C060FCC098}"/>
-              </a:ext>
-            </a:extLst>
-          </p:cNvPr>
-          <p:cNvSpPr>
-            <a:spLocks noGrp="1"/>
-          </p:cNvSpPr>
-          <p:nvPr>
-            <p:ph idx="1"/>
-          </p:nvPr>
-        </p:nvSpPr>
-        <p:spPr/>
-        <p:txBody>
-          <a:bodyPr/>
-          <a:lstStyle/>
-          <a:p>
-            <a:pPr marL="0" indent="0">
-              <a:buNone/>
-            </a:pPr>
-            <a:r>
-              <a:rPr lang="zh-CN" altLang="en-US" dirty="0"/>
-              <a:t>你看现在的年轻人，不愿意花时间社交，浑身疲惫感。</a:t>
-            </a:r>
-          </a:p>
-          <a:p>
-            <a:pPr marL="0" indent="0">
-              <a:buNone/>
-            </a:pPr>
-            <a:r>
-              <a:rPr lang="zh-CN" altLang="en-US" dirty="0"/>
-              <a:t>这样的人难以立志、没有理想。</a:t>
-            </a:r>
-          </a:p>
-          <a:p>
-            <a:pPr marL="0" indent="0">
-              <a:buNone/>
-            </a:pPr>
-            <a:r>
-              <a:rPr lang="zh-CN" altLang="en-US" dirty="0"/>
-              <a:t>实际上我们说的儿童青少年教育到底比的是什么？</a:t>
-            </a:r>
-          </a:p>
-          <a:p>
-            <a:pPr marL="0" indent="0">
-              <a:buNone/>
-            </a:pPr>
-            <a:r>
-              <a:rPr lang="zh-CN" altLang="en-US" dirty="0"/>
-              <a:t>像跳高一样，其实比的就是谁最后失败。</a:t>
-            </a:r>
-          </a:p>
-          <a:p>
-            <a:pPr marL="0" indent="0">
-              <a:buNone/>
-            </a:pPr>
-            <a:r>
-              <a:rPr lang="zh-CN" altLang="en-US" dirty="0"/>
-              <a:t>大家都失败了，但是你坚持到最后才失败，其实就是你胜了！</a:t>
-            </a:r>
-          </a:p>
-          <a:p>
-            <a:pPr marL="0" indent="0">
-              <a:buNone/>
-            </a:pPr>
-            <a:r>
-              <a:rPr lang="zh-CN" altLang="en-US" dirty="0"/>
-              <a:t>很多孩子，不是小学躺平，就是初中躺平，不是初中就是高中，不是高中就是大学，不是大学就是工作后。</a:t>
-            </a:r>
-          </a:p>
-          <a:p>
-            <a:pPr marL="0" indent="0">
-              <a:buNone/>
-            </a:pPr>
-            <a:r>
-              <a:rPr lang="zh-CN" altLang="en-US" dirty="0"/>
-              <a:t>越晚倒下，机会越多。</a:t>
-            </a:r>
-          </a:p>
-          <a:p>
-            <a:pPr marL="0" indent="0">
-              <a:buNone/>
-            </a:pPr>
-            <a:r>
-              <a:rPr lang="zh-CN" altLang="en-US" dirty="0"/>
-              <a:t>关键在哪里呢？</a:t>
-            </a:r>
-          </a:p>
-          <a:p>
-            <a:pPr marL="0" indent="0">
-              <a:buNone/>
-            </a:pPr>
-            <a:r>
-              <a:rPr lang="zh-CN" altLang="en-US" dirty="0"/>
-              <a:t>关键就在于欲望的保持！</a:t>
-            </a:r>
-          </a:p>
-        </p:txBody>
-      </p:sp>
-    </p:spTree>
-    <p:extLst>
-      <p:ext uri="{BB962C8B-B14F-4D97-AF65-F5344CB8AC3E}">
-        <p14:creationId xmlns:p14="http://schemas.microsoft.com/office/powerpoint/2010/main" val="2259444647"/>
-      </p:ext>
-    </p:extLst>
-  </p:cSld>
-  <p:clrMapOvr>
-    <a:masterClrMapping/>
-  </p:clrMapOvr>
-</p:sld>
-</file>
-
-<file path=ppt/slides/slide57.xml><?xml version="1.0" encoding="utf-8"?>
-<p:sld xmlns:a="http://schemas.openxmlformats.org/drawingml/2006/main" xmlns:r="http://schemas.openxmlformats.org/officeDocument/2006/relationships" xmlns:p="http://schemas.openxmlformats.org/presentationml/2006/main">
-  <p:cSld>
-    <p:spTree>
-      <p:nvGrpSpPr>
-        <p:cNvPr id="1" name="">
-          <a:extLst>
-            <a:ext uri="{FF2B5EF4-FFF2-40B4-BE49-F238E27FC236}">
-              <a16:creationId xmlns:a16="http://schemas.microsoft.com/office/drawing/2014/main" id="{7C0AEA13-F54F-9D21-DA5C-684C7D497F33}"/>
-            </a:ext>
-          </a:extLst>
-        </p:cNvPr>
-        <p:cNvGrpSpPr/>
-        <p:nvPr/>
-      </p:nvGrpSpPr>
-      <p:grpSpPr>
-        <a:xfrm>
-          <a:off x="0" y="0"/>
-          <a:ext cx="0" cy="0"/>
-          <a:chOff x="0" y="0"/>
-          <a:chExt cx="0" cy="0"/>
-        </a:xfrm>
-      </p:grpSpPr>
-      <p:sp>
-        <p:nvSpPr>
-          <p:cNvPr id="2" name="标题 1">
-            <a:extLst>
-              <a:ext uri="{FF2B5EF4-FFF2-40B4-BE49-F238E27FC236}">
-                <a16:creationId xmlns:a16="http://schemas.microsoft.com/office/drawing/2014/main" id="{8E23939F-BD1E-9756-8F9E-CEC6A1627FB0}"/>
-              </a:ext>
-            </a:extLst>
-          </p:cNvPr>
-          <p:cNvSpPr>
-            <a:spLocks noGrp="1"/>
-          </p:cNvSpPr>
-          <p:nvPr>
-            <p:ph type="title"/>
-          </p:nvPr>
-        </p:nvSpPr>
-        <p:spPr/>
-        <p:txBody>
-          <a:bodyPr/>
-          <a:lstStyle/>
-          <a:p>
-            <a:r>
-              <a:rPr lang="zh-CN" altLang="en-US" sz="900" dirty="0"/>
-              <a:t>怎么做？</a:t>
-            </a:r>
-          </a:p>
-        </p:txBody>
-      </p:sp>
-      <p:sp>
-        <p:nvSpPr>
-          <p:cNvPr id="3" name="内容占位符 2">
-            <a:extLst>
-              <a:ext uri="{FF2B5EF4-FFF2-40B4-BE49-F238E27FC236}">
-                <a16:creationId xmlns:a16="http://schemas.microsoft.com/office/drawing/2014/main" id="{516AD339-025C-EDD0-03A4-2F402FF8B7A8}"/>
-              </a:ext>
-            </a:extLst>
-          </p:cNvPr>
-          <p:cNvSpPr>
-            <a:spLocks noGrp="1"/>
-          </p:cNvSpPr>
-          <p:nvPr>
-            <p:ph idx="1"/>
-          </p:nvPr>
-        </p:nvSpPr>
-        <p:spPr/>
-        <p:txBody>
-          <a:bodyPr/>
-          <a:lstStyle/>
-          <a:p>
-            <a:pPr marL="0" indent="0">
-              <a:buNone/>
-            </a:pPr>
-            <a:r>
-              <a:rPr lang="zh-CN" altLang="en-US" dirty="0"/>
-              <a:t>怎么做呢？</a:t>
-            </a:r>
-          </a:p>
-          <a:p>
-            <a:pPr marL="0" indent="0">
-              <a:buNone/>
-            </a:pPr>
-            <a:r>
-              <a:rPr lang="zh-CN" altLang="en-US" dirty="0"/>
-              <a:t>四个方法。</a:t>
-            </a:r>
-          </a:p>
-          <a:p>
-            <a:pPr marL="0" indent="0">
-              <a:buNone/>
-            </a:pPr>
-            <a:r>
-              <a:rPr lang="zh-CN" altLang="en-US" dirty="0"/>
-              <a:t>第一，一定要让孩子接触自然</a:t>
-            </a:r>
-          </a:p>
-          <a:p>
-            <a:pPr marL="0" indent="0">
-              <a:buNone/>
-            </a:pPr>
-            <a:r>
-              <a:rPr lang="zh-CN" altLang="en-US" dirty="0"/>
-              <a:t>自然能给人带来欲望</a:t>
-            </a:r>
-          </a:p>
-        </p:txBody>
-      </p:sp>
-    </p:spTree>
-    <p:extLst>
-      <p:ext uri="{BB962C8B-B14F-4D97-AF65-F5344CB8AC3E}">
-        <p14:creationId xmlns:p14="http://schemas.microsoft.com/office/powerpoint/2010/main" val="1438312463"/>
-      </p:ext>
-    </p:extLst>
-  </p:cSld>
-  <p:clrMapOvr>
-    <a:masterClrMapping/>
-  </p:clrMapOvr>
-</p:sld>
-</file>
-
-<file path=ppt/slides/slide58.xml><?xml version="1.0" encoding="utf-8"?>
-<p:sld xmlns:a="http://schemas.openxmlformats.org/drawingml/2006/main" xmlns:r="http://schemas.openxmlformats.org/officeDocument/2006/relationships" xmlns:p="http://schemas.openxmlformats.org/presentationml/2006/main">
-  <p:cSld>
-    <p:spTree>
-      <p:nvGrpSpPr>
-        <p:cNvPr id="1" name="">
-          <a:extLst>
-            <a:ext uri="{FF2B5EF4-FFF2-40B4-BE49-F238E27FC236}">
-              <a16:creationId xmlns:a16="http://schemas.microsoft.com/office/drawing/2014/main" id="{0B8128BB-0FB1-9A1F-CC0B-FDC52C0675BF}"/>
-            </a:ext>
-          </a:extLst>
-        </p:cNvPr>
-        <p:cNvGrpSpPr/>
-        <p:nvPr/>
-      </p:nvGrpSpPr>
-      <p:grpSpPr>
-        <a:xfrm>
-          <a:off x="0" y="0"/>
-          <a:ext cx="0" cy="0"/>
-          <a:chOff x="0" y="0"/>
-          <a:chExt cx="0" cy="0"/>
-        </a:xfrm>
-      </p:grpSpPr>
-      <p:sp>
-        <p:nvSpPr>
-          <p:cNvPr id="2" name="标题 1">
-            <a:extLst>
-              <a:ext uri="{FF2B5EF4-FFF2-40B4-BE49-F238E27FC236}">
-                <a16:creationId xmlns:a16="http://schemas.microsoft.com/office/drawing/2014/main" id="{57F81AFF-3549-6A70-6908-D8EB8CAE3D0B}"/>
-              </a:ext>
-            </a:extLst>
-          </p:cNvPr>
-          <p:cNvSpPr>
-            <a:spLocks noGrp="1"/>
-          </p:cNvSpPr>
-          <p:nvPr>
-            <p:ph type="title"/>
-          </p:nvPr>
-        </p:nvSpPr>
-        <p:spPr/>
-        <p:txBody>
-          <a:bodyPr/>
-          <a:lstStyle/>
-          <a:p>
-            <a:r>
-              <a:rPr lang="zh-CN" altLang="en-US" sz="900" dirty="0"/>
-              <a:t>怎么做？</a:t>
-            </a:r>
-          </a:p>
-        </p:txBody>
-      </p:sp>
-      <p:sp>
-        <p:nvSpPr>
-          <p:cNvPr id="3" name="内容占位符 2">
-            <a:extLst>
-              <a:ext uri="{FF2B5EF4-FFF2-40B4-BE49-F238E27FC236}">
-                <a16:creationId xmlns:a16="http://schemas.microsoft.com/office/drawing/2014/main" id="{FEA50B06-7147-1246-16E5-A51DE4F457ED}"/>
-              </a:ext>
-            </a:extLst>
-          </p:cNvPr>
-          <p:cNvSpPr>
-            <a:spLocks noGrp="1"/>
-          </p:cNvSpPr>
-          <p:nvPr>
-            <p:ph idx="1"/>
-          </p:nvPr>
-        </p:nvSpPr>
-        <p:spPr/>
-        <p:txBody>
-          <a:bodyPr/>
-          <a:lstStyle/>
-          <a:p>
-            <a:pPr marL="0" indent="0">
-              <a:buNone/>
-            </a:pPr>
-            <a:r>
-              <a:rPr lang="zh-CN" altLang="en-US" dirty="0"/>
-              <a:t>第二是要让孩子有社交</a:t>
-            </a:r>
-          </a:p>
-          <a:p>
-            <a:pPr marL="0" indent="0">
-              <a:buNone/>
-            </a:pPr>
-            <a:endParaRPr lang="zh-CN" altLang="en-US" dirty="0"/>
-          </a:p>
-          <a:p>
-            <a:pPr marL="0" indent="0">
-              <a:buNone/>
-            </a:pPr>
-            <a:r>
-              <a:rPr lang="zh-CN" altLang="en-US" dirty="0"/>
-              <a:t>一样有同伴</a:t>
-            </a:r>
-          </a:p>
-        </p:txBody>
-      </p:sp>
-    </p:spTree>
-    <p:extLst>
-      <p:ext uri="{BB962C8B-B14F-4D97-AF65-F5344CB8AC3E}">
-        <p14:creationId xmlns:p14="http://schemas.microsoft.com/office/powerpoint/2010/main" val="2117710397"/>
-      </p:ext>
-    </p:extLst>
-  </p:cSld>
-  <p:clrMapOvr>
-    <a:masterClrMapping/>
-  </p:clrMapOvr>
-</p:sld>
-</file>
-
-<file path=ppt/slides/slide59.xml><?xml version="1.0" encoding="utf-8"?>
+<file path=ppt/slides/slide60.xml><?xml version="1.0" encoding="utf-8"?>
 <p:sld xmlns:a="http://schemas.openxmlformats.org/drawingml/2006/main" xmlns:r="http://schemas.openxmlformats.org/officeDocument/2006/relationships" xmlns:p="http://schemas.openxmlformats.org/presentationml/2006/main">
   <p:cSld>
     <p:spTree>
@@ -11275,7 +11650,15 @@
           <a:p>
             <a:r>
               <a:rPr lang="zh-CN" altLang="en-US" sz="900" dirty="0"/>
-              <a:t>怎么做？</a:t>
+              <a:t>怎么做</a:t>
+            </a:r>
+            <a:r>
+              <a:rPr lang="en-US" altLang="zh-CN" sz="900" dirty="0"/>
+              <a:t>——</a:t>
+            </a:r>
+            <a:r>
+              <a:rPr lang="zh-CN" altLang="en-US" sz="900" dirty="0"/>
+              <a:t>运动</a:t>
             </a:r>
           </a:p>
         </p:txBody>
@@ -11351,165 +11734,7 @@
 </p:sld>
 </file>
 
-<file path=ppt/slides/slide6.xml><?xml version="1.0" encoding="utf-8"?>
-<p:sld xmlns:a="http://schemas.openxmlformats.org/drawingml/2006/main" xmlns:r="http://schemas.openxmlformats.org/officeDocument/2006/relationships" xmlns:p="http://schemas.openxmlformats.org/presentationml/2006/main">
-  <p:cSld>
-    <p:spTree>
-      <p:nvGrpSpPr>
-        <p:cNvPr id="1" name="">
-          <a:extLst>
-            <a:ext uri="{FF2B5EF4-FFF2-40B4-BE49-F238E27FC236}">
-              <a16:creationId xmlns:a16="http://schemas.microsoft.com/office/drawing/2014/main" id="{741156D3-25C3-1286-928E-22D7578C38C7}"/>
-            </a:ext>
-          </a:extLst>
-        </p:cNvPr>
-        <p:cNvGrpSpPr/>
-        <p:nvPr/>
-      </p:nvGrpSpPr>
-      <p:grpSpPr>
-        <a:xfrm>
-          <a:off x="0" y="0"/>
-          <a:ext cx="0" cy="0"/>
-          <a:chOff x="0" y="0"/>
-          <a:chExt cx="0" cy="0"/>
-        </a:xfrm>
-      </p:grpSpPr>
-      <p:sp>
-        <p:nvSpPr>
-          <p:cNvPr id="2" name="标题 1">
-            <a:extLst>
-              <a:ext uri="{FF2B5EF4-FFF2-40B4-BE49-F238E27FC236}">
-                <a16:creationId xmlns:a16="http://schemas.microsoft.com/office/drawing/2014/main" id="{2FDC0A66-FFA1-CEE6-64C4-1C307064E390}"/>
-              </a:ext>
-            </a:extLst>
-          </p:cNvPr>
-          <p:cNvSpPr>
-            <a:spLocks noGrp="1"/>
-          </p:cNvSpPr>
-          <p:nvPr>
-            <p:ph type="title"/>
-          </p:nvPr>
-        </p:nvSpPr>
-        <p:spPr/>
-        <p:txBody>
-          <a:bodyPr/>
-          <a:lstStyle/>
-          <a:p>
-            <a:r>
-              <a:rPr lang="zh-CN" altLang="en-US" sz="4400" dirty="0"/>
-              <a:t>第三代儿童教育就是面向未来的教育（四）</a:t>
-            </a:r>
-          </a:p>
-        </p:txBody>
-      </p:sp>
-      <p:sp>
-        <p:nvSpPr>
-          <p:cNvPr id="3" name="内容占位符 2">
-            <a:extLst>
-              <a:ext uri="{FF2B5EF4-FFF2-40B4-BE49-F238E27FC236}">
-                <a16:creationId xmlns:a16="http://schemas.microsoft.com/office/drawing/2014/main" id="{9B5584A7-2368-B992-4229-B973DAAA29B1}"/>
-              </a:ext>
-            </a:extLst>
-          </p:cNvPr>
-          <p:cNvSpPr>
-            <a:spLocks noGrp="1"/>
-          </p:cNvSpPr>
-          <p:nvPr>
-            <p:ph idx="1"/>
-          </p:nvPr>
-        </p:nvSpPr>
-        <p:spPr/>
-        <p:txBody>
-          <a:bodyPr/>
-          <a:lstStyle/>
-          <a:p>
-            <a:pPr marL="0" indent="0">
-              <a:buNone/>
-            </a:pPr>
-            <a:r>
-              <a:rPr lang="zh-CN" altLang="en-US" dirty="0"/>
-              <a:t>某东可能会在</a:t>
-            </a:r>
-            <a:r>
-              <a:rPr lang="en-US" altLang="zh-CN" dirty="0"/>
-              <a:t>2026</a:t>
-            </a:r>
-            <a:r>
-              <a:rPr lang="zh-CN" altLang="en-US" dirty="0"/>
-              <a:t>年开始正式布局无人快递车，现在某些大小城市道路上我们都能看到不少这样的车了。</a:t>
-            </a:r>
-            <a:endParaRPr lang="en-US" altLang="zh-CN" dirty="0"/>
-          </a:p>
-          <a:p>
-            <a:pPr marL="0" indent="0">
-              <a:buNone/>
-            </a:pPr>
-            <a:r>
-              <a:rPr lang="zh-CN" altLang="en-US" dirty="0"/>
-              <a:t>有人会说，这是不是发展得太快了，大家都没有活干了？</a:t>
-            </a:r>
-          </a:p>
-          <a:p>
-            <a:pPr marL="0" indent="0">
-              <a:buNone/>
-            </a:pPr>
-            <a:r>
-              <a:rPr lang="zh-CN" altLang="en-US" dirty="0"/>
-              <a:t>不是我们发展得太快，而是我们不得不这样做！</a:t>
-            </a:r>
-          </a:p>
-          <a:p>
-            <a:pPr marL="0" indent="0">
-              <a:buNone/>
-            </a:pPr>
-            <a:r>
-              <a:rPr lang="zh-CN" altLang="en-US" dirty="0"/>
-              <a:t>美国的部分城市已经布局无人驾驶车，并且一个城市就有三家公司在运营。</a:t>
-            </a:r>
-          </a:p>
-          <a:p>
-            <a:pPr marL="0" indent="0">
-              <a:buNone/>
-            </a:pPr>
-            <a:r>
-              <a:rPr lang="zh-CN" altLang="en-US" dirty="0"/>
-              <a:t>而中国只有个别城市中，并且只有一家在运营。</a:t>
-            </a:r>
-          </a:p>
-          <a:p>
-            <a:pPr marL="0" indent="0">
-              <a:buNone/>
-            </a:pPr>
-            <a:r>
-              <a:rPr lang="zh-CN" altLang="en-US" dirty="0"/>
-              <a:t>国家也不想这么快，因为也担心这么巨大的就业人口突然就没工作了。</a:t>
-            </a:r>
-          </a:p>
-          <a:p>
-            <a:pPr marL="0" indent="0">
-              <a:buNone/>
-            </a:pPr>
-            <a:r>
-              <a:rPr lang="zh-CN" altLang="en-US" dirty="0"/>
-              <a:t>就会产生很多社会问题。</a:t>
-            </a:r>
-          </a:p>
-        </p:txBody>
-      </p:sp>
-    </p:spTree>
-    <p:extLst>
-      <p:ext uri="{BB962C8B-B14F-4D97-AF65-F5344CB8AC3E}">
-        <p14:creationId xmlns:p14="http://schemas.microsoft.com/office/powerpoint/2010/main" val="408151066"/>
-      </p:ext>
-    </p:extLst>
-  </p:cSld>
-  <p:clrMapOvr>
-    <a:masterClrMapping/>
-  </p:clrMapOvr>
-</p:sld>
-</file>
-
-<file path=ppt/slides/slide60.xml><?xml version="1.0" encoding="utf-8"?>
+<file path=ppt/slides/slide61.xml><?xml version="1.0" encoding="utf-8"?>
 <p:sld xmlns:a="http://schemas.openxmlformats.org/drawingml/2006/main" xmlns:r="http://schemas.openxmlformats.org/officeDocument/2006/relationships" xmlns:p="http://schemas.openxmlformats.org/presentationml/2006/main">
   <p:cSld>
     <p:spTree>
@@ -11555,7 +11780,15 @@
           <a:p>
             <a:r>
               <a:rPr lang="zh-CN" altLang="en-US" sz="900" dirty="0"/>
-              <a:t>怎么做？</a:t>
+              <a:t>怎么做</a:t>
+            </a:r>
+            <a:r>
+              <a:rPr lang="en-US" altLang="zh-CN" sz="900" dirty="0"/>
+              <a:t>——</a:t>
+            </a:r>
+            <a:r>
+              <a:rPr lang="zh-CN" altLang="en-US" sz="900" dirty="0"/>
+              <a:t>艺术活动</a:t>
             </a:r>
           </a:p>
         </p:txBody>
@@ -11613,7 +11846,7 @@
 </p:sld>
 </file>
 
-<file path=ppt/slides/slide61.xml><?xml version="1.0" encoding="utf-8"?>
+<file path=ppt/slides/slide62.xml><?xml version="1.0" encoding="utf-8"?>
 <p:sld xmlns:a="http://schemas.openxmlformats.org/drawingml/2006/main" xmlns:r="http://schemas.openxmlformats.org/officeDocument/2006/relationships" xmlns:p="http://schemas.openxmlformats.org/presentationml/2006/main">
   <p:cSld>
     <p:spTree>
@@ -11659,7 +11892,7 @@
           <a:p>
             <a:r>
               <a:rPr lang="zh-CN" altLang="en-US" sz="900" dirty="0"/>
-              <a:t>怎么做？</a:t>
+              <a:t>童子军运动</a:t>
             </a:r>
           </a:p>
         </p:txBody>
@@ -11789,7 +12022,7 @@
 </p:sld>
 </file>
 
-<file path=ppt/slides/slide62.xml><?xml version="1.0" encoding="utf-8"?>
+<file path=ppt/slides/slide63.xml><?xml version="1.0" encoding="utf-8"?>
 <p:sld xmlns:a="http://schemas.openxmlformats.org/drawingml/2006/main" xmlns:r="http://schemas.openxmlformats.org/officeDocument/2006/relationships" xmlns:p="http://schemas.openxmlformats.org/presentationml/2006/main">
   <p:cSld>
     <p:spTree>
@@ -11835,7 +12068,7 @@
           <a:p>
             <a:r>
               <a:rPr lang="zh-CN" altLang="en-US" sz="900" dirty="0"/>
-              <a:t>怎么做？</a:t>
+              <a:t>未来教育：自然、社交、体育、艺术</a:t>
             </a:r>
           </a:p>
         </p:txBody>
@@ -11929,110 +12162,6 @@
     <p:extLst>
       <p:ext uri="{BB962C8B-B14F-4D97-AF65-F5344CB8AC3E}">
         <p14:creationId xmlns:p14="http://schemas.microsoft.com/office/powerpoint/2010/main" val="2550367692"/>
-      </p:ext>
-    </p:extLst>
-  </p:cSld>
-  <p:clrMapOvr>
-    <a:masterClrMapping/>
-  </p:clrMapOvr>
-</p:sld>
-</file>
-
-<file path=ppt/slides/slide63.xml><?xml version="1.0" encoding="utf-8"?>
-<p:sld xmlns:a="http://schemas.openxmlformats.org/drawingml/2006/main" xmlns:r="http://schemas.openxmlformats.org/officeDocument/2006/relationships" xmlns:p="http://schemas.openxmlformats.org/presentationml/2006/main">
-  <p:cSld>
-    <p:spTree>
-      <p:nvGrpSpPr>
-        <p:cNvPr id="1" name="">
-          <a:extLst>
-            <a:ext uri="{FF2B5EF4-FFF2-40B4-BE49-F238E27FC236}">
-              <a16:creationId xmlns:a16="http://schemas.microsoft.com/office/drawing/2014/main" id="{F9B552D4-4764-249E-BCA4-750D49AF0CEF}"/>
-            </a:ext>
-          </a:extLst>
-        </p:cNvPr>
-        <p:cNvGrpSpPr/>
-        <p:nvPr/>
-      </p:nvGrpSpPr>
-      <p:grpSpPr>
-        <a:xfrm>
-          <a:off x="0" y="0"/>
-          <a:ext cx="0" cy="0"/>
-          <a:chOff x="0" y="0"/>
-          <a:chExt cx="0" cy="0"/>
-        </a:xfrm>
-      </p:grpSpPr>
-      <p:sp>
-        <p:nvSpPr>
-          <p:cNvPr id="2" name="标题 1">
-            <a:extLst>
-              <a:ext uri="{FF2B5EF4-FFF2-40B4-BE49-F238E27FC236}">
-                <a16:creationId xmlns:a16="http://schemas.microsoft.com/office/drawing/2014/main" id="{E5A26613-4E33-A99F-FEC5-DC0FC1C1C8DB}"/>
-              </a:ext>
-            </a:extLst>
-          </p:cNvPr>
-          <p:cNvSpPr>
-            <a:spLocks noGrp="1"/>
-          </p:cNvSpPr>
-          <p:nvPr>
-            <p:ph type="title"/>
-          </p:nvPr>
-        </p:nvSpPr>
-        <p:spPr/>
-        <p:txBody>
-          <a:bodyPr/>
-          <a:lstStyle/>
-          <a:p>
-            <a:r>
-              <a:rPr lang="zh-CN" altLang="en-US" sz="4400" dirty="0"/>
-              <a:t>第三代儿童教育就是面向未来的教育（</a:t>
-            </a:r>
-            <a:r>
-              <a:rPr lang="en-US" altLang="zh-CN" sz="4400" dirty="0"/>
-              <a:t>12</a:t>
-            </a:r>
-            <a:r>
-              <a:rPr lang="zh-CN" altLang="en-US" sz="4400" dirty="0"/>
-              <a:t>）</a:t>
-            </a:r>
-          </a:p>
-        </p:txBody>
-      </p:sp>
-      <p:sp>
-        <p:nvSpPr>
-          <p:cNvPr id="3" name="内容占位符 2">
-            <a:extLst>
-              <a:ext uri="{FF2B5EF4-FFF2-40B4-BE49-F238E27FC236}">
-                <a16:creationId xmlns:a16="http://schemas.microsoft.com/office/drawing/2014/main" id="{C6CDF445-61ED-1BE5-4544-9413BB34A62F}"/>
-              </a:ext>
-            </a:extLst>
-          </p:cNvPr>
-          <p:cNvSpPr>
-            <a:spLocks noGrp="1"/>
-          </p:cNvSpPr>
-          <p:nvPr>
-            <p:ph idx="1"/>
-          </p:nvPr>
-        </p:nvSpPr>
-        <p:spPr/>
-        <p:txBody>
-          <a:bodyPr/>
-          <a:lstStyle/>
-          <a:p>
-            <a:pPr marL="0" indent="0">
-              <a:buNone/>
-            </a:pPr>
-            <a:r>
-              <a:rPr lang="en-US" altLang="zh-CN" dirty="0"/>
-              <a:t>a</a:t>
-            </a:r>
-            <a:endParaRPr lang="zh-CN" altLang="en-US" dirty="0"/>
-          </a:p>
-        </p:txBody>
-      </p:sp>
-    </p:spTree>
-    <p:extLst>
-      <p:ext uri="{BB962C8B-B14F-4D97-AF65-F5344CB8AC3E}">
-        <p14:creationId xmlns:p14="http://schemas.microsoft.com/office/powerpoint/2010/main" val="3116430649"/>
       </p:ext>
     </p:extLst>
   </p:cSld>
@@ -12093,12 +12222,12 @@
           <a:p>
             <a:pPr algn="ctr"/>
             <a:r>
+              <a:rPr lang="en-US" altLang="zh-CN" sz="4400" dirty="0"/>
+              <a:t>AI</a:t>
+            </a:r>
+            <a:r>
               <a:rPr lang="zh-CN" altLang="en-US" sz="4400" dirty="0"/>
-              <a:t>青少年手机防沉迷</a:t>
-            </a:r>
-            <a:r>
-              <a:rPr lang="zh-CN" altLang="en-US" sz="4400"/>
-              <a:t>认知课堂</a:t>
+              <a:t>时代高智慧家长私教课第一季</a:t>
             </a:r>
             <a:br>
               <a:rPr lang="en-US" altLang="zh-CN" sz="4400" dirty="0"/>
@@ -12149,7 +12278,7 @@
               <a:rPr lang="en-US" altLang="zh-CN" sz="1400" dirty="0">
                 <a:latin typeface="+mn-ea"/>
               </a:rPr>
-              <a:t>/ 2026.1</a:t>
+              <a:t>/ 2026.3</a:t>
             </a:r>
             <a:endParaRPr lang="zh-CN" altLang="en-US" sz="1400" dirty="0">
               <a:latin typeface="+mn-ea"/>
@@ -12208,7 +12337,7 @@
         <p:cNvPr id="1" name="">
           <a:extLst>
             <a:ext uri="{FF2B5EF4-FFF2-40B4-BE49-F238E27FC236}">
-              <a16:creationId xmlns:a16="http://schemas.microsoft.com/office/drawing/2014/main" id="{06FBADD6-0447-6686-8BC5-1A6435CFA243}"/>
+              <a16:creationId xmlns:a16="http://schemas.microsoft.com/office/drawing/2014/main" id="{14BDDF96-FBD6-0AFB-72FC-44BB129CEA8D}"/>
             </a:ext>
           </a:extLst>
         </p:cNvPr>
@@ -12228,7 +12357,7 @@
           <p:cNvPr id="2" name="标题 1">
             <a:extLst>
               <a:ext uri="{FF2B5EF4-FFF2-40B4-BE49-F238E27FC236}">
-                <a16:creationId xmlns:a16="http://schemas.microsoft.com/office/drawing/2014/main" id="{E0C24916-D869-7550-93FB-1030179A1C6C}"/>
+                <a16:creationId xmlns:a16="http://schemas.microsoft.com/office/drawing/2014/main" id="{6AACDA2B-758B-0870-C014-48CB024397AA}"/>
               </a:ext>
             </a:extLst>
           </p:cNvPr>
@@ -12239,14 +12368,19 @@
             <p:ph type="title"/>
           </p:nvPr>
         </p:nvSpPr>
-        <p:spPr/>
+        <p:spPr>
+          <a:xfrm>
+            <a:off x="521208" y="978408"/>
+            <a:ext cx="11155680" cy="990092"/>
+          </a:xfrm>
+        </p:spPr>
         <p:txBody>
           <a:bodyPr/>
           <a:lstStyle/>
           <a:p>
             <a:r>
               <a:rPr lang="zh-CN" altLang="en-US" sz="4400" dirty="0"/>
-              <a:t>第三代儿童教育就是面向未来的教育（五）</a:t>
+              <a:t>外卖骑手</a:t>
             </a:r>
           </a:p>
         </p:txBody>
@@ -12256,7 +12390,7 @@
           <p:cNvPr id="3" name="内容占位符 2">
             <a:extLst>
               <a:ext uri="{FF2B5EF4-FFF2-40B4-BE49-F238E27FC236}">
-                <a16:creationId xmlns:a16="http://schemas.microsoft.com/office/drawing/2014/main" id="{93034E03-B67F-DB41-F26A-4E1C2282E2EF}"/>
+                <a16:creationId xmlns:a16="http://schemas.microsoft.com/office/drawing/2014/main" id="{AC198426-783E-07F5-22FB-8945255D452D}"/>
               </a:ext>
             </a:extLst>
           </p:cNvPr>
@@ -12277,59 +12411,43 @@
             </a:pPr>
             <a:r>
               <a:rPr lang="zh-CN" altLang="en-US" dirty="0"/>
-              <a:t>大量的年轻人没有工作，这样的情况并不是现在才有的。</a:t>
-            </a:r>
-          </a:p>
-          <a:p>
-            <a:pPr marL="0" indent="0">
-              <a:buNone/>
-            </a:pPr>
-            <a:r>
-              <a:rPr lang="zh-CN" altLang="en-US" dirty="0"/>
-              <a:t>中国第一次出现类似问题是在上个世纪</a:t>
-            </a:r>
-            <a:r>
-              <a:rPr lang="en-US" altLang="zh-CN" dirty="0"/>
-              <a:t>60</a:t>
-            </a:r>
-            <a:r>
-              <a:rPr lang="zh-CN" altLang="en-US" dirty="0"/>
-              <a:t>年代。</a:t>
-            </a:r>
-          </a:p>
-          <a:p>
-            <a:pPr marL="0" indent="0">
-              <a:buNone/>
-            </a:pPr>
-            <a:r>
-              <a:rPr lang="zh-CN" altLang="en-US" dirty="0"/>
-              <a:t>当时有</a:t>
-            </a:r>
-            <a:r>
-              <a:rPr lang="en-US" altLang="zh-CN" dirty="0"/>
-              <a:t>1500</a:t>
-            </a:r>
-            <a:r>
-              <a:rPr lang="zh-CN" altLang="en-US" dirty="0"/>
-              <a:t>万待业青年，其中有叫做老三届学生。</a:t>
-            </a:r>
-          </a:p>
-          <a:p>
-            <a:pPr marL="0" indent="0">
-              <a:buNone/>
-            </a:pPr>
-            <a:r>
-              <a:rPr lang="zh-CN" altLang="en-US" dirty="0"/>
-              <a:t>国家想到的办法就是上山下乡。</a:t>
-            </a:r>
-          </a:p>
-          <a:p>
-            <a:pPr marL="0" indent="0">
-              <a:buNone/>
-            </a:pPr>
-            <a:r>
-              <a:rPr lang="zh-CN" altLang="en-US" dirty="0"/>
-              <a:t>归根结底就是就业问题。</a:t>
+              <a:t>我们看一下北上广深大城市的外卖骑手，有多少人？</a:t>
+            </a:r>
+          </a:p>
+          <a:p>
+            <a:pPr marL="0" indent="0">
+              <a:buNone/>
+            </a:pPr>
+            <a:r>
+              <a:rPr lang="zh-CN" altLang="en-US" dirty="0"/>
+              <a:t>有多少大学学历的？</a:t>
+            </a:r>
+          </a:p>
+          <a:p>
+            <a:pPr marL="0" indent="0">
+              <a:buNone/>
+            </a:pPr>
+            <a:r>
+              <a:rPr lang="zh-CN" altLang="en-US" dirty="0"/>
+              <a:t>有一年春晚，有一个节目是很多外卖骑手在舞台上一起跳舞。</a:t>
+            </a:r>
+          </a:p>
+          <a:p>
+            <a:pPr marL="0" indent="0">
+              <a:buNone/>
+            </a:pPr>
+            <a:r>
+              <a:rPr lang="zh-CN" altLang="en-US" dirty="0"/>
+              <a:t>黄渤还曾登台一起表演。</a:t>
+            </a:r>
+          </a:p>
+          <a:p>
+            <a:pPr marL="0" indent="0">
+              <a:buNone/>
+            </a:pPr>
+            <a:r>
+              <a:rPr lang="zh-CN" altLang="en-US" dirty="0"/>
+              <a:t>大家知道为什么会有这样的节目吗？</a:t>
             </a:r>
           </a:p>
         </p:txBody>
@@ -12337,7 +12455,7 @@
     </p:spTree>
     <p:extLst>
       <p:ext uri="{BB962C8B-B14F-4D97-AF65-F5344CB8AC3E}">
-        <p14:creationId xmlns:p14="http://schemas.microsoft.com/office/powerpoint/2010/main" val="3390160383"/>
+        <p14:creationId xmlns:p14="http://schemas.microsoft.com/office/powerpoint/2010/main" val="2779998026"/>
       </p:ext>
     </p:extLst>
   </p:cSld>
@@ -12355,7 +12473,7 @@
         <p:cNvPr id="1" name="">
           <a:extLst>
             <a:ext uri="{FF2B5EF4-FFF2-40B4-BE49-F238E27FC236}">
-              <a16:creationId xmlns:a16="http://schemas.microsoft.com/office/drawing/2014/main" id="{217923CA-432F-2783-C573-5F6BCAAC12F7}"/>
+              <a16:creationId xmlns:a16="http://schemas.microsoft.com/office/drawing/2014/main" id="{741156D3-25C3-1286-928E-22D7578C38C7}"/>
             </a:ext>
           </a:extLst>
         </p:cNvPr>
@@ -12375,7 +12493,7 @@
           <p:cNvPr id="2" name="标题 1">
             <a:extLst>
               <a:ext uri="{FF2B5EF4-FFF2-40B4-BE49-F238E27FC236}">
-                <a16:creationId xmlns:a16="http://schemas.microsoft.com/office/drawing/2014/main" id="{117F6D74-032C-F4F8-C1E8-F238092349F0}"/>
+                <a16:creationId xmlns:a16="http://schemas.microsoft.com/office/drawing/2014/main" id="{2FDC0A66-FFA1-CEE6-64C4-1C307064E390}"/>
               </a:ext>
             </a:extLst>
           </p:cNvPr>
@@ -12384,160 +12502,115 @@
           </p:cNvSpPr>
           <p:nvPr>
             <p:ph type="title"/>
-          </p:nvPr>
-        </p:nvSpPr>
-        <p:spPr/>
-        <p:txBody>
-          <a:bodyPr/>
-          <a:lstStyle/>
-          <a:p>
-            <a:r>
-              <a:rPr lang="zh-CN" altLang="en-US" sz="4400" dirty="0"/>
-              <a:t>第三代儿童教育就是面向未来的教育（六）</a:t>
-            </a:r>
-          </a:p>
-        </p:txBody>
-      </p:sp>
-      <p:sp>
-        <p:nvSpPr>
-          <p:cNvPr id="3" name="内容占位符 2">
-            <a:extLst>
-              <a:ext uri="{FF2B5EF4-FFF2-40B4-BE49-F238E27FC236}">
-                <a16:creationId xmlns:a16="http://schemas.microsoft.com/office/drawing/2014/main" id="{3E2D1996-A1D5-2F8B-5E44-6953B1BBA898}"/>
-              </a:ext>
-            </a:extLst>
-          </p:cNvPr>
-          <p:cNvSpPr>
-            <a:spLocks noGrp="1"/>
-          </p:cNvSpPr>
-          <p:nvPr>
-            <p:ph idx="1"/>
           </p:nvPr>
         </p:nvSpPr>
         <p:spPr>
           <a:xfrm>
-            <a:off x="521208" y="2044700"/>
-            <a:ext cx="11155680" cy="4301236"/>
+            <a:off x="521208" y="978408"/>
+            <a:ext cx="11155680" cy="926592"/>
           </a:xfrm>
         </p:spPr>
         <p:txBody>
           <a:bodyPr/>
           <a:lstStyle/>
           <a:p>
-            <a:pPr marL="0" indent="0">
-              <a:buNone/>
-            </a:pPr>
-            <a:r>
-              <a:rPr lang="zh-CN" altLang="en-US" dirty="0"/>
-              <a:t>那为什么美国要发展那么快呢？</a:t>
-            </a:r>
-          </a:p>
-          <a:p>
-            <a:pPr marL="0" indent="0">
-              <a:buNone/>
-            </a:pPr>
-            <a:r>
-              <a:rPr lang="zh-CN" altLang="en-US" dirty="0"/>
-              <a:t>这是由美国这个国家的特点决定的，因为它要做全世界的灯塔。</a:t>
-            </a:r>
-          </a:p>
-          <a:p>
-            <a:pPr marL="0" indent="0">
-              <a:buNone/>
-            </a:pPr>
-            <a:r>
-              <a:rPr lang="zh-CN" altLang="en-US" dirty="0"/>
-              <a:t>它如果没有在科技上引领全世界的话，这个国家就会垮掉。</a:t>
-            </a:r>
-          </a:p>
-          <a:p>
-            <a:pPr marL="0" indent="0">
-              <a:buNone/>
-            </a:pPr>
-            <a:r>
-              <a:rPr lang="zh-CN" altLang="en-US" dirty="0"/>
-              <a:t>美国就是靠编织一个美国梦来达到吸引全球资本的目的。</a:t>
-            </a:r>
-          </a:p>
-          <a:p>
-            <a:pPr marL="0" indent="0">
-              <a:buNone/>
-            </a:pPr>
-            <a:r>
-              <a:rPr lang="zh-CN" altLang="en-US" dirty="0"/>
-              <a:t>吸引全球的金融、全球的人才，这样它才能撑下去。</a:t>
-            </a:r>
-          </a:p>
-          <a:p>
-            <a:pPr marL="0" indent="0">
-              <a:buNone/>
-            </a:pPr>
-            <a:r>
-              <a:rPr lang="zh-CN" altLang="en-US" dirty="0"/>
-              <a:t>所以它会不断地拼命地发展它的科技，特别是发展</a:t>
+            <a:r>
+              <a:rPr lang="zh-CN" altLang="en-US" sz="4400" dirty="0"/>
+              <a:t>无人驾驶车</a:t>
+            </a:r>
+          </a:p>
+        </p:txBody>
+      </p:sp>
+      <p:sp>
+        <p:nvSpPr>
+          <p:cNvPr id="3" name="内容占位符 2">
+            <a:extLst>
+              <a:ext uri="{FF2B5EF4-FFF2-40B4-BE49-F238E27FC236}">
+                <a16:creationId xmlns:a16="http://schemas.microsoft.com/office/drawing/2014/main" id="{9B5584A7-2368-B992-4229-B973DAAA29B1}"/>
+              </a:ext>
+            </a:extLst>
+          </p:cNvPr>
+          <p:cNvSpPr>
+            <a:spLocks noGrp="1"/>
+          </p:cNvSpPr>
+          <p:nvPr>
+            <p:ph idx="1"/>
+          </p:nvPr>
+        </p:nvSpPr>
+        <p:spPr/>
+        <p:txBody>
+          <a:bodyPr/>
+          <a:lstStyle/>
+          <a:p>
+            <a:pPr marL="0" indent="0">
+              <a:buNone/>
+            </a:pPr>
+            <a:r>
+              <a:rPr lang="zh-CN" altLang="en-US" dirty="0"/>
+              <a:t>某东可能会在</a:t>
             </a:r>
             <a:r>
               <a:rPr lang="en-US" altLang="zh-CN" dirty="0"/>
-              <a:t>AI</a:t>
-            </a:r>
-            <a:r>
-              <a:rPr lang="zh-CN" altLang="en-US" dirty="0"/>
-              <a:t>。</a:t>
-            </a:r>
-          </a:p>
-          <a:p>
-            <a:pPr marL="0" indent="0">
-              <a:buNone/>
-            </a:pPr>
-            <a:r>
-              <a:rPr lang="en-US" altLang="zh-CN" dirty="0"/>
-              <a:t>AGI</a:t>
-            </a:r>
-            <a:r>
-              <a:rPr lang="zh-CN" altLang="en-US" dirty="0"/>
-              <a:t>发展需要多久呢？</a:t>
-            </a:r>
-          </a:p>
-          <a:p>
-            <a:pPr marL="0" indent="0">
-              <a:buNone/>
-            </a:pPr>
-            <a:r>
-              <a:rPr lang="zh-CN" altLang="en-US" dirty="0"/>
-              <a:t>根据美国各行业内估算，快需要</a:t>
-            </a:r>
-            <a:r>
-              <a:rPr lang="en-US" altLang="zh-CN" dirty="0"/>
-              <a:t>2</a:t>
-            </a:r>
-            <a:r>
-              <a:rPr lang="zh-CN" altLang="en-US" dirty="0"/>
-              <a:t>年，慢则需要</a:t>
-            </a:r>
-            <a:r>
-              <a:rPr lang="en-US" altLang="zh-CN" dirty="0"/>
-              <a:t>10</a:t>
-            </a:r>
-            <a:r>
-              <a:rPr lang="zh-CN" altLang="en-US" dirty="0"/>
-              <a:t>年。</a:t>
-            </a:r>
-          </a:p>
-          <a:p>
-            <a:pPr marL="0" indent="0">
-              <a:buNone/>
-            </a:pPr>
-            <a:r>
-              <a:rPr lang="zh-CN" altLang="en-US" dirty="0"/>
-              <a:t>你看看，你的孩子在</a:t>
-            </a:r>
-            <a:r>
-              <a:rPr lang="en-US" altLang="zh-CN" dirty="0"/>
-              <a:t>10</a:t>
-            </a:r>
-            <a:r>
-              <a:rPr lang="zh-CN" altLang="en-US" dirty="0"/>
-              <a:t>年之后还会有白领的工作吗？</a:t>
+              <a:t>2026</a:t>
+            </a:r>
+            <a:r>
+              <a:rPr lang="zh-CN" altLang="en-US" dirty="0"/>
+              <a:t>年开始正式布局无人快递车，现在某些大小城市道路上我们都能看到不少这样的车了。</a:t>
+            </a:r>
+            <a:endParaRPr lang="en-US" altLang="zh-CN" dirty="0"/>
+          </a:p>
+          <a:p>
+            <a:pPr marL="0" indent="0">
+              <a:buNone/>
+            </a:pPr>
+            <a:r>
+              <a:rPr lang="zh-CN" altLang="en-US" dirty="0"/>
+              <a:t>有人会说，这是不是发展得太快了，大家都没有活干了？</a:t>
+            </a:r>
+          </a:p>
+          <a:p>
+            <a:pPr marL="0" indent="0">
+              <a:buNone/>
+            </a:pPr>
+            <a:r>
+              <a:rPr lang="zh-CN" altLang="en-US" dirty="0"/>
+              <a:t>不是我们发展得太快，而是我们不得不这样做！</a:t>
+            </a:r>
+          </a:p>
+          <a:p>
+            <a:pPr marL="0" indent="0">
+              <a:buNone/>
+            </a:pPr>
+            <a:r>
+              <a:rPr lang="zh-CN" altLang="en-US" dirty="0"/>
+              <a:t>美国的部分城市已经布局无人驾驶车，并且一个城市就有三家公司在运营。</a:t>
+            </a:r>
+          </a:p>
+          <a:p>
+            <a:pPr marL="0" indent="0">
+              <a:buNone/>
+            </a:pPr>
+            <a:r>
+              <a:rPr lang="zh-CN" altLang="en-US" dirty="0"/>
+              <a:t>而中国只有个别城市中，并且只有一家在运营。</a:t>
+            </a:r>
+          </a:p>
+          <a:p>
+            <a:pPr marL="0" indent="0">
+              <a:buNone/>
+            </a:pPr>
+            <a:r>
+              <a:rPr lang="zh-CN" altLang="en-US" dirty="0"/>
+              <a:t>国家也不想这么快，因为也担心这么巨大的就业人口突然就没工作了。</a:t>
+            </a:r>
+          </a:p>
+          <a:p>
+            <a:pPr marL="0" indent="0">
+              <a:buNone/>
+            </a:pPr>
+            <a:r>
+              <a:rPr lang="zh-CN" altLang="en-US" dirty="0"/>
+              <a:t>就会产生很多社会问题。</a:t>
             </a:r>
           </a:p>
         </p:txBody>
@@ -12545,7 +12618,7 @@
     </p:spTree>
     <p:extLst>
       <p:ext uri="{BB962C8B-B14F-4D97-AF65-F5344CB8AC3E}">
-        <p14:creationId xmlns:p14="http://schemas.microsoft.com/office/powerpoint/2010/main" val="30792127"/>
+        <p14:creationId xmlns:p14="http://schemas.microsoft.com/office/powerpoint/2010/main" val="408151066"/>
       </p:ext>
     </p:extLst>
   </p:cSld>
@@ -12563,7 +12636,7 @@
         <p:cNvPr id="1" name="">
           <a:extLst>
             <a:ext uri="{FF2B5EF4-FFF2-40B4-BE49-F238E27FC236}">
-              <a16:creationId xmlns:a16="http://schemas.microsoft.com/office/drawing/2014/main" id="{A7C47270-8863-B67A-1608-AD40773F7428}"/>
+              <a16:creationId xmlns:a16="http://schemas.microsoft.com/office/drawing/2014/main" id="{06FBADD6-0447-6686-8BC5-1A6435CFA243}"/>
             </a:ext>
           </a:extLst>
         </p:cNvPr>
@@ -12583,7 +12656,7 @@
           <p:cNvPr id="2" name="标题 1">
             <a:extLst>
               <a:ext uri="{FF2B5EF4-FFF2-40B4-BE49-F238E27FC236}">
-                <a16:creationId xmlns:a16="http://schemas.microsoft.com/office/drawing/2014/main" id="{2562A1A4-820E-DA6F-0D16-BBE7F23CBB75}"/>
+                <a16:creationId xmlns:a16="http://schemas.microsoft.com/office/drawing/2014/main" id="{E0C24916-D869-7550-93FB-1030179A1C6C}"/>
               </a:ext>
             </a:extLst>
           </p:cNvPr>
@@ -12601,7 +12674,7 @@
           <a:p>
             <a:r>
               <a:rPr lang="zh-CN" altLang="en-US" sz="4400" dirty="0"/>
-              <a:t>第三代儿童教育就是面向未来的教育（七）</a:t>
+              <a:t>上山下乡</a:t>
             </a:r>
           </a:p>
         </p:txBody>
@@ -12611,7 +12684,7 @@
           <p:cNvPr id="3" name="内容占位符 2">
             <a:extLst>
               <a:ext uri="{FF2B5EF4-FFF2-40B4-BE49-F238E27FC236}">
-                <a16:creationId xmlns:a16="http://schemas.microsoft.com/office/drawing/2014/main" id="{33B79987-83C5-F973-0A79-77E03050F67B}"/>
+                <a16:creationId xmlns:a16="http://schemas.microsoft.com/office/drawing/2014/main" id="{93034E03-B67F-DB41-F26A-4E1C2282E2EF}"/>
               </a:ext>
             </a:extLst>
           </p:cNvPr>
@@ -12632,51 +12705,59 @@
             </a:pPr>
             <a:r>
               <a:rPr lang="zh-CN" altLang="en-US" dirty="0"/>
-              <a:t>马克思看到了资本主义的本质。</a:t>
-            </a:r>
-          </a:p>
-          <a:p>
-            <a:pPr marL="0" indent="0">
-              <a:buNone/>
-            </a:pPr>
-            <a:r>
-              <a:rPr lang="zh-CN" altLang="en-US" dirty="0"/>
-              <a:t>贷款、生产、消费闭环，但每</a:t>
+              <a:t>大量的年轻人没有工作，这样的情况并不是现在才有的。</a:t>
+            </a:r>
+          </a:p>
+          <a:p>
+            <a:pPr marL="0" indent="0">
+              <a:buNone/>
+            </a:pPr>
+            <a:r>
+              <a:rPr lang="zh-CN" altLang="en-US" dirty="0"/>
+              <a:t>中国第一次出现类似问题是在上个世纪</a:t>
             </a:r>
             <a:r>
               <a:rPr lang="en-US" altLang="zh-CN" dirty="0"/>
-              <a:t>10</a:t>
-            </a:r>
-            <a:r>
-              <a:rPr lang="zh-CN" altLang="en-US" dirty="0"/>
-              <a:t>年发生经济危机</a:t>
-            </a:r>
-          </a:p>
-          <a:p>
-            <a:pPr marL="0" indent="0">
-              <a:buNone/>
-            </a:pPr>
-            <a:r>
-              <a:rPr lang="zh-CN" altLang="en-US" dirty="0"/>
-              <a:t>但是为什么现实中没有那么频繁呢？</a:t>
-            </a:r>
-          </a:p>
-          <a:p>
-            <a:pPr marL="0" indent="0">
-              <a:buNone/>
-            </a:pPr>
-            <a:r>
-              <a:rPr lang="zh-CN" altLang="en-US" dirty="0"/>
-              <a:t>不是马克思错了，而是中国成为新商品的倾销市场，缓解了资本主义矛盾。</a:t>
-            </a:r>
-          </a:p>
-          <a:p>
-            <a:pPr marL="0" indent="0">
-              <a:buNone/>
-            </a:pPr>
-            <a:r>
-              <a:rPr lang="zh-CN" altLang="en-US" dirty="0"/>
-              <a:t>日本的彩电、日本的冰箱、外国的汽车</a:t>
+              <a:t>60</a:t>
+            </a:r>
+            <a:r>
+              <a:rPr lang="zh-CN" altLang="en-US" dirty="0"/>
+              <a:t>年代。</a:t>
+            </a:r>
+          </a:p>
+          <a:p>
+            <a:pPr marL="0" indent="0">
+              <a:buNone/>
+            </a:pPr>
+            <a:r>
+              <a:rPr lang="zh-CN" altLang="en-US" dirty="0"/>
+              <a:t>当时有</a:t>
+            </a:r>
+            <a:r>
+              <a:rPr lang="en-US" altLang="zh-CN" dirty="0"/>
+              <a:t>1500</a:t>
+            </a:r>
+            <a:r>
+              <a:rPr lang="zh-CN" altLang="en-US" dirty="0"/>
+              <a:t>万待业青年，其中有叫做老三届学生。</a:t>
+            </a:r>
+          </a:p>
+          <a:p>
+            <a:pPr marL="0" indent="0">
+              <a:buNone/>
+            </a:pPr>
+            <a:r>
+              <a:rPr lang="zh-CN" altLang="en-US" dirty="0"/>
+              <a:t>国家想到的办法就是上山下乡。</a:t>
+            </a:r>
+          </a:p>
+          <a:p>
+            <a:pPr marL="0" indent="0">
+              <a:buNone/>
+            </a:pPr>
+            <a:r>
+              <a:rPr lang="zh-CN" altLang="en-US" dirty="0"/>
+              <a:t>归根结底就是就业问题。</a:t>
             </a:r>
           </a:p>
         </p:txBody>
@@ -12684,7 +12765,7 @@
     </p:spTree>
     <p:extLst>
       <p:ext uri="{BB962C8B-B14F-4D97-AF65-F5344CB8AC3E}">
-        <p14:creationId xmlns:p14="http://schemas.microsoft.com/office/powerpoint/2010/main" val="2490607248"/>
+        <p14:creationId xmlns:p14="http://schemas.microsoft.com/office/powerpoint/2010/main" val="3390160383"/>
       </p:ext>
     </p:extLst>
   </p:cSld>
